--- a/examples/reference-only/01-modular-agent-reference-only/qa/powerpoint-live-case/input/candidate.pptx
+++ b/examples/reference-only/01-modular-agent-reference-only/qa/powerpoint-live-case/input/candidate.pptx
@@ -5,10 +5,13 @@
     <p:sldMasterId id="2147483648" r:id="rId1"/>
   </p:sldMasterIdLst>
   <p:sldIdLst>
-    <p:sldId id="256" r:id="rId7"/>
+    <p:sldId id="256" r:id="rId2"/>
   </p:sldIdLst>
-  <p:sldSz cx="13611225" cy="5972175" type="screen4x3"/>
+  <p:sldSz cx="13611225" cy="5972175"/>
   <p:notesSz cx="6858000" cy="9144000"/>
+  <p:custDataLst>
+    <p:tags r:id="rId3"/>
+  </p:custDataLst>
   <p:defaultTextStyle>
     <a:defPPr>
       <a:defRPr lang="en-US"/>
@@ -104,6 +107,22 @@
       </a:defRPr>
     </a:lvl9pPr>
   </p:defaultTextStyle>
+  <p:extLst>
+    <p:ext uri="{EFAFB233-063F-42B5-8137-9DF3F51BA10A}">
+      <p15:sldGuideLst xmlns:p15="http://schemas.microsoft.com/office/powerpoint/2012/main">
+        <p15:guide id="1" orient="horz" pos="2160">
+          <p15:clr>
+            <a:srgbClr val="A4A3A4"/>
+          </p15:clr>
+        </p15:guide>
+        <p15:guide id="2" pos="2880">
+          <p15:clr>
+            <a:srgbClr val="A4A3A4"/>
+          </p15:clr>
+        </p15:guide>
+      </p15:sldGuideLst>
+    </p:ext>
+  </p:extLst>
 </p:presentation>
 </file>
 
@@ -145,10 +164,9 @@
           <a:lstStyle/>
           <a:p>
             <a:r>
-              <a:rPr lang="en-US" smtClean="0"/>
+              <a:rPr lang="en-US"/>
               <a:t>Click to edit Master title style</a:t>
             </a:r>
-            <a:endParaRPr lang="en-US"/>
           </a:p>
         </p:txBody>
       </p:sp>
@@ -264,10 +282,9 @@
           </a:lstStyle>
           <a:p>
             <a:r>
-              <a:rPr lang="en-US" smtClean="0"/>
+              <a:rPr lang="en-US"/>
               <a:t>Click to edit Master subtitle style</a:t>
             </a:r>
-            <a:endParaRPr lang="en-US"/>
           </a:p>
         </p:txBody>
       </p:sp>
@@ -288,7 +305,7 @@
           <a:p>
             <a:fld id="{5BCAD085-E8A6-8845-BD4E-CB4CCA059FC4}" type="datetimeFigureOut">
               <a:rPr lang="en-US" smtClean="0"/>
-              <a:t>1/27/13</a:t>
+              <a:t>8/24/2026</a:t>
             </a:fld>
             <a:endParaRPr lang="en-US"/>
           </a:p>
@@ -382,10 +399,9 @@
           <a:lstStyle/>
           <a:p>
             <a:r>
-              <a:rPr lang="en-US" smtClean="0"/>
+              <a:rPr lang="en-US"/>
               <a:t>Click to edit Master title style</a:t>
             </a:r>
-            <a:endParaRPr lang="en-US"/>
           </a:p>
         </p:txBody>
       </p:sp>
@@ -406,38 +422,37 @@
           <a:p>
             <a:pPr lvl="0"/>
             <a:r>
-              <a:rPr lang="en-US" smtClean="0"/>
+              <a:rPr lang="en-US"/>
               <a:t>Click to edit Master text styles</a:t>
             </a:r>
           </a:p>
           <a:p>
             <a:pPr lvl="1"/>
             <a:r>
-              <a:rPr lang="en-US" smtClean="0"/>
+              <a:rPr lang="en-US"/>
               <a:t>Second level</a:t>
             </a:r>
           </a:p>
           <a:p>
             <a:pPr lvl="2"/>
             <a:r>
-              <a:rPr lang="en-US" smtClean="0"/>
+              <a:rPr lang="en-US"/>
               <a:t>Third level</a:t>
             </a:r>
           </a:p>
           <a:p>
             <a:pPr lvl="3"/>
             <a:r>
-              <a:rPr lang="en-US" smtClean="0"/>
+              <a:rPr lang="en-US"/>
               <a:t>Fourth level</a:t>
             </a:r>
           </a:p>
           <a:p>
             <a:pPr lvl="4"/>
             <a:r>
-              <a:rPr lang="en-US" smtClean="0"/>
+              <a:rPr lang="en-US"/>
               <a:t>Fifth level</a:t>
             </a:r>
-            <a:endParaRPr lang="en-US"/>
           </a:p>
         </p:txBody>
       </p:sp>
@@ -458,7 +473,7 @@
           <a:p>
             <a:fld id="{5BCAD085-E8A6-8845-BD4E-CB4CCA059FC4}" type="datetimeFigureOut">
               <a:rPr lang="en-US" smtClean="0"/>
-              <a:t>1/27/13</a:t>
+              <a:t>8/24/2026</a:t>
             </a:fld>
             <a:endParaRPr lang="en-US"/>
           </a:p>
@@ -557,10 +572,9 @@
           <a:lstStyle/>
           <a:p>
             <a:r>
-              <a:rPr lang="en-US" smtClean="0"/>
+              <a:rPr lang="en-US"/>
               <a:t>Click to edit Master title style</a:t>
             </a:r>
-            <a:endParaRPr lang="en-US"/>
           </a:p>
         </p:txBody>
       </p:sp>
@@ -586,38 +600,37 @@
           <a:p>
             <a:pPr lvl="0"/>
             <a:r>
-              <a:rPr lang="en-US" smtClean="0"/>
+              <a:rPr lang="en-US"/>
               <a:t>Click to edit Master text styles</a:t>
             </a:r>
           </a:p>
           <a:p>
             <a:pPr lvl="1"/>
             <a:r>
-              <a:rPr lang="en-US" smtClean="0"/>
+              <a:rPr lang="en-US"/>
               <a:t>Second level</a:t>
             </a:r>
           </a:p>
           <a:p>
             <a:pPr lvl="2"/>
             <a:r>
-              <a:rPr lang="en-US" smtClean="0"/>
+              <a:rPr lang="en-US"/>
               <a:t>Third level</a:t>
             </a:r>
           </a:p>
           <a:p>
             <a:pPr lvl="3"/>
             <a:r>
-              <a:rPr lang="en-US" smtClean="0"/>
+              <a:rPr lang="en-US"/>
               <a:t>Fourth level</a:t>
             </a:r>
           </a:p>
           <a:p>
             <a:pPr lvl="4"/>
             <a:r>
-              <a:rPr lang="en-US" smtClean="0"/>
+              <a:rPr lang="en-US"/>
               <a:t>Fifth level</a:t>
             </a:r>
-            <a:endParaRPr lang="en-US"/>
           </a:p>
         </p:txBody>
       </p:sp>
@@ -638,7 +651,7 @@
           <a:p>
             <a:fld id="{5BCAD085-E8A6-8845-BD4E-CB4CCA059FC4}" type="datetimeFigureOut">
               <a:rPr lang="en-US" smtClean="0"/>
-              <a:t>1/27/13</a:t>
+              <a:t>8/24/2026</a:t>
             </a:fld>
             <a:endParaRPr lang="en-US"/>
           </a:p>
@@ -732,10 +745,9 @@
           <a:lstStyle/>
           <a:p>
             <a:r>
-              <a:rPr lang="en-US" smtClean="0"/>
+              <a:rPr lang="en-US"/>
               <a:t>Click to edit Master title style</a:t>
             </a:r>
-            <a:endParaRPr lang="en-US"/>
           </a:p>
         </p:txBody>
       </p:sp>
@@ -756,38 +768,37 @@
           <a:p>
             <a:pPr lvl="0"/>
             <a:r>
-              <a:rPr lang="en-US" smtClean="0"/>
+              <a:rPr lang="en-US"/>
               <a:t>Click to edit Master text styles</a:t>
             </a:r>
           </a:p>
           <a:p>
             <a:pPr lvl="1"/>
             <a:r>
-              <a:rPr lang="en-US" smtClean="0"/>
+              <a:rPr lang="en-US"/>
               <a:t>Second level</a:t>
             </a:r>
           </a:p>
           <a:p>
             <a:pPr lvl="2"/>
             <a:r>
-              <a:rPr lang="en-US" smtClean="0"/>
+              <a:rPr lang="en-US"/>
               <a:t>Third level</a:t>
             </a:r>
           </a:p>
           <a:p>
             <a:pPr lvl="3"/>
             <a:r>
-              <a:rPr lang="en-US" smtClean="0"/>
+              <a:rPr lang="en-US"/>
               <a:t>Fourth level</a:t>
             </a:r>
           </a:p>
           <a:p>
             <a:pPr lvl="4"/>
             <a:r>
-              <a:rPr lang="en-US" smtClean="0"/>
+              <a:rPr lang="en-US"/>
               <a:t>Fifth level</a:t>
             </a:r>
-            <a:endParaRPr lang="en-US"/>
           </a:p>
         </p:txBody>
       </p:sp>
@@ -808,7 +819,7 @@
           <a:p>
             <a:fld id="{5BCAD085-E8A6-8845-BD4E-CB4CCA059FC4}" type="datetimeFigureOut">
               <a:rPr lang="en-US" smtClean="0"/>
-              <a:t>1/27/13</a:t>
+              <a:t>8/24/2026</a:t>
             </a:fld>
             <a:endParaRPr lang="en-US"/>
           </a:p>
@@ -911,10 +922,9 @@
           </a:lstStyle>
           <a:p>
             <a:r>
-              <a:rPr lang="en-US" smtClean="0"/>
+              <a:rPr lang="en-US"/>
               <a:t>Click to edit Master title style</a:t>
             </a:r>
-            <a:endParaRPr lang="en-US"/>
           </a:p>
         </p:txBody>
       </p:sp>
@@ -1031,7 +1041,7 @@
           <a:p>
             <a:pPr lvl="0"/>
             <a:r>
-              <a:rPr lang="en-US" smtClean="0"/>
+              <a:rPr lang="en-US"/>
               <a:t>Click to edit Master text styles</a:t>
             </a:r>
           </a:p>
@@ -1054,7 +1064,7 @@
           <a:p>
             <a:fld id="{5BCAD085-E8A6-8845-BD4E-CB4CCA059FC4}" type="datetimeFigureOut">
               <a:rPr lang="en-US" smtClean="0"/>
-              <a:t>1/27/13</a:t>
+              <a:t>8/24/2026</a:t>
             </a:fld>
             <a:endParaRPr lang="en-US"/>
           </a:p>
@@ -1148,10 +1158,9 @@
           <a:lstStyle/>
           <a:p>
             <a:r>
-              <a:rPr lang="en-US" smtClean="0"/>
+              <a:rPr lang="en-US"/>
               <a:t>Click to edit Master title style</a:t>
             </a:r>
-            <a:endParaRPr lang="en-US"/>
           </a:p>
         </p:txBody>
       </p:sp>
@@ -1205,38 +1214,37 @@
           <a:p>
             <a:pPr lvl="0"/>
             <a:r>
-              <a:rPr lang="en-US" smtClean="0"/>
+              <a:rPr lang="en-US"/>
               <a:t>Click to edit Master text styles</a:t>
             </a:r>
           </a:p>
           <a:p>
             <a:pPr lvl="1"/>
             <a:r>
-              <a:rPr lang="en-US" smtClean="0"/>
+              <a:rPr lang="en-US"/>
               <a:t>Second level</a:t>
             </a:r>
           </a:p>
           <a:p>
             <a:pPr lvl="2"/>
             <a:r>
-              <a:rPr lang="en-US" smtClean="0"/>
+              <a:rPr lang="en-US"/>
               <a:t>Third level</a:t>
             </a:r>
           </a:p>
           <a:p>
             <a:pPr lvl="3"/>
             <a:r>
-              <a:rPr lang="en-US" smtClean="0"/>
+              <a:rPr lang="en-US"/>
               <a:t>Fourth level</a:t>
             </a:r>
           </a:p>
           <a:p>
             <a:pPr lvl="4"/>
             <a:r>
-              <a:rPr lang="en-US" smtClean="0"/>
+              <a:rPr lang="en-US"/>
               <a:t>Fifth level</a:t>
             </a:r>
-            <a:endParaRPr lang="en-US"/>
           </a:p>
         </p:txBody>
       </p:sp>
@@ -1290,38 +1298,37 @@
           <a:p>
             <a:pPr lvl="0"/>
             <a:r>
-              <a:rPr lang="en-US" smtClean="0"/>
+              <a:rPr lang="en-US"/>
               <a:t>Click to edit Master text styles</a:t>
             </a:r>
           </a:p>
           <a:p>
             <a:pPr lvl="1"/>
             <a:r>
-              <a:rPr lang="en-US" smtClean="0"/>
+              <a:rPr lang="en-US"/>
               <a:t>Second level</a:t>
             </a:r>
           </a:p>
           <a:p>
             <a:pPr lvl="2"/>
             <a:r>
-              <a:rPr lang="en-US" smtClean="0"/>
+              <a:rPr lang="en-US"/>
               <a:t>Third level</a:t>
             </a:r>
           </a:p>
           <a:p>
             <a:pPr lvl="3"/>
             <a:r>
-              <a:rPr lang="en-US" smtClean="0"/>
+              <a:rPr lang="en-US"/>
               <a:t>Fourth level</a:t>
             </a:r>
           </a:p>
           <a:p>
             <a:pPr lvl="4"/>
             <a:r>
-              <a:rPr lang="en-US" smtClean="0"/>
+              <a:rPr lang="en-US"/>
               <a:t>Fifth level</a:t>
             </a:r>
-            <a:endParaRPr lang="en-US"/>
           </a:p>
         </p:txBody>
       </p:sp>
@@ -1342,7 +1349,7 @@
           <a:p>
             <a:fld id="{5BCAD085-E8A6-8845-BD4E-CB4CCA059FC4}" type="datetimeFigureOut">
               <a:rPr lang="en-US" smtClean="0"/>
-              <a:t>1/27/13</a:t>
+              <a:t>8/24/2026</a:t>
             </a:fld>
             <a:endParaRPr lang="en-US"/>
           </a:p>
@@ -1440,10 +1447,9 @@
           </a:lstStyle>
           <a:p>
             <a:r>
-              <a:rPr lang="en-US" smtClean="0"/>
+              <a:rPr lang="en-US"/>
               <a:t>Click to edit Master title style</a:t>
             </a:r>
-            <a:endParaRPr lang="en-US"/>
           </a:p>
         </p:txBody>
       </p:sp>
@@ -1506,7 +1512,7 @@
           <a:p>
             <a:pPr lvl="0"/>
             <a:r>
-              <a:rPr lang="en-US" smtClean="0"/>
+              <a:rPr lang="en-US"/>
               <a:t>Click to edit Master text styles</a:t>
             </a:r>
           </a:p>
@@ -1562,38 +1568,37 @@
           <a:p>
             <a:pPr lvl="0"/>
             <a:r>
-              <a:rPr lang="en-US" smtClean="0"/>
+              <a:rPr lang="en-US"/>
               <a:t>Click to edit Master text styles</a:t>
             </a:r>
           </a:p>
           <a:p>
             <a:pPr lvl="1"/>
             <a:r>
-              <a:rPr lang="en-US" smtClean="0"/>
+              <a:rPr lang="en-US"/>
               <a:t>Second level</a:t>
             </a:r>
           </a:p>
           <a:p>
             <a:pPr lvl="2"/>
             <a:r>
-              <a:rPr lang="en-US" smtClean="0"/>
+              <a:rPr lang="en-US"/>
               <a:t>Third level</a:t>
             </a:r>
           </a:p>
           <a:p>
             <a:pPr lvl="3"/>
             <a:r>
-              <a:rPr lang="en-US" smtClean="0"/>
+              <a:rPr lang="en-US"/>
               <a:t>Fourth level</a:t>
             </a:r>
           </a:p>
           <a:p>
             <a:pPr lvl="4"/>
             <a:r>
-              <a:rPr lang="en-US" smtClean="0"/>
+              <a:rPr lang="en-US"/>
               <a:t>Fifth level</a:t>
             </a:r>
-            <a:endParaRPr lang="en-US"/>
           </a:p>
         </p:txBody>
       </p:sp>
@@ -1656,7 +1661,7 @@
           <a:p>
             <a:pPr lvl="0"/>
             <a:r>
-              <a:rPr lang="en-US" smtClean="0"/>
+              <a:rPr lang="en-US"/>
               <a:t>Click to edit Master text styles</a:t>
             </a:r>
           </a:p>
@@ -1712,38 +1717,37 @@
           <a:p>
             <a:pPr lvl="0"/>
             <a:r>
-              <a:rPr lang="en-US" smtClean="0"/>
+              <a:rPr lang="en-US"/>
               <a:t>Click to edit Master text styles</a:t>
             </a:r>
           </a:p>
           <a:p>
             <a:pPr lvl="1"/>
             <a:r>
-              <a:rPr lang="en-US" smtClean="0"/>
+              <a:rPr lang="en-US"/>
               <a:t>Second level</a:t>
             </a:r>
           </a:p>
           <a:p>
             <a:pPr lvl="2"/>
             <a:r>
-              <a:rPr lang="en-US" smtClean="0"/>
+              <a:rPr lang="en-US"/>
               <a:t>Third level</a:t>
             </a:r>
           </a:p>
           <a:p>
             <a:pPr lvl="3"/>
             <a:r>
-              <a:rPr lang="en-US" smtClean="0"/>
+              <a:rPr lang="en-US"/>
               <a:t>Fourth level</a:t>
             </a:r>
           </a:p>
           <a:p>
             <a:pPr lvl="4"/>
             <a:r>
-              <a:rPr lang="en-US" smtClean="0"/>
+              <a:rPr lang="en-US"/>
               <a:t>Fifth level</a:t>
             </a:r>
-            <a:endParaRPr lang="en-US"/>
           </a:p>
         </p:txBody>
       </p:sp>
@@ -1764,7 +1768,7 @@
           <a:p>
             <a:fld id="{5BCAD085-E8A6-8845-BD4E-CB4CCA059FC4}" type="datetimeFigureOut">
               <a:rPr lang="en-US" smtClean="0"/>
-              <a:t>1/27/13</a:t>
+              <a:t>8/24/2026</a:t>
             </a:fld>
             <a:endParaRPr lang="en-US"/>
           </a:p>
@@ -1858,10 +1862,9 @@
           <a:lstStyle/>
           <a:p>
             <a:r>
-              <a:rPr lang="en-US" smtClean="0"/>
+              <a:rPr lang="en-US"/>
               <a:t>Click to edit Master title style</a:t>
             </a:r>
-            <a:endParaRPr lang="en-US"/>
           </a:p>
         </p:txBody>
       </p:sp>
@@ -1882,7 +1885,7 @@
           <a:p>
             <a:fld id="{5BCAD085-E8A6-8845-BD4E-CB4CCA059FC4}" type="datetimeFigureOut">
               <a:rPr lang="en-US" smtClean="0"/>
-              <a:t>1/27/13</a:t>
+              <a:t>8/24/2026</a:t>
             </a:fld>
             <a:endParaRPr lang="en-US"/>
           </a:p>
@@ -1977,7 +1980,7 @@
           <a:p>
             <a:fld id="{5BCAD085-E8A6-8845-BD4E-CB4CCA059FC4}" type="datetimeFigureOut">
               <a:rPr lang="en-US" smtClean="0"/>
-              <a:t>1/27/13</a:t>
+              <a:t>8/24/2026</a:t>
             </a:fld>
             <a:endParaRPr lang="en-US"/>
           </a:p>
@@ -2080,10 +2083,9 @@
           </a:lstStyle>
           <a:p>
             <a:r>
-              <a:rPr lang="en-US" smtClean="0"/>
+              <a:rPr lang="en-US"/>
               <a:t>Click to edit Master title style</a:t>
             </a:r>
-            <a:endParaRPr lang="en-US"/>
           </a:p>
         </p:txBody>
       </p:sp>
@@ -2137,38 +2139,37 @@
           <a:p>
             <a:pPr lvl="0"/>
             <a:r>
-              <a:rPr lang="en-US" smtClean="0"/>
+              <a:rPr lang="en-US"/>
               <a:t>Click to edit Master text styles</a:t>
             </a:r>
           </a:p>
           <a:p>
             <a:pPr lvl="1"/>
             <a:r>
-              <a:rPr lang="en-US" smtClean="0"/>
+              <a:rPr lang="en-US"/>
               <a:t>Second level</a:t>
             </a:r>
           </a:p>
           <a:p>
             <a:pPr lvl="2"/>
             <a:r>
-              <a:rPr lang="en-US" smtClean="0"/>
+              <a:rPr lang="en-US"/>
               <a:t>Third level</a:t>
             </a:r>
           </a:p>
           <a:p>
             <a:pPr lvl="3"/>
             <a:r>
-              <a:rPr lang="en-US" smtClean="0"/>
+              <a:rPr lang="en-US"/>
               <a:t>Fourth level</a:t>
             </a:r>
           </a:p>
           <a:p>
             <a:pPr lvl="4"/>
             <a:r>
-              <a:rPr lang="en-US" smtClean="0"/>
+              <a:rPr lang="en-US"/>
               <a:t>Fifth level</a:t>
             </a:r>
-            <a:endParaRPr lang="en-US"/>
           </a:p>
         </p:txBody>
       </p:sp>
@@ -2231,7 +2232,7 @@
           <a:p>
             <a:pPr lvl="0"/>
             <a:r>
-              <a:rPr lang="en-US" smtClean="0"/>
+              <a:rPr lang="en-US"/>
               <a:t>Click to edit Master text styles</a:t>
             </a:r>
           </a:p>
@@ -2254,7 +2255,7 @@
           <a:p>
             <a:fld id="{5BCAD085-E8A6-8845-BD4E-CB4CCA059FC4}" type="datetimeFigureOut">
               <a:rPr lang="en-US" smtClean="0"/>
-              <a:t>1/27/13</a:t>
+              <a:t>8/24/2026</a:t>
             </a:fld>
             <a:endParaRPr lang="en-US"/>
           </a:p>
@@ -2357,10 +2358,9 @@
           </a:lstStyle>
           <a:p>
             <a:r>
-              <a:rPr lang="en-US" smtClean="0"/>
+              <a:rPr lang="en-US"/>
               <a:t>Click to edit Master title style</a:t>
             </a:r>
-            <a:endParaRPr lang="en-US"/>
           </a:p>
         </p:txBody>
       </p:sp>
@@ -2484,7 +2484,7 @@
           <a:p>
             <a:pPr lvl="0"/>
             <a:r>
-              <a:rPr lang="en-US" smtClean="0"/>
+              <a:rPr lang="en-US"/>
               <a:t>Click to edit Master text styles</a:t>
             </a:r>
           </a:p>
@@ -2507,7 +2507,7 @@
           <a:p>
             <a:fld id="{5BCAD085-E8A6-8845-BD4E-CB4CCA059FC4}" type="datetimeFigureOut">
               <a:rPr lang="en-US" smtClean="0"/>
-              <a:t>1/27/13</a:t>
+              <a:t>8/24/2026</a:t>
             </a:fld>
             <a:endParaRPr lang="en-US"/>
           </a:p>
@@ -2616,10 +2616,9 @@
           <a:lstStyle/>
           <a:p>
             <a:r>
-              <a:rPr lang="en-US" smtClean="0"/>
+              <a:rPr lang="en-US"/>
               <a:t>Click to edit Master title style</a:t>
             </a:r>
-            <a:endParaRPr lang="en-US"/>
           </a:p>
         </p:txBody>
       </p:sp>
@@ -2650,38 +2649,37 @@
           <a:p>
             <a:pPr lvl="0"/>
             <a:r>
-              <a:rPr lang="en-US" smtClean="0"/>
+              <a:rPr lang="en-US"/>
               <a:t>Click to edit Master text styles</a:t>
             </a:r>
           </a:p>
           <a:p>
             <a:pPr lvl="1"/>
             <a:r>
-              <a:rPr lang="en-US" smtClean="0"/>
+              <a:rPr lang="en-US"/>
               <a:t>Second level</a:t>
             </a:r>
           </a:p>
           <a:p>
             <a:pPr lvl="2"/>
             <a:r>
-              <a:rPr lang="en-US" smtClean="0"/>
+              <a:rPr lang="en-US"/>
               <a:t>Third level</a:t>
             </a:r>
           </a:p>
           <a:p>
             <a:pPr lvl="3"/>
             <a:r>
-              <a:rPr lang="en-US" smtClean="0"/>
+              <a:rPr lang="en-US"/>
               <a:t>Fourth level</a:t>
             </a:r>
           </a:p>
           <a:p>
             <a:pPr lvl="4"/>
             <a:r>
-              <a:rPr lang="en-US" smtClean="0"/>
+              <a:rPr lang="en-US"/>
               <a:t>Fifth level</a:t>
             </a:r>
-            <a:endParaRPr lang="en-US"/>
           </a:p>
         </p:txBody>
       </p:sp>
@@ -2720,7 +2718,7 @@
           <a:p>
             <a:fld id="{5BCAD085-E8A6-8845-BD4E-CB4CCA059FC4}" type="datetimeFigureOut">
               <a:rPr lang="en-US" smtClean="0"/>
-              <a:t>1/27/13</a:t>
+              <a:t>8/24/2026</a:t>
             </a:fld>
             <a:endParaRPr lang="en-US"/>
           </a:p>
@@ -3079,7 +3077,7 @@
 </file>
 
 <file path=ppt/slides/slide1.xml><?xml version="1.0" encoding="utf-8"?>
-<p:sld xmlns:a="http://schemas.openxmlformats.org/drawingml/2006/main" xmlns:p="http://schemas.openxmlformats.org/presentationml/2006/main" xmlns:r="http://schemas.openxmlformats.org/officeDocument/2006/relationships">
+<p:sld xmlns:a="http://schemas.openxmlformats.org/drawingml/2006/main" xmlns:r="http://schemas.openxmlformats.org/officeDocument/2006/relationships" xmlns:p="http://schemas.openxmlformats.org/presentationml/2006/main">
   <p:cSld>
     <p:spTree>
       <p:nvGrpSpPr>
@@ -3087,10 +3085,17 @@
         <p:cNvGrpSpPr/>
         <p:nvPr/>
       </p:nvGrpSpPr>
-      <p:grpSpPr/>
-      <p:sp>
-        <p:nvSpPr>
-          <p:cNvPr id="2" name="af-background-rect-01"/>
+      <p:grpSpPr>
+        <a:xfrm>
+          <a:off x="0" y="0"/>
+          <a:ext cx="0" cy="0"/>
+          <a:chOff x="0" y="0"/>
+          <a:chExt cx="0" cy="0"/>
+        </a:xfrm>
+      </p:grpSpPr>
+      <p:sp>
+        <p:nvSpPr>
+          <p:cNvPr id="2" name="af-background-rect-01" descr="{&quot;autofigure_element_id&quot;:&quot;background&quot;}"/>
           <p:cNvSpPr/>
           <p:nvPr/>
         </p:nvSpPr>
@@ -3129,12 +3134,13 @@
           <a:lstStyle/>
           <a:p>
             <a:pPr algn="ctr"/>
-          </a:p>
-        </p:txBody>
-      </p:sp>
-      <p:sp>
-        <p:nvSpPr>
-          <p:cNvPr id="3" name="af-joint-panel-rect-01"/>
+            <a:endParaRPr/>
+          </a:p>
+        </p:txBody>
+      </p:sp>
+      <p:sp>
+        <p:nvSpPr>
+          <p:cNvPr id="3" name="af-joint-panel-rect-01" descr="{&quot;autofigure_element_id&quot;:&quot;joint-panel&quot;}"/>
           <p:cNvSpPr/>
           <p:nvPr/>
         </p:nvSpPr>
@@ -3154,6 +3160,7 @@
               <a:srgbClr val="17355F"/>
             </a:solidFill>
             <a:prstDash val="sysDot"/>
+            <a:miter/>
           </a:ln>
           <a:effectLst/>
         </p:spPr>
@@ -3176,12 +3183,13 @@
           <a:lstStyle/>
           <a:p>
             <a:pPr algn="ctr"/>
-          </a:p>
-        </p:txBody>
-      </p:sp>
-      <p:sp>
-        <p:nvSpPr>
-          <p:cNvPr id="4" name="af-behavior-panel-rect-01"/>
+            <a:endParaRPr/>
+          </a:p>
+        </p:txBody>
+      </p:sp>
+      <p:sp>
+        <p:nvSpPr>
+          <p:cNvPr id="4" name="af-behavior-panel-rect-01" descr="{&quot;autofigure_element_id&quot;:&quot;behavior-panel&quot;}"/>
           <p:cNvSpPr/>
           <p:nvPr/>
         </p:nvSpPr>
@@ -3201,6 +3209,7 @@
               <a:srgbClr val="17355F"/>
             </a:solidFill>
             <a:prstDash val="sysDot"/>
+            <a:miter/>
           </a:ln>
           <a:effectLst/>
         </p:spPr>
@@ -3223,12 +3232,13 @@
           <a:lstStyle/>
           <a:p>
             <a:pPr algn="ctr"/>
-          </a:p>
-        </p:txBody>
-      </p:sp>
-      <p:sp>
-        <p:nvSpPr>
-          <p:cNvPr id="5" name="af-task-input-box-rect-01"/>
+            <a:endParaRPr/>
+          </a:p>
+        </p:txBody>
+      </p:sp>
+      <p:sp>
+        <p:nvSpPr>
+          <p:cNvPr id="5" name="af-task-input-box-rect-01" descr="{&quot;autofigure_element_id&quot;:&quot;task-input-box&quot;}"/>
           <p:cNvSpPr/>
           <p:nvPr/>
         </p:nvSpPr>
@@ -3249,6 +3259,7 @@
             <a:solidFill>
               <a:srgbClr val="18345C"/>
             </a:solidFill>
+            <a:miter/>
           </a:ln>
           <a:effectLst/>
         </p:spPr>
@@ -3271,12 +3282,13 @@
           <a:lstStyle/>
           <a:p>
             <a:pPr algn="ctr"/>
-          </a:p>
-        </p:txBody>
-      </p:sp>
-      <p:sp>
-        <p:nvSpPr>
-          <p:cNvPr id="6" name="af-user-icon-ring-ellipse-01"/>
+            <a:endParaRPr/>
+          </a:p>
+        </p:txBody>
+      </p:sp>
+      <p:sp>
+        <p:nvSpPr>
+          <p:cNvPr id="6" name="af-user-icon-ring-ellipse-01" descr="{&quot;autofigure_element_id&quot;:&quot;user-icon-ring&quot;}"/>
           <p:cNvSpPr/>
           <p:nvPr/>
         </p:nvSpPr>
@@ -3295,6 +3307,7 @@
             <a:solidFill>
               <a:srgbClr val="000000"/>
             </a:solidFill>
+            <a:miter/>
           </a:ln>
           <a:effectLst/>
         </p:spPr>
@@ -3317,12 +3330,13 @@
           <a:lstStyle/>
           <a:p>
             <a:pPr algn="ctr"/>
-          </a:p>
-        </p:txBody>
-      </p:sp>
-      <p:sp>
-        <p:nvSpPr>
-          <p:cNvPr id="7" name="af-user-icon-head-ellipse-01"/>
+            <a:endParaRPr/>
+          </a:p>
+        </p:txBody>
+      </p:sp>
+      <p:sp>
+        <p:nvSpPr>
+          <p:cNvPr id="7" name="af-user-icon-head-ellipse-01" descr="{&quot;autofigure_element_id&quot;:&quot;user-icon-head&quot;}"/>
           <p:cNvSpPr/>
           <p:nvPr/>
         </p:nvSpPr>
@@ -3361,12 +3375,13 @@
           <a:lstStyle/>
           <a:p>
             <a:pPr algn="ctr"/>
-          </a:p>
-        </p:txBody>
-      </p:sp>
-      <p:sp>
-        <p:nvSpPr>
-          <p:cNvPr id="8" name="af-user-icon-body-freeform-01"/>
+            <a:endParaRPr/>
+          </a:p>
+        </p:txBody>
+      </p:sp>
+      <p:sp>
+        <p:nvSpPr>
+          <p:cNvPr id="8" name="af-user-icon-body-freeform-01" descr="{&quot;autofigure_element_id&quot;:&quot;user-icon-body&quot;}"/>
           <p:cNvSpPr/>
           <p:nvPr/>
         </p:nvSpPr>
@@ -3409,12 +3424,15 @@
         </p:spPr>
         <p:txBody>
           <a:bodyPr/>
-          <a:p/>
-        </p:txBody>
-      </p:sp>
-      <p:sp>
-        <p:nvSpPr>
-          <p:cNvPr id="9" name="af-task-line-1-text-01"/>
+          <a:lstStyle/>
+          <a:p>
+            <a:endParaRPr/>
+          </a:p>
+        </p:txBody>
+      </p:sp>
+      <p:sp>
+        <p:nvSpPr>
+          <p:cNvPr id="9" name="af-task-line-1-text-01" descr="{&quot;autofigure_element_id&quot;:&quot;task-line-1&quot;}"/>
           <p:cNvSpPr txBox="1"/>
           <p:nvPr/>
         </p:nvSpPr>
@@ -3430,7 +3448,7 @@
           <a:effectLst/>
         </p:spPr>
         <p:txBody>
-          <a:bodyPr wrap="none" anchor="t" lIns="0" rIns="0" tIns="0" bIns="0">
+          <a:bodyPr wrap="none" lIns="0" tIns="0" rIns="0" bIns="0" anchor="t">
             <a:spAutoFit/>
           </a:bodyPr>
           <a:lstStyle/>
@@ -3450,7 +3468,7 @@
       </p:sp>
       <p:sp>
         <p:nvSpPr>
-          <p:cNvPr id="10" name="af-task-line-2-text-01"/>
+          <p:cNvPr id="10" name="af-task-line-2-text-01" descr="{&quot;autofigure_element_id&quot;:&quot;task-line-2&quot;}"/>
           <p:cNvSpPr txBox="1"/>
           <p:nvPr/>
         </p:nvSpPr>
@@ -3466,7 +3484,7 @@
           <a:effectLst/>
         </p:spPr>
         <p:txBody>
-          <a:bodyPr wrap="none" anchor="t" lIns="0" rIns="0" tIns="0" bIns="0">
+          <a:bodyPr wrap="none" lIns="0" tIns="0" rIns="0" bIns="0" anchor="t">
             <a:spAutoFit/>
           </a:bodyPr>
           <a:lstStyle/>
@@ -3486,7 +3504,7 @@
       </p:sp>
       <p:sp>
         <p:nvSpPr>
-          <p:cNvPr id="11" name="af-task-encoder-rect-01"/>
+          <p:cNvPr id="11" name="af-task-encoder-rect-01" descr="{&quot;autofigure_element_id&quot;:&quot;task-encoder&quot;}"/>
           <p:cNvSpPr/>
           <p:nvPr/>
         </p:nvSpPr>
@@ -3527,12 +3545,13 @@
           <a:lstStyle/>
           <a:p>
             <a:pPr algn="ctr"/>
-          </a:p>
-        </p:txBody>
-      </p:sp>
-      <p:sp>
-        <p:nvSpPr>
-          <p:cNvPr id="12" name="af-task-encoder-line1-text-01"/>
+            <a:endParaRPr/>
+          </a:p>
+        </p:txBody>
+      </p:sp>
+      <p:sp>
+        <p:nvSpPr>
+          <p:cNvPr id="12" name="af-task-encoder-line1-text-01" descr="{&quot;autofigure_element_id&quot;:&quot;task-encoder-line1&quot;}"/>
           <p:cNvSpPr txBox="1"/>
           <p:nvPr/>
         </p:nvSpPr>
@@ -3548,7 +3567,7 @@
           <a:effectLst/>
         </p:spPr>
         <p:txBody>
-          <a:bodyPr wrap="none" anchor="t" lIns="0" rIns="0" tIns="0" bIns="0">
+          <a:bodyPr wrap="none" lIns="0" tIns="0" rIns="0" bIns="0" anchor="t">
             <a:spAutoFit/>
           </a:bodyPr>
           <a:lstStyle/>
@@ -3568,7 +3587,7 @@
       </p:sp>
       <p:sp>
         <p:nvSpPr>
-          <p:cNvPr id="13" name="af-task-encoder-line2-text-01"/>
+          <p:cNvPr id="13" name="af-task-encoder-line2-text-01" descr="{&quot;autofigure_element_id&quot;:&quot;task-encoder-line2&quot;}"/>
           <p:cNvSpPr txBox="1"/>
           <p:nvPr/>
         </p:nvSpPr>
@@ -3584,7 +3603,7 @@
           <a:effectLst/>
         </p:spPr>
         <p:txBody>
-          <a:bodyPr wrap="none" anchor="t" lIns="0" rIns="0" tIns="0" bIns="0">
+          <a:bodyPr wrap="none" lIns="0" tIns="0" rIns="0" bIns="0" anchor="t">
             <a:spAutoFit/>
           </a:bodyPr>
           <a:lstStyle/>
@@ -3604,7 +3623,7 @@
       </p:sp>
       <p:sp>
         <p:nvSpPr>
-          <p:cNvPr id="14" name="af-tau-box-rect-01"/>
+          <p:cNvPr id="14" name="af-tau-box-rect-01" descr="{&quot;autofigure_element_id&quot;:&quot;tau-box&quot;}"/>
           <p:cNvSpPr/>
           <p:nvPr/>
         </p:nvSpPr>
@@ -3623,6 +3642,7 @@
             <a:solidFill>
               <a:srgbClr val="18345C"/>
             </a:solidFill>
+            <a:miter/>
           </a:ln>
           <a:effectLst/>
         </p:spPr>
@@ -3645,11 +3665,12 @@
           <a:lstStyle/>
           <a:p>
             <a:pPr algn="ctr"/>
-          </a:p>
-        </p:txBody>
-      </p:sp>
-      <mc:AlternateContent xmlns:mc="http://schemas.openxmlformats.org/markup-compatibility/2006">
-        <mc:Choice xmlns:a14="http://schemas.microsoft.com/office/drawing/2010/main" Requires="a14">
+            <a:endParaRPr/>
+          </a:p>
+        </p:txBody>
+      </p:sp>
+      <mc:AlternateContent xmlns:mc="http://schemas.openxmlformats.org/markup-compatibility/2006" xmlns:a14="http://schemas.microsoft.com/office/drawing/2010/main">
+        <mc:Choice Requires="a14">
           <p:sp>
             <p:nvSpPr>
               <p:cNvPr id="15" name="math:001" descr="AI_AUTOFIGURE_NATIVE_MATH_V1:eyJjb250ZW50X3J1bnMiOlt7ImNhbm9uaWNhbF9sYXRleCI6IlxcdGF1IiwiZm9ybXVsYV9pZCI6IkVRMDAxIiwia2luZCI6Im1hdGgiLCJsYXRleF9zaGEyNTYiOiI1NWQxODIzNTQ1YjViNGMzY2JjNDJiNzg0YzVlODQ2MDVmZmJlOGU1OWQxZGVlOTc4MmNkODc3NDFlZWY5ZGMzIiwibW9kZSI6ImlubGluZSIsIm9tbWxfc2hhMjU2IjoiNjI3NThjYWJiNjU4Yjc3NjgxYmFhNjE0ZmE0MDA1M2M0NDliNWZjZTkzMmYxYzlhNGQxZTNhMTBlZjI2MWFiMiIsInNlbWFudGljX29tbWxfcHJvZmlsZSI6Im9mZmljZS1tYXRoLXNlbWFudGljLXYyIiwic2VtYW50aWNfb21tbF9zaGEyNTYiOiIxZjMyN2Q3M2RkZGIzMWY1YWJjZmZiY2QwODNlMWJmOGIwNWEzMGY2ZGZkMDk2ZWFjZjdlYjljYTBlMTBhMzY4In1dLCJmb3JtdWxhcyI6W3siY2Fub25pY2FsX2xhdGV4IjoiXFx0YXUiLCJmb3JtdWxhX2lkIjoiRVEwMDEiLCJsYXRleF9zaGEyNTYiOiI1NWQxODIzNTQ1YjViNGMzY2JjNDJiNzg0YzVlODQ2MDVmZmJlOGU1OWQxZGVlOTc4MmNkODc3NDFlZWY5ZGMzIiwibW9kZSI6ImlubGluZSIsIm9tbWxfc2hhMjU2IjoiNjI3NThjYWJiNjU4Yjc3NjgxYmFhNjE0ZmE0MDA1M2M0NDliNWZjZTkzMmYxYzlhNGQxZTNhMTBlZjI2MWFiMiIsInNlbWFudGljX29tbWxfcHJvZmlsZSI6Im9mZmljZS1tYXRoLXNlbWFudGljLXYyIiwic2VtYW50aWNfb21tbF9zaGEyNTYiOiIxZjMyN2Q3M2RkZGIzMWY1YWJjZmZiY2QwODNlMWJmOGIwNWEzMGY2ZGZkMDk2ZWFjZjdlYjljYTBlMTBhMzY4In1dLCJraW5kIjoibmF0aXZlX29mZmljZV9tYXRoIiwicGxhY2Vob2xkZXJfbmFtZSI6Im1hdGg6MDAxIiwic2NoZW1hX3ZlcnNpb24iOiIxLjAifQ=="/>
@@ -3668,26 +3689,28 @@
               <a:effectLst/>
             </p:spPr>
             <p:txBody>
-              <a:bodyPr wrap="none" anchor="t" lIns="0" rIns="0" tIns="0" bIns="0">
+              <a:bodyPr wrap="none" lIns="0" tIns="0" rIns="0" bIns="0" anchor="t">
                 <a:spAutoFit/>
               </a:bodyPr>
               <a:lstStyle/>
               <a:p>
                 <a:pPr algn="ctr"/>
                 <a14:m>
-                  <m:oMath xmlns:m="http://schemas.openxmlformats.org/officeDocument/2006/math">
-                    <m:r>
-                      <a:rPr lang="en-US" dirty="0" sz="1650">
-                        <a:solidFill>
-                          <a:srgbClr val="000000"/>
-                        </a:solidFill>
-                        <a:latin typeface="Cambria Math"/>
-                      </a:rPr>
-                      <m:t>τ</m:t>
-                    </m:r>
-                  </m:oMath>
+                  <m:oMathPara xmlns:m="http://schemas.openxmlformats.org/officeDocument/2006/math">
+                    <m:oMath>
+                      <m:r>
+                        <a:rPr lang="en-US" sz="1650" dirty="0">
+                          <a:solidFill>
+                            <a:srgbClr val="000000"/>
+                          </a:solidFill>
+                          <a:latin typeface="Cambria Math"/>
+                        </a:rPr>
+                        <m:t>𝜏</m:t>
+                      </m:r>
+                    </m:oMath>
+                  </m:oMathPara>
                 </a14:m>
-                <a:endParaRPr lang="en-US" dirty="0" sz="1650">
+                <a:endParaRPr lang="en-US" sz="1650" dirty="0">
                   <a:solidFill>
                     <a:srgbClr val="000000"/>
                   </a:solidFill>
@@ -3697,7 +3720,7 @@
             </p:txBody>
           </p:sp>
         </mc:Choice>
-        <mc:Fallback>
+        <mc:Fallback xmlns="">
           <p:sp>
             <p:nvSpPr>
               <p:cNvPr id="15" name="math:001" descr="AI_AUTOFIGURE_MATH_FALLBACK_ONLY_V1:eyJjb250ZW50X3J1bnMiOlt7ImNhbm9uaWNhbF9sYXRleCI6IlxcdGF1IiwiZm9ybXVsYV9pZCI6IkVRMDAxIiwia2luZCI6Im1hdGgiLCJsYXRleF9zaGEyNTYiOiI1NWQxODIzNTQ1YjViNGMzY2JjNDJiNzg0YzVlODQ2MDVmZmJlOGU1OWQxZGVlOTc4MmNkODc3NDFlZWY5ZGMzIiwibW9kZSI6ImlubGluZSIsIm9tbWxfc2hhMjU2IjoiNjI3NThjYWJiNjU4Yjc3NjgxYmFhNjE0ZmE0MDA1M2M0NDliNWZjZTkzMmYxYzlhNGQxZTNhMTBlZjI2MWFiMiIsInNlbWFudGljX29tbWxfcHJvZmlsZSI6Im9mZmljZS1tYXRoLXNlbWFudGljLXYyIiwic2VtYW50aWNfb21tbF9zaGEyNTYiOiIxZjMyN2Q3M2RkZGIzMWY1YWJjZmZiY2QwODNlMWJmOGIwNWEzMGY2ZGZkMDk2ZWFjZjdlYjljYTBlMTBhMzY4In1dLCJmb3JtdWxhcyI6W3siY2Fub25pY2FsX2xhdGV4IjoiXFx0YXUiLCJmb3JtdWxhX2lkIjoiRVEwMDEiLCJsYXRleF9zaGEyNTYiOiI1NWQxODIzNTQ1YjViNGMzY2JjNDJiNzg0YzVlODQ2MDVmZmJlOGU1OWQxZGVlOTc4MmNkODc3NDFlZWY5ZGMzIiwibW9kZSI6ImlubGluZSIsIm9tbWxfc2hhMjU2IjoiNjI3NThjYWJiNjU4Yjc3NjgxYmFhNjE0ZmE0MDA1M2M0NDliNWZjZTkzMmYxYzlhNGQxZTNhMTBlZjI2MWFiMiIsInNlbWFudGljX29tbWxfcHJvZmlsZSI6Im9mZmljZS1tYXRoLXNlbWFudGljLXYyIiwic2VtYW50aWNfb21tbF9zaGEyNTYiOiIxZjMyN2Q3M2RkZGIzMWY1YWJjZmZiY2QwODNlMWJmOGIwNWEzMGY2ZGZkMDk2ZWFjZjdlYjljYTBlMTBhMzY4In1dLCJraW5kIjoibmF0aXZlX29mZmljZV9tYXRoIiwicGxhY2Vob2xkZXJfbmFtZSI6Im1hdGg6MDAxIiwic2NoZW1hX3ZlcnNpb24iOiIxLjAifQ=="/>
@@ -3716,7 +3739,7 @@
               <a:effectLst/>
             </p:spPr>
             <p:txBody>
-              <a:bodyPr wrap="none" anchor="t" lIns="0" rIns="0" tIns="0" bIns="0">
+              <a:bodyPr wrap="none" lIns="0" tIns="0" rIns="0" bIns="0" anchor="t">
                 <a:spAutoFit/>
               </a:bodyPr>
               <a:lstStyle/>
@@ -3742,7 +3765,7 @@
       </mc:AlternateContent>
       <p:sp>
         <p:nvSpPr>
-          <p:cNvPr id="16" name="af-tau-node-1-ellipse-01"/>
+          <p:cNvPr id="16" name="af-tau-node-1-ellipse-01" descr="{&quot;autofigure_element_id&quot;:&quot;tau-node-1&quot;}"/>
           <p:cNvSpPr/>
           <p:nvPr/>
         </p:nvSpPr>
@@ -3781,12 +3804,13 @@
           <a:lstStyle/>
           <a:p>
             <a:pPr algn="ctr"/>
-          </a:p>
-        </p:txBody>
-      </p:sp>
-      <p:sp>
-        <p:nvSpPr>
-          <p:cNvPr id="17" name="af-tau-node-2-ellipse-01"/>
+            <a:endParaRPr/>
+          </a:p>
+        </p:txBody>
+      </p:sp>
+      <p:sp>
+        <p:nvSpPr>
+          <p:cNvPr id="17" name="af-tau-node-2-ellipse-01" descr="{&quot;autofigure_element_id&quot;:&quot;tau-node-2&quot;}"/>
           <p:cNvSpPr/>
           <p:nvPr/>
         </p:nvSpPr>
@@ -3825,12 +3849,13 @@
           <a:lstStyle/>
           <a:p>
             <a:pPr algn="ctr"/>
-          </a:p>
-        </p:txBody>
-      </p:sp>
-      <p:sp>
-        <p:nvSpPr>
-          <p:cNvPr id="18" name="af-tau-node-3-ellipse-01"/>
+            <a:endParaRPr/>
+          </a:p>
+        </p:txBody>
+      </p:sp>
+      <p:sp>
+        <p:nvSpPr>
+          <p:cNvPr id="18" name="af-tau-node-3-ellipse-01" descr="{&quot;autofigure_element_id&quot;:&quot;tau-node-3&quot;}"/>
           <p:cNvSpPr/>
           <p:nvPr/>
         </p:nvSpPr>
@@ -3869,12 +3894,13 @@
           <a:lstStyle/>
           <a:p>
             <a:pPr algn="ctr"/>
-          </a:p>
-        </p:txBody>
-      </p:sp>
-      <p:sp>
-        <p:nvSpPr>
-          <p:cNvPr id="19" name="af-mapping-box-rect-01"/>
+            <a:endParaRPr/>
+          </a:p>
+        </p:txBody>
+      </p:sp>
+      <p:sp>
+        <p:nvSpPr>
+          <p:cNvPr id="19" name="af-mapping-box-rect-01" descr="{&quot;autofigure_element_id&quot;:&quot;mapping-box&quot;}"/>
           <p:cNvSpPr/>
           <p:nvPr/>
         </p:nvSpPr>
@@ -3915,12 +3941,13 @@
           <a:lstStyle/>
           <a:p>
             <a:pPr algn="ctr"/>
-          </a:p>
-        </p:txBody>
-      </p:sp>
-      <p:sp>
-        <p:nvSpPr>
-          <p:cNvPr id="20" name="af-mapping-label-text-01"/>
+            <a:endParaRPr/>
+          </a:p>
+        </p:txBody>
+      </p:sp>
+      <p:sp>
+        <p:nvSpPr>
+          <p:cNvPr id="20" name="af-mapping-label-text-01" descr="{&quot;autofigure_element_id&quot;:&quot;mapping-label&quot;}"/>
           <p:cNvSpPr txBox="1"/>
           <p:nvPr/>
         </p:nvSpPr>
@@ -3936,7 +3963,7 @@
           <a:effectLst/>
         </p:spPr>
         <p:txBody>
-          <a:bodyPr wrap="none" anchor="t" lIns="0" rIns="0" tIns="0" bIns="0">
+          <a:bodyPr wrap="none" lIns="0" tIns="0" rIns="0" bIns="0" anchor="t">
             <a:spAutoFit/>
           </a:bodyPr>
           <a:lstStyle/>
@@ -3954,8 +3981,8 @@
           </a:p>
         </p:txBody>
       </p:sp>
-      <mc:AlternateContent xmlns:mc="http://schemas.openxmlformats.org/markup-compatibility/2006">
-        <mc:Choice xmlns:a14="http://schemas.microsoft.com/office/drawing/2010/main" Requires="a14">
+      <mc:AlternateContent xmlns:mc="http://schemas.openxmlformats.org/markup-compatibility/2006" xmlns:a14="http://schemas.microsoft.com/office/drawing/2010/main">
+        <mc:Choice Requires="a14">
           <p:sp>
             <p:nvSpPr>
               <p:cNvPr id="21" name="math:002" descr="AI_AUTOFIGURE_NATIVE_MATH_V1:eyJjb250ZW50X3J1bnMiOlt7ImNhbm9uaWNhbF9sYXRleCI6ImZfe21hcH0iLCJmb3JtdWxhX2lkIjoiRVEwMDIiLCJraW5kIjoibWF0aCIsImxhdGV4X3NoYTI1NiI6IjU3MWIwZGZjYzU5NDUzMDFiMDU2Y2I1Mzc2YzZhYzQ1MDM5ODY0ZTYxYjU0OGQ2ZWM2NDhhNGQ2NzgxZTAyZmQiLCJtb2RlIjoiaW5saW5lIiwib21tbF9zaGEyNTYiOiIwYjY0N2UwMjhhZjI2MTk5NjIyNDYwZjhhNGFkYzNkN2I1M2U3MGMxZTRlM2RjYjcyN2IwZjlmOWMzODc3OGJjIiwic2VtYW50aWNfb21tbF9wcm9maWxlIjoib2ZmaWNlLW1hdGgtc2VtYW50aWMtdjIiLCJzZW1hbnRpY19vbW1sX3NoYTI1NiI6ImI4Yzg4NzY2ZWQ2NDRiZGVlYTJkZThkMTUyOWYyYzg5N2U5NzM4ODYyMTllOTI1ODBmODExZjAyOGVhNmRjYzcifV0sImZvcm11bGFzIjpbeyJjYW5vbmljYWxfbGF0ZXgiOiJmX3ttYXB9IiwiZm9ybXVsYV9pZCI6IkVRMDAyIiwibGF0ZXhfc2hhMjU2IjoiNTcxYjBkZmNjNTk0NTMwMWIwNTZjYjUzNzZjNmFjNDUwMzk4NjRlNjFiNTQ4ZDZlYzY0OGE0ZDY3ODFlMDJmZCIsIm1vZGUiOiJpbmxpbmUiLCJvbW1sX3NoYTI1NiI6IjBiNjQ3ZTAyOGFmMjYxOTk2MjI0NjBmOGE0YWRjM2Q3YjUzZTcwYzFlNGUzZGNiNzI3YjBmOWY5YzM4Nzc4YmMiLCJzZW1hbnRpY19vbW1sX3Byb2ZpbGUiOiJvZmZpY2UtbWF0aC1zZW1hbnRpYy12MiIsInNlbWFudGljX29tbWxfc2hhMjU2IjoiYjhjODg3NjZlZDY0NGJkZWVhMmRlOGQxNTI5ZjJjODk3ZTk3Mzg4NjIxOWU5MjU4MGY4MTFmMDI4ZWE2ZGNjNyJ9XSwia2luZCI6Im5hdGl2ZV9vZmZpY2VfbWF0aCIsInBsYWNlaG9sZGVyX25hbWUiOiJtYXRoOjAwMiIsInNjaGVtYV92ZXJzaW9uIjoiMS4wIn0="/>
@@ -3974,41 +4001,53 @@
               <a:effectLst/>
             </p:spPr>
             <p:txBody>
-              <a:bodyPr wrap="none" anchor="t" lIns="0" rIns="0" tIns="0" bIns="0">
+              <a:bodyPr wrap="none" lIns="0" tIns="0" rIns="0" bIns="0" anchor="t">
                 <a:spAutoFit/>
               </a:bodyPr>
               <a:lstStyle/>
               <a:p>
                 <a:pPr algn="l"/>
                 <a14:m>
-                  <m:oMath xmlns:m="http://schemas.openxmlformats.org/officeDocument/2006/math">
-                    <m:sSub>
-                      <m:e>
-                        <m:r>
-                          <a:rPr lang="en-US" dirty="0" sz="1275">
-                            <a:solidFill>
-                              <a:srgbClr val="000000"/>
-                            </a:solidFill>
-                            <a:latin typeface="Cambria Math"/>
-                          </a:rPr>
-                          <m:t>f</m:t>
-                        </m:r>
-                      </m:e>
-                      <m:sub>
-                        <m:r>
-                          <a:rPr lang="en-US" dirty="0" sz="1275">
-                            <a:solidFill>
-                              <a:srgbClr val="000000"/>
-                            </a:solidFill>
-                            <a:latin typeface="Cambria Math"/>
-                          </a:rPr>
-                          <m:t>map</m:t>
-                        </m:r>
-                      </m:sub>
-                    </m:sSub>
-                  </m:oMath>
+                  <m:oMathPara xmlns:m="http://schemas.openxmlformats.org/officeDocument/2006/math">
+                    <m:oMath>
+                      <m:sSub>
+                        <m:sSubPr>
+                          <m:ctrlPr>
+                            <a:rPr lang="en-US" sz="1275" dirty="0">
+                              <a:solidFill>
+                                <a:srgbClr val="000000"/>
+                              </a:solidFill>
+                              <a:latin typeface="Cambria Math"/>
+                            </a:rPr>
+                          </m:ctrlPr>
+                        </m:sSubPr>
+                        <m:e>
+                          <m:r>
+                            <a:rPr lang="en-US" sz="1275" dirty="0">
+                              <a:solidFill>
+                                <a:srgbClr val="000000"/>
+                              </a:solidFill>
+                              <a:latin typeface="Cambria Math"/>
+                            </a:rPr>
+                            <m:t>𝑓</m:t>
+                          </m:r>
+                        </m:e>
+                        <m:sub>
+                          <m:r>
+                            <a:rPr lang="en-US" sz="1275" dirty="0">
+                              <a:solidFill>
+                                <a:srgbClr val="000000"/>
+                              </a:solidFill>
+                              <a:latin typeface="Cambria Math"/>
+                            </a:rPr>
+                            <m:t>𝑚𝑎𝑝</m:t>
+                          </m:r>
+                        </m:sub>
+                      </m:sSub>
+                    </m:oMath>
+                  </m:oMathPara>
                 </a14:m>
-                <a:endParaRPr lang="en-US" dirty="0" sz="1275">
+                <a:endParaRPr lang="en-US" sz="1275" dirty="0">
                   <a:solidFill>
                     <a:srgbClr val="000000"/>
                   </a:solidFill>
@@ -4018,7 +4057,7 @@
             </p:txBody>
           </p:sp>
         </mc:Choice>
-        <mc:Fallback>
+        <mc:Fallback xmlns="">
           <p:sp>
             <p:nvSpPr>
               <p:cNvPr id="21" name="math:002" descr="AI_AUTOFIGURE_MATH_FALLBACK_ONLY_V1:eyJjb250ZW50X3J1bnMiOlt7ImNhbm9uaWNhbF9sYXRleCI6ImZfe21hcH0iLCJmb3JtdWxhX2lkIjoiRVEwMDIiLCJraW5kIjoibWF0aCIsImxhdGV4X3NoYTI1NiI6IjU3MWIwZGZjYzU5NDUzMDFiMDU2Y2I1Mzc2YzZhYzQ1MDM5ODY0ZTYxYjU0OGQ2ZWM2NDhhNGQ2NzgxZTAyZmQiLCJtb2RlIjoiaW5saW5lIiwib21tbF9zaGEyNTYiOiIwYjY0N2UwMjhhZjI2MTk5NjIyNDYwZjhhNGFkYzNkN2I1M2U3MGMxZTRlM2RjYjcyN2IwZjlmOWMzODc3OGJjIiwic2VtYW50aWNfb21tbF9wcm9maWxlIjoib2ZmaWNlLW1hdGgtc2VtYW50aWMtdjIiLCJzZW1hbnRpY19vbW1sX3NoYTI1NiI6ImI4Yzg4NzY2ZWQ2NDRiZGVlYTJkZThkMTUyOWYyYzg5N2U5NzM4ODYyMTllOTI1ODBmODExZjAyOGVhNmRjYzcifV0sImZvcm11bGFzIjpbeyJjYW5vbmljYWxfbGF0ZXgiOiJmX3ttYXB9IiwiZm9ybXVsYV9pZCI6IkVRMDAyIiwibGF0ZXhfc2hhMjU2IjoiNTcxYjBkZmNjNTk0NTMwMWIwNTZjYjUzNzZjNmFjNDUwMzk4NjRlNjFiNTQ4ZDZlYzY0OGE0ZDY3ODFlMDJmZCIsIm1vZGUiOiJpbmxpbmUiLCJvbW1sX3NoYTI1NiI6IjBiNjQ3ZTAyOGFmMjYxOTk2MjI0NjBmOGE0YWRjM2Q3YjUzZTcwYzFlNGUzZGNiNzI3YjBmOWY5YzM4Nzc4YmMiLCJzZW1hbnRpY19vbW1sX3Byb2ZpbGUiOiJvZmZpY2UtbWF0aC1zZW1hbnRpYy12MiIsInNlbWFudGljX29tbWxfc2hhMjU2IjoiYjhjODg3NjZlZDY0NGJkZWVhMmRlOGQxNTI5ZjJjODk3ZTk3Mzg4NjIxOWU5MjU4MGY4MTFmMDI4ZWE2ZGNjNyJ9XSwia2luZCI6Im5hdGl2ZV9vZmZpY2VfbWF0aCIsInBsYWNlaG9sZGVyX25hbWUiOiJtYXRoOjAwMiIsInNjaGVtYV92ZXJzaW9uIjoiMS4wIn0="/>
@@ -4037,7 +4076,7 @@
               <a:effectLst/>
             </p:spPr>
             <p:txBody>
-              <a:bodyPr wrap="none" anchor="t" lIns="0" rIns="0" tIns="0" bIns="0">
+              <a:bodyPr wrap="none" lIns="0" tIns="0" rIns="0" bIns="0" anchor="t">
                 <a:spAutoFit/>
               </a:bodyPr>
               <a:lstStyle/>
@@ -4063,7 +4102,7 @@
       </mc:AlternateContent>
       <p:cxnSp>
         <p:nvCxnSpPr>
-          <p:cNvPr id="22" name="af-task-input-to-encoder-connector-01"/>
+          <p:cNvPr id="22" name="af-task-input-to-encoder-connector-01" descr="{&quot;arrow_spec_sha256&quot;:&quot;7d5ed98d70de50a89dd6a62b357199f31c630caa2dd759ba7ae7a496a0e1eecf&quot;,&quot;autofigure_element_id&quot;:&quot;task-input-to-encoder&quot;}"/>
           <p:cNvCxnSpPr>
             <a:stCxn id="5" idx="0"/>
             <a:endCxn id="11" idx="0"/>
@@ -4082,6 +4121,7 @@
             <a:solidFill>
               <a:srgbClr val="7F7F7F"/>
             </a:solidFill>
+            <a:miter/>
             <a:tailEnd type="triangle" w="sm" len="sm"/>
           </a:ln>
           <a:effectLst/>
@@ -4103,7 +4143,7 @@
       </p:cxnSp>
       <p:cxnSp>
         <p:nvCxnSpPr>
-          <p:cNvPr id="23" name="af-task-encoder-to-tau-connector-01"/>
+          <p:cNvPr id="23" name="af-task-encoder-to-tau-connector-01" descr="{&quot;arrow_spec_sha256&quot;:&quot;05f855fe9d4755df68c702b5553583fc088577e9b45784efd59df6e8c718dd59&quot;,&quot;autofigure_element_id&quot;:&quot;task-encoder-to-tau&quot;}"/>
           <p:cNvCxnSpPr>
             <a:stCxn id="11" idx="0"/>
             <a:endCxn id="14" idx="0"/>
@@ -4122,6 +4162,7 @@
             <a:solidFill>
               <a:srgbClr val="7F7F7F"/>
             </a:solidFill>
+            <a:miter/>
             <a:tailEnd type="triangle" w="sm" len="sm"/>
           </a:ln>
           <a:effectLst/>
@@ -4143,7 +4184,7 @@
       </p:cxnSp>
       <p:cxnSp>
         <p:nvCxnSpPr>
-          <p:cNvPr id="24" name="af-tau-to-mapping-connector-01"/>
+          <p:cNvPr id="24" name="af-tau-to-mapping-connector-01" descr="{&quot;arrow_spec_sha256&quot;:&quot;33f6262b8e70635ec86353616d887f9de74d8a4b1bbaa2086a181b9ce9bf3ca8&quot;,&quot;autofigure_element_id&quot;:&quot;tau-to-mapping&quot;}"/>
           <p:cNvCxnSpPr>
             <a:stCxn id="14" idx="0"/>
             <a:endCxn id="19" idx="0"/>
@@ -4162,6 +4203,7 @@
             <a:solidFill>
               <a:srgbClr val="7F7F7F"/>
             </a:solidFill>
+            <a:miter/>
             <a:tailEnd type="triangle" w="sm" len="sm"/>
           </a:ln>
           <a:effectLst/>
@@ -4183,7 +4225,7 @@
       </p:cxnSp>
       <p:sp>
         <p:nvSpPr>
-          <p:cNvPr id="25" name="af-legend-sem-rect-01"/>
+          <p:cNvPr id="25" name="af-legend-sem-rect-01" descr="{&quot;autofigure_element_id&quot;:&quot;legend-sem&quot;}"/>
           <p:cNvSpPr/>
           <p:nvPr/>
         </p:nvSpPr>
@@ -4224,12 +4266,13 @@
           <a:lstStyle/>
           <a:p>
             <a:pPr algn="ctr"/>
-          </a:p>
-        </p:txBody>
-      </p:sp>
-      <p:sp>
-        <p:nvSpPr>
-          <p:cNvPr id="26" name="af-legend-sem-short-text-01"/>
+            <a:endParaRPr/>
+          </a:p>
+        </p:txBody>
+      </p:sp>
+      <p:sp>
+        <p:nvSpPr>
+          <p:cNvPr id="26" name="af-legend-sem-short-text-01" descr="{&quot;autofigure_element_id&quot;:&quot;legend-sem-short&quot;}"/>
           <p:cNvSpPr txBox="1"/>
           <p:nvPr/>
         </p:nvSpPr>
@@ -4245,7 +4288,7 @@
           <a:effectLst/>
         </p:spPr>
         <p:txBody>
-          <a:bodyPr wrap="none" anchor="t" lIns="0" rIns="0" tIns="0" bIns="0">
+          <a:bodyPr wrap="none" lIns="0" tIns="0" rIns="0" bIns="0" anchor="t">
             <a:spAutoFit/>
           </a:bodyPr>
           <a:lstStyle/>
@@ -4265,7 +4308,7 @@
       </p:sp>
       <p:sp>
         <p:nvSpPr>
-          <p:cNvPr id="27" name="af-legend-sem-long-text-01"/>
+          <p:cNvPr id="27" name="af-legend-sem-long-text-01" descr="{&quot;autofigure_element_id&quot;:&quot;legend-sem-long&quot;}"/>
           <p:cNvSpPr txBox="1"/>
           <p:nvPr/>
         </p:nvSpPr>
@@ -4281,7 +4324,7 @@
           <a:effectLst/>
         </p:spPr>
         <p:txBody>
-          <a:bodyPr wrap="none" anchor="t" lIns="0" rIns="0" tIns="0" bIns="0">
+          <a:bodyPr wrap="none" lIns="0" tIns="0" rIns="0" bIns="0" anchor="t">
             <a:spAutoFit/>
           </a:bodyPr>
           <a:lstStyle/>
@@ -4301,7 +4344,7 @@
       </p:sp>
       <p:sp>
         <p:nvSpPr>
-          <p:cNvPr id="28" name="af-legend-dyn-rect-01"/>
+          <p:cNvPr id="28" name="af-legend-dyn-rect-01" descr="{&quot;autofigure_element_id&quot;:&quot;legend-dyn&quot;}"/>
           <p:cNvSpPr/>
           <p:nvPr/>
         </p:nvSpPr>
@@ -4342,12 +4385,13 @@
           <a:lstStyle/>
           <a:p>
             <a:pPr algn="ctr"/>
-          </a:p>
-        </p:txBody>
-      </p:sp>
-      <p:sp>
-        <p:nvSpPr>
-          <p:cNvPr id="29" name="af-legend-dyn-short-text-01"/>
+            <a:endParaRPr/>
+          </a:p>
+        </p:txBody>
+      </p:sp>
+      <p:sp>
+        <p:nvSpPr>
+          <p:cNvPr id="29" name="af-legend-dyn-short-text-01" descr="{&quot;autofigure_element_id&quot;:&quot;legend-dyn-short&quot;}"/>
           <p:cNvSpPr txBox="1"/>
           <p:nvPr/>
         </p:nvSpPr>
@@ -4363,7 +4407,7 @@
           <a:effectLst/>
         </p:spPr>
         <p:txBody>
-          <a:bodyPr wrap="none" anchor="t" lIns="0" rIns="0" tIns="0" bIns="0">
+          <a:bodyPr wrap="none" lIns="0" tIns="0" rIns="0" bIns="0" anchor="t">
             <a:spAutoFit/>
           </a:bodyPr>
           <a:lstStyle/>
@@ -4383,7 +4427,7 @@
       </p:sp>
       <p:sp>
         <p:nvSpPr>
-          <p:cNvPr id="30" name="af-legend-dyn-long-text-01"/>
+          <p:cNvPr id="30" name="af-legend-dyn-long-text-01" descr="{&quot;autofigure_element_id&quot;:&quot;legend-dyn-long&quot;}"/>
           <p:cNvSpPr txBox="1"/>
           <p:nvPr/>
         </p:nvSpPr>
@@ -4399,7 +4443,7 @@
           <a:effectLst/>
         </p:spPr>
         <p:txBody>
-          <a:bodyPr wrap="none" anchor="t" lIns="0" rIns="0" tIns="0" bIns="0">
+          <a:bodyPr wrap="none" lIns="0" tIns="0" rIns="0" bIns="0" anchor="t">
             <a:spAutoFit/>
           </a:bodyPr>
           <a:lstStyle/>
@@ -4419,7 +4463,7 @@
       </p:sp>
       <p:sp>
         <p:nvSpPr>
-          <p:cNvPr id="31" name="af-joint-title-text-01"/>
+          <p:cNvPr id="31" name="af-joint-title-text-01" descr="{&quot;autofigure_element_id&quot;:&quot;joint-title&quot;}"/>
           <p:cNvSpPr txBox="1"/>
           <p:nvPr/>
         </p:nvSpPr>
@@ -4435,7 +4479,7 @@
           <a:effectLst/>
         </p:spPr>
         <p:txBody>
-          <a:bodyPr wrap="none" anchor="t" lIns="0" rIns="0" tIns="0" bIns="0">
+          <a:bodyPr wrap="none" lIns="0" tIns="0" rIns="0" bIns="0" anchor="t">
             <a:spAutoFit/>
           </a:bodyPr>
           <a:lstStyle/>
@@ -4455,7 +4499,7 @@
       </p:sp>
       <p:sp>
         <p:nvSpPr>
-          <p:cNvPr id="32" name="af-allocator-box-rect-01"/>
+          <p:cNvPr id="32" name="af-allocator-box-rect-01" descr="{&quot;autofigure_element_id&quot;:&quot;allocator-box&quot;}"/>
           <p:cNvSpPr/>
           <p:nvPr/>
         </p:nvSpPr>
@@ -4474,6 +4518,7 @@
             <a:solidFill>
               <a:srgbClr val="4776CC"/>
             </a:solidFill>
+            <a:miter/>
           </a:ln>
           <a:effectLst/>
         </p:spPr>
@@ -4496,12 +4541,13 @@
           <a:lstStyle/>
           <a:p>
             <a:pPr algn="ctr"/>
-          </a:p>
-        </p:txBody>
-      </p:sp>
-      <p:sp>
-        <p:nvSpPr>
-          <p:cNvPr id="33" name="af-allocator-label-text-01"/>
+            <a:endParaRPr/>
+          </a:p>
+        </p:txBody>
+      </p:sp>
+      <p:sp>
+        <p:nvSpPr>
+          <p:cNvPr id="33" name="af-allocator-label-text-01" descr="{&quot;autofigure_element_id&quot;:&quot;allocator-label&quot;}"/>
           <p:cNvSpPr txBox="1"/>
           <p:nvPr/>
         </p:nvSpPr>
@@ -4517,7 +4563,7 @@
           <a:effectLst/>
         </p:spPr>
         <p:txBody>
-          <a:bodyPr wrap="none" anchor="t" lIns="0" rIns="0" tIns="0" bIns="0">
+          <a:bodyPr wrap="none" lIns="0" tIns="0" rIns="0" bIns="0" anchor="t">
             <a:spAutoFit/>
           </a:bodyPr>
           <a:lstStyle/>
@@ -4537,7 +4583,7 @@
       </p:sp>
       <p:sp>
         <p:nvSpPr>
-          <p:cNvPr id="34" name="af-allocator-funnel-freeform-01"/>
+          <p:cNvPr id="34" name="af-allocator-funnel-freeform-01" descr="{&quot;autofigure_element_id&quot;:&quot;allocator-funnel&quot;}"/>
           <p:cNvSpPr/>
           <p:nvPr/>
         </p:nvSpPr>
@@ -4591,117 +4637,67 @@
         </p:spPr>
         <p:txBody>
           <a:bodyPr/>
-          <a:p/>
-        </p:txBody>
-      </p:sp>
-      <p:grpSp>
-        <p:nvGrpSpPr>
-          <p:cNvPr id="37" name="af-tau-to-allocator-arrow-group-01"/>
-          <p:cNvGrpSpPr/>
-          <p:nvPr/>
-        </p:nvGrpSpPr>
-        <p:grpSpPr>
-          <a:xfrm>
-            <a:off x="0" y="0"/>
-            <a:ext cx="13611225" cy="5972175"/>
-            <a:chOff x="0" y="0"/>
-            <a:chExt cx="13611225" cy="5972175"/>
-          </a:xfrm>
-        </p:grpSpPr>
-        <p:cxnSp>
-          <p:nvCxnSpPr>
-            <p:cNvPr id="35" name="af-tau-to-allocator-connector-01"/>
-            <p:cNvCxnSpPr>
-              <a:stCxn id="14" idx="0"/>
-              <a:endCxn id="32" idx="0"/>
-            </p:cNvCxnSpPr>
-            <p:nvPr/>
-          </p:nvCxnSpPr>
-          <p:spPr>
-            <a:xfrm>
-              <a:off x="6286500" y="762000"/>
-              <a:ext cx="0" cy="447675"/>
-            </a:xfrm>
-            <a:prstGeom prst="line">
-              <a:avLst/>
-            </a:prstGeom>
-            <a:ln w="28575">
-              <a:solidFill>
-                <a:srgbClr val="4776CC"/>
-              </a:solidFill>
-            </a:ln>
-            <a:effectLst/>
-          </p:spPr>
-          <p:style>
-            <a:lnRef idx="2">
-              <a:schemeClr val="accent1"/>
-            </a:lnRef>
-            <a:fillRef idx="0">
-              <a:schemeClr val="accent1"/>
-            </a:fillRef>
-            <a:effectRef idx="1">
-              <a:schemeClr val="accent1"/>
-            </a:effectRef>
-            <a:fontRef idx="minor">
-              <a:schemeClr val="tx1"/>
-            </a:fontRef>
-          </p:style>
-        </p:cxnSp>
-        <p:sp>
-          <p:nvSpPr>
-            <p:cNvPr id="36" name="af-tau-to-allocator-arrowhead-fallback-01"/>
-            <p:cNvSpPr/>
-            <p:nvPr/>
-          </p:nvSpPr>
-          <p:spPr>
-            <a:xfrm>
-              <a:off x="6234112" y="1123950"/>
-              <a:ext cx="104775" cy="95250"/>
-            </a:xfrm>
-            <a:custGeom>
-              <a:avLst/>
-              <a:gdLst/>
-              <a:ahLst/>
-              <a:cxnLst/>
-              <a:rect l="0" t="0" r="0" b="0"/>
-              <a:pathLst>
-                <a:path w="104775" h="95250">
-                  <a:moveTo>
-                    <a:pt x="104775" y="0"/>
-                  </a:moveTo>
-                  <a:lnTo>
-                    <a:pt x="52388" y="95250"/>
-                  </a:lnTo>
-                  <a:lnTo>
-                    <a:pt x="0" y="0"/>
-                  </a:lnTo>
-                  <a:close/>
-                </a:path>
-              </a:pathLst>
-            </a:custGeom>
+          <a:lstStyle/>
+          <a:p>
+            <a:endParaRPr/>
+          </a:p>
+        </p:txBody>
+      </p:sp>
+      <p:cxnSp>
+        <p:nvCxnSpPr>
+          <p:cNvPr id="35" name="af-tau-to-allocator-connector-01" descr="{&quot;arrow_spec_sha256&quot;:&quot;d8c4063c82e8d9a3ade452a78b6f955ac9341a0939856ec54367e9fa98b620ea&quot;,&quot;autofigure_element_id&quot;:&quot;tau-to-allocator&quot;}"/>
+          <p:cNvCxnSpPr>
+            <a:stCxn id="14" idx="0"/>
+            <a:endCxn id="32" idx="0"/>
+          </p:cNvCxnSpPr>
+          <p:nvPr/>
+        </p:nvCxnSpPr>
+        <p:spPr>
+          <a:xfrm>
+            <a:off x="6286500" y="762000"/>
+            <a:ext cx="0" cy="447675"/>
+          </a:xfrm>
+          <a:prstGeom prst="line">
+            <a:avLst/>
+          </a:prstGeom>
+          <a:ln w="28575">
             <a:solidFill>
-              <a:srgbClr val="3567B7"/>
+              <a:srgbClr val="4776CC"/>
             </a:solidFill>
-            <a:ln>
-              <a:noFill/>
-            </a:ln>
-          </p:spPr>
-        </p:sp>
-      </p:grpSp>
-      <p:sp>
-        <p:nvSpPr>
-          <p:cNvPr id="38" name="af-mllm-encoder-rect-01"/>
+            <a:miter/>
+            <a:tailEnd type="triangle" w="med" len="med"/>
+          </a:ln>
+          <a:effectLst/>
+        </p:spPr>
+        <p:style>
+          <a:lnRef idx="2">
+            <a:schemeClr val="accent1"/>
+          </a:lnRef>
+          <a:fillRef idx="0">
+            <a:schemeClr val="accent1"/>
+          </a:fillRef>
+          <a:effectRef idx="1">
+            <a:schemeClr val="accent1"/>
+          </a:effectRef>
+          <a:fontRef idx="minor">
+            <a:schemeClr val="tx1"/>
+          </a:fontRef>
+        </p:style>
+      </p:cxnSp>
+      <p:sp>
+        <p:nvSpPr>
+          <p:cNvPr id="36" name="af-mllm-encoder-rect-01" descr="{&quot;autofigure_element_id&quot;:&quot;mllm-encoder&quot;}"/>
           <p:cNvSpPr/>
           <p:nvPr/>
         </p:nvSpPr>
         <p:spPr>
           <a:xfrm>
-            <a:off x="1790700" y="2314575"/>
-            <a:ext cx="1181100" cy="1066800"/>
+            <a:off x="1781175" y="2305050"/>
+            <a:ext cx="1181100" cy="742950"/>
           </a:xfrm>
           <a:prstGeom prst="roundRect">
             <a:avLst>
-              <a:gd name="adj" fmla="val 12500"/>
+              <a:gd name="adj" fmla="val 16666"/>
             </a:avLst>
           </a:prstGeom>
           <a:solidFill>
@@ -4731,12 +4727,13 @@
           <a:lstStyle/>
           <a:p>
             <a:pPr algn="ctr"/>
-          </a:p>
-        </p:txBody>
-      </p:sp>
-      <p:sp>
-        <p:nvSpPr>
-          <p:cNvPr id="39" name="af-mllm-line1-text-01"/>
+            <a:endParaRPr/>
+          </a:p>
+        </p:txBody>
+      </p:sp>
+      <p:sp>
+        <p:nvSpPr>
+          <p:cNvPr id="37" name="af-mllm-line1-text-01" descr="{&quot;autofigure_element_id&quot;:&quot;mllm-line1&quot;}"/>
           <p:cNvSpPr txBox="1"/>
           <p:nvPr/>
         </p:nvSpPr>
@@ -4752,7 +4749,7 @@
           <a:effectLst/>
         </p:spPr>
         <p:txBody>
-          <a:bodyPr wrap="none" anchor="t" lIns="0" rIns="0" tIns="0" bIns="0">
+          <a:bodyPr wrap="none" lIns="0" tIns="0" rIns="0" bIns="0" anchor="t">
             <a:spAutoFit/>
           </a:bodyPr>
           <a:lstStyle/>
@@ -4772,14 +4769,14 @@
       </p:sp>
       <p:sp>
         <p:nvSpPr>
-          <p:cNvPr id="40" name="af-mllm-line2-text-01"/>
+          <p:cNvPr id="38" name="af-mllm-line2-text-01" descr="{&quot;autofigure_element_id&quot;:&quot;mllm-line2&quot;}"/>
           <p:cNvSpPr txBox="1"/>
           <p:nvPr/>
         </p:nvSpPr>
         <p:spPr>
           <a:xfrm>
-            <a:off x="1865805" y="2705576"/>
-            <a:ext cx="1030891" cy="440531"/>
+            <a:off x="1866900" y="2705576"/>
+            <a:ext cx="1028700" cy="275749"/>
           </a:xfrm>
           <a:prstGeom prst="rect">
             <a:avLst/>
@@ -4788,7 +4785,7 @@
           <a:effectLst/>
         </p:spPr>
         <p:txBody>
-          <a:bodyPr wrap="none" anchor="t" lIns="0" rIns="0" tIns="0" bIns="0">
+          <a:bodyPr wrap="none" lIns="0" tIns="0" rIns="0" bIns="0" anchor="t">
             <a:spAutoFit/>
           </a:bodyPr>
           <a:lstStyle/>
@@ -4808,18 +4805,18 @@
       </p:sp>
       <p:sp>
         <p:nvSpPr>
-          <p:cNvPr id="41" name="af-wm-encoder-rect-01"/>
+          <p:cNvPr id="39" name="af-wm-encoder-rect-01" descr="{&quot;autofigure_element_id&quot;:&quot;wm-encoder&quot;}"/>
           <p:cNvSpPr/>
           <p:nvPr/>
         </p:nvSpPr>
         <p:spPr>
           <a:xfrm>
             <a:off x="1790700" y="3819525"/>
-            <a:ext cx="1181100" cy="828675"/>
+            <a:ext cx="1190625" cy="742950"/>
           </a:xfrm>
           <a:prstGeom prst="roundRect">
             <a:avLst>
-              <a:gd name="adj" fmla="val 16091"/>
+              <a:gd name="adj" fmla="val 16666"/>
             </a:avLst>
           </a:prstGeom>
           <a:solidFill>
@@ -4849,12 +4846,13 @@
           <a:lstStyle/>
           <a:p>
             <a:pPr algn="ctr"/>
-          </a:p>
-        </p:txBody>
-      </p:sp>
-      <p:sp>
-        <p:nvSpPr>
-          <p:cNvPr id="42" name="af-wm-line1-text-01"/>
+            <a:endParaRPr/>
+          </a:p>
+        </p:txBody>
+      </p:sp>
+      <p:sp>
+        <p:nvSpPr>
+          <p:cNvPr id="40" name="af-wm-line1-text-01" descr="{&quot;autofigure_element_id&quot;:&quot;wm-line1&quot;}"/>
           <p:cNvSpPr txBox="1"/>
           <p:nvPr/>
         </p:nvSpPr>
@@ -4870,7 +4868,7 @@
           <a:effectLst/>
         </p:spPr>
         <p:txBody>
-          <a:bodyPr wrap="none" anchor="t" lIns="0" rIns="0" tIns="0" bIns="0">
+          <a:bodyPr wrap="none" lIns="0" tIns="0" rIns="0" bIns="0" anchor="t">
             <a:spAutoFit/>
           </a:bodyPr>
           <a:lstStyle/>
@@ -4890,14 +4888,14 @@
       </p:sp>
       <p:sp>
         <p:nvSpPr>
-          <p:cNvPr id="43" name="af-wm-line2-text-01"/>
+          <p:cNvPr id="41" name="af-wm-line2-text-01" descr="{&quot;autofigure_element_id&quot;:&quot;wm-line2&quot;}"/>
           <p:cNvSpPr txBox="1"/>
           <p:nvPr/>
         </p:nvSpPr>
         <p:spPr>
           <a:xfrm>
             <a:off x="1865805" y="4229576"/>
-            <a:ext cx="1030891" cy="351949"/>
+            <a:ext cx="1030891" cy="266224"/>
           </a:xfrm>
           <a:prstGeom prst="rect">
             <a:avLst/>
@@ -4906,7 +4904,7 @@
           <a:effectLst/>
         </p:spPr>
         <p:txBody>
-          <a:bodyPr wrap="none" anchor="t" lIns="0" rIns="0" tIns="0" bIns="0">
+          <a:bodyPr wrap="none" lIns="0" tIns="0" rIns="0" bIns="0" anchor="t">
             <a:spAutoFit/>
           </a:bodyPr>
           <a:lstStyle/>
@@ -4926,18 +4924,18 @@
       </p:sp>
       <p:pic>
         <p:nvPicPr>
-          <p:cNvPr id="44" name="af-atomic-observation-atomic-raster-01" descr="image.png"/>
+          <p:cNvPr id="42" name="af-atomic-observation-atomic-raster-01" descr="{&quot;autofigure_element_id&quot;:&quot;atomic:observation&quot;}"/>
           <p:cNvPicPr>
             <a:picLocks noChangeAspect="1"/>
           </p:cNvPicPr>
           <p:nvPr>
             <p:custDataLst>
-              <p:tags r:id="rId3"/>
+              <p:tags r:id="rId1"/>
             </p:custDataLst>
           </p:nvPr>
         </p:nvPicPr>
         <p:blipFill>
-          <a:blip r:embed="rId2"/>
+          <a:blip r:embed="rId4"/>
           <a:stretch>
             <a:fillRect/>
           </a:stretch>
@@ -4954,7 +4952,7 @@
       </p:pic>
       <p:sp>
         <p:nvSpPr>
-          <p:cNvPr id="45" name="af-observation-ellipsis-text-01"/>
+          <p:cNvPr id="43" name="af-observation-ellipsis-text-01" descr="{&quot;autofigure_element_id&quot;:&quot;observation-ellipsis&quot;}"/>
           <p:cNvSpPr txBox="1"/>
           <p:nvPr/>
         </p:nvSpPr>
@@ -4970,7 +4968,7 @@
           <a:effectLst/>
         </p:spPr>
         <p:txBody>
-          <a:bodyPr wrap="none" anchor="t" lIns="0" rIns="0" tIns="0" bIns="0">
+          <a:bodyPr wrap="none" lIns="0" tIns="0" rIns="0" bIns="0" anchor="t">
             <a:spAutoFit/>
           </a:bodyPr>
           <a:lstStyle/>
@@ -4990,7 +4988,7 @@
       </p:sp>
       <p:sp>
         <p:nvSpPr>
-          <p:cNvPr id="46" name="af-observation-label-text-01"/>
+          <p:cNvPr id="44" name="af-observation-label-text-01" descr="{&quot;autofigure_element_id&quot;:&quot;observation-label&quot;}"/>
           <p:cNvSpPr txBox="1"/>
           <p:nvPr/>
         </p:nvSpPr>
@@ -5006,7 +5004,7 @@
           <a:effectLst/>
         </p:spPr>
         <p:txBody>
-          <a:bodyPr wrap="none" anchor="t" lIns="0" rIns="0" tIns="0" bIns="0">
+          <a:bodyPr wrap="none" lIns="0" tIns="0" rIns="0" bIns="0" anchor="t">
             <a:spAutoFit/>
           </a:bodyPr>
           <a:lstStyle/>
@@ -5026,10 +5024,10 @@
       </p:sp>
       <p:cxnSp>
         <p:nvCxnSpPr>
-          <p:cNvPr id="47" name="af-observation-to-mllm-connector-01"/>
+          <p:cNvPr id="45" name="af-observation-to-mllm-connector-01" descr="{&quot;arrow_spec_sha256&quot;:&quot;3cab0196d88eae7a9574892caff0477e76eab7638867f5c01b82892d8e2985fb&quot;,&quot;autofigure_element_id&quot;:&quot;observation-to-mllm&quot;}"/>
           <p:cNvCxnSpPr>
-            <a:stCxn id="44" idx="0"/>
-            <a:endCxn id="38" idx="0"/>
+            <a:stCxn id="42" idx="0"/>
+            <a:endCxn id="36" idx="0"/>
           </p:cNvCxnSpPr>
           <p:nvPr/>
         </p:nvCxnSpPr>
@@ -5045,6 +5043,7 @@
             <a:solidFill>
               <a:srgbClr val="F27622"/>
             </a:solidFill>
+            <a:miter/>
             <a:tailEnd type="triangle" w="sm" len="sm"/>
           </a:ln>
           <a:effectLst/>
@@ -5066,10 +5065,10 @@
       </p:cxnSp>
       <p:cxnSp>
         <p:nvCxnSpPr>
-          <p:cNvPr id="48" name="af-observation-to-wm-connector-01"/>
+          <p:cNvPr id="46" name="af-observation-to-wm-connector-01" descr="{&quot;arrow_spec_sha256&quot;:&quot;1d0f12eeb40e0a9811ab7ed54c4f80700c2b2a1969d6ebdd788ab71ed95eed10&quot;,&quot;autofigure_element_id&quot;:&quot;observation-to-wm&quot;}"/>
           <p:cNvCxnSpPr>
-            <a:stCxn id="44" idx="0"/>
-            <a:endCxn id="41" idx="0"/>
+            <a:stCxn id="42" idx="0"/>
+            <a:endCxn id="39" idx="0"/>
           </p:cNvCxnSpPr>
           <p:nvPr/>
         </p:nvCxnSpPr>
@@ -5085,6 +5084,7 @@
             <a:solidFill>
               <a:srgbClr val="3567B7"/>
             </a:solidFill>
+            <a:miter/>
             <a:tailEnd type="triangle" w="sm" len="sm"/>
           </a:ln>
           <a:effectLst/>
@@ -5106,10 +5106,10 @@
       </p:cxnSp>
       <p:cxnSp>
         <p:nvCxnSpPr>
-          <p:cNvPr id="49" name="af-mllm-to-ev-connector-01"/>
+          <p:cNvPr id="47" name="af-mllm-to-ev-connector-01" descr="{&quot;arrow_spec_sha256&quot;:&quot;c5231c3d364c2a3a757f4df602ea7f81e74ded078934016208a5db594f840fb8&quot;,&quot;autofigure_element_id&quot;:&quot;mllm-to-ev&quot;}"/>
           <p:cNvCxnSpPr>
-            <a:stCxn id="38" idx="0"/>
-            <a:endCxn id="51" idx="0"/>
+            <a:stCxn id="36" idx="0"/>
+            <a:endCxn id="49" idx="0"/>
           </p:cNvCxnSpPr>
           <p:nvPr/>
         </p:nvCxnSpPr>
@@ -5125,6 +5125,7 @@
             <a:solidFill>
               <a:srgbClr val="F27622"/>
             </a:solidFill>
+            <a:miter/>
             <a:tailEnd type="triangle" w="sm" len="sm"/>
           </a:ln>
           <a:effectLst/>
@@ -5146,10 +5147,10 @@
       </p:cxnSp>
       <p:cxnSp>
         <p:nvCxnSpPr>
-          <p:cNvPr id="50" name="af-wm-to-st-connector-01"/>
+          <p:cNvPr id="48" name="af-wm-to-st-connector-01" descr="{&quot;arrow_spec_sha256&quot;:&quot;6ee36a15d74b8141f18e430f2effd81d2e629dffe0badd2fb924d38745dd2e47&quot;,&quot;autofigure_element_id&quot;:&quot;wm-to-st&quot;}"/>
           <p:cNvCxnSpPr>
-            <a:stCxn id="41" idx="0"/>
-            <a:endCxn id="56" idx="0"/>
+            <a:stCxn id="39" idx="0"/>
+            <a:endCxn id="54" idx="0"/>
           </p:cNvCxnSpPr>
           <p:nvPr/>
         </p:nvCxnSpPr>
@@ -5165,6 +5166,7 @@
             <a:solidFill>
               <a:srgbClr val="3567B7"/>
             </a:solidFill>
+            <a:miter/>
             <a:tailEnd type="triangle" w="sm" len="sm"/>
           </a:ln>
           <a:effectLst/>
@@ -5186,7 +5188,7 @@
       </p:cxnSp>
       <p:sp>
         <p:nvSpPr>
-          <p:cNvPr id="51" name="af-ev-box-rect-01"/>
+          <p:cNvPr id="49" name="af-ev-box-rect-01" descr="{&quot;autofigure_element_id&quot;:&quot;ev-box&quot;}"/>
           <p:cNvSpPr/>
           <p:nvPr/>
         </p:nvSpPr>
@@ -5205,6 +5207,7 @@
             <a:solidFill>
               <a:srgbClr val="19365F"/>
             </a:solidFill>
+            <a:miter/>
           </a:ln>
           <a:effectLst/>
         </p:spPr>
@@ -5227,14 +5230,15 @@
           <a:lstStyle/>
           <a:p>
             <a:pPr algn="ctr"/>
-          </a:p>
-        </p:txBody>
-      </p:sp>
-      <mc:AlternateContent xmlns:mc="http://schemas.openxmlformats.org/markup-compatibility/2006">
-        <mc:Choice xmlns:a14="http://schemas.microsoft.com/office/drawing/2010/main" Requires="a14">
+            <a:endParaRPr/>
+          </a:p>
+        </p:txBody>
+      </p:sp>
+      <mc:AlternateContent xmlns:mc="http://schemas.openxmlformats.org/markup-compatibility/2006" xmlns:a14="http://schemas.microsoft.com/office/drawing/2010/main">
+        <mc:Choice Requires="a14">
           <p:sp>
             <p:nvSpPr>
-              <p:cNvPr id="52" name="math:003" descr="AI_AUTOFIGURE_NATIVE_MATH_V1:eyJjb250ZW50X3J1bnMiOlt7ImNhbm9uaWNhbF9sYXRleCI6ImVfe3Z9IiwiZm9ybXVsYV9pZCI6IkVRMDAzIiwia2luZCI6Im1hdGgiLCJsYXRleF9zaGEyNTYiOiIyZWZkODE5ZTcyNTZiNTkwYTRmNTFkMTVkMWIzZjdmYzgwODhhMGE0Mzc3ZWQyZTExMWUwZmQ5NDAyNjc5YzhkIiwibW9kZSI6ImlubGluZSIsIm9tbWxfc2hhMjU2IjoiNjM1YTA1MmI0MjllMzI3Y2I5ZmZlNTI5MTI0YjJjOGRlMDBlYzlkMmRiZDI3ZjE1MWJmZTM4ZmIwZjhjNzc3MiIsInNlbWFudGljX29tbWxfcHJvZmlsZSI6Im9mZmljZS1tYXRoLXNlbWFudGljLXYyIiwic2VtYW50aWNfb21tbF9zaGEyNTYiOiIyZjRlZjJkZTQ0NjBlNTJiN2I5NjdlNWFiZjRmZGI5OTQ5NzIzYWVlNmNkMzc5MTlkNGNlOTY2NmVmZTAyN2E4In1dLCJmb3JtdWxhcyI6W3siY2Fub25pY2FsX2xhdGV4IjoiZV97dn0iLCJmb3JtdWxhX2lkIjoiRVEwMDMiLCJsYXRleF9zaGEyNTYiOiIyZWZkODE5ZTcyNTZiNTkwYTRmNTFkMTVkMWIzZjdmYzgwODhhMGE0Mzc3ZWQyZTExMWUwZmQ5NDAyNjc5YzhkIiwibW9kZSI6ImlubGluZSIsIm9tbWxfc2hhMjU2IjoiNjM1YTA1MmI0MjllMzI3Y2I5ZmZlNTI5MTI0YjJjOGRlMDBlYzlkMmRiZDI3ZjE1MWJmZTM4ZmIwZjhjNzc3MiIsInNlbWFudGljX29tbWxfcHJvZmlsZSI6Im9mZmljZS1tYXRoLXNlbWFudGljLXYyIiwic2VtYW50aWNfb21tbF9zaGEyNTYiOiIyZjRlZjJkZTQ0NjBlNTJiN2I5NjdlNWFiZjRmZGI5OTQ5NzIzYWVlNmNkMzc5MTlkNGNlOTY2NmVmZTAyN2E4In1dLCJraW5kIjoibmF0aXZlX29mZmljZV9tYXRoIiwicGxhY2Vob2xkZXJfbmFtZSI6Im1hdGg6MDAzIiwic2NoZW1hX3ZlcnNpb24iOiIxLjAifQ=="/>
+              <p:cNvPr id="50" name="math:003" descr="AI_AUTOFIGURE_NATIVE_MATH_V1:eyJjb250ZW50X3J1bnMiOlt7ImNhbm9uaWNhbF9sYXRleCI6ImVfe3Z9IiwiZm9ybXVsYV9pZCI6IkVRMDAzIiwia2luZCI6Im1hdGgiLCJsYXRleF9zaGEyNTYiOiIyZWZkODE5ZTcyNTZiNTkwYTRmNTFkMTVkMWIzZjdmYzgwODhhMGE0Mzc3ZWQyZTExMWUwZmQ5NDAyNjc5YzhkIiwibW9kZSI6ImlubGluZSIsIm9tbWxfc2hhMjU2IjoiNjM1YTA1MmI0MjllMzI3Y2I5ZmZlNTI5MTI0YjJjOGRlMDBlYzlkMmRiZDI3ZjE1MWJmZTM4ZmIwZjhjNzc3MiIsInNlbWFudGljX29tbWxfcHJvZmlsZSI6Im9mZmljZS1tYXRoLXNlbWFudGljLXYyIiwic2VtYW50aWNfb21tbF9zaGEyNTYiOiIyZjRlZjJkZTQ0NjBlNTJiN2I5NjdlNWFiZjRmZGI5OTQ5NzIzYWVlNmNkMzc5MTlkNGNlOTY2NmVmZTAyN2E4In1dLCJmb3JtdWxhcyI6W3siY2Fub25pY2FsX2xhdGV4IjoiZV97dn0iLCJmb3JtdWxhX2lkIjoiRVEwMDMiLCJsYXRleF9zaGEyNTYiOiIyZWZkODE5ZTcyNTZiNTkwYTRmNTFkMTVkMWIzZjdmYzgwODhhMGE0Mzc3ZWQyZTExMWUwZmQ5NDAyNjc5YzhkIiwibW9kZSI6ImlubGluZSIsIm9tbWxfc2hhMjU2IjoiNjM1YTA1MmI0MjllMzI3Y2I5ZmZlNTI5MTI0YjJjOGRlMDBlYzlkMmRiZDI3ZjE1MWJmZTM4ZmIwZjhjNzc3MiIsInNlbWFudGljX29tbWxfcHJvZmlsZSI6Im9mZmljZS1tYXRoLXNlbWFudGljLXYyIiwic2VtYW50aWNfb21tbF9zaGEyNTYiOiIyZjRlZjJkZTQ0NjBlNTJiN2I5NjdlNWFiZjRmZGI5OTQ5NzIzYWVlNmNkMzc5MTlkNGNlOTY2NmVmZTAyN2E4In1dLCJraW5kIjoibmF0aXZlX29mZmljZV9tYXRoIiwicGxhY2Vob2xkZXJfbmFtZSI6Im1hdGg6MDAzIiwic2NoZW1hX3ZlcnNpb24iOiIxLjAifQ=="/>
               <p:cNvSpPr txBox="1"/>
               <p:nvPr/>
             </p:nvSpPr>
@@ -5250,41 +5254,53 @@
               <a:effectLst/>
             </p:spPr>
             <p:txBody>
-              <a:bodyPr wrap="none" anchor="t" lIns="0" rIns="0" tIns="0" bIns="0">
+              <a:bodyPr wrap="none" lIns="0" tIns="0" rIns="0" bIns="0" anchor="t">
                 <a:spAutoFit/>
               </a:bodyPr>
               <a:lstStyle/>
               <a:p>
                 <a:pPr algn="ctr"/>
                 <a14:m>
-                  <m:oMath xmlns:m="http://schemas.openxmlformats.org/officeDocument/2006/math">
-                    <m:sSub>
-                      <m:e>
-                        <m:r>
-                          <a:rPr lang="en-US" dirty="0" sz="1350">
-                            <a:solidFill>
-                              <a:srgbClr val="000000"/>
-                            </a:solidFill>
-                            <a:latin typeface="Cambria Math"/>
-                          </a:rPr>
-                          <m:t>e</m:t>
-                        </m:r>
-                      </m:e>
-                      <m:sub>
-                        <m:r>
-                          <a:rPr lang="en-US" dirty="0" sz="1350">
-                            <a:solidFill>
-                              <a:srgbClr val="000000"/>
-                            </a:solidFill>
-                            <a:latin typeface="Cambria Math"/>
-                          </a:rPr>
-                          <m:t>v</m:t>
-                        </m:r>
-                      </m:sub>
-                    </m:sSub>
-                  </m:oMath>
+                  <m:oMathPara xmlns:m="http://schemas.openxmlformats.org/officeDocument/2006/math">
+                    <m:oMath>
+                      <m:sSub>
+                        <m:sSubPr>
+                          <m:ctrlPr>
+                            <a:rPr lang="en-US" sz="1350" dirty="0">
+                              <a:solidFill>
+                                <a:srgbClr val="000000"/>
+                              </a:solidFill>
+                              <a:latin typeface="Cambria Math"/>
+                            </a:rPr>
+                          </m:ctrlPr>
+                        </m:sSubPr>
+                        <m:e>
+                          <m:r>
+                            <a:rPr lang="en-US" sz="1350" dirty="0">
+                              <a:solidFill>
+                                <a:srgbClr val="000000"/>
+                              </a:solidFill>
+                              <a:latin typeface="Cambria Math"/>
+                            </a:rPr>
+                            <m:t>𝑒</m:t>
+                          </m:r>
+                        </m:e>
+                        <m:sub>
+                          <m:r>
+                            <a:rPr lang="en-US" sz="1350" dirty="0">
+                              <a:solidFill>
+                                <a:srgbClr val="000000"/>
+                              </a:solidFill>
+                              <a:latin typeface="Cambria Math"/>
+                            </a:rPr>
+                            <m:t>𝑣</m:t>
+                          </m:r>
+                        </m:sub>
+                      </m:sSub>
+                    </m:oMath>
+                  </m:oMathPara>
                 </a14:m>
-                <a:endParaRPr lang="en-US" dirty="0" sz="1350">
+                <a:endParaRPr lang="en-US" sz="1350" dirty="0">
                   <a:solidFill>
                     <a:srgbClr val="000000"/>
                   </a:solidFill>
@@ -5294,10 +5310,10 @@
             </p:txBody>
           </p:sp>
         </mc:Choice>
-        <mc:Fallback>
+        <mc:Fallback xmlns="">
           <p:sp>
             <p:nvSpPr>
-              <p:cNvPr id="52" name="math:003" descr="AI_AUTOFIGURE_MATH_FALLBACK_ONLY_V1:eyJjb250ZW50X3J1bnMiOlt7ImNhbm9uaWNhbF9sYXRleCI6ImVfe3Z9IiwiZm9ybXVsYV9pZCI6IkVRMDAzIiwia2luZCI6Im1hdGgiLCJsYXRleF9zaGEyNTYiOiIyZWZkODE5ZTcyNTZiNTkwYTRmNTFkMTVkMWIzZjdmYzgwODhhMGE0Mzc3ZWQyZTExMWUwZmQ5NDAyNjc5YzhkIiwibW9kZSI6ImlubGluZSIsIm9tbWxfc2hhMjU2IjoiNjM1YTA1MmI0MjllMzI3Y2I5ZmZlNTI5MTI0YjJjOGRlMDBlYzlkMmRiZDI3ZjE1MWJmZTM4ZmIwZjhjNzc3MiIsInNlbWFudGljX29tbWxfcHJvZmlsZSI6Im9mZmljZS1tYXRoLXNlbWFudGljLXYyIiwic2VtYW50aWNfb21tbF9zaGEyNTYiOiIyZjRlZjJkZTQ0NjBlNTJiN2I5NjdlNWFiZjRmZGI5OTQ5NzIzYWVlNmNkMzc5MTlkNGNlOTY2NmVmZTAyN2E4In1dLCJmb3JtdWxhcyI6W3siY2Fub25pY2FsX2xhdGV4IjoiZV97dn0iLCJmb3JtdWxhX2lkIjoiRVEwMDMiLCJsYXRleF9zaGEyNTYiOiIyZWZkODE5ZTcyNTZiNTkwYTRmNTFkMTVkMWIzZjdmYzgwODhhMGE0Mzc3ZWQyZTExMWUwZmQ5NDAyNjc5YzhkIiwibW9kZSI6ImlubGluZSIsIm9tbWxfc2hhMjU2IjoiNjM1YTA1MmI0MjllMzI3Y2I5ZmZlNTI5MTI0YjJjOGRlMDBlYzlkMmRiZDI3ZjE1MWJmZTM4ZmIwZjhjNzc3MiIsInNlbWFudGljX29tbWxfcHJvZmlsZSI6Im9mZmljZS1tYXRoLXNlbWFudGljLXYyIiwic2VtYW50aWNfb21tbF9zaGEyNTYiOiIyZjRlZjJkZTQ0NjBlNTJiN2I5NjdlNWFiZjRmZGI5OTQ5NzIzYWVlNmNkMzc5MTlkNGNlOTY2NmVmZTAyN2E4In1dLCJraW5kIjoibmF0aXZlX29mZmljZV9tYXRoIiwicGxhY2Vob2xkZXJfbmFtZSI6Im1hdGg6MDAzIiwic2NoZW1hX3ZlcnNpb24iOiIxLjAifQ=="/>
+              <p:cNvPr id="50" name="math:003" descr="AI_AUTOFIGURE_MATH_FALLBACK_ONLY_V1:eyJjb250ZW50X3J1bnMiOlt7ImNhbm9uaWNhbF9sYXRleCI6ImVfe3Z9IiwiZm9ybXVsYV9pZCI6IkVRMDAzIiwia2luZCI6Im1hdGgiLCJsYXRleF9zaGEyNTYiOiIyZWZkODE5ZTcyNTZiNTkwYTRmNTFkMTVkMWIzZjdmYzgwODhhMGE0Mzc3ZWQyZTExMWUwZmQ5NDAyNjc5YzhkIiwibW9kZSI6ImlubGluZSIsIm9tbWxfc2hhMjU2IjoiNjM1YTA1MmI0MjllMzI3Y2I5ZmZlNTI5MTI0YjJjOGRlMDBlYzlkMmRiZDI3ZjE1MWJmZTM4ZmIwZjhjNzc3MiIsInNlbWFudGljX29tbWxfcHJvZmlsZSI6Im9mZmljZS1tYXRoLXNlbWFudGljLXYyIiwic2VtYW50aWNfb21tbF9zaGEyNTYiOiIyZjRlZjJkZTQ0NjBlNTJiN2I5NjdlNWFiZjRmZGI5OTQ5NzIzYWVlNmNkMzc5MTlkNGNlOTY2NmVmZTAyN2E4In1dLCJmb3JtdWxhcyI6W3siY2Fub25pY2FsX2xhdGV4IjoiZV97dn0iLCJmb3JtdWxhX2lkIjoiRVEwMDMiLCJsYXRleF9zaGEyNTYiOiIyZWZkODE5ZTcyNTZiNTkwYTRmNTFkMTVkMWIzZjdmYzgwODhhMGE0Mzc3ZWQyZTExMWUwZmQ5NDAyNjc5YzhkIiwibW9kZSI6ImlubGluZSIsIm9tbWxfc2hhMjU2IjoiNjM1YTA1MmI0MjllMzI3Y2I5ZmZlNTI5MTI0YjJjOGRlMDBlYzlkMmRiZDI3ZjE1MWJmZTM4ZmIwZjhjNzc3MiIsInNlbWFudGljX29tbWxfcHJvZmlsZSI6Im9mZmljZS1tYXRoLXNlbWFudGljLXYyIiwic2VtYW50aWNfb21tbF9zaGEyNTYiOiIyZjRlZjJkZTQ0NjBlNTJiN2I5NjdlNWFiZjRmZGI5OTQ5NzIzYWVlNmNkMzc5MTlkNGNlOTY2NmVmZTAyN2E4In1dLCJraW5kIjoibmF0aXZlX29mZmljZV9tYXRoIiwicGxhY2Vob2xkZXJfbmFtZSI6Im1hdGg6MDAzIiwic2NoZW1hX3ZlcnNpb24iOiIxLjAifQ=="/>
               <p:cNvSpPr txBox="1"/>
               <p:nvPr/>
             </p:nvSpPr>
@@ -5313,7 +5329,7 @@
               <a:effectLst/>
             </p:spPr>
             <p:txBody>
-              <a:bodyPr wrap="none" anchor="t" lIns="0" rIns="0" tIns="0" bIns="0">
+              <a:bodyPr wrap="none" lIns="0" tIns="0" rIns="0" bIns="0" anchor="t">
                 <a:spAutoFit/>
               </a:bodyPr>
               <a:lstStyle/>
@@ -5339,7 +5355,7 @@
       </mc:AlternateContent>
       <p:sp>
         <p:nvSpPr>
-          <p:cNvPr id="53" name="af-ev-node-1-ellipse-01"/>
+          <p:cNvPr id="51" name="af-ev-node-1-ellipse-01" descr="{&quot;autofigure_element_id&quot;:&quot;ev-node-1&quot;}"/>
           <p:cNvSpPr/>
           <p:nvPr/>
         </p:nvSpPr>
@@ -5378,12 +5394,13 @@
           <a:lstStyle/>
           <a:p>
             <a:pPr algn="ctr"/>
-          </a:p>
-        </p:txBody>
-      </p:sp>
-      <p:sp>
-        <p:nvSpPr>
-          <p:cNvPr id="54" name="af-ev-node-2-ellipse-01"/>
+            <a:endParaRPr/>
+          </a:p>
+        </p:txBody>
+      </p:sp>
+      <p:sp>
+        <p:nvSpPr>
+          <p:cNvPr id="52" name="af-ev-node-2-ellipse-01" descr="{&quot;autofigure_element_id&quot;:&quot;ev-node-2&quot;}"/>
           <p:cNvSpPr/>
           <p:nvPr/>
         </p:nvSpPr>
@@ -5422,12 +5439,13 @@
           <a:lstStyle/>
           <a:p>
             <a:pPr algn="ctr"/>
-          </a:p>
-        </p:txBody>
-      </p:sp>
-      <p:sp>
-        <p:nvSpPr>
-          <p:cNvPr id="55" name="af-ev-node-3-ellipse-01"/>
+            <a:endParaRPr/>
+          </a:p>
+        </p:txBody>
+      </p:sp>
+      <p:sp>
+        <p:nvSpPr>
+          <p:cNvPr id="53" name="af-ev-node-3-ellipse-01" descr="{&quot;autofigure_element_id&quot;:&quot;ev-node-3&quot;}"/>
           <p:cNvSpPr/>
           <p:nvPr/>
         </p:nvSpPr>
@@ -5466,12 +5484,13 @@
           <a:lstStyle/>
           <a:p>
             <a:pPr algn="ctr"/>
-          </a:p>
-        </p:txBody>
-      </p:sp>
-      <p:sp>
-        <p:nvSpPr>
-          <p:cNvPr id="56" name="af-st-box-rect-01"/>
+            <a:endParaRPr/>
+          </a:p>
+        </p:txBody>
+      </p:sp>
+      <p:sp>
+        <p:nvSpPr>
+          <p:cNvPr id="54" name="af-st-box-rect-01" descr="{&quot;autofigure_element_id&quot;:&quot;st-box&quot;}"/>
           <p:cNvSpPr/>
           <p:nvPr/>
         </p:nvSpPr>
@@ -5490,6 +5509,7 @@
             <a:solidFill>
               <a:srgbClr val="19365F"/>
             </a:solidFill>
+            <a:miter/>
           </a:ln>
           <a:effectLst/>
         </p:spPr>
@@ -5512,14 +5532,15 @@
           <a:lstStyle/>
           <a:p>
             <a:pPr algn="ctr"/>
-          </a:p>
-        </p:txBody>
-      </p:sp>
-      <mc:AlternateContent xmlns:mc="http://schemas.openxmlformats.org/markup-compatibility/2006">
-        <mc:Choice xmlns:a14="http://schemas.microsoft.com/office/drawing/2010/main" Requires="a14">
+            <a:endParaRPr/>
+          </a:p>
+        </p:txBody>
+      </p:sp>
+      <mc:AlternateContent xmlns:mc="http://schemas.openxmlformats.org/markup-compatibility/2006" xmlns:a14="http://schemas.microsoft.com/office/drawing/2010/main">
+        <mc:Choice Requires="a14">
           <p:sp>
             <p:nvSpPr>
-              <p:cNvPr id="57" name="math:004" descr="AI_AUTOFIGURE_NATIVE_MATH_V1:eyJjb250ZW50X3J1bnMiOlt7ImNhbm9uaWNhbF9sYXRleCI6InNfe3R9IiwiZm9ybXVsYV9pZCI6IkVRMDA0Iiwia2luZCI6Im1hdGgiLCJsYXRleF9zaGEyNTYiOiIwMDE3ZmQ1YjUxNmM2YTU5ZjUxZTM3MWJlZTBmMjQ5ODI4ZWIzZDhlOTNhYTc0NzM3Y2M4ZWYxNTY5YzM1ZTIyIiwibW9kZSI6ImlubGluZSIsIm9tbWxfc2hhMjU2IjoiMWJhZjE4MDU3OTA4OTQ0ZmQxZmFiYzgwMzBhN2RiMWFmMjY1MmUxOGQ1Y2U3YjlhMGJiMWU2MWMzYTU3ZTg3NyIsInNlbWFudGljX29tbWxfcHJvZmlsZSI6Im9mZmljZS1tYXRoLXNlbWFudGljLXYyIiwic2VtYW50aWNfb21tbF9zaGEyNTYiOiI2OWRhZTcyNmY2OTRlNTQ3MDhmYjQ2Y2IxZjRjYTM5NzhhODhjOWIxZmJmMDc2ZjE2MWIxODVlZThhNDdiYzBkIn1dLCJmb3JtdWxhcyI6W3siY2Fub25pY2FsX2xhdGV4Ijoic197dH0iLCJmb3JtdWxhX2lkIjoiRVEwMDQiLCJsYXRleF9zaGEyNTYiOiIwMDE3ZmQ1YjUxNmM2YTU5ZjUxZTM3MWJlZTBmMjQ5ODI4ZWIzZDhlOTNhYTc0NzM3Y2M4ZWYxNTY5YzM1ZTIyIiwibW9kZSI6ImlubGluZSIsIm9tbWxfc2hhMjU2IjoiMWJhZjE4MDU3OTA4OTQ0ZmQxZmFiYzgwMzBhN2RiMWFmMjY1MmUxOGQ1Y2U3YjlhMGJiMWU2MWMzYTU3ZTg3NyIsInNlbWFudGljX29tbWxfcHJvZmlsZSI6Im9mZmljZS1tYXRoLXNlbWFudGljLXYyIiwic2VtYW50aWNfb21tbF9zaGEyNTYiOiI2OWRhZTcyNmY2OTRlNTQ3MDhmYjQ2Y2IxZjRjYTM5NzhhODhjOWIxZmJmMDc2ZjE2MWIxODVlZThhNDdiYzBkIn1dLCJraW5kIjoibmF0aXZlX29mZmljZV9tYXRoIiwicGxhY2Vob2xkZXJfbmFtZSI6Im1hdGg6MDA0Iiwic2NoZW1hX3ZlcnNpb24iOiIxLjAifQ=="/>
+              <p:cNvPr id="55" name="math:004" descr="AI_AUTOFIGURE_NATIVE_MATH_V1:eyJjb250ZW50X3J1bnMiOlt7ImNhbm9uaWNhbF9sYXRleCI6InNfe3R9IiwiZm9ybXVsYV9pZCI6IkVRMDA0Iiwia2luZCI6Im1hdGgiLCJsYXRleF9zaGEyNTYiOiIwMDE3ZmQ1YjUxNmM2YTU5ZjUxZTM3MWJlZTBmMjQ5ODI4ZWIzZDhlOTNhYTc0NzM3Y2M4ZWYxNTY5YzM1ZTIyIiwibW9kZSI6ImlubGluZSIsIm9tbWxfc2hhMjU2IjoiMWJhZjE4MDU3OTA4OTQ0ZmQxZmFiYzgwMzBhN2RiMWFmMjY1MmUxOGQ1Y2U3YjlhMGJiMWU2MWMzYTU3ZTg3NyIsInNlbWFudGljX29tbWxfcHJvZmlsZSI6Im9mZmljZS1tYXRoLXNlbWFudGljLXYyIiwic2VtYW50aWNfb21tbF9zaGEyNTYiOiI2OWRhZTcyNmY2OTRlNTQ3MDhmYjQ2Y2IxZjRjYTM5NzhhODhjOWIxZmJmMDc2ZjE2MWIxODVlZThhNDdiYzBkIn1dLCJmb3JtdWxhcyI6W3siY2Fub25pY2FsX2xhdGV4Ijoic197dH0iLCJmb3JtdWxhX2lkIjoiRVEwMDQiLCJsYXRleF9zaGEyNTYiOiIwMDE3ZmQ1YjUxNmM2YTU5ZjUxZTM3MWJlZTBmMjQ5ODI4ZWIzZDhlOTNhYTc0NzM3Y2M4ZWYxNTY5YzM1ZTIyIiwibW9kZSI6ImlubGluZSIsIm9tbWxfc2hhMjU2IjoiMWJhZjE4MDU3OTA4OTQ0ZmQxZmFiYzgwMzBhN2RiMWFmMjY1MmUxOGQ1Y2U3YjlhMGJiMWU2MWMzYTU3ZTg3NyIsInNlbWFudGljX29tbWxfcHJvZmlsZSI6Im9mZmljZS1tYXRoLXNlbWFudGljLXYyIiwic2VtYW50aWNfb21tbF9zaGEyNTYiOiI2OWRhZTcyNmY2OTRlNTQ3MDhmYjQ2Y2IxZjRjYTM5NzhhODhjOWIxZmJmMDc2ZjE2MWIxODVlZThhNDdiYzBkIn1dLCJraW5kIjoibmF0aXZlX29mZmljZV9tYXRoIiwicGxhY2Vob2xkZXJfbmFtZSI6Im1hdGg6MDA0Iiwic2NoZW1hX3ZlcnNpb24iOiIxLjAifQ=="/>
               <p:cNvSpPr txBox="1"/>
               <p:nvPr/>
             </p:nvSpPr>
@@ -5535,41 +5556,53 @@
               <a:effectLst/>
             </p:spPr>
             <p:txBody>
-              <a:bodyPr wrap="none" anchor="t" lIns="0" rIns="0" tIns="0" bIns="0">
+              <a:bodyPr wrap="none" lIns="0" tIns="0" rIns="0" bIns="0" anchor="t">
                 <a:spAutoFit/>
               </a:bodyPr>
               <a:lstStyle/>
               <a:p>
                 <a:pPr algn="ctr"/>
                 <a14:m>
-                  <m:oMath xmlns:m="http://schemas.openxmlformats.org/officeDocument/2006/math">
-                    <m:sSub>
-                      <m:e>
-                        <m:r>
-                          <a:rPr lang="en-US" dirty="0" sz="1350">
-                            <a:solidFill>
-                              <a:srgbClr val="000000"/>
-                            </a:solidFill>
-                            <a:latin typeface="Cambria Math"/>
-                          </a:rPr>
-                          <m:t>s</m:t>
-                        </m:r>
-                      </m:e>
-                      <m:sub>
-                        <m:r>
-                          <a:rPr lang="en-US" dirty="0" sz="1350">
-                            <a:solidFill>
-                              <a:srgbClr val="000000"/>
-                            </a:solidFill>
-                            <a:latin typeface="Cambria Math"/>
-                          </a:rPr>
-                          <m:t>t</m:t>
-                        </m:r>
-                      </m:sub>
-                    </m:sSub>
-                  </m:oMath>
+                  <m:oMathPara xmlns:m="http://schemas.openxmlformats.org/officeDocument/2006/math">
+                    <m:oMath>
+                      <m:sSub>
+                        <m:sSubPr>
+                          <m:ctrlPr>
+                            <a:rPr lang="en-US" sz="1350" dirty="0">
+                              <a:solidFill>
+                                <a:srgbClr val="000000"/>
+                              </a:solidFill>
+                              <a:latin typeface="Cambria Math"/>
+                            </a:rPr>
+                          </m:ctrlPr>
+                        </m:sSubPr>
+                        <m:e>
+                          <m:r>
+                            <a:rPr lang="en-US" sz="1350" dirty="0">
+                              <a:solidFill>
+                                <a:srgbClr val="000000"/>
+                              </a:solidFill>
+                              <a:latin typeface="Cambria Math"/>
+                            </a:rPr>
+                            <m:t>𝑠</m:t>
+                          </m:r>
+                        </m:e>
+                        <m:sub>
+                          <m:r>
+                            <a:rPr lang="en-US" sz="1350" dirty="0">
+                              <a:solidFill>
+                                <a:srgbClr val="000000"/>
+                              </a:solidFill>
+                              <a:latin typeface="Cambria Math"/>
+                            </a:rPr>
+                            <m:t>𝑡</m:t>
+                          </m:r>
+                        </m:sub>
+                      </m:sSub>
+                    </m:oMath>
+                  </m:oMathPara>
                 </a14:m>
-                <a:endParaRPr lang="en-US" dirty="0" sz="1350">
+                <a:endParaRPr lang="en-US" sz="1350" dirty="0">
                   <a:solidFill>
                     <a:srgbClr val="000000"/>
                   </a:solidFill>
@@ -5579,10 +5612,10 @@
             </p:txBody>
           </p:sp>
         </mc:Choice>
-        <mc:Fallback>
+        <mc:Fallback xmlns="">
           <p:sp>
             <p:nvSpPr>
-              <p:cNvPr id="57" name="math:004" descr="AI_AUTOFIGURE_MATH_FALLBACK_ONLY_V1:eyJjb250ZW50X3J1bnMiOlt7ImNhbm9uaWNhbF9sYXRleCI6InNfe3R9IiwiZm9ybXVsYV9pZCI6IkVRMDA0Iiwia2luZCI6Im1hdGgiLCJsYXRleF9zaGEyNTYiOiIwMDE3ZmQ1YjUxNmM2YTU5ZjUxZTM3MWJlZTBmMjQ5ODI4ZWIzZDhlOTNhYTc0NzM3Y2M4ZWYxNTY5YzM1ZTIyIiwibW9kZSI6ImlubGluZSIsIm9tbWxfc2hhMjU2IjoiMWJhZjE4MDU3OTA4OTQ0ZmQxZmFiYzgwMzBhN2RiMWFmMjY1MmUxOGQ1Y2U3YjlhMGJiMWU2MWMzYTU3ZTg3NyIsInNlbWFudGljX29tbWxfcHJvZmlsZSI6Im9mZmljZS1tYXRoLXNlbWFudGljLXYyIiwic2VtYW50aWNfb21tbF9zaGEyNTYiOiI2OWRhZTcyNmY2OTRlNTQ3MDhmYjQ2Y2IxZjRjYTM5NzhhODhjOWIxZmJmMDc2ZjE2MWIxODVlZThhNDdiYzBkIn1dLCJmb3JtdWxhcyI6W3siY2Fub25pY2FsX2xhdGV4Ijoic197dH0iLCJmb3JtdWxhX2lkIjoiRVEwMDQiLCJsYXRleF9zaGEyNTYiOiIwMDE3ZmQ1YjUxNmM2YTU5ZjUxZTM3MWJlZTBmMjQ5ODI4ZWIzZDhlOTNhYTc0NzM3Y2M4ZWYxNTY5YzM1ZTIyIiwibW9kZSI6ImlubGluZSIsIm9tbWxfc2hhMjU2IjoiMWJhZjE4MDU3OTA4OTQ0ZmQxZmFiYzgwMzBhN2RiMWFmMjY1MmUxOGQ1Y2U3YjlhMGJiMWU2MWMzYTU3ZTg3NyIsInNlbWFudGljX29tbWxfcHJvZmlsZSI6Im9mZmljZS1tYXRoLXNlbWFudGljLXYyIiwic2VtYW50aWNfb21tbF9zaGEyNTYiOiI2OWRhZTcyNmY2OTRlNTQ3MDhmYjQ2Y2IxZjRjYTM5NzhhODhjOWIxZmJmMDc2ZjE2MWIxODVlZThhNDdiYzBkIn1dLCJraW5kIjoibmF0aXZlX29mZmljZV9tYXRoIiwicGxhY2Vob2xkZXJfbmFtZSI6Im1hdGg6MDA0Iiwic2NoZW1hX3ZlcnNpb24iOiIxLjAifQ=="/>
+              <p:cNvPr id="55" name="math:004" descr="AI_AUTOFIGURE_MATH_FALLBACK_ONLY_V1:eyJjb250ZW50X3J1bnMiOlt7ImNhbm9uaWNhbF9sYXRleCI6InNfe3R9IiwiZm9ybXVsYV9pZCI6IkVRMDA0Iiwia2luZCI6Im1hdGgiLCJsYXRleF9zaGEyNTYiOiIwMDE3ZmQ1YjUxNmM2YTU5ZjUxZTM3MWJlZTBmMjQ5ODI4ZWIzZDhlOTNhYTc0NzM3Y2M4ZWYxNTY5YzM1ZTIyIiwibW9kZSI6ImlubGluZSIsIm9tbWxfc2hhMjU2IjoiMWJhZjE4MDU3OTA4OTQ0ZmQxZmFiYzgwMzBhN2RiMWFmMjY1MmUxOGQ1Y2U3YjlhMGJiMWU2MWMzYTU3ZTg3NyIsInNlbWFudGljX29tbWxfcHJvZmlsZSI6Im9mZmljZS1tYXRoLXNlbWFudGljLXYyIiwic2VtYW50aWNfb21tbF9zaGEyNTYiOiI2OWRhZTcyNmY2OTRlNTQ3MDhmYjQ2Y2IxZjRjYTM5NzhhODhjOWIxZmJmMDc2ZjE2MWIxODVlZThhNDdiYzBkIn1dLCJmb3JtdWxhcyI6W3siY2Fub25pY2FsX2xhdGV4Ijoic197dH0iLCJmb3JtdWxhX2lkIjoiRVEwMDQiLCJsYXRleF9zaGEyNTYiOiIwMDE3ZmQ1YjUxNmM2YTU5ZjUxZTM3MWJlZTBmMjQ5ODI4ZWIzZDhlOTNhYTc0NzM3Y2M4ZWYxNTY5YzM1ZTIyIiwibW9kZSI6ImlubGluZSIsIm9tbWxfc2hhMjU2IjoiMWJhZjE4MDU3OTA4OTQ0ZmQxZmFiYzgwMzBhN2RiMWFmMjY1MmUxOGQ1Y2U3YjlhMGJiMWU2MWMzYTU3ZTg3NyIsInNlbWFudGljX29tbWxfcHJvZmlsZSI6Im9mZmljZS1tYXRoLXNlbWFudGljLXYyIiwic2VtYW50aWNfb21tbF9zaGEyNTYiOiI2OWRhZTcyNmY2OTRlNTQ3MDhmYjQ2Y2IxZjRjYTM5NzhhODhjOWIxZmJmMDc2ZjE2MWIxODVlZThhNDdiYzBkIn1dLCJraW5kIjoibmF0aXZlX29mZmljZV9tYXRoIiwicGxhY2Vob2xkZXJfbmFtZSI6Im1hdGg6MDA0Iiwic2NoZW1hX3ZlcnNpb24iOiIxLjAifQ=="/>
               <p:cNvSpPr txBox="1"/>
               <p:nvPr/>
             </p:nvSpPr>
@@ -5598,7 +5631,7 @@
               <a:effectLst/>
             </p:spPr>
             <p:txBody>
-              <a:bodyPr wrap="none" anchor="t" lIns="0" rIns="0" tIns="0" bIns="0">
+              <a:bodyPr wrap="none" lIns="0" tIns="0" rIns="0" bIns="0" anchor="t">
                 <a:spAutoFit/>
               </a:bodyPr>
               <a:lstStyle/>
@@ -5624,7 +5657,7 @@
       </mc:AlternateContent>
       <p:sp>
         <p:nvSpPr>
-          <p:cNvPr id="58" name="af-st-node-1-ellipse-01"/>
+          <p:cNvPr id="56" name="af-st-node-1-ellipse-01" descr="{&quot;autofigure_element_id&quot;:&quot;st-node-1&quot;}"/>
           <p:cNvSpPr/>
           <p:nvPr/>
         </p:nvSpPr>
@@ -5663,12 +5696,13 @@
           <a:lstStyle/>
           <a:p>
             <a:pPr algn="ctr"/>
-          </a:p>
-        </p:txBody>
-      </p:sp>
-      <p:sp>
-        <p:nvSpPr>
-          <p:cNvPr id="59" name="af-st-node-2-ellipse-01"/>
+            <a:endParaRPr/>
+          </a:p>
+        </p:txBody>
+      </p:sp>
+      <p:sp>
+        <p:nvSpPr>
+          <p:cNvPr id="57" name="af-st-node-2-ellipse-01" descr="{&quot;autofigure_element_id&quot;:&quot;st-node-2&quot;}"/>
           <p:cNvSpPr/>
           <p:nvPr/>
         </p:nvSpPr>
@@ -5707,12 +5741,13 @@
           <a:lstStyle/>
           <a:p>
             <a:pPr algn="ctr"/>
-          </a:p>
-        </p:txBody>
-      </p:sp>
-      <p:sp>
-        <p:nvSpPr>
-          <p:cNvPr id="60" name="af-st-node-3-ellipse-01"/>
+            <a:endParaRPr/>
+          </a:p>
+        </p:txBody>
+      </p:sp>
+      <p:sp>
+        <p:nvSpPr>
+          <p:cNvPr id="58" name="af-st-node-3-ellipse-01" descr="{&quot;autofigure_element_id&quot;:&quot;st-node-3&quot;}"/>
           <p:cNvSpPr/>
           <p:nvPr/>
         </p:nvSpPr>
@@ -5751,15 +5786,16 @@
           <a:lstStyle/>
           <a:p>
             <a:pPr algn="ctr"/>
+            <a:endParaRPr/>
           </a:p>
         </p:txBody>
       </p:sp>
       <p:cxnSp>
         <p:nvCxnSpPr>
-          <p:cNvPr id="61" name="af-ev-to-joint-connector-01"/>
+          <p:cNvPr id="59" name="af-ev-to-joint-connector-01" descr="{&quot;arrow_spec_sha256&quot;:&quot;2743c5155df451b92bded2a93e94e1343ea81788ad369fd3f1fd6364872ea2d3&quot;,&quot;autofigure_element_id&quot;:&quot;ev-to-joint&quot;}"/>
           <p:cNvCxnSpPr>
-            <a:stCxn id="51" idx="0"/>
-            <a:endCxn id="63" idx="0"/>
+            <a:stCxn id="49" idx="0"/>
+            <a:endCxn id="61" idx="0"/>
           </p:cNvCxnSpPr>
           <p:nvPr/>
         </p:nvCxnSpPr>
@@ -5775,6 +5811,7 @@
             <a:solidFill>
               <a:srgbClr val="F27622"/>
             </a:solidFill>
+            <a:miter/>
             <a:tailEnd type="triangle" w="sm" len="sm"/>
           </a:ln>
           <a:effectLst/>
@@ -5796,10 +5833,10 @@
       </p:cxnSp>
       <p:cxnSp>
         <p:nvCxnSpPr>
-          <p:cNvPr id="62" name="af-st-to-joint-connector-01"/>
+          <p:cNvPr id="60" name="af-st-to-joint-connector-01" descr="{&quot;arrow_spec_sha256&quot;:&quot;4f9a34eeaa8a625ad80fbbaae38c5b411ea19815ad1981009e623f09ee549901&quot;,&quot;autofigure_element_id&quot;:&quot;st-to-joint&quot;}"/>
           <p:cNvCxnSpPr>
-            <a:stCxn id="56" idx="0"/>
-            <a:endCxn id="63" idx="0"/>
+            <a:stCxn id="54" idx="0"/>
+            <a:endCxn id="61" idx="0"/>
           </p:cNvCxnSpPr>
           <p:nvPr/>
         </p:nvCxnSpPr>
@@ -5815,6 +5852,7 @@
             <a:solidFill>
               <a:srgbClr val="3567B7"/>
             </a:solidFill>
+            <a:miter/>
             <a:tailEnd type="triangle" w="sm" len="sm"/>
           </a:ln>
           <a:effectLst/>
@@ -5836,7 +5874,7 @@
       </p:cxnSp>
       <p:sp>
         <p:nvSpPr>
-          <p:cNvPr id="63" name="af-joint-core-rect-01"/>
+          <p:cNvPr id="61" name="af-joint-core-rect-01" descr="{&quot;autofigure_element_id&quot;:&quot;joint-core&quot;}"/>
           <p:cNvSpPr/>
           <p:nvPr/>
         </p:nvSpPr>
@@ -5857,6 +5895,7 @@
             <a:solidFill>
               <a:srgbClr val="19365F"/>
             </a:solidFill>
+            <a:miter/>
           </a:ln>
           <a:effectLst/>
         </p:spPr>
@@ -5879,12 +5918,13 @@
           <a:lstStyle/>
           <a:p>
             <a:pPr algn="ctr"/>
-          </a:p>
-        </p:txBody>
-      </p:sp>
-      <p:sp>
-        <p:nvSpPr>
-          <p:cNvPr id="64" name="af-task-1-box-rect-01"/>
+            <a:endParaRPr/>
+          </a:p>
+        </p:txBody>
+      </p:sp>
+      <p:sp>
+        <p:nvSpPr>
+          <p:cNvPr id="62" name="af-task-1-box-rect-01" descr="{&quot;autofigure_element_id&quot;:&quot;task-1-box&quot;}"/>
           <p:cNvSpPr/>
           <p:nvPr/>
         </p:nvSpPr>
@@ -5923,12 +5963,13 @@
           <a:lstStyle/>
           <a:p>
             <a:pPr algn="ctr"/>
-          </a:p>
-        </p:txBody>
-      </p:sp>
-      <p:sp>
-        <p:nvSpPr>
-          <p:cNvPr id="65" name="af-task-1-label-text-01"/>
+            <a:endParaRPr/>
+          </a:p>
+        </p:txBody>
+      </p:sp>
+      <p:sp>
+        <p:nvSpPr>
+          <p:cNvPr id="63" name="af-task-1-label-text-01" descr="{&quot;autofigure_element_id&quot;:&quot;task-1-label&quot;}"/>
           <p:cNvSpPr txBox="1"/>
           <p:nvPr/>
         </p:nvSpPr>
@@ -5944,7 +5985,7 @@
           <a:effectLst/>
         </p:spPr>
         <p:txBody>
-          <a:bodyPr wrap="none" anchor="t" lIns="0" rIns="0" tIns="0" bIns="0">
+          <a:bodyPr wrap="none" lIns="0" tIns="0" rIns="0" bIns="0" anchor="t">
             <a:spAutoFit/>
           </a:bodyPr>
           <a:lstStyle/>
@@ -5964,7 +6005,7 @@
       </p:sp>
       <p:sp>
         <p:nvSpPr>
-          <p:cNvPr id="66" name="af-task-2-box-rect-01"/>
+          <p:cNvPr id="64" name="af-task-2-box-rect-01" descr="{&quot;autofigure_element_id&quot;:&quot;task-2-box&quot;}"/>
           <p:cNvSpPr/>
           <p:nvPr/>
         </p:nvSpPr>
@@ -6003,12 +6044,13 @@
           <a:lstStyle/>
           <a:p>
             <a:pPr algn="ctr"/>
-          </a:p>
-        </p:txBody>
-      </p:sp>
-      <p:sp>
-        <p:nvSpPr>
-          <p:cNvPr id="67" name="af-task-2-label-text-01"/>
+            <a:endParaRPr/>
+          </a:p>
+        </p:txBody>
+      </p:sp>
+      <p:sp>
+        <p:nvSpPr>
+          <p:cNvPr id="65" name="af-task-2-label-text-01" descr="{&quot;autofigure_element_id&quot;:&quot;task-2-label&quot;}"/>
           <p:cNvSpPr txBox="1"/>
           <p:nvPr/>
         </p:nvSpPr>
@@ -6024,7 +6066,7 @@
           <a:effectLst/>
         </p:spPr>
         <p:txBody>
-          <a:bodyPr wrap="none" anchor="t" lIns="0" rIns="0" tIns="0" bIns="0">
+          <a:bodyPr wrap="none" lIns="0" tIns="0" rIns="0" bIns="0" anchor="t">
             <a:spAutoFit/>
           </a:bodyPr>
           <a:lstStyle/>
@@ -6044,14 +6086,14 @@
       </p:sp>
       <p:sp>
         <p:nvSpPr>
-          <p:cNvPr id="68" name="af-expert-1-box-rect-01"/>
+          <p:cNvPr id="66" name="af-expert-1-box-rect-01" descr="{&quot;autofigure_element_id&quot;:&quot;expert-1-box&quot;}"/>
           <p:cNvSpPr/>
           <p:nvPr/>
         </p:nvSpPr>
         <p:spPr>
           <a:xfrm>
             <a:off x="5257800" y="2181225"/>
-            <a:ext cx="485775" cy="2247900"/>
+            <a:ext cx="495300" cy="2257425"/>
           </a:xfrm>
           <a:prstGeom prst="rect">
             <a:avLst/>
@@ -6063,6 +6105,7 @@
             <a:solidFill>
               <a:srgbClr val="8C8C8C"/>
             </a:solidFill>
+            <a:miter/>
           </a:ln>
           <a:effectLst/>
         </p:spPr>
@@ -6085,12 +6128,13 @@
           <a:lstStyle/>
           <a:p>
             <a:pPr algn="ctr"/>
-          </a:p>
-        </p:txBody>
-      </p:sp>
-      <p:sp>
-        <p:nvSpPr>
-          <p:cNvPr id="69" name="af-expert-1-sem-rect-01"/>
+            <a:endParaRPr/>
+          </a:p>
+        </p:txBody>
+      </p:sp>
+      <p:sp>
+        <p:nvSpPr>
+          <p:cNvPr id="67" name="af-expert-1-sem-rect-01" descr="{&quot;autofigure_element_id&quot;:&quot;expert-1-sem&quot;}"/>
           <p:cNvSpPr/>
           <p:nvPr/>
         </p:nvSpPr>
@@ -6131,19 +6175,20 @@
           <a:lstStyle/>
           <a:p>
             <a:pPr algn="ctr"/>
-          </a:p>
-        </p:txBody>
-      </p:sp>
-      <p:sp>
-        <p:nvSpPr>
-          <p:cNvPr id="70" name="af-expert-1-dyn-rect-01"/>
+            <a:endParaRPr/>
+          </a:p>
+        </p:txBody>
+      </p:sp>
+      <p:sp>
+        <p:nvSpPr>
+          <p:cNvPr id="68" name="af-expert-1-dyn-rect-01" descr="{&quot;autofigure_element_id&quot;:&quot;expert-1-dyn&quot;}"/>
           <p:cNvSpPr/>
           <p:nvPr/>
         </p:nvSpPr>
         <p:spPr>
           <a:xfrm>
             <a:off x="5324475" y="3390900"/>
-            <a:ext cx="352425" cy="952500"/>
+            <a:ext cx="352425" cy="942975"/>
           </a:xfrm>
           <a:prstGeom prst="roundRect">
             <a:avLst>
@@ -6177,19 +6222,20 @@
           <a:lstStyle/>
           <a:p>
             <a:pPr algn="ctr"/>
-          </a:p>
-        </p:txBody>
-      </p:sp>
-      <p:sp>
-        <p:nvSpPr>
-          <p:cNvPr id="71" name="af-expert-1-sem-label-text-01"/>
+            <a:endParaRPr/>
+          </a:p>
+        </p:txBody>
+      </p:sp>
+      <p:sp>
+        <p:nvSpPr>
+          <p:cNvPr id="69" name="af-expert-1-sem-label-text-01" descr="{&quot;autofigure_element_id&quot;:&quot;expert-1-sem-label&quot;}"/>
           <p:cNvSpPr txBox="1"/>
           <p:nvPr/>
         </p:nvSpPr>
         <p:spPr>
-          <a:xfrm>
-            <a:off x="5362575" y="2520791"/>
-            <a:ext cx="285750" cy="345281"/>
+          <a:xfrm rot="5400000">
+            <a:off x="5110162" y="2595562"/>
+            <a:ext cx="781050" cy="390525"/>
           </a:xfrm>
           <a:prstGeom prst="rect">
             <a:avLst/>
@@ -6198,106 +6244,70 @@
           <a:effectLst/>
         </p:spPr>
         <p:txBody>
-          <a:bodyPr wrap="none" anchor="t" lIns="0" rIns="0" tIns="0" bIns="0">
+          <a:bodyPr wrap="none" lIns="0" tIns="0" rIns="0" bIns="0" anchor="ctr">
             <a:spAutoFit/>
           </a:bodyPr>
           <a:lstStyle/>
           <a:p>
             <a:pPr algn="ctr"/>
             <a:r>
-              <a:rPr sz="975">
+              <a:rPr sz="1350">
                 <a:solidFill>
                   <a:srgbClr val="000000"/>
                 </a:solidFill>
                 <a:latin typeface="Arial"/>
               </a:rPr>
-              <a:t>S</a:t>
+              <a:t>Sem</a:t>
             </a:r>
+          </a:p>
+        </p:txBody>
+      </p:sp>
+      <p:sp>
+        <p:nvSpPr>
+          <p:cNvPr id="70" name="af-expert-1-dyn-label-text-01" descr="{&quot;autofigure_element_id&quot;:&quot;expert-1-dyn-label&quot;}"/>
+          <p:cNvSpPr txBox="1"/>
+          <p:nvPr/>
+        </p:nvSpPr>
+        <p:spPr>
+          <a:xfrm rot="5400000">
+            <a:off x="5110162" y="3667125"/>
+            <a:ext cx="781050" cy="390525"/>
+          </a:xfrm>
+          <a:prstGeom prst="rect">
+            <a:avLst/>
+          </a:prstGeom>
+          <a:noFill/>
+          <a:effectLst/>
+        </p:spPr>
+        <p:txBody>
+          <a:bodyPr wrap="none" lIns="0" tIns="0" rIns="0" bIns="0" anchor="ctr">
+            <a:spAutoFit/>
+          </a:bodyPr>
+          <a:lstStyle/>
+          <a:p>
+            <a:pPr algn="ctr"/>
             <a:r>
-              <a:rPr sz="975">
+              <a:rPr sz="1350">
                 <a:solidFill>
                   <a:srgbClr val="000000"/>
                 </a:solidFill>
                 <a:latin typeface="Arial"/>
               </a:rPr>
-              <a:t>e</a:t>
+              <a:t>Dyn</a:t>
             </a:r>
-            <a:r>
-              <a:rPr sz="975">
-                <a:solidFill>
-                  <a:srgbClr val="000000"/>
-                </a:solidFill>
-                <a:latin typeface="Arial"/>
-              </a:rPr>
-              <a:t>m</a:t>
-            </a:r>
-          </a:p>
-        </p:txBody>
-      </p:sp>
-      <p:sp>
-        <p:nvSpPr>
-          <p:cNvPr id="72" name="af-expert-1-dyn-label-text-01"/>
-          <p:cNvSpPr txBox="1"/>
-          <p:nvPr/>
-        </p:nvSpPr>
-        <p:spPr>
-          <a:xfrm>
-            <a:off x="5362575" y="3597116"/>
-            <a:ext cx="285750" cy="345281"/>
-          </a:xfrm>
-          <a:prstGeom prst="rect">
-            <a:avLst/>
-          </a:prstGeom>
-          <a:noFill/>
-          <a:effectLst/>
-        </p:spPr>
-        <p:txBody>
-          <a:bodyPr wrap="none" anchor="t" lIns="0" rIns="0" tIns="0" bIns="0">
-            <a:spAutoFit/>
-          </a:bodyPr>
-          <a:lstStyle/>
-          <a:p>
-            <a:pPr algn="ctr"/>
-            <a:r>
-              <a:rPr sz="975">
-                <a:solidFill>
-                  <a:srgbClr val="000000"/>
-                </a:solidFill>
-                <a:latin typeface="Arial"/>
-              </a:rPr>
-              <a:t>D</a:t>
-            </a:r>
-            <a:r>
-              <a:rPr sz="975">
-                <a:solidFill>
-                  <a:srgbClr val="000000"/>
-                </a:solidFill>
-                <a:latin typeface="Arial"/>
-              </a:rPr>
-              <a:t>y</a:t>
-            </a:r>
-            <a:r>
-              <a:rPr sz="975">
-                <a:solidFill>
-                  <a:srgbClr val="000000"/>
-                </a:solidFill>
-                <a:latin typeface="Arial"/>
-              </a:rPr>
-              <a:t>n</a:t>
-            </a:r>
-          </a:p>
-        </p:txBody>
-      </p:sp>
-      <p:sp>
-        <p:nvSpPr>
-          <p:cNvPr id="73" name="af-expert-2-box-rect-01"/>
+          </a:p>
+        </p:txBody>
+      </p:sp>
+      <p:sp>
+        <p:nvSpPr>
+          <p:cNvPr id="71" name="af-expert-2-box-rect-01" descr="{&quot;autofigure_element_id&quot;:&quot;expert-2-box&quot;}"/>
           <p:cNvSpPr/>
           <p:nvPr/>
         </p:nvSpPr>
         <p:spPr>
           <a:xfrm>
             <a:off x="5981700" y="2181225"/>
-            <a:ext cx="495300" cy="2247900"/>
+            <a:ext cx="495300" cy="2257425"/>
           </a:xfrm>
           <a:prstGeom prst="rect">
             <a:avLst/>
@@ -6309,6 +6319,7 @@
             <a:solidFill>
               <a:srgbClr val="8C8C8C"/>
             </a:solidFill>
+            <a:miter/>
           </a:ln>
           <a:effectLst/>
         </p:spPr>
@@ -6331,18 +6342,19 @@
           <a:lstStyle/>
           <a:p>
             <a:pPr algn="ctr"/>
-          </a:p>
-        </p:txBody>
-      </p:sp>
-      <p:sp>
-        <p:nvSpPr>
-          <p:cNvPr id="74" name="af-expert-2-sem-rect-01"/>
+            <a:endParaRPr/>
+          </a:p>
+        </p:txBody>
+      </p:sp>
+      <p:sp>
+        <p:nvSpPr>
+          <p:cNvPr id="72" name="af-expert-2-sem-rect-01" descr="{&quot;autofigure_element_id&quot;:&quot;expert-2-sem&quot;}"/>
           <p:cNvSpPr/>
           <p:nvPr/>
         </p:nvSpPr>
         <p:spPr>
           <a:xfrm>
-            <a:off x="6057900" y="2314575"/>
+            <a:off x="6048375" y="2314575"/>
             <a:ext cx="352425" cy="952500"/>
           </a:xfrm>
           <a:prstGeom prst="roundRect">
@@ -6377,19 +6389,20 @@
           <a:lstStyle/>
           <a:p>
             <a:pPr algn="ctr"/>
-          </a:p>
-        </p:txBody>
-      </p:sp>
-      <p:sp>
-        <p:nvSpPr>
-          <p:cNvPr id="75" name="af-expert-2-dyn-rect-01"/>
+            <a:endParaRPr/>
+          </a:p>
+        </p:txBody>
+      </p:sp>
+      <p:sp>
+        <p:nvSpPr>
+          <p:cNvPr id="73" name="af-expert-2-dyn-rect-01" descr="{&quot;autofigure_element_id&quot;:&quot;expert-2-dyn&quot;}"/>
           <p:cNvSpPr/>
           <p:nvPr/>
         </p:nvSpPr>
         <p:spPr>
           <a:xfrm>
-            <a:off x="6057900" y="3390900"/>
-            <a:ext cx="352425" cy="952500"/>
+            <a:off x="6048375" y="3390900"/>
+            <a:ext cx="352425" cy="942975"/>
           </a:xfrm>
           <a:prstGeom prst="roundRect">
             <a:avLst>
@@ -6423,19 +6436,20 @@
           <a:lstStyle/>
           <a:p>
             <a:pPr algn="ctr"/>
-          </a:p>
-        </p:txBody>
-      </p:sp>
-      <p:sp>
-        <p:nvSpPr>
-          <p:cNvPr id="76" name="af-expert-2-sem-label-text-01"/>
+            <a:endParaRPr/>
+          </a:p>
+        </p:txBody>
+      </p:sp>
+      <p:sp>
+        <p:nvSpPr>
+          <p:cNvPr id="74" name="af-expert-2-sem-label-text-01" descr="{&quot;autofigure_element_id&quot;:&quot;expert-2-sem-label&quot;}"/>
           <p:cNvSpPr txBox="1"/>
           <p:nvPr/>
         </p:nvSpPr>
         <p:spPr>
-          <a:xfrm>
-            <a:off x="6096000" y="2520791"/>
-            <a:ext cx="285750" cy="345281"/>
+          <a:xfrm rot="5400000">
+            <a:off x="5834062" y="2595562"/>
+            <a:ext cx="781050" cy="390525"/>
           </a:xfrm>
           <a:prstGeom prst="rect">
             <a:avLst/>
@@ -6444,106 +6458,70 @@
           <a:effectLst/>
         </p:spPr>
         <p:txBody>
-          <a:bodyPr wrap="none" anchor="t" lIns="0" rIns="0" tIns="0" bIns="0">
+          <a:bodyPr wrap="none" lIns="0" tIns="0" rIns="0" bIns="0" anchor="ctr">
             <a:spAutoFit/>
           </a:bodyPr>
           <a:lstStyle/>
           <a:p>
             <a:pPr algn="ctr"/>
             <a:r>
-              <a:rPr sz="975">
+              <a:rPr sz="1350">
                 <a:solidFill>
                   <a:srgbClr val="000000"/>
                 </a:solidFill>
                 <a:latin typeface="Arial"/>
               </a:rPr>
-              <a:t>S</a:t>
+              <a:t>Sem</a:t>
             </a:r>
+          </a:p>
+        </p:txBody>
+      </p:sp>
+      <p:sp>
+        <p:nvSpPr>
+          <p:cNvPr id="75" name="af-expert-2-dyn-label-text-01" descr="{&quot;autofigure_element_id&quot;:&quot;expert-2-dyn-label&quot;}"/>
+          <p:cNvSpPr txBox="1"/>
+          <p:nvPr/>
+        </p:nvSpPr>
+        <p:spPr>
+          <a:xfrm rot="5400000">
+            <a:off x="5834062" y="3667125"/>
+            <a:ext cx="781050" cy="390525"/>
+          </a:xfrm>
+          <a:prstGeom prst="rect">
+            <a:avLst/>
+          </a:prstGeom>
+          <a:noFill/>
+          <a:effectLst/>
+        </p:spPr>
+        <p:txBody>
+          <a:bodyPr wrap="none" lIns="0" tIns="0" rIns="0" bIns="0" anchor="ctr">
+            <a:spAutoFit/>
+          </a:bodyPr>
+          <a:lstStyle/>
+          <a:p>
+            <a:pPr algn="ctr"/>
             <a:r>
-              <a:rPr sz="975">
+              <a:rPr sz="1350">
                 <a:solidFill>
                   <a:srgbClr val="000000"/>
                 </a:solidFill>
                 <a:latin typeface="Arial"/>
               </a:rPr>
-              <a:t>e</a:t>
+              <a:t>Dyn</a:t>
             </a:r>
-            <a:r>
-              <a:rPr sz="975">
-                <a:solidFill>
-                  <a:srgbClr val="000000"/>
-                </a:solidFill>
-                <a:latin typeface="Arial"/>
-              </a:rPr>
-              <a:t>m</a:t>
-            </a:r>
-          </a:p>
-        </p:txBody>
-      </p:sp>
-      <p:sp>
-        <p:nvSpPr>
-          <p:cNvPr id="77" name="af-expert-2-dyn-label-text-01"/>
-          <p:cNvSpPr txBox="1"/>
-          <p:nvPr/>
-        </p:nvSpPr>
-        <p:spPr>
-          <a:xfrm>
-            <a:off x="6096000" y="3597116"/>
-            <a:ext cx="285750" cy="345281"/>
-          </a:xfrm>
-          <a:prstGeom prst="rect">
-            <a:avLst/>
-          </a:prstGeom>
-          <a:noFill/>
-          <a:effectLst/>
-        </p:spPr>
-        <p:txBody>
-          <a:bodyPr wrap="none" anchor="t" lIns="0" rIns="0" tIns="0" bIns="0">
-            <a:spAutoFit/>
-          </a:bodyPr>
-          <a:lstStyle/>
-          <a:p>
-            <a:pPr algn="ctr"/>
-            <a:r>
-              <a:rPr sz="975">
-                <a:solidFill>
-                  <a:srgbClr val="000000"/>
-                </a:solidFill>
-                <a:latin typeface="Arial"/>
-              </a:rPr>
-              <a:t>D</a:t>
-            </a:r>
-            <a:r>
-              <a:rPr sz="975">
-                <a:solidFill>
-                  <a:srgbClr val="000000"/>
-                </a:solidFill>
-                <a:latin typeface="Arial"/>
-              </a:rPr>
-              <a:t>y</a:t>
-            </a:r>
-            <a:r>
-              <a:rPr sz="975">
-                <a:solidFill>
-                  <a:srgbClr val="000000"/>
-                </a:solidFill>
-                <a:latin typeface="Arial"/>
-              </a:rPr>
-              <a:t>n</a:t>
-            </a:r>
-          </a:p>
-        </p:txBody>
-      </p:sp>
-      <p:sp>
-        <p:nvSpPr>
-          <p:cNvPr id="78" name="af-expert-3-box-rect-01"/>
+          </a:p>
+        </p:txBody>
+      </p:sp>
+      <p:sp>
+        <p:nvSpPr>
+          <p:cNvPr id="76" name="af-expert-3-box-rect-01" descr="{&quot;autofigure_element_id&quot;:&quot;expert-3-box&quot;}"/>
           <p:cNvSpPr/>
           <p:nvPr/>
         </p:nvSpPr>
         <p:spPr>
           <a:xfrm>
-            <a:off x="6734175" y="2181225"/>
-            <a:ext cx="485775" cy="2247900"/>
+            <a:off x="6724650" y="2181225"/>
+            <a:ext cx="495300" cy="2257425"/>
           </a:xfrm>
           <a:prstGeom prst="rect">
             <a:avLst/>
@@ -6555,6 +6533,7 @@
             <a:solidFill>
               <a:srgbClr val="8C8C8C"/>
             </a:solidFill>
+            <a:miter/>
           </a:ln>
           <a:effectLst/>
         </p:spPr>
@@ -6577,18 +6556,19 @@
           <a:lstStyle/>
           <a:p>
             <a:pPr algn="ctr"/>
-          </a:p>
-        </p:txBody>
-      </p:sp>
-      <p:sp>
-        <p:nvSpPr>
-          <p:cNvPr id="79" name="af-expert-3-sem-rect-01"/>
+            <a:endParaRPr/>
+          </a:p>
+        </p:txBody>
+      </p:sp>
+      <p:sp>
+        <p:nvSpPr>
+          <p:cNvPr id="77" name="af-expert-3-sem-rect-01" descr="{&quot;autofigure_element_id&quot;:&quot;expert-3-sem&quot;}"/>
           <p:cNvSpPr/>
           <p:nvPr/>
         </p:nvSpPr>
         <p:spPr>
           <a:xfrm>
-            <a:off x="6800850" y="2314575"/>
+            <a:off x="6791325" y="2314575"/>
             <a:ext cx="352425" cy="952500"/>
           </a:xfrm>
           <a:prstGeom prst="roundRect">
@@ -6623,19 +6603,20 @@
           <a:lstStyle/>
           <a:p>
             <a:pPr algn="ctr"/>
-          </a:p>
-        </p:txBody>
-      </p:sp>
-      <p:sp>
-        <p:nvSpPr>
-          <p:cNvPr id="80" name="af-expert-3-dyn-rect-01"/>
+            <a:endParaRPr/>
+          </a:p>
+        </p:txBody>
+      </p:sp>
+      <p:sp>
+        <p:nvSpPr>
+          <p:cNvPr id="78" name="af-expert-3-dyn-rect-01" descr="{&quot;autofigure_element_id&quot;:&quot;expert-3-dyn&quot;}"/>
           <p:cNvSpPr/>
           <p:nvPr/>
         </p:nvSpPr>
         <p:spPr>
           <a:xfrm>
-            <a:off x="6800850" y="3390900"/>
-            <a:ext cx="352425" cy="952500"/>
+            <a:off x="6791325" y="3390900"/>
+            <a:ext cx="352425" cy="942975"/>
           </a:xfrm>
           <a:prstGeom prst="roundRect">
             <a:avLst>
@@ -6669,19 +6650,20 @@
           <a:lstStyle/>
           <a:p>
             <a:pPr algn="ctr"/>
-          </a:p>
-        </p:txBody>
-      </p:sp>
-      <p:sp>
-        <p:nvSpPr>
-          <p:cNvPr id="81" name="af-expert-3-sem-label-text-01"/>
+            <a:endParaRPr/>
+          </a:p>
+        </p:txBody>
+      </p:sp>
+      <p:sp>
+        <p:nvSpPr>
+          <p:cNvPr id="79" name="af-expert-3-sem-label-text-01" descr="{&quot;autofigure_element_id&quot;:&quot;expert-3-sem-label&quot;}"/>
           <p:cNvSpPr txBox="1"/>
           <p:nvPr/>
         </p:nvSpPr>
         <p:spPr>
-          <a:xfrm>
-            <a:off x="6838950" y="2520791"/>
-            <a:ext cx="285750" cy="345281"/>
+          <a:xfrm rot="5400000">
+            <a:off x="6577012" y="2595562"/>
+            <a:ext cx="781050" cy="390525"/>
           </a:xfrm>
           <a:prstGeom prst="rect">
             <a:avLst/>
@@ -6690,106 +6672,70 @@
           <a:effectLst/>
         </p:spPr>
         <p:txBody>
-          <a:bodyPr wrap="none" anchor="t" lIns="0" rIns="0" tIns="0" bIns="0">
+          <a:bodyPr wrap="none" lIns="0" tIns="0" rIns="0" bIns="0" anchor="ctr">
             <a:spAutoFit/>
           </a:bodyPr>
           <a:lstStyle/>
           <a:p>
             <a:pPr algn="ctr"/>
             <a:r>
-              <a:rPr sz="975">
+              <a:rPr sz="1350">
                 <a:solidFill>
                   <a:srgbClr val="000000"/>
                 </a:solidFill>
                 <a:latin typeface="Arial"/>
               </a:rPr>
-              <a:t>S</a:t>
+              <a:t>Sem</a:t>
             </a:r>
+          </a:p>
+        </p:txBody>
+      </p:sp>
+      <p:sp>
+        <p:nvSpPr>
+          <p:cNvPr id="80" name="af-expert-3-dyn-label-text-01" descr="{&quot;autofigure_element_id&quot;:&quot;expert-3-dyn-label&quot;}"/>
+          <p:cNvSpPr txBox="1"/>
+          <p:nvPr/>
+        </p:nvSpPr>
+        <p:spPr>
+          <a:xfrm rot="5400000">
+            <a:off x="6577012" y="3667125"/>
+            <a:ext cx="781050" cy="390525"/>
+          </a:xfrm>
+          <a:prstGeom prst="rect">
+            <a:avLst/>
+          </a:prstGeom>
+          <a:noFill/>
+          <a:effectLst/>
+        </p:spPr>
+        <p:txBody>
+          <a:bodyPr wrap="none" lIns="0" tIns="0" rIns="0" bIns="0" anchor="ctr">
+            <a:spAutoFit/>
+          </a:bodyPr>
+          <a:lstStyle/>
+          <a:p>
+            <a:pPr algn="ctr"/>
             <a:r>
-              <a:rPr sz="975">
+              <a:rPr sz="1350">
                 <a:solidFill>
                   <a:srgbClr val="000000"/>
                 </a:solidFill>
                 <a:latin typeface="Arial"/>
               </a:rPr>
-              <a:t>e</a:t>
+              <a:t>Dyn</a:t>
             </a:r>
-            <a:r>
-              <a:rPr sz="975">
-                <a:solidFill>
-                  <a:srgbClr val="000000"/>
-                </a:solidFill>
-                <a:latin typeface="Arial"/>
-              </a:rPr>
-              <a:t>m</a:t>
-            </a:r>
-          </a:p>
-        </p:txBody>
-      </p:sp>
-      <p:sp>
-        <p:nvSpPr>
-          <p:cNvPr id="82" name="af-expert-3-dyn-label-text-01"/>
-          <p:cNvSpPr txBox="1"/>
-          <p:nvPr/>
-        </p:nvSpPr>
-        <p:spPr>
-          <a:xfrm>
-            <a:off x="6838950" y="3597116"/>
-            <a:ext cx="285750" cy="345281"/>
-          </a:xfrm>
-          <a:prstGeom prst="rect">
-            <a:avLst/>
-          </a:prstGeom>
-          <a:noFill/>
-          <a:effectLst/>
-        </p:spPr>
-        <p:txBody>
-          <a:bodyPr wrap="none" anchor="t" lIns="0" rIns="0" tIns="0" bIns="0">
-            <a:spAutoFit/>
-          </a:bodyPr>
-          <a:lstStyle/>
-          <a:p>
-            <a:pPr algn="ctr"/>
-            <a:r>
-              <a:rPr sz="975">
-                <a:solidFill>
-                  <a:srgbClr val="000000"/>
-                </a:solidFill>
-                <a:latin typeface="Arial"/>
-              </a:rPr>
-              <a:t>D</a:t>
-            </a:r>
-            <a:r>
-              <a:rPr sz="975">
-                <a:solidFill>
-                  <a:srgbClr val="000000"/>
-                </a:solidFill>
-                <a:latin typeface="Arial"/>
-              </a:rPr>
-              <a:t>y</a:t>
-            </a:r>
-            <a:r>
-              <a:rPr sz="975">
-                <a:solidFill>
-                  <a:srgbClr val="000000"/>
-                </a:solidFill>
-                <a:latin typeface="Arial"/>
-              </a:rPr>
-              <a:t>n</a:t>
-            </a:r>
-          </a:p>
-        </p:txBody>
-      </p:sp>
-      <p:sp>
-        <p:nvSpPr>
-          <p:cNvPr id="83" name="af-expert-4-box-rect-01"/>
+          </a:p>
+        </p:txBody>
+      </p:sp>
+      <p:sp>
+        <p:nvSpPr>
+          <p:cNvPr id="81" name="af-expert-4-box-rect-01" descr="{&quot;autofigure_element_id&quot;:&quot;expert-4-box&quot;}"/>
           <p:cNvSpPr/>
           <p:nvPr/>
         </p:nvSpPr>
         <p:spPr>
           <a:xfrm>
-            <a:off x="7610475" y="2181225"/>
-            <a:ext cx="495300" cy="2247900"/>
+            <a:off x="7629525" y="2181225"/>
+            <a:ext cx="495300" cy="2257425"/>
           </a:xfrm>
           <a:prstGeom prst="rect">
             <a:avLst/>
@@ -6801,6 +6747,7 @@
             <a:solidFill>
               <a:srgbClr val="8C8C8C"/>
             </a:solidFill>
+            <a:miter/>
           </a:ln>
           <a:effectLst/>
         </p:spPr>
@@ -6823,18 +6770,19 @@
           <a:lstStyle/>
           <a:p>
             <a:pPr algn="ctr"/>
-          </a:p>
-        </p:txBody>
-      </p:sp>
-      <p:sp>
-        <p:nvSpPr>
-          <p:cNvPr id="84" name="af-expert-4-sem-rect-01"/>
+            <a:endParaRPr/>
+          </a:p>
+        </p:txBody>
+      </p:sp>
+      <p:sp>
+        <p:nvSpPr>
+          <p:cNvPr id="82" name="af-expert-4-sem-rect-01" descr="{&quot;autofigure_element_id&quot;:&quot;expert-4-sem&quot;}"/>
           <p:cNvSpPr/>
           <p:nvPr/>
         </p:nvSpPr>
         <p:spPr>
           <a:xfrm>
-            <a:off x="7686675" y="2314575"/>
+            <a:off x="7696200" y="2314575"/>
             <a:ext cx="352425" cy="952500"/>
           </a:xfrm>
           <a:prstGeom prst="roundRect">
@@ -6869,19 +6817,20 @@
           <a:lstStyle/>
           <a:p>
             <a:pPr algn="ctr"/>
-          </a:p>
-        </p:txBody>
-      </p:sp>
-      <p:sp>
-        <p:nvSpPr>
-          <p:cNvPr id="85" name="af-expert-4-dyn-rect-01"/>
+            <a:endParaRPr/>
+          </a:p>
+        </p:txBody>
+      </p:sp>
+      <p:sp>
+        <p:nvSpPr>
+          <p:cNvPr id="83" name="af-expert-4-dyn-rect-01" descr="{&quot;autofigure_element_id&quot;:&quot;expert-4-dyn&quot;}"/>
           <p:cNvSpPr/>
           <p:nvPr/>
         </p:nvSpPr>
         <p:spPr>
           <a:xfrm>
-            <a:off x="7686675" y="3390900"/>
-            <a:ext cx="352425" cy="952500"/>
+            <a:off x="7696200" y="3390900"/>
+            <a:ext cx="352425" cy="942975"/>
           </a:xfrm>
           <a:prstGeom prst="roundRect">
             <a:avLst>
@@ -6915,19 +6864,20 @@
           <a:lstStyle/>
           <a:p>
             <a:pPr algn="ctr"/>
-          </a:p>
-        </p:txBody>
-      </p:sp>
-      <p:sp>
-        <p:nvSpPr>
-          <p:cNvPr id="86" name="af-expert-4-sem-label-text-01"/>
+            <a:endParaRPr/>
+          </a:p>
+        </p:txBody>
+      </p:sp>
+      <p:sp>
+        <p:nvSpPr>
+          <p:cNvPr id="84" name="af-expert-4-sem-label-text-01" descr="{&quot;autofigure_element_id&quot;:&quot;expert-4-sem-label&quot;}"/>
           <p:cNvSpPr txBox="1"/>
           <p:nvPr/>
         </p:nvSpPr>
         <p:spPr>
-          <a:xfrm>
-            <a:off x="7715250" y="2520791"/>
-            <a:ext cx="285750" cy="345281"/>
+          <a:xfrm rot="5400000">
+            <a:off x="7481888" y="2595562"/>
+            <a:ext cx="781050" cy="390525"/>
           </a:xfrm>
           <a:prstGeom prst="rect">
             <a:avLst/>
@@ -6936,99 +6886,63 @@
           <a:effectLst/>
         </p:spPr>
         <p:txBody>
-          <a:bodyPr wrap="none" anchor="t" lIns="0" rIns="0" tIns="0" bIns="0">
+          <a:bodyPr wrap="none" lIns="0" tIns="0" rIns="0" bIns="0" anchor="ctr">
             <a:spAutoFit/>
           </a:bodyPr>
           <a:lstStyle/>
           <a:p>
             <a:pPr algn="ctr"/>
             <a:r>
-              <a:rPr sz="975">
+              <a:rPr sz="1350">
                 <a:solidFill>
                   <a:srgbClr val="000000"/>
                 </a:solidFill>
                 <a:latin typeface="Arial"/>
               </a:rPr>
-              <a:t>S</a:t>
+              <a:t>Sem</a:t>
             </a:r>
+          </a:p>
+        </p:txBody>
+      </p:sp>
+      <p:sp>
+        <p:nvSpPr>
+          <p:cNvPr id="85" name="af-expert-4-dyn-label-text-01" descr="{&quot;autofigure_element_id&quot;:&quot;expert-4-dyn-label&quot;}"/>
+          <p:cNvSpPr txBox="1"/>
+          <p:nvPr/>
+        </p:nvSpPr>
+        <p:spPr>
+          <a:xfrm rot="5400000">
+            <a:off x="7481888" y="3667125"/>
+            <a:ext cx="781050" cy="390525"/>
+          </a:xfrm>
+          <a:prstGeom prst="rect">
+            <a:avLst/>
+          </a:prstGeom>
+          <a:noFill/>
+          <a:effectLst/>
+        </p:spPr>
+        <p:txBody>
+          <a:bodyPr wrap="none" lIns="0" tIns="0" rIns="0" bIns="0" anchor="ctr">
+            <a:spAutoFit/>
+          </a:bodyPr>
+          <a:lstStyle/>
+          <a:p>
+            <a:pPr algn="ctr"/>
             <a:r>
-              <a:rPr sz="975">
+              <a:rPr sz="1350">
                 <a:solidFill>
                   <a:srgbClr val="000000"/>
                 </a:solidFill>
                 <a:latin typeface="Arial"/>
               </a:rPr>
-              <a:t>e</a:t>
+              <a:t>Dyn</a:t>
             </a:r>
-            <a:r>
-              <a:rPr sz="975">
-                <a:solidFill>
-                  <a:srgbClr val="000000"/>
-                </a:solidFill>
-                <a:latin typeface="Arial"/>
-              </a:rPr>
-              <a:t>m</a:t>
-            </a:r>
-          </a:p>
-        </p:txBody>
-      </p:sp>
-      <p:sp>
-        <p:nvSpPr>
-          <p:cNvPr id="87" name="af-expert-4-dyn-label-text-01"/>
-          <p:cNvSpPr txBox="1"/>
-          <p:nvPr/>
-        </p:nvSpPr>
-        <p:spPr>
-          <a:xfrm>
-            <a:off x="7715250" y="3597116"/>
-            <a:ext cx="285750" cy="345281"/>
-          </a:xfrm>
-          <a:prstGeom prst="rect">
-            <a:avLst/>
-          </a:prstGeom>
-          <a:noFill/>
-          <a:effectLst/>
-        </p:spPr>
-        <p:txBody>
-          <a:bodyPr wrap="none" anchor="t" lIns="0" rIns="0" tIns="0" bIns="0">
-            <a:spAutoFit/>
-          </a:bodyPr>
-          <a:lstStyle/>
-          <a:p>
-            <a:pPr algn="ctr"/>
-            <a:r>
-              <a:rPr sz="975">
-                <a:solidFill>
-                  <a:srgbClr val="000000"/>
-                </a:solidFill>
-                <a:latin typeface="Arial"/>
-              </a:rPr>
-              <a:t>D</a:t>
-            </a:r>
-            <a:r>
-              <a:rPr sz="975">
-                <a:solidFill>
-                  <a:srgbClr val="000000"/>
-                </a:solidFill>
-                <a:latin typeface="Arial"/>
-              </a:rPr>
-              <a:t>y</a:t>
-            </a:r>
-            <a:r>
-              <a:rPr sz="975">
-                <a:solidFill>
-                  <a:srgbClr val="000000"/>
-                </a:solidFill>
-                <a:latin typeface="Arial"/>
-              </a:rPr>
-              <a:t>n</a:t>
-            </a:r>
-          </a:p>
-        </p:txBody>
-      </p:sp>
-      <p:sp>
-        <p:nvSpPr>
-          <p:cNvPr id="88" name="af-expert-index-1-text-01"/>
+          </a:p>
+        </p:txBody>
+      </p:sp>
+      <p:sp>
+        <p:nvSpPr>
+          <p:cNvPr id="86" name="af-expert-index-1-text-01" descr="{&quot;autofigure_element_id&quot;:&quot;expert-index-1&quot;}"/>
           <p:cNvSpPr txBox="1"/>
           <p:nvPr/>
         </p:nvSpPr>
@@ -7044,7 +6958,7 @@
           <a:effectLst/>
         </p:spPr>
         <p:txBody>
-          <a:bodyPr wrap="none" anchor="t" lIns="0" rIns="0" tIns="0" bIns="0">
+          <a:bodyPr wrap="none" lIns="0" tIns="0" rIns="0" bIns="0" anchor="t">
             <a:spAutoFit/>
           </a:bodyPr>
           <a:lstStyle/>
@@ -7064,7 +6978,7 @@
       </p:sp>
       <p:sp>
         <p:nvSpPr>
-          <p:cNvPr id="89" name="af-expert-index-2-text-01"/>
+          <p:cNvPr id="87" name="af-expert-index-2-text-01" descr="{&quot;autofigure_element_id&quot;:&quot;expert-index-2&quot;}"/>
           <p:cNvSpPr txBox="1"/>
           <p:nvPr/>
         </p:nvSpPr>
@@ -7080,7 +6994,7 @@
           <a:effectLst/>
         </p:spPr>
         <p:txBody>
-          <a:bodyPr wrap="none" anchor="t" lIns="0" rIns="0" tIns="0" bIns="0">
+          <a:bodyPr wrap="none" lIns="0" tIns="0" rIns="0" bIns="0" anchor="t">
             <a:spAutoFit/>
           </a:bodyPr>
           <a:lstStyle/>
@@ -7100,7 +7014,7 @@
       </p:sp>
       <p:sp>
         <p:nvSpPr>
-          <p:cNvPr id="90" name="af-expert-index-3-text-01"/>
+          <p:cNvPr id="88" name="af-expert-index-3-text-01" descr="{&quot;autofigure_element_id&quot;:&quot;expert-index-3&quot;}"/>
           <p:cNvSpPr txBox="1"/>
           <p:nvPr/>
         </p:nvSpPr>
@@ -7116,7 +7030,7 @@
           <a:effectLst/>
         </p:spPr>
         <p:txBody>
-          <a:bodyPr wrap="none" anchor="t" lIns="0" rIns="0" tIns="0" bIns="0">
+          <a:bodyPr wrap="none" lIns="0" tIns="0" rIns="0" bIns="0" anchor="t">
             <a:spAutoFit/>
           </a:bodyPr>
           <a:lstStyle/>
@@ -7136,7 +7050,7 @@
       </p:sp>
       <p:sp>
         <p:nvSpPr>
-          <p:cNvPr id="91" name="af-expert-index-dots-text-01"/>
+          <p:cNvPr id="89" name="af-expert-index-dots-text-01" descr="{&quot;autofigure_element_id&quot;:&quot;expert-index-dots&quot;}"/>
           <p:cNvSpPr txBox="1"/>
           <p:nvPr/>
         </p:nvSpPr>
@@ -7152,7 +7066,7 @@
           <a:effectLst/>
         </p:spPr>
         <p:txBody>
-          <a:bodyPr wrap="none" anchor="t" lIns="0" rIns="0" tIns="0" bIns="0">
+          <a:bodyPr wrap="none" lIns="0" tIns="0" rIns="0" bIns="0" anchor="t">
             <a:spAutoFit/>
           </a:bodyPr>
           <a:lstStyle/>
@@ -7172,7 +7086,7 @@
       </p:sp>
       <p:sp>
         <p:nvSpPr>
-          <p:cNvPr id="92" name="af-expert-index-l-text-01"/>
+          <p:cNvPr id="90" name="af-expert-index-l-text-01" descr="{&quot;autofigure_element_id&quot;:&quot;expert-index-l&quot;}"/>
           <p:cNvSpPr txBox="1"/>
           <p:nvPr/>
         </p:nvSpPr>
@@ -7188,7 +7102,7 @@
           <a:effectLst/>
         </p:spPr>
         <p:txBody>
-          <a:bodyPr wrap="none" anchor="t" lIns="0" rIns="0" tIns="0" bIns="0">
+          <a:bodyPr wrap="none" lIns="0" tIns="0" rIns="0" bIns="0" anchor="t">
             <a:spAutoFit/>
           </a:bodyPr>
           <a:lstStyle/>
@@ -7206,16 +7120,139 @@
           </a:p>
         </p:txBody>
       </p:sp>
-      <p:sp>
-        <p:nvSpPr>
-          <p:cNvPr id="93" name="af-allocator-task1-route-1-freeform-arrow-01"/>
+      <p:cxnSp>
+        <p:nvCxnSpPr>
+          <p:cNvPr id="91" name="af-allocator-task1-route-1-connector-01" descr="{&quot;arrow_spec_sha256&quot;:&quot;b5bea0e182ef3ce4043d70053b8e87d0453d194fe89d9a2cb29e28180f568f8a&quot;,&quot;autofigure_element_id&quot;:&quot;allocator-task1-route-1&quot;}"/>
+          <p:cNvCxnSpPr>
+            <a:stCxn id="66" idx="3"/>
+            <a:endCxn id="71" idx="1"/>
+          </p:cNvCxnSpPr>
+          <p:nvPr/>
+        </p:nvCxnSpPr>
+        <p:spPr>
+          <a:xfrm>
+            <a:off x="5753100" y="3305175"/>
+            <a:ext cx="228600" cy="0"/>
+          </a:xfrm>
+          <a:prstGeom prst="line">
+            <a:avLst/>
+          </a:prstGeom>
+          <a:ln w="28575" cap="rnd">
+            <a:solidFill>
+              <a:srgbClr val="111111"/>
+            </a:solidFill>
+            <a:round/>
+            <a:tailEnd type="triangle" w="med" len="med"/>
+          </a:ln>
+          <a:effectLst/>
+        </p:spPr>
+        <p:style>
+          <a:lnRef idx="2">
+            <a:schemeClr val="accent1"/>
+          </a:lnRef>
+          <a:fillRef idx="0">
+            <a:schemeClr val="accent1"/>
+          </a:fillRef>
+          <a:effectRef idx="1">
+            <a:schemeClr val="accent1"/>
+          </a:effectRef>
+          <a:fontRef idx="minor">
+            <a:schemeClr val="tx1"/>
+          </a:fontRef>
+        </p:style>
+      </p:cxnSp>
+      <p:cxnSp>
+        <p:nvCxnSpPr>
+          <p:cNvPr id="92" name="af-allocator-task1-route-2-connector-01" descr="{&quot;arrow_spec_sha256&quot;:&quot;b7bde9d1bb63d8af3c4718594c86fb71006c13399cd8ff148661ac67d2cdb7e7&quot;,&quot;autofigure_element_id&quot;:&quot;allocator-task1-route-2&quot;}"/>
+          <p:cNvCxnSpPr>
+            <a:stCxn id="71" idx="3"/>
+            <a:endCxn id="76" idx="1"/>
+          </p:cNvCxnSpPr>
+          <p:nvPr/>
+        </p:nvCxnSpPr>
+        <p:spPr>
+          <a:xfrm>
+            <a:off x="6477000" y="3305175"/>
+            <a:ext cx="247650" cy="0"/>
+          </a:xfrm>
+          <a:prstGeom prst="line">
+            <a:avLst/>
+          </a:prstGeom>
+          <a:ln w="28575" cap="rnd">
+            <a:solidFill>
+              <a:srgbClr val="111111"/>
+            </a:solidFill>
+            <a:round/>
+            <a:tailEnd type="triangle" w="med" len="med"/>
+          </a:ln>
+          <a:effectLst/>
+        </p:spPr>
+        <p:style>
+          <a:lnRef idx="2">
+            <a:schemeClr val="accent1"/>
+          </a:lnRef>
+          <a:fillRef idx="0">
+            <a:schemeClr val="accent1"/>
+          </a:fillRef>
+          <a:effectRef idx="1">
+            <a:schemeClr val="accent1"/>
+          </a:effectRef>
+          <a:fontRef idx="minor">
+            <a:schemeClr val="tx1"/>
+          </a:fontRef>
+        </p:style>
+      </p:cxnSp>
+      <p:cxnSp>
+        <p:nvCxnSpPr>
+          <p:cNvPr id="93" name="af-allocator-task1-skip-edge-connector-01" descr="{&quot;arrow_spec_sha256&quot;:&quot;292d1612085c6f6c9d9ad25840e06098a6769ba8f23e73901111891a12021bfc&quot;,&quot;autofigure_element_id&quot;:&quot;allocator-task1-skip-edge&quot;}"/>
+          <p:cNvCxnSpPr>
+            <a:stCxn id="76" idx="3"/>
+            <a:endCxn id="81" idx="1"/>
+          </p:cNvCxnSpPr>
+          <p:nvPr/>
+        </p:nvCxnSpPr>
+        <p:spPr>
+          <a:xfrm>
+            <a:off x="7219950" y="3305175"/>
+            <a:ext cx="409575" cy="0"/>
+          </a:xfrm>
+          <a:prstGeom prst="line">
+            <a:avLst/>
+          </a:prstGeom>
+          <a:ln w="28575" cap="rnd">
+            <a:solidFill>
+              <a:srgbClr val="111111"/>
+            </a:solidFill>
+            <a:round/>
+            <a:tailEnd type="triangle" w="med" len="med"/>
+          </a:ln>
+          <a:effectLst/>
+        </p:spPr>
+        <p:style>
+          <a:lnRef idx="2">
+            <a:schemeClr val="accent1"/>
+          </a:lnRef>
+          <a:fillRef idx="0">
+            <a:schemeClr val="accent1"/>
+          </a:fillRef>
+          <a:effectRef idx="1">
+            <a:schemeClr val="accent1"/>
+          </a:effectRef>
+          <a:fontRef idx="minor">
+            <a:schemeClr val="tx1"/>
+          </a:fontRef>
+        </p:style>
+      </p:cxnSp>
+      <p:sp>
+        <p:nvSpPr>
+          <p:cNvPr id="94" name="af-allocator-task1-propagation-freeform-01" descr="{&quot;autofigure_element_id&quot;:&quot;allocator-task1-propagation&quot;}"/>
           <p:cNvSpPr/>
           <p:nvPr/>
         </p:nvSpPr>
         <p:spPr>
           <a:xfrm>
-            <a:off x="5114925" y="2476500"/>
-            <a:ext cx="771525" cy="828675"/>
+            <a:off x="5133975" y="2476500"/>
+            <a:ext cx="3448050" cy="1085850"/>
           </a:xfrm>
           <a:custGeom>
             <a:avLst/>
@@ -7224,42 +7261,70 @@
             <a:cxnLst/>
             <a:rect l="0" t="0" r="0" b="0"/>
             <a:pathLst>
-              <a:path w="771525" h="828675">
+              <a:path w="3448050" h="1085850">
                 <a:moveTo>
                   <a:pt x="0" y="276225"/>
                 </a:moveTo>
                 <a:cubicBezTo>
-                  <a:pt x="314325" y="0"/>
-                  <a:pt x="438150" y="161925"/>
-                  <a:pt x="771525" y="828675"/>
+                  <a:pt x="219075" y="0"/>
+                  <a:pt x="381000" y="142875"/>
+                  <a:pt x="485775" y="485775"/>
+                </a:cubicBezTo>
+                <a:cubicBezTo>
+                  <a:pt x="609600" y="857250"/>
+                  <a:pt x="819150" y="800100"/>
+                  <a:pt x="952500" y="581025"/>
+                </a:cubicBezTo>
+                <a:cubicBezTo>
+                  <a:pt x="1104900" y="323850"/>
+                  <a:pt x="1247775" y="371475"/>
+                  <a:pt x="1400175" y="733425"/>
+                </a:cubicBezTo>
+                <a:cubicBezTo>
+                  <a:pt x="1543050" y="1066800"/>
+                  <a:pt x="1733550" y="1085850"/>
+                  <a:pt x="1866900" y="704850"/>
+                </a:cubicBezTo>
+                <a:cubicBezTo>
+                  <a:pt x="2019300" y="257175"/>
+                  <a:pt x="2276475" y="180975"/>
+                  <a:pt x="2476500" y="276225"/>
+                </a:cubicBezTo>
+                <a:cubicBezTo>
+                  <a:pt x="2714625" y="381000"/>
+                  <a:pt x="2962275" y="47625"/>
+                  <a:pt x="3448050" y="257175"/>
                 </a:cubicBezTo>
               </a:path>
             </a:pathLst>
           </a:custGeom>
           <a:noFill/>
-          <a:ln w="28575">
+          <a:ln w="26670" cap="rnd">
             <a:solidFill>
-              <a:srgbClr val="3567B7"/>
+              <a:srgbClr val="2D5EA8"/>
             </a:solidFill>
-            <a:prstDash val="sysDot"/>
-            <a:tailEnd type="triangle" w="med" len="med"/>
+            <a:prstDash val="dot"/>
+            <a:round/>
           </a:ln>
         </p:spPr>
         <p:txBody>
           <a:bodyPr/>
-          <a:p/>
-        </p:txBody>
-      </p:sp>
-      <p:sp>
-        <p:nvSpPr>
-          <p:cNvPr id="94" name="af-allocator-task1-route-2-freeform-arrow-01"/>
+          <a:lstStyle/>
+          <a:p>
+            <a:endParaRPr/>
+          </a:p>
+        </p:txBody>
+      </p:sp>
+      <p:sp>
+        <p:nvSpPr>
+          <p:cNvPr id="95" name="af-allocator-task2-propagation-freeform-01" descr="{&quot;autofigure_element_id&quot;:&quot;allocator-task2-propagation&quot;}"/>
           <p:cNvSpPr/>
           <p:nvPr/>
         </p:nvSpPr>
         <p:spPr>
           <a:xfrm>
-            <a:off x="5124450" y="2381250"/>
-            <a:ext cx="3076575" cy="1714500"/>
+            <a:off x="5133975" y="2838450"/>
+            <a:ext cx="3448050" cy="1285875"/>
           </a:xfrm>
           <a:custGeom>
             <a:avLst/>
@@ -7268,238 +7333,58 @@
             <a:cxnLst/>
             <a:rect l="0" t="0" r="0" b="0"/>
             <a:pathLst>
-              <a:path w="3076575" h="1714500">
+              <a:path w="3448050" h="1285875">
                 <a:moveTo>
-                  <a:pt x="0" y="381000"/>
+                  <a:pt x="0" y="1066800"/>
                 </a:moveTo>
                 <a:cubicBezTo>
-                  <a:pt x="800100" y="0"/>
-                  <a:pt x="809625" y="1714500"/>
-                  <a:pt x="1543050" y="1695450"/>
+                  <a:pt x="247650" y="1000125"/>
+                  <a:pt x="485775" y="1200150"/>
+                  <a:pt x="752475" y="1143000"/>
                 </a:cubicBezTo>
                 <a:cubicBezTo>
-                  <a:pt x="2114550" y="1676400"/>
-                  <a:pt x="2352675" y="133350"/>
-                  <a:pt x="3076575" y="323850"/>
+                  <a:pt x="1019175" y="1066800"/>
+                  <a:pt x="1181100" y="685800"/>
+                  <a:pt x="1381125" y="342900"/>
+                </a:cubicBezTo>
+                <a:cubicBezTo>
+                  <a:pt x="1533525" y="95250"/>
+                  <a:pt x="1657350" y="0"/>
+                  <a:pt x="1800225" y="114300"/>
+                </a:cubicBezTo>
+                <a:cubicBezTo>
+                  <a:pt x="1962150" y="276225"/>
+                  <a:pt x="2085975" y="838200"/>
+                  <a:pt x="2362200" y="1066800"/>
+                </a:cubicBezTo>
+                <a:cubicBezTo>
+                  <a:pt x="2628900" y="1285875"/>
+                  <a:pt x="2905125" y="1162050"/>
+                  <a:pt x="3448050" y="1095375"/>
                 </a:cubicBezTo>
               </a:path>
             </a:pathLst>
           </a:custGeom>
           <a:noFill/>
-          <a:ln w="28575">
+          <a:ln w="26670" cap="rnd">
             <a:solidFill>
-              <a:srgbClr val="3567B7"/>
+              <a:srgbClr val="D20C0C"/>
             </a:solidFill>
-            <a:prstDash val="sysDot"/>
-            <a:tailEnd type="triangle" w="med" len="med"/>
+            <a:prstDash val="dot"/>
+            <a:round/>
           </a:ln>
         </p:spPr>
         <p:txBody>
           <a:bodyPr/>
-          <a:p/>
-        </p:txBody>
-      </p:sp>
-      <p:grpSp>
-        <p:nvGrpSpPr>
-          <p:cNvPr id="97" name="af-allocator-task2-route-1-arrow-group-01"/>
-          <p:cNvGrpSpPr/>
-          <p:nvPr/>
-        </p:nvGrpSpPr>
-        <p:grpSpPr>
-          <a:xfrm>
-            <a:off x="0" y="0"/>
-            <a:ext cx="13611225" cy="5972175"/>
-            <a:chOff x="0" y="0"/>
-            <a:chExt cx="13611225" cy="5972175"/>
-          </a:xfrm>
-        </p:grpSpPr>
-        <p:sp>
-          <p:nvSpPr>
-            <p:cNvPr id="95" name="af-allocator-task2-route-1-freeform-arrow-01"/>
-            <p:cNvSpPr/>
-            <p:nvPr/>
-          </p:nvSpPr>
-          <p:spPr>
-            <a:xfrm>
-              <a:off x="5114925" y="2667000"/>
-              <a:ext cx="2066925" cy="1533525"/>
-            </a:xfrm>
-            <a:custGeom>
-              <a:avLst/>
-              <a:gdLst/>
-              <a:ahLst/>
-              <a:cxnLst/>
-              <a:rect l="0" t="0" r="0" b="0"/>
-              <a:pathLst>
-                <a:path w="2066925" h="1533525">
-                  <a:moveTo>
-                    <a:pt x="0" y="1238250"/>
-                  </a:moveTo>
-                  <a:cubicBezTo>
-                    <a:pt x="790575" y="1066800"/>
-                    <a:pt x="904875" y="1533525"/>
-                    <a:pt x="1381125" y="990600"/>
-                  </a:cubicBezTo>
-                  <a:cubicBezTo>
-                    <a:pt x="1704975" y="628650"/>
-                    <a:pt x="1743075" y="0"/>
-                    <a:pt x="2066925" y="19050"/>
-                  </a:cubicBezTo>
-                </a:path>
-              </a:pathLst>
-            </a:custGeom>
-            <a:noFill/>
-            <a:ln w="28575">
-              <a:solidFill>
-                <a:srgbClr val="D40000"/>
-              </a:solidFill>
-              <a:prstDash val="sysDot"/>
-            </a:ln>
-          </p:spPr>
-        </p:sp>
-        <p:sp>
-          <p:nvSpPr>
-            <p:cNvPr id="96" name="af-allocator-task2-route-1-arrowhead-fallback-01"/>
-            <p:cNvSpPr/>
-            <p:nvPr/>
-          </p:nvSpPr>
-          <p:spPr>
-            <a:xfrm>
-              <a:off x="7093197" y="2628719"/>
-              <a:ext cx="98162" cy="104594"/>
-            </a:xfrm>
-            <a:custGeom>
-              <a:avLst/>
-              <a:gdLst/>
-              <a:ahLst/>
-              <a:cxnLst/>
-              <a:rect l="0" t="0" r="0" b="0"/>
-              <a:pathLst>
-                <a:path w="98162" h="104594">
-                  <a:moveTo>
-                    <a:pt x="6153" y="0"/>
-                  </a:moveTo>
-                  <a:lnTo>
-                    <a:pt x="98162" y="57890"/>
-                  </a:lnTo>
-                  <a:lnTo>
-                    <a:pt x="0" y="104594"/>
-                  </a:lnTo>
-                  <a:close/>
-                </a:path>
-              </a:pathLst>
-            </a:custGeom>
-            <a:solidFill>
-              <a:srgbClr val="F27622"/>
-            </a:solidFill>
-            <a:ln>
-              <a:noFill/>
-            </a:ln>
-          </p:spPr>
-        </p:sp>
-      </p:grpSp>
-      <p:grpSp>
-        <p:nvGrpSpPr>
-          <p:cNvPr id="100" name="af-allocator-task2-route-2-arrow-group-01"/>
-          <p:cNvGrpSpPr/>
-          <p:nvPr/>
-        </p:nvGrpSpPr>
-        <p:grpSpPr>
-          <a:xfrm>
-            <a:off x="0" y="0"/>
-            <a:ext cx="13611225" cy="5972175"/>
-            <a:chOff x="0" y="0"/>
-            <a:chExt cx="13611225" cy="5972175"/>
-          </a:xfrm>
-        </p:grpSpPr>
-        <p:sp>
-          <p:nvSpPr>
-            <p:cNvPr id="98" name="af-allocator-task2-route-2-freeform-arrow-01"/>
-            <p:cNvSpPr/>
-            <p:nvPr/>
-          </p:nvSpPr>
-          <p:spPr>
-            <a:xfrm>
-              <a:off x="5114925" y="3228975"/>
-              <a:ext cx="3095625" cy="1104900"/>
-            </a:xfrm>
-            <a:custGeom>
-              <a:avLst/>
-              <a:gdLst/>
-              <a:ahLst/>
-              <a:cxnLst/>
-              <a:rect l="0" t="0" r="0" b="0"/>
-              <a:pathLst>
-                <a:path w="3095625" h="1104900">
-                  <a:moveTo>
-                    <a:pt x="0" y="676275"/>
-                  </a:moveTo>
-                  <a:cubicBezTo>
-                    <a:pt x="809625" y="609600"/>
-                    <a:pt x="1019175" y="809625"/>
-                    <a:pt x="1476375" y="409575"/>
-                  </a:cubicBezTo>
-                  <a:cubicBezTo>
-                    <a:pt x="1943100" y="0"/>
-                    <a:pt x="2324100" y="1104900"/>
-                    <a:pt x="3095625" y="752475"/>
-                  </a:cubicBezTo>
-                </a:path>
-              </a:pathLst>
-            </a:custGeom>
-            <a:noFill/>
-            <a:ln w="28575">
-              <a:solidFill>
-                <a:srgbClr val="D40000"/>
-              </a:solidFill>
-              <a:prstDash val="sysDot"/>
-            </a:ln>
-          </p:spPr>
-        </p:sp>
-        <p:sp>
-          <p:nvSpPr>
-            <p:cNvPr id="99" name="af-allocator-task2-route-2-arrowhead-fallback-01"/>
-            <p:cNvSpPr/>
-            <p:nvPr/>
-          </p:nvSpPr>
-          <p:spPr>
-            <a:xfrm>
-              <a:off x="8110808" y="3969417"/>
-              <a:ext cx="108406" cy="95303"/>
-            </a:xfrm>
-            <a:custGeom>
-              <a:avLst/>
-              <a:gdLst/>
-              <a:ahLst/>
-              <a:cxnLst/>
-              <a:rect l="0" t="0" r="0" b="0"/>
-              <a:pathLst>
-                <a:path w="108406" h="95303">
-                  <a:moveTo>
-                    <a:pt x="0" y="0"/>
-                  </a:moveTo>
-                  <a:lnTo>
-                    <a:pt x="108406" y="8076"/>
-                  </a:lnTo>
-                  <a:lnTo>
-                    <a:pt x="43533" y="95303"/>
-                  </a:lnTo>
-                  <a:close/>
-                </a:path>
-              </a:pathLst>
-            </a:custGeom>
-            <a:solidFill>
-              <a:srgbClr val="F27622"/>
-            </a:solidFill>
-            <a:ln>
-              <a:noFill/>
-            </a:ln>
-          </p:spPr>
-        </p:sp>
-      </p:grpSp>
-      <p:sp>
-        <p:nvSpPr>
-          <p:cNvPr id="101" name="af-zt-top-box-rect-01"/>
+          <a:lstStyle/>
+          <a:p>
+            <a:endParaRPr/>
+          </a:p>
+        </p:txBody>
+      </p:sp>
+      <p:sp>
+        <p:nvSpPr>
+          <p:cNvPr id="96" name="af-zt-top-box-rect-01" descr="{&quot;autofigure_element_id&quot;:&quot;zt-top-box&quot;}"/>
           <p:cNvSpPr/>
           <p:nvPr/>
         </p:nvSpPr>
@@ -7518,6 +7403,7 @@
             <a:solidFill>
               <a:srgbClr val="19365F"/>
             </a:solidFill>
+            <a:miter/>
           </a:ln>
           <a:effectLst/>
         </p:spPr>
@@ -7540,14 +7426,15 @@
           <a:lstStyle/>
           <a:p>
             <a:pPr algn="ctr"/>
-          </a:p>
-        </p:txBody>
-      </p:sp>
-      <mc:AlternateContent xmlns:mc="http://schemas.openxmlformats.org/markup-compatibility/2006">
-        <mc:Choice xmlns:a14="http://schemas.microsoft.com/office/drawing/2010/main" Requires="a14">
+            <a:endParaRPr/>
+          </a:p>
+        </p:txBody>
+      </p:sp>
+      <mc:AlternateContent xmlns:mc="http://schemas.openxmlformats.org/markup-compatibility/2006" xmlns:a14="http://schemas.microsoft.com/office/drawing/2010/main">
+        <mc:Choice Requires="a14">
           <p:sp>
             <p:nvSpPr>
-              <p:cNvPr id="102" name="math:005" descr="AI_AUTOFIGURE_NATIVE_MATH_V1:eyJjb250ZW50X3J1bnMiOlt7ImNhbm9uaWNhbF9sYXRleCI6Inpfe3R9IiwiZm9ybXVsYV9pZCI6IkVRMDA1Iiwia2luZCI6Im1hdGgiLCJsYXRleF9zaGEyNTYiOiI1MTFhZDkzYjNmYWU5ZDczZDU2MzY1NmZlYjNiZTY5M2Y0MjBjM2FkNDNmNjBkY2QzNWRiNjMxYWIwZTUwY2EzIiwibW9kZSI6ImlubGluZSIsIm9tbWxfc2hhMjU2IjoiOWNjMjA3NmY3N2U5ZDBlODdiOWE5Y2ZjYWFmZmRjNTBiNzU4ZDZiYmM1MTBjZWY4ZjNiYTU3NDhmODUyMmM1ZSIsInNlbWFudGljX29tbWxfcHJvZmlsZSI6Im9mZmljZS1tYXRoLXNlbWFudGljLXYyIiwic2VtYW50aWNfb21tbF9zaGEyNTYiOiI3MGQyYWI5NmM3NjkwMTQ0MjFhOGZjMTk5ZjQ0MzE0YjFhYWNlZjVkN2RhZGNiZjU2ZDI3MzJjMWJhMjU0MzI4In1dLCJmb3JtdWxhcyI6W3siY2Fub25pY2FsX2xhdGV4Ijoiel97dH0iLCJmb3JtdWxhX2lkIjoiRVEwMDUiLCJsYXRleF9zaGEyNTYiOiI1MTFhZDkzYjNmYWU5ZDczZDU2MzY1NmZlYjNiZTY5M2Y0MjBjM2FkNDNmNjBkY2QzNWRiNjMxYWIwZTUwY2EzIiwibW9kZSI6ImlubGluZSIsIm9tbWxfc2hhMjU2IjoiOWNjMjA3NmY3N2U5ZDBlODdiOWE5Y2ZjYWFmZmRjNTBiNzU4ZDZiYmM1MTBjZWY4ZjNiYTU3NDhmODUyMmM1ZSIsInNlbWFudGljX29tbWxfcHJvZmlsZSI6Im9mZmljZS1tYXRoLXNlbWFudGljLXYyIiwic2VtYW50aWNfb21tbF9zaGEyNTYiOiI3MGQyYWI5NmM3NjkwMTQ0MjFhOGZjMTk5ZjQ0MzE0YjFhYWNlZjVkN2RhZGNiZjU2ZDI3MzJjMWJhMjU0MzI4In1dLCJraW5kIjoibmF0aXZlX29mZmljZV9tYXRoIiwicGxhY2Vob2xkZXJfbmFtZSI6Im1hdGg6MDA1Iiwic2NoZW1hX3ZlcnNpb24iOiIxLjAifQ=="/>
+              <p:cNvPr id="97" name="math:005" descr="AI_AUTOFIGURE_NATIVE_MATH_V1:eyJjb250ZW50X3J1bnMiOlt7ImNhbm9uaWNhbF9sYXRleCI6Inpfe3R9IiwiZm9ybXVsYV9pZCI6IkVRMDA1Iiwia2luZCI6Im1hdGgiLCJsYXRleF9zaGEyNTYiOiI1MTFhZDkzYjNmYWU5ZDczZDU2MzY1NmZlYjNiZTY5M2Y0MjBjM2FkNDNmNjBkY2QzNWRiNjMxYWIwZTUwY2EzIiwibW9kZSI6ImlubGluZSIsIm9tbWxfc2hhMjU2IjoiOWNjMjA3NmY3N2U5ZDBlODdiOWE5Y2ZjYWFmZmRjNTBiNzU4ZDZiYmM1MTBjZWY4ZjNiYTU3NDhmODUyMmM1ZSIsInNlbWFudGljX29tbWxfcHJvZmlsZSI6Im9mZmljZS1tYXRoLXNlbWFudGljLXYyIiwic2VtYW50aWNfb21tbF9zaGEyNTYiOiI3MGQyYWI5NmM3NjkwMTQ0MjFhOGZjMTk5ZjQ0MzE0YjFhYWNlZjVkN2RhZGNiZjU2ZDI3MzJjMWJhMjU0MzI4In1dLCJmb3JtdWxhcyI6W3siY2Fub25pY2FsX2xhdGV4Ijoiel97dH0iLCJmb3JtdWxhX2lkIjoiRVEwMDUiLCJsYXRleF9zaGEyNTYiOiI1MTFhZDkzYjNmYWU5ZDczZDU2MzY1NmZlYjNiZTY5M2Y0MjBjM2FkNDNmNjBkY2QzNWRiNjMxYWIwZTUwY2EzIiwibW9kZSI6ImlubGluZSIsIm9tbWxfc2hhMjU2IjoiOWNjMjA3NmY3N2U5ZDBlODdiOWE5Y2ZjYWFmZmRjNTBiNzU4ZDZiYmM1MTBjZWY4ZjNiYTU3NDhmODUyMmM1ZSIsInNlbWFudGljX29tbWxfcHJvZmlsZSI6Im9mZmljZS1tYXRoLXNlbWFudGljLXYyIiwic2VtYW50aWNfb21tbF9zaGEyNTYiOiI3MGQyYWI5NmM3NjkwMTQ0MjFhOGZjMTk5ZjQ0MzE0YjFhYWNlZjVkN2RhZGNiZjU2ZDI3MzJjMWJhMjU0MzI4In1dLCJraW5kIjoibmF0aXZlX29mZmljZV9tYXRoIiwicGxhY2Vob2xkZXJfbmFtZSI6Im1hdGg6MDA1Iiwic2NoZW1hX3ZlcnNpb24iOiIxLjAifQ=="/>
               <p:cNvSpPr txBox="1"/>
               <p:nvPr/>
             </p:nvSpPr>
@@ -7563,41 +7450,53 @@
               <a:effectLst/>
             </p:spPr>
             <p:txBody>
-              <a:bodyPr wrap="none" anchor="t" lIns="0" rIns="0" tIns="0" bIns="0">
+              <a:bodyPr wrap="none" lIns="0" tIns="0" rIns="0" bIns="0" anchor="t">
                 <a:spAutoFit/>
               </a:bodyPr>
               <a:lstStyle/>
               <a:p>
                 <a:pPr algn="ctr"/>
                 <a14:m>
-                  <m:oMath xmlns:m="http://schemas.openxmlformats.org/officeDocument/2006/math">
-                    <m:sSub>
-                      <m:e>
-                        <m:r>
-                          <a:rPr lang="en-US" dirty="0" sz="1350">
-                            <a:solidFill>
-                              <a:srgbClr val="000000"/>
-                            </a:solidFill>
-                            <a:latin typeface="Cambria Math"/>
-                          </a:rPr>
-                          <m:t>z</m:t>
-                        </m:r>
-                      </m:e>
-                      <m:sub>
-                        <m:r>
-                          <a:rPr lang="en-US" dirty="0" sz="1350">
-                            <a:solidFill>
-                              <a:srgbClr val="000000"/>
-                            </a:solidFill>
-                            <a:latin typeface="Cambria Math"/>
-                          </a:rPr>
-                          <m:t>t</m:t>
-                        </m:r>
-                      </m:sub>
-                    </m:sSub>
-                  </m:oMath>
+                  <m:oMathPara xmlns:m="http://schemas.openxmlformats.org/officeDocument/2006/math">
+                    <m:oMath>
+                      <m:sSub>
+                        <m:sSubPr>
+                          <m:ctrlPr>
+                            <a:rPr lang="en-US" sz="1350" dirty="0">
+                              <a:solidFill>
+                                <a:srgbClr val="000000"/>
+                              </a:solidFill>
+                              <a:latin typeface="Cambria Math"/>
+                            </a:rPr>
+                          </m:ctrlPr>
+                        </m:sSubPr>
+                        <m:e>
+                          <m:r>
+                            <a:rPr lang="en-US" sz="1350" dirty="0">
+                              <a:solidFill>
+                                <a:srgbClr val="000000"/>
+                              </a:solidFill>
+                              <a:latin typeface="Cambria Math"/>
+                            </a:rPr>
+                            <m:t>𝑧</m:t>
+                          </m:r>
+                        </m:e>
+                        <m:sub>
+                          <m:r>
+                            <a:rPr lang="en-US" sz="1350" dirty="0">
+                              <a:solidFill>
+                                <a:srgbClr val="000000"/>
+                              </a:solidFill>
+                              <a:latin typeface="Cambria Math"/>
+                            </a:rPr>
+                            <m:t>𝑡</m:t>
+                          </m:r>
+                        </m:sub>
+                      </m:sSub>
+                    </m:oMath>
+                  </m:oMathPara>
                 </a14:m>
-                <a:endParaRPr lang="en-US" dirty="0" sz="1350">
+                <a:endParaRPr lang="en-US" sz="1350" dirty="0">
                   <a:solidFill>
                     <a:srgbClr val="000000"/>
                   </a:solidFill>
@@ -7607,10 +7506,10 @@
             </p:txBody>
           </p:sp>
         </mc:Choice>
-        <mc:Fallback>
+        <mc:Fallback xmlns="">
           <p:sp>
             <p:nvSpPr>
-              <p:cNvPr id="102" name="math:005" descr="AI_AUTOFIGURE_MATH_FALLBACK_ONLY_V1:eyJjb250ZW50X3J1bnMiOlt7ImNhbm9uaWNhbF9sYXRleCI6Inpfe3R9IiwiZm9ybXVsYV9pZCI6IkVRMDA1Iiwia2luZCI6Im1hdGgiLCJsYXRleF9zaGEyNTYiOiI1MTFhZDkzYjNmYWU5ZDczZDU2MzY1NmZlYjNiZTY5M2Y0MjBjM2FkNDNmNjBkY2QzNWRiNjMxYWIwZTUwY2EzIiwibW9kZSI6ImlubGluZSIsIm9tbWxfc2hhMjU2IjoiOWNjMjA3NmY3N2U5ZDBlODdiOWE5Y2ZjYWFmZmRjNTBiNzU4ZDZiYmM1MTBjZWY4ZjNiYTU3NDhmODUyMmM1ZSIsInNlbWFudGljX29tbWxfcHJvZmlsZSI6Im9mZmljZS1tYXRoLXNlbWFudGljLXYyIiwic2VtYW50aWNfb21tbF9zaGEyNTYiOiI3MGQyYWI5NmM3NjkwMTQ0MjFhOGZjMTk5ZjQ0MzE0YjFhYWNlZjVkN2RhZGNiZjU2ZDI3MzJjMWJhMjU0MzI4In1dLCJmb3JtdWxhcyI6W3siY2Fub25pY2FsX2xhdGV4Ijoiel97dH0iLCJmb3JtdWxhX2lkIjoiRVEwMDUiLCJsYXRleF9zaGEyNTYiOiI1MTFhZDkzYjNmYWU5ZDczZDU2MzY1NmZlYjNiZTY5M2Y0MjBjM2FkNDNmNjBkY2QzNWRiNjMxYWIwZTUwY2EzIiwibW9kZSI6ImlubGluZSIsIm9tbWxfc2hhMjU2IjoiOWNjMjA3NmY3N2U5ZDBlODdiOWE5Y2ZjYWFmZmRjNTBiNzU4ZDZiYmM1MTBjZWY4ZjNiYTU3NDhmODUyMmM1ZSIsInNlbWFudGljX29tbWxfcHJvZmlsZSI6Im9mZmljZS1tYXRoLXNlbWFudGljLXYyIiwic2VtYW50aWNfb21tbF9zaGEyNTYiOiI3MGQyYWI5NmM3NjkwMTQ0MjFhOGZjMTk5ZjQ0MzE0YjFhYWNlZjVkN2RhZGNiZjU2ZDI3MzJjMWJhMjU0MzI4In1dLCJraW5kIjoibmF0aXZlX29mZmljZV9tYXRoIiwicGxhY2Vob2xkZXJfbmFtZSI6Im1hdGg6MDA1Iiwic2NoZW1hX3ZlcnNpb24iOiIxLjAifQ=="/>
+              <p:cNvPr id="97" name="math:005" descr="AI_AUTOFIGURE_MATH_FALLBACK_ONLY_V1:eyJjb250ZW50X3J1bnMiOlt7ImNhbm9uaWNhbF9sYXRleCI6Inpfe3R9IiwiZm9ybXVsYV9pZCI6IkVRMDA1Iiwia2luZCI6Im1hdGgiLCJsYXRleF9zaGEyNTYiOiI1MTFhZDkzYjNmYWU5ZDczZDU2MzY1NmZlYjNiZTY5M2Y0MjBjM2FkNDNmNjBkY2QzNWRiNjMxYWIwZTUwY2EzIiwibW9kZSI6ImlubGluZSIsIm9tbWxfc2hhMjU2IjoiOWNjMjA3NmY3N2U5ZDBlODdiOWE5Y2ZjYWFmZmRjNTBiNzU4ZDZiYmM1MTBjZWY4ZjNiYTU3NDhmODUyMmM1ZSIsInNlbWFudGljX29tbWxfcHJvZmlsZSI6Im9mZmljZS1tYXRoLXNlbWFudGljLXYyIiwic2VtYW50aWNfb21tbF9zaGEyNTYiOiI3MGQyYWI5NmM3NjkwMTQ0MjFhOGZjMTk5ZjQ0MzE0YjFhYWNlZjVkN2RhZGNiZjU2ZDI3MzJjMWJhMjU0MzI4In1dLCJmb3JtdWxhcyI6W3siY2Fub25pY2FsX2xhdGV4Ijoiel97dH0iLCJmb3JtdWxhX2lkIjoiRVEwMDUiLCJsYXRleF9zaGEyNTYiOiI1MTFhZDkzYjNmYWU5ZDczZDU2MzY1NmZlYjNiZTY5M2Y0MjBjM2FkNDNmNjBkY2QzNWRiNjMxYWIwZTUwY2EzIiwibW9kZSI6ImlubGluZSIsIm9tbWxfc2hhMjU2IjoiOWNjMjA3NmY3N2U5ZDBlODdiOWE5Y2ZjYWFmZmRjNTBiNzU4ZDZiYmM1MTBjZWY4ZjNiYTU3NDhmODUyMmM1ZSIsInNlbWFudGljX29tbWxfcHJvZmlsZSI6Im9mZmljZS1tYXRoLXNlbWFudGljLXYyIiwic2VtYW50aWNfb21tbF9zaGEyNTYiOiI3MGQyYWI5NmM3NjkwMTQ0MjFhOGZjMTk5ZjQ0MzE0YjFhYWNlZjVkN2RhZGNiZjU2ZDI3MzJjMWJhMjU0MzI4In1dLCJraW5kIjoibmF0aXZlX29mZmljZV9tYXRoIiwicGxhY2Vob2xkZXJfbmFtZSI6Im1hdGg6MDA1Iiwic2NoZW1hX3ZlcnNpb24iOiIxLjAifQ=="/>
               <p:cNvSpPr txBox="1"/>
               <p:nvPr/>
             </p:nvSpPr>
@@ -7626,7 +7525,7 @@
               <a:effectLst/>
             </p:spPr>
             <p:txBody>
-              <a:bodyPr wrap="none" anchor="t" lIns="0" rIns="0" tIns="0" bIns="0">
+              <a:bodyPr wrap="none" lIns="0" tIns="0" rIns="0" bIns="0" anchor="t">
                 <a:spAutoFit/>
               </a:bodyPr>
               <a:lstStyle/>
@@ -7652,7 +7551,7 @@
       </mc:AlternateContent>
       <p:sp>
         <p:nvSpPr>
-          <p:cNvPr id="103" name="af-zt-top-1-ellipse-01"/>
+          <p:cNvPr id="98" name="af-zt-top-1-ellipse-01" descr="{&quot;autofigure_element_id&quot;:&quot;zt-top-1&quot;}"/>
           <p:cNvSpPr/>
           <p:nvPr/>
         </p:nvSpPr>
@@ -7708,12 +7607,13 @@
           <a:lstStyle/>
           <a:p>
             <a:pPr algn="ctr"/>
-          </a:p>
-        </p:txBody>
-      </p:sp>
-      <p:sp>
-        <p:nvSpPr>
-          <p:cNvPr id="104" name="af-zt-top-2-ellipse-01"/>
+            <a:endParaRPr/>
+          </a:p>
+        </p:txBody>
+      </p:sp>
+      <p:sp>
+        <p:nvSpPr>
+          <p:cNvPr id="99" name="af-zt-top-2-ellipse-01" descr="{&quot;autofigure_element_id&quot;:&quot;zt-top-2&quot;}"/>
           <p:cNvSpPr/>
           <p:nvPr/>
         </p:nvSpPr>
@@ -7769,12 +7669,13 @@
           <a:lstStyle/>
           <a:p>
             <a:pPr algn="ctr"/>
-          </a:p>
-        </p:txBody>
-      </p:sp>
-      <p:sp>
-        <p:nvSpPr>
-          <p:cNvPr id="105" name="af-zt-top-3-ellipse-01"/>
+            <a:endParaRPr/>
+          </a:p>
+        </p:txBody>
+      </p:sp>
+      <p:sp>
+        <p:nvSpPr>
+          <p:cNvPr id="100" name="af-zt-top-3-ellipse-01" descr="{&quot;autofigure_element_id&quot;:&quot;zt-top-3&quot;}"/>
           <p:cNvSpPr/>
           <p:nvPr/>
         </p:nvSpPr>
@@ -7830,12 +7731,13 @@
           <a:lstStyle/>
           <a:p>
             <a:pPr algn="ctr"/>
-          </a:p>
-        </p:txBody>
-      </p:sp>
-      <p:sp>
-        <p:nvSpPr>
-          <p:cNvPr id="106" name="af-zt-bottom-box-rect-01"/>
+            <a:endParaRPr/>
+          </a:p>
+        </p:txBody>
+      </p:sp>
+      <p:sp>
+        <p:nvSpPr>
+          <p:cNvPr id="101" name="af-zt-bottom-box-rect-01" descr="{&quot;autofigure_element_id&quot;:&quot;zt-bottom-box&quot;}"/>
           <p:cNvSpPr/>
           <p:nvPr/>
         </p:nvSpPr>
@@ -7854,6 +7756,7 @@
             <a:solidFill>
               <a:srgbClr val="19365F"/>
             </a:solidFill>
+            <a:miter/>
           </a:ln>
           <a:effectLst/>
         </p:spPr>
@@ -7876,12 +7779,13 @@
           <a:lstStyle/>
           <a:p>
             <a:pPr algn="ctr"/>
-          </a:p>
-        </p:txBody>
-      </p:sp>
-      <p:sp>
-        <p:nvSpPr>
-          <p:cNvPr id="107" name="af-zt-bottom-1-ellipse-01"/>
+            <a:endParaRPr/>
+          </a:p>
+        </p:txBody>
+      </p:sp>
+      <p:sp>
+        <p:nvSpPr>
+          <p:cNvPr id="102" name="af-zt-bottom-1-ellipse-01" descr="{&quot;autofigure_element_id&quot;:&quot;zt-bottom-1&quot;}"/>
           <p:cNvSpPr/>
           <p:nvPr/>
         </p:nvSpPr>
@@ -7937,12 +7841,13 @@
           <a:lstStyle/>
           <a:p>
             <a:pPr algn="ctr"/>
-          </a:p>
-        </p:txBody>
-      </p:sp>
-      <p:sp>
-        <p:nvSpPr>
-          <p:cNvPr id="108" name="af-zt-bottom-2-ellipse-01"/>
+            <a:endParaRPr/>
+          </a:p>
+        </p:txBody>
+      </p:sp>
+      <p:sp>
+        <p:nvSpPr>
+          <p:cNvPr id="103" name="af-zt-bottom-2-ellipse-01" descr="{&quot;autofigure_element_id&quot;:&quot;zt-bottom-2&quot;}"/>
           <p:cNvSpPr/>
           <p:nvPr/>
         </p:nvSpPr>
@@ -7998,12 +7903,13 @@
           <a:lstStyle/>
           <a:p>
             <a:pPr algn="ctr"/>
-          </a:p>
-        </p:txBody>
-      </p:sp>
-      <p:sp>
-        <p:nvSpPr>
-          <p:cNvPr id="109" name="af-zt-bottom-3-ellipse-01"/>
+            <a:endParaRPr/>
+          </a:p>
+        </p:txBody>
+      </p:sp>
+      <p:sp>
+        <p:nvSpPr>
+          <p:cNvPr id="104" name="af-zt-bottom-3-ellipse-01" descr="{&quot;autofigure_element_id&quot;:&quot;zt-bottom-3&quot;}"/>
           <p:cNvSpPr/>
           <p:nvPr/>
         </p:nvSpPr>
@@ -8059,12 +7965,13 @@
           <a:lstStyle/>
           <a:p>
             <a:pPr algn="ctr"/>
-          </a:p>
-        </p:txBody>
-      </p:sp>
-      <p:sp>
-        <p:nvSpPr>
-          <p:cNvPr id="110" name="af-task-conditioned-imagination-rect-01"/>
+            <a:endParaRPr/>
+          </a:p>
+        </p:txBody>
+      </p:sp>
+      <p:sp>
+        <p:nvSpPr>
+          <p:cNvPr id="105" name="af-task-conditioned-imagination-rect-01" descr="{&quot;autofigure_element_id&quot;:&quot;task-conditioned-imagination&quot;}"/>
           <p:cNvSpPr/>
           <p:nvPr/>
         </p:nvSpPr>
@@ -8085,6 +7992,7 @@
             <a:solidFill>
               <a:srgbClr val="19365F"/>
             </a:solidFill>
+            <a:miter/>
           </a:ln>
           <a:effectLst/>
         </p:spPr>
@@ -8107,12 +8015,136 @@
           <a:lstStyle/>
           <a:p>
             <a:pPr algn="ctr"/>
-          </a:p>
-        </p:txBody>
-      </p:sp>
-      <p:sp>
-        <p:nvSpPr>
-          <p:cNvPr id="111" name="af-imagination-title-text-01"/>
+            <a:endParaRPr/>
+          </a:p>
+        </p:txBody>
+      </p:sp>
+      <p:cxnSp>
+        <p:nvCxnSpPr>
+          <p:cNvPr id="106" name="af-imagination-z0-to-r0-connector-01" descr="{&quot;arrow_spec_sha256&quot;:&quot;b710a3e44ce73e2e535d86b3e048149b0efe91fa911338748891c50a84f7d670&quot;,&quot;autofigure_element_id&quot;:&quot;imagination-z0-to-r0&quot;}"/>
+          <p:cNvCxnSpPr>
+            <a:stCxn id="110" idx="2"/>
+            <a:endCxn id="134" idx="0"/>
+          </p:cNvCxnSpPr>
+          <p:nvPr/>
+        </p:nvCxnSpPr>
+        <p:spPr>
+          <a:xfrm>
+            <a:off x="9839325" y="1914525"/>
+            <a:ext cx="0" cy="209550"/>
+          </a:xfrm>
+          <a:prstGeom prst="line">
+            <a:avLst/>
+          </a:prstGeom>
+          <a:ln w="19050">
+            <a:solidFill>
+              <a:srgbClr val="7E6000"/>
+            </a:solidFill>
+            <a:miter/>
+            <a:tailEnd type="triangle" w="med" len="med"/>
+          </a:ln>
+          <a:effectLst/>
+        </p:spPr>
+        <p:style>
+          <a:lnRef idx="2">
+            <a:schemeClr val="accent1"/>
+          </a:lnRef>
+          <a:fillRef idx="0">
+            <a:schemeClr val="accent1"/>
+          </a:fillRef>
+          <a:effectRef idx="1">
+            <a:schemeClr val="accent1"/>
+          </a:effectRef>
+          <a:fontRef idx="minor">
+            <a:schemeClr val="tx1"/>
+          </a:fontRef>
+        </p:style>
+      </p:cxnSp>
+      <p:cxnSp>
+        <p:nvCxnSpPr>
+          <p:cNvPr id="107" name="af-imagination-z1-to-r1-connector-01" descr="{&quot;arrow_spec_sha256&quot;:&quot;ad49b582533b015dc77663531ef5656428eb09c41ce001350fd93bfaf61d79e6&quot;,&quot;autofigure_element_id&quot;:&quot;imagination-z1-to-r1&quot;}"/>
+          <p:cNvCxnSpPr>
+            <a:stCxn id="111" idx="2"/>
+            <a:endCxn id="135" idx="0"/>
+          </p:cNvCxnSpPr>
+          <p:nvPr/>
+        </p:nvCxnSpPr>
+        <p:spPr>
+          <a:xfrm>
+            <a:off x="10753725" y="1914525"/>
+            <a:ext cx="0" cy="209550"/>
+          </a:xfrm>
+          <a:prstGeom prst="line">
+            <a:avLst/>
+          </a:prstGeom>
+          <a:ln w="19050">
+            <a:solidFill>
+              <a:srgbClr val="7E6000"/>
+            </a:solidFill>
+            <a:miter/>
+            <a:tailEnd type="triangle" w="med" len="med"/>
+          </a:ln>
+          <a:effectLst/>
+        </p:spPr>
+        <p:style>
+          <a:lnRef idx="2">
+            <a:schemeClr val="accent1"/>
+          </a:lnRef>
+          <a:fillRef idx="0">
+            <a:schemeClr val="accent1"/>
+          </a:fillRef>
+          <a:effectRef idx="1">
+            <a:schemeClr val="accent1"/>
+          </a:effectRef>
+          <a:fontRef idx="minor">
+            <a:schemeClr val="tx1"/>
+          </a:fontRef>
+        </p:style>
+      </p:cxnSp>
+      <p:cxnSp>
+        <p:nvCxnSpPr>
+          <p:cNvPr id="108" name="af-imagination-z2-to-r2-connector-01" descr="{&quot;arrow_spec_sha256&quot;:&quot;38fc40e9194a569ecf61954c16b0ca03224f7e03b69a84bddd9cec40a8c51ae8&quot;,&quot;autofigure_element_id&quot;:&quot;imagination-z2-to-r2&quot;}"/>
+          <p:cNvCxnSpPr>
+            <a:stCxn id="112" idx="2"/>
+            <a:endCxn id="136" idx="0"/>
+          </p:cNvCxnSpPr>
+          <p:nvPr/>
+        </p:nvCxnSpPr>
+        <p:spPr>
+          <a:xfrm>
+            <a:off x="11706225" y="1914525"/>
+            <a:ext cx="0" cy="209550"/>
+          </a:xfrm>
+          <a:prstGeom prst="line">
+            <a:avLst/>
+          </a:prstGeom>
+          <a:ln w="19050">
+            <a:solidFill>
+              <a:srgbClr val="7E6000"/>
+            </a:solidFill>
+            <a:miter/>
+            <a:tailEnd type="triangle" w="med" len="med"/>
+          </a:ln>
+          <a:effectLst/>
+        </p:spPr>
+        <p:style>
+          <a:lnRef idx="2">
+            <a:schemeClr val="accent1"/>
+          </a:lnRef>
+          <a:fillRef idx="0">
+            <a:schemeClr val="accent1"/>
+          </a:fillRef>
+          <a:effectRef idx="1">
+            <a:schemeClr val="accent1"/>
+          </a:effectRef>
+          <a:fontRef idx="minor">
+            <a:schemeClr val="tx1"/>
+          </a:fontRef>
+        </p:style>
+      </p:cxnSp>
+      <p:sp>
+        <p:nvSpPr>
+          <p:cNvPr id="109" name="af-imagination-title-text-01" descr="{&quot;autofigure_element_id&quot;:&quot;imagination-title&quot;}"/>
           <p:cNvSpPr txBox="1"/>
           <p:nvPr/>
         </p:nvSpPr>
@@ -8128,7 +8160,7 @@
           <a:effectLst/>
         </p:spPr>
         <p:txBody>
-          <a:bodyPr wrap="none" anchor="t" lIns="0" rIns="0" tIns="0" bIns="0">
+          <a:bodyPr wrap="none" lIns="0" tIns="0" rIns="0" bIns="0" anchor="t">
             <a:spAutoFit/>
           </a:bodyPr>
           <a:lstStyle/>
@@ -8148,7 +8180,7 @@
       </p:sp>
       <p:sp>
         <p:nvSpPr>
-          <p:cNvPr id="112" name="af-imag-z0-rect-01"/>
+          <p:cNvPr id="110" name="af-imag-z0-rect-01" descr="{&quot;autofigure_element_id&quot;:&quot;imag-z0&quot;}"/>
           <p:cNvSpPr/>
           <p:nvPr/>
         </p:nvSpPr>
@@ -8189,12 +8221,13 @@
           <a:lstStyle/>
           <a:p>
             <a:pPr algn="ctr"/>
-          </a:p>
-        </p:txBody>
-      </p:sp>
-      <p:sp>
-        <p:nvSpPr>
-          <p:cNvPr id="113" name="af-imag-z1-rect-01"/>
+            <a:endParaRPr/>
+          </a:p>
+        </p:txBody>
+      </p:sp>
+      <p:sp>
+        <p:nvSpPr>
+          <p:cNvPr id="111" name="af-imag-z1-rect-01" descr="{&quot;autofigure_element_id&quot;:&quot;imag-z1&quot;}"/>
           <p:cNvSpPr/>
           <p:nvPr/>
         </p:nvSpPr>
@@ -8235,12 +8268,13 @@
           <a:lstStyle/>
           <a:p>
             <a:pPr algn="ctr"/>
-          </a:p>
-        </p:txBody>
-      </p:sp>
-      <p:sp>
-        <p:nvSpPr>
-          <p:cNvPr id="114" name="af-imag-z2-rect-01"/>
+            <a:endParaRPr/>
+          </a:p>
+        </p:txBody>
+      </p:sp>
+      <p:sp>
+        <p:nvSpPr>
+          <p:cNvPr id="112" name="af-imag-z2-rect-01" descr="{&quot;autofigure_element_id&quot;:&quot;imag-z2&quot;}"/>
           <p:cNvSpPr/>
           <p:nvPr/>
         </p:nvSpPr>
@@ -8281,12 +8315,13 @@
           <a:lstStyle/>
           <a:p>
             <a:pPr algn="ctr"/>
-          </a:p>
-        </p:txBody>
-      </p:sp>
-      <p:sp>
-        <p:nvSpPr>
-          <p:cNvPr id="115" name="af-imag-zh-rect-01"/>
+            <a:endParaRPr/>
+          </a:p>
+        </p:txBody>
+      </p:sp>
+      <p:sp>
+        <p:nvSpPr>
+          <p:cNvPr id="113" name="af-imag-zh-rect-01" descr="{&quot;autofigure_element_id&quot;:&quot;imag-zh&quot;}"/>
           <p:cNvSpPr/>
           <p:nvPr/>
         </p:nvSpPr>
@@ -8327,14 +8362,15 @@
           <a:lstStyle/>
           <a:p>
             <a:pPr algn="ctr"/>
-          </a:p>
-        </p:txBody>
-      </p:sp>
-      <mc:AlternateContent xmlns:mc="http://schemas.openxmlformats.org/markup-compatibility/2006">
-        <mc:Choice xmlns:a14="http://schemas.microsoft.com/office/drawing/2010/main" Requires="a14">
+            <a:endParaRPr/>
+          </a:p>
+        </p:txBody>
+      </p:sp>
+      <mc:AlternateContent xmlns:mc="http://schemas.openxmlformats.org/markup-compatibility/2006" xmlns:a14="http://schemas.microsoft.com/office/drawing/2010/main">
+        <mc:Choice Requires="a14">
           <p:sp>
             <p:nvSpPr>
-              <p:cNvPr id="116" name="math:006" descr="AI_AUTOFIGURE_NATIVE_MATH_V1:eyJjb250ZW50X3J1bnMiOlt7ImNhbm9uaWNhbF9sYXRleCI6Inpee1xcdGF1fV97dH0iLCJmb3JtdWxhX2lkIjoiRVEwMDYiLCJraW5kIjoibWF0aCIsImxhdGV4X3NoYTI1NiI6IjgxMmI1YjFjOGFmZDdhYzI0Nzc5YTQxYzhmMmE0ZDNiNzZlODAyYzNlNDk5NDc3MjdlM2Q4OTZhYmI3MmQ3ZjEiLCJtb2RlIjoiaW5saW5lIiwib21tbF9zaGEyNTYiOiIwYjA5Y2ZlY2EzYmZiNzFlMzRjMGY1ZmI2ZTY2NDUzZTMwMWFlZGI1Nzc5YmE1MTFhMGZiZDc0MDljMWZlN2M1Iiwic2VtYW50aWNfb21tbF9wcm9maWxlIjoib2ZmaWNlLW1hdGgtc2VtYW50aWMtdjIiLCJzZW1hbnRpY19vbW1sX3NoYTI1NiI6IjdiMDU0ZTcxNjkxNGEwYjY5OGE4N2NmZWM0NTQ3ZWYwYjY2NTA0YzFhYTU3YmI0NDkwN2Q0NGE0YzQ3NDgxZWQifV0sImZvcm11bGFzIjpbeyJjYW5vbmljYWxfbGF0ZXgiOiJ6XntcXHRhdX1fe3R9IiwiZm9ybXVsYV9pZCI6IkVRMDA2IiwibGF0ZXhfc2hhMjU2IjoiODEyYjViMWM4YWZkN2FjMjQ3NzlhNDFjOGYyYTRkM2I3NmU4MDJjM2U0OTk0NzcyN2UzZDg5NmFiYjcyZDdmMSIsIm1vZGUiOiJpbmxpbmUiLCJvbW1sX3NoYTI1NiI6IjBiMDljZmVjYTNiZmI3MWUzNGMwZjVmYjZlNjY0NTNlMzAxYWVkYjU3NzliYTUxMWEwZmJkNzQwOWMxZmU3YzUiLCJzZW1hbnRpY19vbW1sX3Byb2ZpbGUiOiJvZmZpY2UtbWF0aC1zZW1hbnRpYy12MiIsInNlbWFudGljX29tbWxfc2hhMjU2IjoiN2IwNTRlNzE2OTE0YTBiNjk4YTg3Y2ZlYzQ1NDdlZjBiNjY1MDRjMWFhNTdiYjQ0OTA3ZDQ0YTRjNDc0ODFlZCJ9XSwia2luZCI6Im5hdGl2ZV9vZmZpY2VfbWF0aCIsInBsYWNlaG9sZGVyX25hbWUiOiJtYXRoOjAwNiIsInNjaGVtYV92ZXJzaW9uIjoiMS4wIn0="/>
+              <p:cNvPr id="114" name="math:006" descr="AI_AUTOFIGURE_NATIVE_MATH_V1:eyJjb250ZW50X3J1bnMiOlt7ImNhbm9uaWNhbF9sYXRleCI6Inpee1xcdGF1fV97dH0iLCJmb3JtdWxhX2lkIjoiRVEwMDYiLCJraW5kIjoibWF0aCIsImxhdGV4X3NoYTI1NiI6IjgxMmI1YjFjOGFmZDdhYzI0Nzc5YTQxYzhmMmE0ZDNiNzZlODAyYzNlNDk5NDc3MjdlM2Q4OTZhYmI3MmQ3ZjEiLCJtb2RlIjoiaW5saW5lIiwib21tbF9zaGEyNTYiOiIwYjA5Y2ZlY2EzYmZiNzFlMzRjMGY1ZmI2ZTY2NDUzZTMwMWFlZGI1Nzc5YmE1MTFhMGZiZDc0MDljMWZlN2M1Iiwic2VtYW50aWNfb21tbF9wcm9maWxlIjoib2ZmaWNlLW1hdGgtc2VtYW50aWMtdjIiLCJzZW1hbnRpY19vbW1sX3NoYTI1NiI6IjdiMDU0ZTcxNjkxNGEwYjY5OGE4N2NmZWM0NTQ3ZWYwYjY2NTA0YzFhYTU3YmI0NDkwN2Q0NGE0YzQ3NDgxZWQifV0sImZvcm11bGFzIjpbeyJjYW5vbmljYWxfbGF0ZXgiOiJ6XntcXHRhdX1fe3R9IiwiZm9ybXVsYV9pZCI6IkVRMDA2IiwibGF0ZXhfc2hhMjU2IjoiODEyYjViMWM4YWZkN2FjMjQ3NzlhNDFjOGYyYTRkM2I3NmU4MDJjM2U0OTk0NzcyN2UzZDg5NmFiYjcyZDdmMSIsIm1vZGUiOiJpbmxpbmUiLCJvbW1sX3NoYTI1NiI6IjBiMDljZmVjYTNiZmI3MWUzNGMwZjVmYjZlNjY0NTNlMzAxYWVkYjU3NzliYTUxMWEwZmJkNzQwOWMxZmU3YzUiLCJzZW1hbnRpY19vbW1sX3Byb2ZpbGUiOiJvZmZpY2UtbWF0aC1zZW1hbnRpYy12MiIsInNlbWFudGljX29tbWxfc2hhMjU2IjoiN2IwNTRlNzE2OTE0YTBiNjk4YTg3Y2ZlYzQ1NDdlZjBiNjY1MDRjMWFhNTdiYjQ0OTA3ZDQ0YTRjNDc0ODFlZCJ9XSwia2luZCI6Im5hdGl2ZV9vZmZpY2VfbWF0aCIsInBsYWNlaG9sZGVyX25hbWUiOiJtYXRoOjAwNiIsInNjaGVtYV92ZXJzaW9uIjoiMS4wIn0="/>
               <p:cNvSpPr txBox="1"/>
               <p:nvPr/>
             </p:nvSpPr>
@@ -8350,52 +8386,64 @@
               <a:effectLst/>
             </p:spPr>
             <p:txBody>
-              <a:bodyPr wrap="none" anchor="t" lIns="0" rIns="0" tIns="0" bIns="0">
+              <a:bodyPr wrap="none" lIns="0" tIns="0" rIns="0" bIns="0" anchor="t">
                 <a:spAutoFit/>
               </a:bodyPr>
               <a:lstStyle/>
               <a:p>
                 <a:pPr algn="ctr"/>
                 <a14:m>
-                  <m:oMath xmlns:m="http://schemas.openxmlformats.org/officeDocument/2006/math">
-                    <m:sSubSup>
-                      <m:e>
-                        <m:r>
-                          <a:rPr lang="en-US" dirty="0" sz="1275">
-                            <a:solidFill>
-                              <a:srgbClr val="FFFFFF"/>
-                            </a:solidFill>
-                            <a:latin typeface="Cambria Math"/>
-                          </a:rPr>
-                          <m:t>z</m:t>
-                        </m:r>
-                      </m:e>
-                      <m:sub>
-                        <m:r>
-                          <a:rPr lang="en-US" dirty="0" sz="1275">
-                            <a:solidFill>
-                              <a:srgbClr val="FFFFFF"/>
-                            </a:solidFill>
-                            <a:latin typeface="Cambria Math"/>
-                          </a:rPr>
-                          <m:t>t</m:t>
-                        </m:r>
-                      </m:sub>
-                      <m:sup>
-                        <m:r>
-                          <a:rPr lang="en-US" dirty="0" sz="1275">
-                            <a:solidFill>
-                              <a:srgbClr val="FFFFFF"/>
-                            </a:solidFill>
-                            <a:latin typeface="Cambria Math"/>
-                          </a:rPr>
-                          <m:t>τ</m:t>
-                        </m:r>
-                      </m:sup>
-                    </m:sSubSup>
-                  </m:oMath>
+                  <m:oMathPara xmlns:m="http://schemas.openxmlformats.org/officeDocument/2006/math">
+                    <m:oMath>
+                      <m:sSubSup>
+                        <m:sSubSupPr>
+                          <m:ctrlPr>
+                            <a:rPr lang="en-US" sz="1275" dirty="0">
+                              <a:solidFill>
+                                <a:srgbClr val="FFFFFF"/>
+                              </a:solidFill>
+                              <a:latin typeface="Cambria Math"/>
+                            </a:rPr>
+                          </m:ctrlPr>
+                        </m:sSubSupPr>
+                        <m:e>
+                          <m:r>
+                            <a:rPr lang="en-US" sz="1275" dirty="0">
+                              <a:solidFill>
+                                <a:srgbClr val="FFFFFF"/>
+                              </a:solidFill>
+                              <a:latin typeface="Cambria Math"/>
+                            </a:rPr>
+                            <m:t>𝑧</m:t>
+                          </m:r>
+                        </m:e>
+                        <m:sub>
+                          <m:r>
+                            <a:rPr lang="en-US" sz="1275" dirty="0">
+                              <a:solidFill>
+                                <a:srgbClr val="FFFFFF"/>
+                              </a:solidFill>
+                              <a:latin typeface="Cambria Math"/>
+                            </a:rPr>
+                            <m:t>𝑡</m:t>
+                          </m:r>
+                        </m:sub>
+                        <m:sup>
+                          <m:r>
+                            <a:rPr lang="en-US" sz="1275" dirty="0">
+                              <a:solidFill>
+                                <a:srgbClr val="FFFFFF"/>
+                              </a:solidFill>
+                              <a:latin typeface="Cambria Math"/>
+                            </a:rPr>
+                            <m:t>𝜏</m:t>
+                          </m:r>
+                        </m:sup>
+                      </m:sSubSup>
+                    </m:oMath>
+                  </m:oMathPara>
                 </a14:m>
-                <a:endParaRPr lang="en-US" dirty="0" sz="1275">
+                <a:endParaRPr lang="en-US" sz="1275" dirty="0">
                   <a:solidFill>
                     <a:srgbClr val="FFFFFF"/>
                   </a:solidFill>
@@ -8405,10 +8453,10 @@
             </p:txBody>
           </p:sp>
         </mc:Choice>
-        <mc:Fallback>
+        <mc:Fallback xmlns="">
           <p:sp>
             <p:nvSpPr>
-              <p:cNvPr id="116" name="math:006" descr="AI_AUTOFIGURE_MATH_FALLBACK_ONLY_V1:eyJjb250ZW50X3J1bnMiOlt7ImNhbm9uaWNhbF9sYXRleCI6Inpee1xcdGF1fV97dH0iLCJmb3JtdWxhX2lkIjoiRVEwMDYiLCJraW5kIjoibWF0aCIsImxhdGV4X3NoYTI1NiI6IjgxMmI1YjFjOGFmZDdhYzI0Nzc5YTQxYzhmMmE0ZDNiNzZlODAyYzNlNDk5NDc3MjdlM2Q4OTZhYmI3MmQ3ZjEiLCJtb2RlIjoiaW5saW5lIiwib21tbF9zaGEyNTYiOiIwYjA5Y2ZlY2EzYmZiNzFlMzRjMGY1ZmI2ZTY2NDUzZTMwMWFlZGI1Nzc5YmE1MTFhMGZiZDc0MDljMWZlN2M1Iiwic2VtYW50aWNfb21tbF9wcm9maWxlIjoib2ZmaWNlLW1hdGgtc2VtYW50aWMtdjIiLCJzZW1hbnRpY19vbW1sX3NoYTI1NiI6IjdiMDU0ZTcxNjkxNGEwYjY5OGE4N2NmZWM0NTQ3ZWYwYjY2NTA0YzFhYTU3YmI0NDkwN2Q0NGE0YzQ3NDgxZWQifV0sImZvcm11bGFzIjpbeyJjYW5vbmljYWxfbGF0ZXgiOiJ6XntcXHRhdX1fe3R9IiwiZm9ybXVsYV9pZCI6IkVRMDA2IiwibGF0ZXhfc2hhMjU2IjoiODEyYjViMWM4YWZkN2FjMjQ3NzlhNDFjOGYyYTRkM2I3NmU4MDJjM2U0OTk0NzcyN2UzZDg5NmFiYjcyZDdmMSIsIm1vZGUiOiJpbmxpbmUiLCJvbW1sX3NoYTI1NiI6IjBiMDljZmVjYTNiZmI3MWUzNGMwZjVmYjZlNjY0NTNlMzAxYWVkYjU3NzliYTUxMWEwZmJkNzQwOWMxZmU3YzUiLCJzZW1hbnRpY19vbW1sX3Byb2ZpbGUiOiJvZmZpY2UtbWF0aC1zZW1hbnRpYy12MiIsInNlbWFudGljX29tbWxfc2hhMjU2IjoiN2IwNTRlNzE2OTE0YTBiNjk4YTg3Y2ZlYzQ1NDdlZjBiNjY1MDRjMWFhNTdiYjQ0OTA3ZDQ0YTRjNDc0ODFlZCJ9XSwia2luZCI6Im5hdGl2ZV9vZmZpY2VfbWF0aCIsInBsYWNlaG9sZGVyX25hbWUiOiJtYXRoOjAwNiIsInNjaGVtYV92ZXJzaW9uIjoiMS4wIn0="/>
+              <p:cNvPr id="114" name="math:006" descr="AI_AUTOFIGURE_MATH_FALLBACK_ONLY_V1:eyJjb250ZW50X3J1bnMiOlt7ImNhbm9uaWNhbF9sYXRleCI6Inpee1xcdGF1fV97dH0iLCJmb3JtdWxhX2lkIjoiRVEwMDYiLCJraW5kIjoibWF0aCIsImxhdGV4X3NoYTI1NiI6IjgxMmI1YjFjOGFmZDdhYzI0Nzc5YTQxYzhmMmE0ZDNiNzZlODAyYzNlNDk5NDc3MjdlM2Q4OTZhYmI3MmQ3ZjEiLCJtb2RlIjoiaW5saW5lIiwib21tbF9zaGEyNTYiOiIwYjA5Y2ZlY2EzYmZiNzFlMzRjMGY1ZmI2ZTY2NDUzZTMwMWFlZGI1Nzc5YmE1MTFhMGZiZDc0MDljMWZlN2M1Iiwic2VtYW50aWNfb21tbF9wcm9maWxlIjoib2ZmaWNlLW1hdGgtc2VtYW50aWMtdjIiLCJzZW1hbnRpY19vbW1sX3NoYTI1NiI6IjdiMDU0ZTcxNjkxNGEwYjY5OGE4N2NmZWM0NTQ3ZWYwYjY2NTA0YzFhYTU3YmI0NDkwN2Q0NGE0YzQ3NDgxZWQifV0sImZvcm11bGFzIjpbeyJjYW5vbmljYWxfbGF0ZXgiOiJ6XntcXHRhdX1fe3R9IiwiZm9ybXVsYV9pZCI6IkVRMDA2IiwibGF0ZXhfc2hhMjU2IjoiODEyYjViMWM4YWZkN2FjMjQ3NzlhNDFjOGYyYTRkM2I3NmU4MDJjM2U0OTk0NzcyN2UzZDg5NmFiYjcyZDdmMSIsIm1vZGUiOiJpbmxpbmUiLCJvbW1sX3NoYTI1NiI6IjBiMDljZmVjYTNiZmI3MWUzNGMwZjVmYjZlNjY0NTNlMzAxYWVkYjU3NzliYTUxMWEwZmJkNzQwOWMxZmU3YzUiLCJzZW1hbnRpY19vbW1sX3Byb2ZpbGUiOiJvZmZpY2UtbWF0aC1zZW1hbnRpYy12MiIsInNlbWFudGljX29tbWxfc2hhMjU2IjoiN2IwNTRlNzE2OTE0YTBiNjk4YTg3Y2ZlYzQ1NDdlZjBiNjY1MDRjMWFhNTdiYjQ0OTA3ZDQ0YTRjNDc0ODFlZCJ9XSwia2luZCI6Im5hdGl2ZV9vZmZpY2VfbWF0aCIsInBsYWNlaG9sZGVyX25hbWUiOiJtYXRoOjAwNiIsInNjaGVtYV92ZXJzaW9uIjoiMS4wIn0="/>
               <p:cNvSpPr txBox="1"/>
               <p:nvPr/>
             </p:nvSpPr>
@@ -8424,7 +8472,7 @@
               <a:effectLst/>
             </p:spPr>
             <p:txBody>
-              <a:bodyPr wrap="none" anchor="t" lIns="0" rIns="0" tIns="0" bIns="0">
+              <a:bodyPr wrap="none" lIns="0" tIns="0" rIns="0" bIns="0" anchor="t">
                 <a:spAutoFit/>
               </a:bodyPr>
               <a:lstStyle/>
@@ -8448,11 +8496,11 @@
           </p:sp>
         </mc:Fallback>
       </mc:AlternateContent>
-      <mc:AlternateContent xmlns:mc="http://schemas.openxmlformats.org/markup-compatibility/2006">
-        <mc:Choice xmlns:a14="http://schemas.microsoft.com/office/drawing/2010/main" Requires="a14">
+      <mc:AlternateContent xmlns:mc="http://schemas.openxmlformats.org/markup-compatibility/2006" xmlns:a14="http://schemas.microsoft.com/office/drawing/2010/main">
+        <mc:Choice Requires="a14">
           <p:sp>
             <p:nvSpPr>
-              <p:cNvPr id="117" name="math:007" descr="AI_AUTOFIGURE_NATIVE_MATH_V1:eyJjb250ZW50X3J1bnMiOlt7ImNhbm9uaWNhbF9sYXRleCI6Inpee1xcdGF1fV97dCsxfSIsImZvcm11bGFfaWQiOiJFUTAwNyIsImtpbmQiOiJtYXRoIiwibGF0ZXhfc2hhMjU2IjoiMmM1ZTJlMzU3Mzg2MTFkZDE4YzEwNzBlZTQ2YjQ1MGU5YjE0ZGViZDFmYmU3ZDJlYzI0OWQ4OWMxZThmODU5MSIsIm1vZGUiOiJpbmxpbmUiLCJvbW1sX3NoYTI1NiI6IjY2YmY1ZjM0M2NjY2YwNTI1M2NjZGI5ODYxM2Y4NTFjZTYzMmVkOWNmMjBhMjE3MDc5MDUyYWE2NjRlYWQ3ZTkiLCJzZW1hbnRpY19vbW1sX3Byb2ZpbGUiOiJvZmZpY2UtbWF0aC1zZW1hbnRpYy12MiIsInNlbWFudGljX29tbWxfc2hhMjU2IjoiMjMzM2NjYjhkM2RjMTg3N2JiNDFkYzBkMmJlM2NmY2MxMjJjMGZjNDQyMzk3Mzk4YmI0MzlkMWMwNzdhMjY5OCJ9XSwiZm9ybXVsYXMiOlt7ImNhbm9uaWNhbF9sYXRleCI6Inpee1xcdGF1fV97dCsxfSIsImZvcm11bGFfaWQiOiJFUTAwNyIsImxhdGV4X3NoYTI1NiI6IjJjNWUyZTM1NzM4NjExZGQxOGMxMDcwZWU0NmI0NTBlOWIxNGRlYmQxZmJlN2QyZWMyNDlkODljMWU4Zjg1OTEiLCJtb2RlIjoiaW5saW5lIiwib21tbF9zaGEyNTYiOiI2NmJmNWYzNDNjY2NmMDUyNTNjY2RiOTg2MTNmODUxY2U2MzJlZDljZjIwYTIxNzA3OTA1MmFhNjY0ZWFkN2U5Iiwic2VtYW50aWNfb21tbF9wcm9maWxlIjoib2ZmaWNlLW1hdGgtc2VtYW50aWMtdjIiLCJzZW1hbnRpY19vbW1sX3NoYTI1NiI6IjIzMzNjY2I4ZDNkYzE4NzdiYjQxZGMwZDJiZTNjZmNjMTIyYzBmYzQ0MjM5NzM5OGJiNDM5ZDFjMDc3YTI2OTgifV0sImtpbmQiOiJuYXRpdmVfb2ZmaWNlX21hdGgiLCJwbGFjZWhvbGRlcl9uYW1lIjoibWF0aDowMDciLCJzY2hlbWFfdmVyc2lvbiI6IjEuMCJ9"/>
+              <p:cNvPr id="115" name="math:007" descr="AI_AUTOFIGURE_NATIVE_MATH_V1:eyJjb250ZW50X3J1bnMiOlt7ImNhbm9uaWNhbF9sYXRleCI6Inpee1xcdGF1fV97dCsxfSIsImZvcm11bGFfaWQiOiJFUTAwNyIsImtpbmQiOiJtYXRoIiwibGF0ZXhfc2hhMjU2IjoiMmM1ZTJlMzU3Mzg2MTFkZDE4YzEwNzBlZTQ2YjQ1MGU5YjE0ZGViZDFmYmU3ZDJlYzI0OWQ4OWMxZThmODU5MSIsIm1vZGUiOiJpbmxpbmUiLCJvbW1sX3NoYTI1NiI6IjY2YmY1ZjM0M2NjY2YwNTI1M2NjZGI5ODYxM2Y4NTFjZTYzMmVkOWNmMjBhMjE3MDc5MDUyYWE2NjRlYWQ3ZTkiLCJzZW1hbnRpY19vbW1sX3Byb2ZpbGUiOiJvZmZpY2UtbWF0aC1zZW1hbnRpYy12MiIsInNlbWFudGljX29tbWxfc2hhMjU2IjoiMjMzM2NjYjhkM2RjMTg3N2JiNDFkYzBkMmJlM2NmY2MxMjJjMGZjNDQyMzk3Mzk4YmI0MzlkMWMwNzdhMjY5OCJ9XSwiZm9ybXVsYXMiOlt7ImNhbm9uaWNhbF9sYXRleCI6Inpee1xcdGF1fV97dCsxfSIsImZvcm11bGFfaWQiOiJFUTAwNyIsImxhdGV4X3NoYTI1NiI6IjJjNWUyZTM1NzM4NjExZGQxOGMxMDcwZWU0NmI0NTBlOWIxNGRlYmQxZmJlN2QyZWMyNDlkODljMWU4Zjg1OTEiLCJtb2RlIjoiaW5saW5lIiwib21tbF9zaGEyNTYiOiI2NmJmNWYzNDNjY2NmMDUyNTNjY2RiOTg2MTNmODUxY2U2MzJlZDljZjIwYTIxNzA3OTA1MmFhNjY0ZWFkN2U5Iiwic2VtYW50aWNfb21tbF9wcm9maWxlIjoib2ZmaWNlLW1hdGgtc2VtYW50aWMtdjIiLCJzZW1hbnRpY19vbW1sX3NoYTI1NiI6IjIzMzNjY2I4ZDNkYzE4NzdiYjQxZGMwZDJiZTNjZmNjMTIyYzBmYzQ0MjM5NzM5OGJiNDM5ZDFjMDc3YTI2OTgifV0sImtpbmQiOiJuYXRpdmVfb2ZmaWNlX21hdGgiLCJwbGFjZWhvbGRlcl9uYW1lIjoibWF0aDowMDciLCJzY2hlbWFfdmVyc2lvbiI6IjEuMCJ9"/>
               <p:cNvSpPr txBox="1"/>
               <p:nvPr/>
             </p:nvSpPr>
@@ -8468,52 +8516,73 @@
               <a:effectLst/>
             </p:spPr>
             <p:txBody>
-              <a:bodyPr wrap="none" anchor="t" lIns="0" rIns="0" tIns="0" bIns="0">
+              <a:bodyPr wrap="none" lIns="0" tIns="0" rIns="0" bIns="0" anchor="t">
                 <a:spAutoFit/>
               </a:bodyPr>
               <a:lstStyle/>
               <a:p>
                 <a:pPr algn="ctr"/>
                 <a14:m>
-                  <m:oMath xmlns:m="http://schemas.openxmlformats.org/officeDocument/2006/math">
-                    <m:sSubSup>
-                      <m:e>
-                        <m:r>
-                          <a:rPr lang="en-US" dirty="0" sz="1275">
-                            <a:solidFill>
-                              <a:srgbClr val="FFFFFF"/>
-                            </a:solidFill>
-                            <a:latin typeface="Cambria Math"/>
-                          </a:rPr>
-                          <m:t>z</m:t>
-                        </m:r>
-                      </m:e>
-                      <m:sub>
-                        <m:r>
-                          <a:rPr lang="en-US" dirty="0" sz="1275">
-                            <a:solidFill>
-                              <a:srgbClr val="FFFFFF"/>
-                            </a:solidFill>
-                            <a:latin typeface="Cambria Math"/>
-                          </a:rPr>
-                          <m:t>t+1</m:t>
-                        </m:r>
-                      </m:sub>
-                      <m:sup>
-                        <m:r>
-                          <a:rPr lang="en-US" dirty="0" sz="1275">
-                            <a:solidFill>
-                              <a:srgbClr val="FFFFFF"/>
-                            </a:solidFill>
-                            <a:latin typeface="Cambria Math"/>
-                          </a:rPr>
-                          <m:t>τ</m:t>
-                        </m:r>
-                      </m:sup>
-                    </m:sSubSup>
-                  </m:oMath>
+                  <m:oMathPara xmlns:m="http://schemas.openxmlformats.org/officeDocument/2006/math">
+                    <m:oMath>
+                      <m:sSubSup>
+                        <m:sSubSupPr>
+                          <m:ctrlPr>
+                            <a:rPr lang="en-US" sz="1275" dirty="0">
+                              <a:solidFill>
+                                <a:srgbClr val="FFFFFF"/>
+                              </a:solidFill>
+                              <a:latin typeface="Cambria Math"/>
+                            </a:rPr>
+                          </m:ctrlPr>
+                        </m:sSubSupPr>
+                        <m:e>
+                          <m:r>
+                            <a:rPr lang="en-US" sz="1275" dirty="0">
+                              <a:solidFill>
+                                <a:srgbClr val="FFFFFF"/>
+                              </a:solidFill>
+                              <a:latin typeface="Cambria Math"/>
+                            </a:rPr>
+                            <m:t>𝑧</m:t>
+                          </m:r>
+                        </m:e>
+                        <m:sub>
+                          <m:r>
+                            <a:rPr lang="en-US" sz="1275" dirty="0">
+                              <a:solidFill>
+                                <a:srgbClr val="FFFFFF"/>
+                              </a:solidFill>
+                              <a:latin typeface="Cambria Math"/>
+                            </a:rPr>
+                            <m:t>𝑡</m:t>
+                          </m:r>
+                          <m:r>
+                            <a:rPr lang="en-US" sz="1275" dirty="0">
+                              <a:solidFill>
+                                <a:srgbClr val="FFFFFF"/>
+                              </a:solidFill>
+                              <a:latin typeface="Cambria Math"/>
+                            </a:rPr>
+                            <m:t>+1</m:t>
+                          </m:r>
+                        </m:sub>
+                        <m:sup>
+                          <m:r>
+                            <a:rPr lang="en-US" sz="1275" dirty="0">
+                              <a:solidFill>
+                                <a:srgbClr val="FFFFFF"/>
+                              </a:solidFill>
+                              <a:latin typeface="Cambria Math"/>
+                            </a:rPr>
+                            <m:t>𝜏</m:t>
+                          </m:r>
+                        </m:sup>
+                      </m:sSubSup>
+                    </m:oMath>
+                  </m:oMathPara>
                 </a14:m>
-                <a:endParaRPr lang="en-US" dirty="0" sz="1275">
+                <a:endParaRPr lang="en-US" sz="1275" dirty="0">
                   <a:solidFill>
                     <a:srgbClr val="FFFFFF"/>
                   </a:solidFill>
@@ -8523,10 +8592,10 @@
             </p:txBody>
           </p:sp>
         </mc:Choice>
-        <mc:Fallback>
+        <mc:Fallback xmlns="">
           <p:sp>
             <p:nvSpPr>
-              <p:cNvPr id="117" name="math:007" descr="AI_AUTOFIGURE_MATH_FALLBACK_ONLY_V1:eyJjb250ZW50X3J1bnMiOlt7ImNhbm9uaWNhbF9sYXRleCI6Inpee1xcdGF1fV97dCsxfSIsImZvcm11bGFfaWQiOiJFUTAwNyIsImtpbmQiOiJtYXRoIiwibGF0ZXhfc2hhMjU2IjoiMmM1ZTJlMzU3Mzg2MTFkZDE4YzEwNzBlZTQ2YjQ1MGU5YjE0ZGViZDFmYmU3ZDJlYzI0OWQ4OWMxZThmODU5MSIsIm1vZGUiOiJpbmxpbmUiLCJvbW1sX3NoYTI1NiI6IjY2YmY1ZjM0M2NjY2YwNTI1M2NjZGI5ODYxM2Y4NTFjZTYzMmVkOWNmMjBhMjE3MDc5MDUyYWE2NjRlYWQ3ZTkiLCJzZW1hbnRpY19vbW1sX3Byb2ZpbGUiOiJvZmZpY2UtbWF0aC1zZW1hbnRpYy12MiIsInNlbWFudGljX29tbWxfc2hhMjU2IjoiMjMzM2NjYjhkM2RjMTg3N2JiNDFkYzBkMmJlM2NmY2MxMjJjMGZjNDQyMzk3Mzk4YmI0MzlkMWMwNzdhMjY5OCJ9XSwiZm9ybXVsYXMiOlt7ImNhbm9uaWNhbF9sYXRleCI6Inpee1xcdGF1fV97dCsxfSIsImZvcm11bGFfaWQiOiJFUTAwNyIsImxhdGV4X3NoYTI1NiI6IjJjNWUyZTM1NzM4NjExZGQxOGMxMDcwZWU0NmI0NTBlOWIxNGRlYmQxZmJlN2QyZWMyNDlkODljMWU4Zjg1OTEiLCJtb2RlIjoiaW5saW5lIiwib21tbF9zaGEyNTYiOiI2NmJmNWYzNDNjY2NmMDUyNTNjY2RiOTg2MTNmODUxY2U2MzJlZDljZjIwYTIxNzA3OTA1MmFhNjY0ZWFkN2U5Iiwic2VtYW50aWNfb21tbF9wcm9maWxlIjoib2ZmaWNlLW1hdGgtc2VtYW50aWMtdjIiLCJzZW1hbnRpY19vbW1sX3NoYTI1NiI6IjIzMzNjY2I4ZDNkYzE4NzdiYjQxZGMwZDJiZTNjZmNjMTIyYzBmYzQ0MjM5NzM5OGJiNDM5ZDFjMDc3YTI2OTgifV0sImtpbmQiOiJuYXRpdmVfb2ZmaWNlX21hdGgiLCJwbGFjZWhvbGRlcl9uYW1lIjoibWF0aDowMDciLCJzY2hlbWFfdmVyc2lvbiI6IjEuMCJ9"/>
+              <p:cNvPr id="115" name="math:007" descr="AI_AUTOFIGURE_MATH_FALLBACK_ONLY_V1:eyJjb250ZW50X3J1bnMiOlt7ImNhbm9uaWNhbF9sYXRleCI6Inpee1xcdGF1fV97dCsxfSIsImZvcm11bGFfaWQiOiJFUTAwNyIsImtpbmQiOiJtYXRoIiwibGF0ZXhfc2hhMjU2IjoiMmM1ZTJlMzU3Mzg2MTFkZDE4YzEwNzBlZTQ2YjQ1MGU5YjE0ZGViZDFmYmU3ZDJlYzI0OWQ4OWMxZThmODU5MSIsIm1vZGUiOiJpbmxpbmUiLCJvbW1sX3NoYTI1NiI6IjY2YmY1ZjM0M2NjY2YwNTI1M2NjZGI5ODYxM2Y4NTFjZTYzMmVkOWNmMjBhMjE3MDc5MDUyYWE2NjRlYWQ3ZTkiLCJzZW1hbnRpY19vbW1sX3Byb2ZpbGUiOiJvZmZpY2UtbWF0aC1zZW1hbnRpYy12MiIsInNlbWFudGljX29tbWxfc2hhMjU2IjoiMjMzM2NjYjhkM2RjMTg3N2JiNDFkYzBkMmJlM2NmY2MxMjJjMGZjNDQyMzk3Mzk4YmI0MzlkMWMwNzdhMjY5OCJ9XSwiZm9ybXVsYXMiOlt7ImNhbm9uaWNhbF9sYXRleCI6Inpee1xcdGF1fV97dCsxfSIsImZvcm11bGFfaWQiOiJFUTAwNyIsImxhdGV4X3NoYTI1NiI6IjJjNWUyZTM1NzM4NjExZGQxOGMxMDcwZWU0NmI0NTBlOWIxNGRlYmQxZmJlN2QyZWMyNDlkODljMWU4Zjg1OTEiLCJtb2RlIjoiaW5saW5lIiwib21tbF9zaGEyNTYiOiI2NmJmNWYzNDNjY2NmMDUyNTNjY2RiOTg2MTNmODUxY2U2MzJlZDljZjIwYTIxNzA3OTA1MmFhNjY0ZWFkN2U5Iiwic2VtYW50aWNfb21tbF9wcm9maWxlIjoib2ZmaWNlLW1hdGgtc2VtYW50aWMtdjIiLCJzZW1hbnRpY19vbW1sX3NoYTI1NiI6IjIzMzNjY2I4ZDNkYzE4NzdiYjQxZGMwZDJiZTNjZmNjMTIyYzBmYzQ0MjM5NzM5OGJiNDM5ZDFjMDc3YTI2OTgifV0sImtpbmQiOiJuYXRpdmVfb2ZmaWNlX21hdGgiLCJwbGFjZWhvbGRlcl9uYW1lIjoibWF0aDowMDciLCJzY2hlbWFfdmVyc2lvbiI6IjEuMCJ9"/>
               <p:cNvSpPr txBox="1"/>
               <p:nvPr/>
             </p:nvSpPr>
@@ -8542,7 +8611,7 @@
               <a:effectLst/>
             </p:spPr>
             <p:txBody>
-              <a:bodyPr wrap="none" anchor="t" lIns="0" rIns="0" tIns="0" bIns="0">
+              <a:bodyPr wrap="none" lIns="0" tIns="0" rIns="0" bIns="0" anchor="t">
                 <a:spAutoFit/>
               </a:bodyPr>
               <a:lstStyle/>
@@ -8566,11 +8635,11 @@
           </p:sp>
         </mc:Fallback>
       </mc:AlternateContent>
-      <mc:AlternateContent xmlns:mc="http://schemas.openxmlformats.org/markup-compatibility/2006">
-        <mc:Choice xmlns:a14="http://schemas.microsoft.com/office/drawing/2010/main" Requires="a14">
+      <mc:AlternateContent xmlns:mc="http://schemas.openxmlformats.org/markup-compatibility/2006" xmlns:a14="http://schemas.microsoft.com/office/drawing/2010/main">
+        <mc:Choice Requires="a14">
           <p:sp>
             <p:nvSpPr>
-              <p:cNvPr id="118" name="math:008" descr="AI_AUTOFIGURE_NATIVE_MATH_V1:eyJjb250ZW50X3J1bnMiOlt7ImNhbm9uaWNhbF9sYXRleCI6Inpee1xcdGF1fV97dCsyfSIsImZvcm11bGFfaWQiOiJFUTAwOCIsImtpbmQiOiJtYXRoIiwibGF0ZXhfc2hhMjU2IjoiZjE3MjkyMTZjNmIzNGI3ODc1N2JhN2I1NThmZTBlZjUzN2Q5YjM2ZTg1ZmY4NmE0ZTA0NjQ5ZmI5OTFmMWE0ZiIsIm1vZGUiOiJpbmxpbmUiLCJvbW1sX3NoYTI1NiI6IjU4YTU0YjQ2NDc2NGExYWVlOWMxNDQ1NTdjNjRhMjAxYjBjOGY5Zjk2MDE0ZjVlNDkwNmJhOTM4NDEzZjFmNDUiLCJzZW1hbnRpY19vbW1sX3Byb2ZpbGUiOiJvZmZpY2UtbWF0aC1zZW1hbnRpYy12MiIsInNlbWFudGljX29tbWxfc2hhMjU2IjoiMTc4YzVhMDM3MDY3NGFjYzc2NGI3OGYxNWExMGU0MmM5ZTNlZTRjZmZlY2Y5NjU5ZjgzMzViMjZlNzMyZmZmZSJ9XSwiZm9ybXVsYXMiOlt7ImNhbm9uaWNhbF9sYXRleCI6Inpee1xcdGF1fV97dCsyfSIsImZvcm11bGFfaWQiOiJFUTAwOCIsImxhdGV4X3NoYTI1NiI6ImYxNzI5MjE2YzZiMzRiNzg3NTdiYTdiNTU4ZmUwZWY1MzdkOWIzNmU4NWZmODZhNGUwNDY0OWZiOTkxZjFhNGYiLCJtb2RlIjoiaW5saW5lIiwib21tbF9zaGEyNTYiOiI1OGE1NGI0NjQ3NjRhMWFlZTljMTQ0NTU3YzY0YTIwMWIwYzhmOWY5NjAxNGY1ZTQ5MDZiYTkzODQxM2YxZjQ1Iiwic2VtYW50aWNfb21tbF9wcm9maWxlIjoib2ZmaWNlLW1hdGgtc2VtYW50aWMtdjIiLCJzZW1hbnRpY19vbW1sX3NoYTI1NiI6IjE3OGM1YTAzNzA2NzRhY2M3NjRiNzhmMTVhMTBlNDJjOWUzZWU0Y2ZmZWNmOTY1OWY4MzM1YjI2ZTczMmZmZmUifV0sImtpbmQiOiJuYXRpdmVfb2ZmaWNlX21hdGgiLCJwbGFjZWhvbGRlcl9uYW1lIjoibWF0aDowMDgiLCJzY2hlbWFfdmVyc2lvbiI6IjEuMCJ9"/>
+              <p:cNvPr id="116" name="math:008" descr="AI_AUTOFIGURE_NATIVE_MATH_V1:eyJjb250ZW50X3J1bnMiOlt7ImNhbm9uaWNhbF9sYXRleCI6Inpee1xcdGF1fV97dCsyfSIsImZvcm11bGFfaWQiOiJFUTAwOCIsImtpbmQiOiJtYXRoIiwibGF0ZXhfc2hhMjU2IjoiZjE3MjkyMTZjNmIzNGI3ODc1N2JhN2I1NThmZTBlZjUzN2Q5YjM2ZTg1ZmY4NmE0ZTA0NjQ5ZmI5OTFmMWE0ZiIsIm1vZGUiOiJpbmxpbmUiLCJvbW1sX3NoYTI1NiI6IjU4YTU0YjQ2NDc2NGExYWVlOWMxNDQ1NTdjNjRhMjAxYjBjOGY5Zjk2MDE0ZjVlNDkwNmJhOTM4NDEzZjFmNDUiLCJzZW1hbnRpY19vbW1sX3Byb2ZpbGUiOiJvZmZpY2UtbWF0aC1zZW1hbnRpYy12MiIsInNlbWFudGljX29tbWxfc2hhMjU2IjoiMTc4YzVhMDM3MDY3NGFjYzc2NGI3OGYxNWExMGU0MmM5ZTNlZTRjZmZlY2Y5NjU5ZjgzMzViMjZlNzMyZmZmZSJ9XSwiZm9ybXVsYXMiOlt7ImNhbm9uaWNhbF9sYXRleCI6Inpee1xcdGF1fV97dCsyfSIsImZvcm11bGFfaWQiOiJFUTAwOCIsImxhdGV4X3NoYTI1NiI6ImYxNzI5MjE2YzZiMzRiNzg3NTdiYTdiNTU4ZmUwZWY1MzdkOWIzNmU4NWZmODZhNGUwNDY0OWZiOTkxZjFhNGYiLCJtb2RlIjoiaW5saW5lIiwib21tbF9zaGEyNTYiOiI1OGE1NGI0NjQ3NjRhMWFlZTljMTQ0NTU3YzY0YTIwMWIwYzhmOWY5NjAxNGY1ZTQ5MDZiYTkzODQxM2YxZjQ1Iiwic2VtYW50aWNfb21tbF9wcm9maWxlIjoib2ZmaWNlLW1hdGgtc2VtYW50aWMtdjIiLCJzZW1hbnRpY19vbW1sX3NoYTI1NiI6IjE3OGM1YTAzNzA2NzRhY2M3NjRiNzhmMTVhMTBlNDJjOWUzZWU0Y2ZmZWNmOTY1OWY4MzM1YjI2ZTczMmZmZmUifV0sImtpbmQiOiJuYXRpdmVfb2ZmaWNlX21hdGgiLCJwbGFjZWhvbGRlcl9uYW1lIjoibWF0aDowMDgiLCJzY2hlbWFfdmVyc2lvbiI6IjEuMCJ9"/>
               <p:cNvSpPr txBox="1"/>
               <p:nvPr/>
             </p:nvSpPr>
@@ -8586,52 +8655,73 @@
               <a:effectLst/>
             </p:spPr>
             <p:txBody>
-              <a:bodyPr wrap="none" anchor="t" lIns="0" rIns="0" tIns="0" bIns="0">
+              <a:bodyPr wrap="none" lIns="0" tIns="0" rIns="0" bIns="0" anchor="t">
                 <a:spAutoFit/>
               </a:bodyPr>
               <a:lstStyle/>
               <a:p>
                 <a:pPr algn="ctr"/>
                 <a14:m>
-                  <m:oMath xmlns:m="http://schemas.openxmlformats.org/officeDocument/2006/math">
-                    <m:sSubSup>
-                      <m:e>
-                        <m:r>
-                          <a:rPr lang="en-US" dirty="0" sz="1275">
-                            <a:solidFill>
-                              <a:srgbClr val="FFFFFF"/>
-                            </a:solidFill>
-                            <a:latin typeface="Cambria Math"/>
-                          </a:rPr>
-                          <m:t>z</m:t>
-                        </m:r>
-                      </m:e>
-                      <m:sub>
-                        <m:r>
-                          <a:rPr lang="en-US" dirty="0" sz="1275">
-                            <a:solidFill>
-                              <a:srgbClr val="FFFFFF"/>
-                            </a:solidFill>
-                            <a:latin typeface="Cambria Math"/>
-                          </a:rPr>
-                          <m:t>t+2</m:t>
-                        </m:r>
-                      </m:sub>
-                      <m:sup>
-                        <m:r>
-                          <a:rPr lang="en-US" dirty="0" sz="1275">
-                            <a:solidFill>
-                              <a:srgbClr val="FFFFFF"/>
-                            </a:solidFill>
-                            <a:latin typeface="Cambria Math"/>
-                          </a:rPr>
-                          <m:t>τ</m:t>
-                        </m:r>
-                      </m:sup>
-                    </m:sSubSup>
-                  </m:oMath>
+                  <m:oMathPara xmlns:m="http://schemas.openxmlformats.org/officeDocument/2006/math">
+                    <m:oMath>
+                      <m:sSubSup>
+                        <m:sSubSupPr>
+                          <m:ctrlPr>
+                            <a:rPr lang="en-US" sz="1275" dirty="0">
+                              <a:solidFill>
+                                <a:srgbClr val="FFFFFF"/>
+                              </a:solidFill>
+                              <a:latin typeface="Cambria Math"/>
+                            </a:rPr>
+                          </m:ctrlPr>
+                        </m:sSubSupPr>
+                        <m:e>
+                          <m:r>
+                            <a:rPr lang="en-US" sz="1275" dirty="0">
+                              <a:solidFill>
+                                <a:srgbClr val="FFFFFF"/>
+                              </a:solidFill>
+                              <a:latin typeface="Cambria Math"/>
+                            </a:rPr>
+                            <m:t>𝑧</m:t>
+                          </m:r>
+                        </m:e>
+                        <m:sub>
+                          <m:r>
+                            <a:rPr lang="en-US" sz="1275" dirty="0">
+                              <a:solidFill>
+                                <a:srgbClr val="FFFFFF"/>
+                              </a:solidFill>
+                              <a:latin typeface="Cambria Math"/>
+                            </a:rPr>
+                            <m:t>𝑡</m:t>
+                          </m:r>
+                          <m:r>
+                            <a:rPr lang="en-US" sz="1275" dirty="0">
+                              <a:solidFill>
+                                <a:srgbClr val="FFFFFF"/>
+                              </a:solidFill>
+                              <a:latin typeface="Cambria Math"/>
+                            </a:rPr>
+                            <m:t>+2</m:t>
+                          </m:r>
+                        </m:sub>
+                        <m:sup>
+                          <m:r>
+                            <a:rPr lang="en-US" sz="1275" dirty="0">
+                              <a:solidFill>
+                                <a:srgbClr val="FFFFFF"/>
+                              </a:solidFill>
+                              <a:latin typeface="Cambria Math"/>
+                            </a:rPr>
+                            <m:t>𝜏</m:t>
+                          </m:r>
+                        </m:sup>
+                      </m:sSubSup>
+                    </m:oMath>
+                  </m:oMathPara>
                 </a14:m>
-                <a:endParaRPr lang="en-US" dirty="0" sz="1275">
+                <a:endParaRPr lang="en-US" sz="1275" dirty="0">
                   <a:solidFill>
                     <a:srgbClr val="FFFFFF"/>
                   </a:solidFill>
@@ -8641,10 +8731,10 @@
             </p:txBody>
           </p:sp>
         </mc:Choice>
-        <mc:Fallback>
+        <mc:Fallback xmlns="">
           <p:sp>
             <p:nvSpPr>
-              <p:cNvPr id="118" name="math:008" descr="AI_AUTOFIGURE_MATH_FALLBACK_ONLY_V1:eyJjb250ZW50X3J1bnMiOlt7ImNhbm9uaWNhbF9sYXRleCI6Inpee1xcdGF1fV97dCsyfSIsImZvcm11bGFfaWQiOiJFUTAwOCIsImtpbmQiOiJtYXRoIiwibGF0ZXhfc2hhMjU2IjoiZjE3MjkyMTZjNmIzNGI3ODc1N2JhN2I1NThmZTBlZjUzN2Q5YjM2ZTg1ZmY4NmE0ZTA0NjQ5ZmI5OTFmMWE0ZiIsIm1vZGUiOiJpbmxpbmUiLCJvbW1sX3NoYTI1NiI6IjU4YTU0YjQ2NDc2NGExYWVlOWMxNDQ1NTdjNjRhMjAxYjBjOGY5Zjk2MDE0ZjVlNDkwNmJhOTM4NDEzZjFmNDUiLCJzZW1hbnRpY19vbW1sX3Byb2ZpbGUiOiJvZmZpY2UtbWF0aC1zZW1hbnRpYy12MiIsInNlbWFudGljX29tbWxfc2hhMjU2IjoiMTc4YzVhMDM3MDY3NGFjYzc2NGI3OGYxNWExMGU0MmM5ZTNlZTRjZmZlY2Y5NjU5ZjgzMzViMjZlNzMyZmZmZSJ9XSwiZm9ybXVsYXMiOlt7ImNhbm9uaWNhbF9sYXRleCI6Inpee1xcdGF1fV97dCsyfSIsImZvcm11bGFfaWQiOiJFUTAwOCIsImxhdGV4X3NoYTI1NiI6ImYxNzI5MjE2YzZiMzRiNzg3NTdiYTdiNTU4ZmUwZWY1MzdkOWIzNmU4NWZmODZhNGUwNDY0OWZiOTkxZjFhNGYiLCJtb2RlIjoiaW5saW5lIiwib21tbF9zaGEyNTYiOiI1OGE1NGI0NjQ3NjRhMWFlZTljMTQ0NTU3YzY0YTIwMWIwYzhmOWY5NjAxNGY1ZTQ5MDZiYTkzODQxM2YxZjQ1Iiwic2VtYW50aWNfb21tbF9wcm9maWxlIjoib2ZmaWNlLW1hdGgtc2VtYW50aWMtdjIiLCJzZW1hbnRpY19vbW1sX3NoYTI1NiI6IjE3OGM1YTAzNzA2NzRhY2M3NjRiNzhmMTVhMTBlNDJjOWUzZWU0Y2ZmZWNmOTY1OWY4MzM1YjI2ZTczMmZmZmUifV0sImtpbmQiOiJuYXRpdmVfb2ZmaWNlX21hdGgiLCJwbGFjZWhvbGRlcl9uYW1lIjoibWF0aDowMDgiLCJzY2hlbWFfdmVyc2lvbiI6IjEuMCJ9"/>
+              <p:cNvPr id="116" name="math:008" descr="AI_AUTOFIGURE_MATH_FALLBACK_ONLY_V1:eyJjb250ZW50X3J1bnMiOlt7ImNhbm9uaWNhbF9sYXRleCI6Inpee1xcdGF1fV97dCsyfSIsImZvcm11bGFfaWQiOiJFUTAwOCIsImtpbmQiOiJtYXRoIiwibGF0ZXhfc2hhMjU2IjoiZjE3MjkyMTZjNmIzNGI3ODc1N2JhN2I1NThmZTBlZjUzN2Q5YjM2ZTg1ZmY4NmE0ZTA0NjQ5ZmI5OTFmMWE0ZiIsIm1vZGUiOiJpbmxpbmUiLCJvbW1sX3NoYTI1NiI6IjU4YTU0YjQ2NDc2NGExYWVlOWMxNDQ1NTdjNjRhMjAxYjBjOGY5Zjk2MDE0ZjVlNDkwNmJhOTM4NDEzZjFmNDUiLCJzZW1hbnRpY19vbW1sX3Byb2ZpbGUiOiJvZmZpY2UtbWF0aC1zZW1hbnRpYy12MiIsInNlbWFudGljX29tbWxfc2hhMjU2IjoiMTc4YzVhMDM3MDY3NGFjYzc2NGI3OGYxNWExMGU0MmM5ZTNlZTRjZmZlY2Y5NjU5ZjgzMzViMjZlNzMyZmZmZSJ9XSwiZm9ybXVsYXMiOlt7ImNhbm9uaWNhbF9sYXRleCI6Inpee1xcdGF1fV97dCsyfSIsImZvcm11bGFfaWQiOiJFUTAwOCIsImxhdGV4X3NoYTI1NiI6ImYxNzI5MjE2YzZiMzRiNzg3NTdiYTdiNTU4ZmUwZWY1MzdkOWIzNmU4NWZmODZhNGUwNDY0OWZiOTkxZjFhNGYiLCJtb2RlIjoiaW5saW5lIiwib21tbF9zaGEyNTYiOiI1OGE1NGI0NjQ3NjRhMWFlZTljMTQ0NTU3YzY0YTIwMWIwYzhmOWY5NjAxNGY1ZTQ5MDZiYTkzODQxM2YxZjQ1Iiwic2VtYW50aWNfb21tbF9wcm9maWxlIjoib2ZmaWNlLW1hdGgtc2VtYW50aWMtdjIiLCJzZW1hbnRpY19vbW1sX3NoYTI1NiI6IjE3OGM1YTAzNzA2NzRhY2M3NjRiNzhmMTVhMTBlNDJjOWUzZWU0Y2ZmZWNmOTY1OWY4MzM1YjI2ZTczMmZmZmUifV0sImtpbmQiOiJuYXRpdmVfb2ZmaWNlX21hdGgiLCJwbGFjZWhvbGRlcl9uYW1lIjoibWF0aDowMDgiLCJzY2hlbWFfdmVyc2lvbiI6IjEuMCJ9"/>
               <p:cNvSpPr txBox="1"/>
               <p:nvPr/>
             </p:nvSpPr>
@@ -8660,7 +8750,7 @@
               <a:effectLst/>
             </p:spPr>
             <p:txBody>
-              <a:bodyPr wrap="none" anchor="t" lIns="0" rIns="0" tIns="0" bIns="0">
+              <a:bodyPr wrap="none" lIns="0" tIns="0" rIns="0" bIns="0" anchor="t">
                 <a:spAutoFit/>
               </a:bodyPr>
               <a:lstStyle/>
@@ -8686,7 +8776,7 @@
       </mc:AlternateContent>
       <p:sp>
         <p:nvSpPr>
-          <p:cNvPr id="119" name="af-imag-dots-text-01"/>
+          <p:cNvPr id="117" name="af-imag-dots-text-01" descr="{&quot;autofigure_element_id&quot;:&quot;imag-dots&quot;}"/>
           <p:cNvSpPr txBox="1"/>
           <p:nvPr/>
         </p:nvSpPr>
@@ -8702,7 +8792,7 @@
           <a:effectLst/>
         </p:spPr>
         <p:txBody>
-          <a:bodyPr wrap="none" anchor="t" lIns="0" rIns="0" tIns="0" bIns="0">
+          <a:bodyPr wrap="none" lIns="0" tIns="0" rIns="0" bIns="0" anchor="t">
             <a:spAutoFit/>
           </a:bodyPr>
           <a:lstStyle/>
@@ -8720,11 +8810,11 @@
           </a:p>
         </p:txBody>
       </p:sp>
-      <mc:AlternateContent xmlns:mc="http://schemas.openxmlformats.org/markup-compatibility/2006">
-        <mc:Choice xmlns:a14="http://schemas.microsoft.com/office/drawing/2010/main" Requires="a14">
+      <mc:AlternateContent xmlns:mc="http://schemas.openxmlformats.org/markup-compatibility/2006" xmlns:a14="http://schemas.microsoft.com/office/drawing/2010/main">
+        <mc:Choice Requires="a14">
           <p:sp>
             <p:nvSpPr>
-              <p:cNvPr id="120" name="math:009" descr="AI_AUTOFIGURE_NATIVE_MATH_V1:eyJjb250ZW50X3J1bnMiOlt7ImNhbm9uaWNhbF9sYXRleCI6Inpee1xcdGF1fV97dCtofSIsImZvcm11bGFfaWQiOiJFUTAwOSIsImtpbmQiOiJtYXRoIiwibGF0ZXhfc2hhMjU2IjoiMTQ0MmExOTZjN2U5OWJhNTk2OTVjZTY3YzMyNTcyMjgzYjAyZmZlYjg4NDZhMDIxOTY0MDdiY2JiMjQzZjJkYSIsIm1vZGUiOiJpbmxpbmUiLCJvbW1sX3NoYTI1NiI6IjFkMGY2MzMyZDYwMTgwZTEwZTI4MDg1NDA1YmI5ZDc0Y2E2Mzg2NDllNmExOTBiOGE2Mjc1MzZmZmMxMjU4NzEiLCJzZW1hbnRpY19vbW1sX3Byb2ZpbGUiOiJvZmZpY2UtbWF0aC1zZW1hbnRpYy12MiIsInNlbWFudGljX29tbWxfc2hhMjU2IjoiMDM1YjgxMTU3MDY0NWY2YWY4ZGZhYTViMGM3Yzk4N2I2N2E3YmE0OWUxOGE4NWU5MDRjMzhiY2RjODViYWRlOCJ9XSwiZm9ybXVsYXMiOlt7ImNhbm9uaWNhbF9sYXRleCI6Inpee1xcdGF1fV97dCtofSIsImZvcm11bGFfaWQiOiJFUTAwOSIsImxhdGV4X3NoYTI1NiI6IjE0NDJhMTk2YzdlOTliYTU5Njk1Y2U2N2MzMjU3MjI4M2IwMmZmZWI4ODQ2YTAyMTk2NDA3YmNiYjI0M2YyZGEiLCJtb2RlIjoiaW5saW5lIiwib21tbF9zaGEyNTYiOiIxZDBmNjMzMmQ2MDE4MGUxMGUyODA4NTQwNWJiOWQ3NGNhNjM4NjQ5ZTZhMTkwYjhhNjI3NTM2ZmZjMTI1ODcxIiwic2VtYW50aWNfb21tbF9wcm9maWxlIjoib2ZmaWNlLW1hdGgtc2VtYW50aWMtdjIiLCJzZW1hbnRpY19vbW1sX3NoYTI1NiI6IjAzNWI4MTE1NzA2NDVmNmFmOGRmYWE1YjBjN2M5ODdiNjdhN2JhNDllMThhODVlOTA0YzM4YmNkYzg1YmFkZTgifV0sImtpbmQiOiJuYXRpdmVfb2ZmaWNlX21hdGgiLCJwbGFjZWhvbGRlcl9uYW1lIjoibWF0aDowMDkiLCJzY2hlbWFfdmVyc2lvbiI6IjEuMCJ9"/>
+              <p:cNvPr id="118" name="math:009" descr="AI_AUTOFIGURE_NATIVE_MATH_V1:eyJjb250ZW50X3J1bnMiOlt7ImNhbm9uaWNhbF9sYXRleCI6Inpee1xcdGF1fV97dCtofSIsImZvcm11bGFfaWQiOiJFUTAwOSIsImtpbmQiOiJtYXRoIiwibGF0ZXhfc2hhMjU2IjoiMTQ0MmExOTZjN2U5OWJhNTk2OTVjZTY3YzMyNTcyMjgzYjAyZmZlYjg4NDZhMDIxOTY0MDdiY2JiMjQzZjJkYSIsIm1vZGUiOiJpbmxpbmUiLCJvbW1sX3NoYTI1NiI6IjFkMGY2MzMyZDYwMTgwZTEwZTI4MDg1NDA1YmI5ZDc0Y2E2Mzg2NDllNmExOTBiOGE2Mjc1MzZmZmMxMjU4NzEiLCJzZW1hbnRpY19vbW1sX3Byb2ZpbGUiOiJvZmZpY2UtbWF0aC1zZW1hbnRpYy12MiIsInNlbWFudGljX29tbWxfc2hhMjU2IjoiMDM1YjgxMTU3MDY0NWY2YWY4ZGZhYTViMGM3Yzk4N2I2N2E3YmE0OWUxOGE4NWU5MDRjMzhiY2RjODViYWRlOCJ9XSwiZm9ybXVsYXMiOlt7ImNhbm9uaWNhbF9sYXRleCI6Inpee1xcdGF1fV97dCtofSIsImZvcm11bGFfaWQiOiJFUTAwOSIsImxhdGV4X3NoYTI1NiI6IjE0NDJhMTk2YzdlOTliYTU5Njk1Y2U2N2MzMjU3MjI4M2IwMmZmZWI4ODQ2YTAyMTk2NDA3YmNiYjI0M2YyZGEiLCJtb2RlIjoiaW5saW5lIiwib21tbF9zaGEyNTYiOiIxZDBmNjMzMmQ2MDE4MGUxMGUyODA4NTQwNWJiOWQ3NGNhNjM4NjQ5ZTZhMTkwYjhhNjI3NTM2ZmZjMTI1ODcxIiwic2VtYW50aWNfb21tbF9wcm9maWxlIjoib2ZmaWNlLW1hdGgtc2VtYW50aWMtdjIiLCJzZW1hbnRpY19vbW1sX3NoYTI1NiI6IjAzNWI4MTE1NzA2NDVmNmFmOGRmYWE1YjBjN2M5ODdiNjdhN2JhNDllMThhODVlOTA0YzM4YmNkYzg1YmFkZTgifV0sImtpbmQiOiJuYXRpdmVfb2ZmaWNlX21hdGgiLCJwbGFjZWhvbGRlcl9uYW1lIjoibWF0aDowMDkiLCJzY2hlbWFfdmVyc2lvbiI6IjEuMCJ9"/>
               <p:cNvSpPr txBox="1"/>
               <p:nvPr/>
             </p:nvSpPr>
@@ -8740,52 +8830,82 @@
               <a:effectLst/>
             </p:spPr>
             <p:txBody>
-              <a:bodyPr wrap="none" anchor="t" lIns="0" rIns="0" tIns="0" bIns="0">
+              <a:bodyPr wrap="none" lIns="0" tIns="0" rIns="0" bIns="0" anchor="t">
                 <a:spAutoFit/>
               </a:bodyPr>
               <a:lstStyle/>
               <a:p>
                 <a:pPr algn="ctr"/>
                 <a14:m>
-                  <m:oMath xmlns:m="http://schemas.openxmlformats.org/officeDocument/2006/math">
-                    <m:sSubSup>
-                      <m:e>
-                        <m:r>
-                          <a:rPr lang="en-US" dirty="0" sz="1275">
-                            <a:solidFill>
-                              <a:srgbClr val="FFFFFF"/>
-                            </a:solidFill>
-                            <a:latin typeface="Cambria Math"/>
-                          </a:rPr>
-                          <m:t>z</m:t>
-                        </m:r>
-                      </m:e>
-                      <m:sub>
-                        <m:r>
-                          <a:rPr lang="en-US" dirty="0" sz="1275">
-                            <a:solidFill>
-                              <a:srgbClr val="FFFFFF"/>
-                            </a:solidFill>
-                            <a:latin typeface="Cambria Math"/>
-                          </a:rPr>
-                          <m:t>t+h</m:t>
-                        </m:r>
-                      </m:sub>
-                      <m:sup>
-                        <m:r>
-                          <a:rPr lang="en-US" dirty="0" sz="1275">
-                            <a:solidFill>
-                              <a:srgbClr val="FFFFFF"/>
-                            </a:solidFill>
-                            <a:latin typeface="Cambria Math"/>
-                          </a:rPr>
-                          <m:t>τ</m:t>
-                        </m:r>
-                      </m:sup>
-                    </m:sSubSup>
-                  </m:oMath>
+                  <m:oMathPara xmlns:m="http://schemas.openxmlformats.org/officeDocument/2006/math">
+                    <m:oMath>
+                      <m:sSubSup>
+                        <m:sSubSupPr>
+                          <m:ctrlPr>
+                            <a:rPr lang="en-US" sz="1275" dirty="0">
+                              <a:solidFill>
+                                <a:srgbClr val="FFFFFF"/>
+                              </a:solidFill>
+                              <a:latin typeface="Cambria Math"/>
+                            </a:rPr>
+                          </m:ctrlPr>
+                        </m:sSubSupPr>
+                        <m:e>
+                          <m:r>
+                            <a:rPr lang="en-US" sz="1275" dirty="0">
+                              <a:solidFill>
+                                <a:srgbClr val="FFFFFF"/>
+                              </a:solidFill>
+                              <a:latin typeface="Cambria Math"/>
+                            </a:rPr>
+                            <m:t>𝑧</m:t>
+                          </m:r>
+                        </m:e>
+                        <m:sub>
+                          <m:r>
+                            <a:rPr lang="en-US" sz="1275" dirty="0">
+                              <a:solidFill>
+                                <a:srgbClr val="FFFFFF"/>
+                              </a:solidFill>
+                              <a:latin typeface="Cambria Math"/>
+                            </a:rPr>
+                            <m:t>𝑡</m:t>
+                          </m:r>
+                          <m:r>
+                            <a:rPr lang="en-US" sz="1275" dirty="0">
+                              <a:solidFill>
+                                <a:srgbClr val="FFFFFF"/>
+                              </a:solidFill>
+                              <a:latin typeface="Cambria Math"/>
+                            </a:rPr>
+                            <m:t>+</m:t>
+                          </m:r>
+                          <m:r>
+                            <a:rPr lang="en-US" sz="1275" dirty="0">
+                              <a:solidFill>
+                                <a:srgbClr val="FFFFFF"/>
+                              </a:solidFill>
+                              <a:latin typeface="Cambria Math"/>
+                            </a:rPr>
+                            <m:t>ℎ</m:t>
+                          </m:r>
+                        </m:sub>
+                        <m:sup>
+                          <m:r>
+                            <a:rPr lang="en-US" sz="1275" dirty="0">
+                              <a:solidFill>
+                                <a:srgbClr val="FFFFFF"/>
+                              </a:solidFill>
+                              <a:latin typeface="Cambria Math"/>
+                            </a:rPr>
+                            <m:t>𝜏</m:t>
+                          </m:r>
+                        </m:sup>
+                      </m:sSubSup>
+                    </m:oMath>
+                  </m:oMathPara>
                 </a14:m>
-                <a:endParaRPr lang="en-US" dirty="0" sz="1275">
+                <a:endParaRPr lang="en-US" sz="1275" dirty="0">
                   <a:solidFill>
                     <a:srgbClr val="FFFFFF"/>
                   </a:solidFill>
@@ -8795,10 +8915,10 @@
             </p:txBody>
           </p:sp>
         </mc:Choice>
-        <mc:Fallback>
+        <mc:Fallback xmlns="">
           <p:sp>
             <p:nvSpPr>
-              <p:cNvPr id="120" name="math:009" descr="AI_AUTOFIGURE_MATH_FALLBACK_ONLY_V1:eyJjb250ZW50X3J1bnMiOlt7ImNhbm9uaWNhbF9sYXRleCI6Inpee1xcdGF1fV97dCtofSIsImZvcm11bGFfaWQiOiJFUTAwOSIsImtpbmQiOiJtYXRoIiwibGF0ZXhfc2hhMjU2IjoiMTQ0MmExOTZjN2U5OWJhNTk2OTVjZTY3YzMyNTcyMjgzYjAyZmZlYjg4NDZhMDIxOTY0MDdiY2JiMjQzZjJkYSIsIm1vZGUiOiJpbmxpbmUiLCJvbW1sX3NoYTI1NiI6IjFkMGY2MzMyZDYwMTgwZTEwZTI4MDg1NDA1YmI5ZDc0Y2E2Mzg2NDllNmExOTBiOGE2Mjc1MzZmZmMxMjU4NzEiLCJzZW1hbnRpY19vbW1sX3Byb2ZpbGUiOiJvZmZpY2UtbWF0aC1zZW1hbnRpYy12MiIsInNlbWFudGljX29tbWxfc2hhMjU2IjoiMDM1YjgxMTU3MDY0NWY2YWY4ZGZhYTViMGM3Yzk4N2I2N2E3YmE0OWUxOGE4NWU5MDRjMzhiY2RjODViYWRlOCJ9XSwiZm9ybXVsYXMiOlt7ImNhbm9uaWNhbF9sYXRleCI6Inpee1xcdGF1fV97dCtofSIsImZvcm11bGFfaWQiOiJFUTAwOSIsImxhdGV4X3NoYTI1NiI6IjE0NDJhMTk2YzdlOTliYTU5Njk1Y2U2N2MzMjU3MjI4M2IwMmZmZWI4ODQ2YTAyMTk2NDA3YmNiYjI0M2YyZGEiLCJtb2RlIjoiaW5saW5lIiwib21tbF9zaGEyNTYiOiIxZDBmNjMzMmQ2MDE4MGUxMGUyODA4NTQwNWJiOWQ3NGNhNjM4NjQ5ZTZhMTkwYjhhNjI3NTM2ZmZjMTI1ODcxIiwic2VtYW50aWNfb21tbF9wcm9maWxlIjoib2ZmaWNlLW1hdGgtc2VtYW50aWMtdjIiLCJzZW1hbnRpY19vbW1sX3NoYTI1NiI6IjAzNWI4MTE1NzA2NDVmNmFmOGRmYWE1YjBjN2M5ODdiNjdhN2JhNDllMThhODVlOTA0YzM4YmNkYzg1YmFkZTgifV0sImtpbmQiOiJuYXRpdmVfb2ZmaWNlX21hdGgiLCJwbGFjZWhvbGRlcl9uYW1lIjoibWF0aDowMDkiLCJzY2hlbWFfdmVyc2lvbiI6IjEuMCJ9"/>
+              <p:cNvPr id="118" name="math:009" descr="AI_AUTOFIGURE_MATH_FALLBACK_ONLY_V1:eyJjb250ZW50X3J1bnMiOlt7ImNhbm9uaWNhbF9sYXRleCI6Inpee1xcdGF1fV97dCtofSIsImZvcm11bGFfaWQiOiJFUTAwOSIsImtpbmQiOiJtYXRoIiwibGF0ZXhfc2hhMjU2IjoiMTQ0MmExOTZjN2U5OWJhNTk2OTVjZTY3YzMyNTcyMjgzYjAyZmZlYjg4NDZhMDIxOTY0MDdiY2JiMjQzZjJkYSIsIm1vZGUiOiJpbmxpbmUiLCJvbW1sX3NoYTI1NiI6IjFkMGY2MzMyZDYwMTgwZTEwZTI4MDg1NDA1YmI5ZDc0Y2E2Mzg2NDllNmExOTBiOGE2Mjc1MzZmZmMxMjU4NzEiLCJzZW1hbnRpY19vbW1sX3Byb2ZpbGUiOiJvZmZpY2UtbWF0aC1zZW1hbnRpYy12MiIsInNlbWFudGljX29tbWxfc2hhMjU2IjoiMDM1YjgxMTU3MDY0NWY2YWY4ZGZhYTViMGM3Yzk4N2I2N2E3YmE0OWUxOGE4NWU5MDRjMzhiY2RjODViYWRlOCJ9XSwiZm9ybXVsYXMiOlt7ImNhbm9uaWNhbF9sYXRleCI6Inpee1xcdGF1fV97dCtofSIsImZvcm11bGFfaWQiOiJFUTAwOSIsImxhdGV4X3NoYTI1NiI6IjE0NDJhMTk2YzdlOTliYTU5Njk1Y2U2N2MzMjU3MjI4M2IwMmZmZWI4ODQ2YTAyMTk2NDA3YmNiYjI0M2YyZGEiLCJtb2RlIjoiaW5saW5lIiwib21tbF9zaGEyNTYiOiIxZDBmNjMzMmQ2MDE4MGUxMGUyODA4NTQwNWJiOWQ3NGNhNjM4NjQ5ZTZhMTkwYjhhNjI3NTM2ZmZjMTI1ODcxIiwic2VtYW50aWNfb21tbF9wcm9maWxlIjoib2ZmaWNlLW1hdGgtc2VtYW50aWMtdjIiLCJzZW1hbnRpY19vbW1sX3NoYTI1NiI6IjAzNWI4MTE1NzA2NDVmNmFmOGRmYWE1YjBjN2M5ODdiNjdhN2JhNDllMThhODVlOTA0YzM4YmNkYzg1YmFkZTgifV0sImtpbmQiOiJuYXRpdmVfb2ZmaWNlX21hdGgiLCJwbGFjZWhvbGRlcl9uYW1lIjoibWF0aDowMDkiLCJzY2hlbWFfdmVyc2lvbiI6IjEuMCJ9"/>
               <p:cNvSpPr txBox="1"/>
               <p:nvPr/>
             </p:nvSpPr>
@@ -8814,7 +8934,7 @@
               <a:effectLst/>
             </p:spPr>
             <p:txBody>
-              <a:bodyPr wrap="none" anchor="t" lIns="0" rIns="0" tIns="0" bIns="0">
+              <a:bodyPr wrap="none" lIns="0" tIns="0" rIns="0" bIns="0" anchor="t">
                 <a:spAutoFit/>
               </a:bodyPr>
               <a:lstStyle/>
@@ -8840,7 +8960,7 @@
       </mc:AlternateContent>
       <p:sp>
         <p:nvSpPr>
-          <p:cNvPr id="121" name="af-rollout-panel-rect-01"/>
+          <p:cNvPr id="119" name="af-rollout-panel-rect-01" descr="{&quot;autofigure_element_id&quot;:&quot;rollout-panel&quot;}"/>
           <p:cNvSpPr/>
           <p:nvPr/>
         </p:nvSpPr>
@@ -8861,6 +8981,7 @@
             <a:solidFill>
               <a:srgbClr val="19365F"/>
             </a:solidFill>
+            <a:miter/>
           </a:ln>
           <a:effectLst/>
         </p:spPr>
@@ -8883,12 +9004,218 @@
           <a:lstStyle/>
           <a:p>
             <a:pPr algn="ctr"/>
-          </a:p>
-        </p:txBody>
-      </p:sp>
-      <p:sp>
-        <p:nvSpPr>
-          <p:cNvPr id="122" name="af-rollout-z0-rect-01"/>
+            <a:endParaRPr/>
+          </a:p>
+        </p:txBody>
+      </p:sp>
+      <p:cxnSp>
+        <p:nvCxnSpPr>
+          <p:cNvPr id="120" name="af-rollout-z0-to-r0-connector-01" descr="{&quot;arrow_spec_sha256&quot;:&quot;94e973578aadc00531dbed3007f1ad265f363d9c390b7d9d992475ebe57ccaf1&quot;,&quot;autofigure_element_id&quot;:&quot;rollout-z0-to-r0&quot;}"/>
+          <p:cNvCxnSpPr>
+            <a:stCxn id="125" idx="0"/>
+            <a:endCxn id="134" idx="2"/>
+          </p:cNvCxnSpPr>
+          <p:nvPr/>
+        </p:nvCxnSpPr>
+        <p:spPr>
+          <a:xfrm flipV="1">
+            <a:off x="9839325" y="2562225"/>
+            <a:ext cx="0" cy="257175"/>
+          </a:xfrm>
+          <a:prstGeom prst="line">
+            <a:avLst/>
+          </a:prstGeom>
+          <a:ln w="19050">
+            <a:solidFill>
+              <a:srgbClr val="7E6000"/>
+            </a:solidFill>
+            <a:miter/>
+            <a:tailEnd type="triangle" w="med" len="med"/>
+          </a:ln>
+          <a:effectLst/>
+        </p:spPr>
+        <p:style>
+          <a:lnRef idx="2">
+            <a:schemeClr val="accent1"/>
+          </a:lnRef>
+          <a:fillRef idx="0">
+            <a:schemeClr val="accent1"/>
+          </a:fillRef>
+          <a:effectRef idx="1">
+            <a:schemeClr val="accent1"/>
+          </a:effectRef>
+          <a:fontRef idx="minor">
+            <a:schemeClr val="tx1"/>
+          </a:fontRef>
+        </p:style>
+      </p:cxnSp>
+      <p:cxnSp>
+        <p:nvCxnSpPr>
+          <p:cNvPr id="121" name="af-rollout-z1-to-r1-connector-01" descr="{&quot;arrow_spec_sha256&quot;:&quot;0a8c03b2edd5440e6980b8cd35a97c1694bce46df95ab111ffec56d67ed577e4&quot;,&quot;autofigure_element_id&quot;:&quot;rollout-z1-to-r1&quot;}"/>
+          <p:cNvCxnSpPr>
+            <a:stCxn id="126" idx="0"/>
+            <a:endCxn id="135" idx="2"/>
+          </p:cNvCxnSpPr>
+          <p:nvPr/>
+        </p:nvCxnSpPr>
+        <p:spPr>
+          <a:xfrm flipV="1">
+            <a:off x="10753725" y="2552700"/>
+            <a:ext cx="0" cy="266700"/>
+          </a:xfrm>
+          <a:prstGeom prst="line">
+            <a:avLst/>
+          </a:prstGeom>
+          <a:ln w="19050">
+            <a:solidFill>
+              <a:srgbClr val="7E6000"/>
+            </a:solidFill>
+            <a:miter/>
+            <a:tailEnd type="triangle" w="med" len="med"/>
+          </a:ln>
+          <a:effectLst/>
+        </p:spPr>
+        <p:style>
+          <a:lnRef idx="2">
+            <a:schemeClr val="accent1"/>
+          </a:lnRef>
+          <a:fillRef idx="0">
+            <a:schemeClr val="accent1"/>
+          </a:fillRef>
+          <a:effectRef idx="1">
+            <a:schemeClr val="accent1"/>
+          </a:effectRef>
+          <a:fontRef idx="minor">
+            <a:schemeClr val="tx1"/>
+          </a:fontRef>
+        </p:style>
+      </p:cxnSp>
+      <p:cxnSp>
+        <p:nvCxnSpPr>
+          <p:cNvPr id="122" name="af-rollout-z2-to-r2-connector-01" descr="{&quot;arrow_spec_sha256&quot;:&quot;65d2b5223168c18ecc6f49d53117072503fa0b4f64cf3167db67ec12fdc58930&quot;,&quot;autofigure_element_id&quot;:&quot;rollout-z2-to-r2&quot;}"/>
+          <p:cNvCxnSpPr>
+            <a:stCxn id="127" idx="0"/>
+            <a:endCxn id="136" idx="2"/>
+          </p:cNvCxnSpPr>
+          <p:nvPr/>
+        </p:nvCxnSpPr>
+        <p:spPr>
+          <a:xfrm flipV="1">
+            <a:off x="11706225" y="2552700"/>
+            <a:ext cx="0" cy="266700"/>
+          </a:xfrm>
+          <a:prstGeom prst="line">
+            <a:avLst/>
+          </a:prstGeom>
+          <a:ln w="19050">
+            <a:solidFill>
+              <a:srgbClr val="7E6000"/>
+            </a:solidFill>
+            <a:miter/>
+            <a:tailEnd type="triangle" w="med" len="med"/>
+          </a:ln>
+          <a:effectLst/>
+        </p:spPr>
+        <p:style>
+          <a:lnRef idx="2">
+            <a:schemeClr val="accent1"/>
+          </a:lnRef>
+          <a:fillRef idx="0">
+            <a:schemeClr val="accent1"/>
+          </a:fillRef>
+          <a:effectRef idx="1">
+            <a:schemeClr val="accent1"/>
+          </a:effectRef>
+          <a:fontRef idx="minor">
+            <a:schemeClr val="tx1"/>
+          </a:fontRef>
+        </p:style>
+      </p:cxnSp>
+      <p:cxnSp>
+        <p:nvCxnSpPr>
+          <p:cNvPr id="123" name="af-zt-top-to-imagination-connector-01" descr="{&quot;arrow_spec_sha256&quot;:&quot;92baa490b7e35be95ec0e5b41bcbaacac44577452dfb5fcd7c63dcfef2485503&quot;,&quot;autofigure_element_id&quot;:&quot;zt-top-to-imagination&quot;}"/>
+          <p:cNvCxnSpPr>
+            <a:stCxn id="96" idx="3"/>
+            <a:endCxn id="125" idx="1"/>
+          </p:cNvCxnSpPr>
+          <p:nvPr/>
+        </p:nvCxnSpPr>
+        <p:spPr>
+          <a:xfrm>
+            <a:off x="9010650" y="2590800"/>
+            <a:ext cx="561975" cy="381000"/>
+          </a:xfrm>
+          <a:prstGeom prst="line">
+            <a:avLst/>
+          </a:prstGeom>
+          <a:ln w="19050">
+            <a:solidFill>
+              <a:srgbClr val="7E6000"/>
+            </a:solidFill>
+            <a:miter/>
+            <a:tailEnd type="triangle" w="med" len="med"/>
+          </a:ln>
+          <a:effectLst/>
+        </p:spPr>
+        <p:style>
+          <a:lnRef idx="2">
+            <a:schemeClr val="accent1"/>
+          </a:lnRef>
+          <a:fillRef idx="0">
+            <a:schemeClr val="accent1"/>
+          </a:fillRef>
+          <a:effectRef idx="1">
+            <a:schemeClr val="accent1"/>
+          </a:effectRef>
+          <a:fontRef idx="minor">
+            <a:schemeClr val="tx1"/>
+          </a:fontRef>
+        </p:style>
+      </p:cxnSp>
+      <p:cxnSp>
+        <p:nvCxnSpPr>
+          <p:cNvPr id="124" name="af-zt-bottom-to-rollout-connector-01" descr="{&quot;arrow_spec_sha256&quot;:&quot;34e29b869a4e4167c361e387c10a862d8aa755a68c5dd317cee798142207a7e8&quot;,&quot;autofigure_element_id&quot;:&quot;zt-bottom-to-rollout&quot;}"/>
+          <p:cNvCxnSpPr>
+            <a:stCxn id="101" idx="3"/>
+            <a:endCxn id="125" idx="1"/>
+          </p:cNvCxnSpPr>
+          <p:nvPr/>
+        </p:nvCxnSpPr>
+        <p:spPr>
+          <a:xfrm flipV="1">
+            <a:off x="9010650" y="3105150"/>
+            <a:ext cx="561975" cy="857250"/>
+          </a:xfrm>
+          <a:prstGeom prst="line">
+            <a:avLst/>
+          </a:prstGeom>
+          <a:ln w="19050">
+            <a:solidFill>
+              <a:srgbClr val="7E6000"/>
+            </a:solidFill>
+            <a:miter/>
+            <a:tailEnd type="triangle" w="med" len="med"/>
+          </a:ln>
+          <a:effectLst/>
+        </p:spPr>
+        <p:style>
+          <a:lnRef idx="2">
+            <a:schemeClr val="accent1"/>
+          </a:lnRef>
+          <a:fillRef idx="0">
+            <a:schemeClr val="accent1"/>
+          </a:fillRef>
+          <a:effectRef idx="1">
+            <a:schemeClr val="accent1"/>
+          </a:effectRef>
+          <a:fontRef idx="minor">
+            <a:schemeClr val="tx1"/>
+          </a:fontRef>
+        </p:style>
+      </p:cxnSp>
+      <p:sp>
+        <p:nvSpPr>
+          <p:cNvPr id="125" name="af-rollout-z0-rect-01" descr="{&quot;autofigure_element_id&quot;:&quot;rollout-z0&quot;}"/>
           <p:cNvSpPr/>
           <p:nvPr/>
         </p:nvSpPr>
@@ -8929,12 +9256,13 @@
           <a:lstStyle/>
           <a:p>
             <a:pPr algn="ctr"/>
-          </a:p>
-        </p:txBody>
-      </p:sp>
-      <p:sp>
-        <p:nvSpPr>
-          <p:cNvPr id="123" name="af-rollout-z1-rect-01"/>
+            <a:endParaRPr/>
+          </a:p>
+        </p:txBody>
+      </p:sp>
+      <p:sp>
+        <p:nvSpPr>
+          <p:cNvPr id="126" name="af-rollout-z1-rect-01" descr="{&quot;autofigure_element_id&quot;:&quot;rollout-z1&quot;}"/>
           <p:cNvSpPr/>
           <p:nvPr/>
         </p:nvSpPr>
@@ -8975,12 +9303,13 @@
           <a:lstStyle/>
           <a:p>
             <a:pPr algn="ctr"/>
-          </a:p>
-        </p:txBody>
-      </p:sp>
-      <p:sp>
-        <p:nvSpPr>
-          <p:cNvPr id="124" name="af-rollout-z2-rect-01"/>
+            <a:endParaRPr/>
+          </a:p>
+        </p:txBody>
+      </p:sp>
+      <p:sp>
+        <p:nvSpPr>
+          <p:cNvPr id="127" name="af-rollout-z2-rect-01" descr="{&quot;autofigure_element_id&quot;:&quot;rollout-z2&quot;}"/>
           <p:cNvSpPr/>
           <p:nvPr/>
         </p:nvSpPr>
@@ -9021,12 +9350,13 @@
           <a:lstStyle/>
           <a:p>
             <a:pPr algn="ctr"/>
-          </a:p>
-        </p:txBody>
-      </p:sp>
-      <p:sp>
-        <p:nvSpPr>
-          <p:cNvPr id="125" name="af-rollout-zh-rect-01"/>
+            <a:endParaRPr/>
+          </a:p>
+        </p:txBody>
+      </p:sp>
+      <p:sp>
+        <p:nvSpPr>
+          <p:cNvPr id="128" name="af-rollout-zh-rect-01" descr="{&quot;autofigure_element_id&quot;:&quot;rollout-zh&quot;}"/>
           <p:cNvSpPr/>
           <p:nvPr/>
         </p:nvSpPr>
@@ -9067,14 +9397,15 @@
           <a:lstStyle/>
           <a:p>
             <a:pPr algn="ctr"/>
-          </a:p>
-        </p:txBody>
-      </p:sp>
-      <mc:AlternateContent xmlns:mc="http://schemas.openxmlformats.org/markup-compatibility/2006">
-        <mc:Choice xmlns:a14="http://schemas.microsoft.com/office/drawing/2010/main" Requires="a14">
+            <a:endParaRPr/>
+          </a:p>
+        </p:txBody>
+      </p:sp>
+      <mc:AlternateContent xmlns:mc="http://schemas.openxmlformats.org/markup-compatibility/2006" xmlns:a14="http://schemas.microsoft.com/office/drawing/2010/main">
+        <mc:Choice Requires="a14">
           <p:sp>
             <p:nvSpPr>
-              <p:cNvPr id="126" name="math:010" descr="AI_AUTOFIGURE_NATIVE_MATH_V1:eyJjb250ZW50X3J1bnMiOlt7ImNhbm9uaWNhbF9sYXRleCI6Inpfe3R9IiwiZm9ybXVsYV9pZCI6IkVRMDEwIiwia2luZCI6Im1hdGgiLCJsYXRleF9zaGEyNTYiOiI1MTFhZDkzYjNmYWU5ZDczZDU2MzY1NmZlYjNiZTY5M2Y0MjBjM2FkNDNmNjBkY2QzNWRiNjMxYWIwZTUwY2EzIiwibW9kZSI6ImlubGluZSIsIm9tbWxfc2hhMjU2IjoiOWNjMjA3NmY3N2U5ZDBlODdiOWE5Y2ZjYWFmZmRjNTBiNzU4ZDZiYmM1MTBjZWY4ZjNiYTU3NDhmODUyMmM1ZSIsInNlbWFudGljX29tbWxfcHJvZmlsZSI6Im9mZmljZS1tYXRoLXNlbWFudGljLXYyIiwic2VtYW50aWNfb21tbF9zaGEyNTYiOiI3MGQyYWI5NmM3NjkwMTQ0MjFhOGZjMTk5ZjQ0MzE0YjFhYWNlZjVkN2RhZGNiZjU2ZDI3MzJjMWJhMjU0MzI4In1dLCJmb3JtdWxhcyI6W3siY2Fub25pY2FsX2xhdGV4Ijoiel97dH0iLCJmb3JtdWxhX2lkIjoiRVEwMTAiLCJsYXRleF9zaGEyNTYiOiI1MTFhZDkzYjNmYWU5ZDczZDU2MzY1NmZlYjNiZTY5M2Y0MjBjM2FkNDNmNjBkY2QzNWRiNjMxYWIwZTUwY2EzIiwibW9kZSI6ImlubGluZSIsIm9tbWxfc2hhMjU2IjoiOWNjMjA3NmY3N2U5ZDBlODdiOWE5Y2ZjYWFmZmRjNTBiNzU4ZDZiYmM1MTBjZWY4ZjNiYTU3NDhmODUyMmM1ZSIsInNlbWFudGljX29tbWxfcHJvZmlsZSI6Im9mZmljZS1tYXRoLXNlbWFudGljLXYyIiwic2VtYW50aWNfb21tbF9zaGEyNTYiOiI3MGQyYWI5NmM3NjkwMTQ0MjFhOGZjMTk5ZjQ0MzE0YjFhYWNlZjVkN2RhZGNiZjU2ZDI3MzJjMWJhMjU0MzI4In1dLCJraW5kIjoibmF0aXZlX29mZmljZV9tYXRoIiwicGxhY2Vob2xkZXJfbmFtZSI6Im1hdGg6MDEwIiwic2NoZW1hX3ZlcnNpb24iOiIxLjAifQ=="/>
+              <p:cNvPr id="129" name="math:010" descr="AI_AUTOFIGURE_NATIVE_MATH_V1:eyJjb250ZW50X3J1bnMiOlt7ImNhbm9uaWNhbF9sYXRleCI6Inpfe3R9IiwiZm9ybXVsYV9pZCI6IkVRMDEwIiwia2luZCI6Im1hdGgiLCJsYXRleF9zaGEyNTYiOiI1MTFhZDkzYjNmYWU5ZDczZDU2MzY1NmZlYjNiZTY5M2Y0MjBjM2FkNDNmNjBkY2QzNWRiNjMxYWIwZTUwY2EzIiwibW9kZSI6ImlubGluZSIsIm9tbWxfc2hhMjU2IjoiOWNjMjA3NmY3N2U5ZDBlODdiOWE5Y2ZjYWFmZmRjNTBiNzU4ZDZiYmM1MTBjZWY4ZjNiYTU3NDhmODUyMmM1ZSIsInNlbWFudGljX29tbWxfcHJvZmlsZSI6Im9mZmljZS1tYXRoLXNlbWFudGljLXYyIiwic2VtYW50aWNfb21tbF9zaGEyNTYiOiI3MGQyYWI5NmM3NjkwMTQ0MjFhOGZjMTk5ZjQ0MzE0YjFhYWNlZjVkN2RhZGNiZjU2ZDI3MzJjMWJhMjU0MzI4In1dLCJmb3JtdWxhcyI6W3siY2Fub25pY2FsX2xhdGV4Ijoiel97dH0iLCJmb3JtdWxhX2lkIjoiRVEwMTAiLCJsYXRleF9zaGEyNTYiOiI1MTFhZDkzYjNmYWU5ZDczZDU2MzY1NmZlYjNiZTY5M2Y0MjBjM2FkNDNmNjBkY2QzNWRiNjMxYWIwZTUwY2EzIiwibW9kZSI6ImlubGluZSIsIm9tbWxfc2hhMjU2IjoiOWNjMjA3NmY3N2U5ZDBlODdiOWE5Y2ZjYWFmZmRjNTBiNzU4ZDZiYmM1MTBjZWY4ZjNiYTU3NDhmODUyMmM1ZSIsInNlbWFudGljX29tbWxfcHJvZmlsZSI6Im9mZmljZS1tYXRoLXNlbWFudGljLXYyIiwic2VtYW50aWNfb21tbF9zaGEyNTYiOiI3MGQyYWI5NmM3NjkwMTQ0MjFhOGZjMTk5ZjQ0MzE0YjFhYWNlZjVkN2RhZGNiZjU2ZDI3MzJjMWJhMjU0MzI4In1dLCJraW5kIjoibmF0aXZlX29mZmljZV9tYXRoIiwicGxhY2Vob2xkZXJfbmFtZSI6Im1hdGg6MDEwIiwic2NoZW1hX3ZlcnNpb24iOiIxLjAifQ=="/>
               <p:cNvSpPr txBox="1"/>
               <p:nvPr/>
             </p:nvSpPr>
@@ -9090,41 +9421,53 @@
               <a:effectLst/>
             </p:spPr>
             <p:txBody>
-              <a:bodyPr wrap="none" anchor="t" lIns="0" rIns="0" tIns="0" bIns="0">
+              <a:bodyPr wrap="none" lIns="0" tIns="0" rIns="0" bIns="0" anchor="t">
                 <a:spAutoFit/>
               </a:bodyPr>
               <a:lstStyle/>
               <a:p>
                 <a:pPr algn="ctr"/>
                 <a14:m>
-                  <m:oMath xmlns:m="http://schemas.openxmlformats.org/officeDocument/2006/math">
-                    <m:sSub>
-                      <m:e>
-                        <m:r>
-                          <a:rPr lang="en-US" dirty="0" sz="1275">
-                            <a:solidFill>
-                              <a:srgbClr val="FFFFFF"/>
-                            </a:solidFill>
-                            <a:latin typeface="Cambria Math"/>
-                          </a:rPr>
-                          <m:t>z</m:t>
-                        </m:r>
-                      </m:e>
-                      <m:sub>
-                        <m:r>
-                          <a:rPr lang="en-US" dirty="0" sz="1275">
-                            <a:solidFill>
-                              <a:srgbClr val="FFFFFF"/>
-                            </a:solidFill>
-                            <a:latin typeface="Cambria Math"/>
-                          </a:rPr>
-                          <m:t>t</m:t>
-                        </m:r>
-                      </m:sub>
-                    </m:sSub>
-                  </m:oMath>
+                  <m:oMathPara xmlns:m="http://schemas.openxmlformats.org/officeDocument/2006/math">
+                    <m:oMath>
+                      <m:sSub>
+                        <m:sSubPr>
+                          <m:ctrlPr>
+                            <a:rPr lang="en-US" sz="1275" dirty="0">
+                              <a:solidFill>
+                                <a:srgbClr val="FFFFFF"/>
+                              </a:solidFill>
+                              <a:latin typeface="Cambria Math"/>
+                            </a:rPr>
+                          </m:ctrlPr>
+                        </m:sSubPr>
+                        <m:e>
+                          <m:r>
+                            <a:rPr lang="en-US" sz="1275" dirty="0">
+                              <a:solidFill>
+                                <a:srgbClr val="FFFFFF"/>
+                              </a:solidFill>
+                              <a:latin typeface="Cambria Math"/>
+                            </a:rPr>
+                            <m:t>𝑧</m:t>
+                          </m:r>
+                        </m:e>
+                        <m:sub>
+                          <m:r>
+                            <a:rPr lang="en-US" sz="1275" dirty="0">
+                              <a:solidFill>
+                                <a:srgbClr val="FFFFFF"/>
+                              </a:solidFill>
+                              <a:latin typeface="Cambria Math"/>
+                            </a:rPr>
+                            <m:t>𝑡</m:t>
+                          </m:r>
+                        </m:sub>
+                      </m:sSub>
+                    </m:oMath>
+                  </m:oMathPara>
                 </a14:m>
-                <a:endParaRPr lang="en-US" dirty="0" sz="1275">
+                <a:endParaRPr lang="en-US" sz="1275" dirty="0">
                   <a:solidFill>
                     <a:srgbClr val="FFFFFF"/>
                   </a:solidFill>
@@ -9134,10 +9477,10 @@
             </p:txBody>
           </p:sp>
         </mc:Choice>
-        <mc:Fallback>
+        <mc:Fallback xmlns="">
           <p:sp>
             <p:nvSpPr>
-              <p:cNvPr id="126" name="math:010" descr="AI_AUTOFIGURE_MATH_FALLBACK_ONLY_V1:eyJjb250ZW50X3J1bnMiOlt7ImNhbm9uaWNhbF9sYXRleCI6Inpfe3R9IiwiZm9ybXVsYV9pZCI6IkVRMDEwIiwia2luZCI6Im1hdGgiLCJsYXRleF9zaGEyNTYiOiI1MTFhZDkzYjNmYWU5ZDczZDU2MzY1NmZlYjNiZTY5M2Y0MjBjM2FkNDNmNjBkY2QzNWRiNjMxYWIwZTUwY2EzIiwibW9kZSI6ImlubGluZSIsIm9tbWxfc2hhMjU2IjoiOWNjMjA3NmY3N2U5ZDBlODdiOWE5Y2ZjYWFmZmRjNTBiNzU4ZDZiYmM1MTBjZWY4ZjNiYTU3NDhmODUyMmM1ZSIsInNlbWFudGljX29tbWxfcHJvZmlsZSI6Im9mZmljZS1tYXRoLXNlbWFudGljLXYyIiwic2VtYW50aWNfb21tbF9zaGEyNTYiOiI3MGQyYWI5NmM3NjkwMTQ0MjFhOGZjMTk5ZjQ0MzE0YjFhYWNlZjVkN2RhZGNiZjU2ZDI3MzJjMWJhMjU0MzI4In1dLCJmb3JtdWxhcyI6W3siY2Fub25pY2FsX2xhdGV4Ijoiel97dH0iLCJmb3JtdWxhX2lkIjoiRVEwMTAiLCJsYXRleF9zaGEyNTYiOiI1MTFhZDkzYjNmYWU5ZDczZDU2MzY1NmZlYjNiZTY5M2Y0MjBjM2FkNDNmNjBkY2QzNWRiNjMxYWIwZTUwY2EzIiwibW9kZSI6ImlubGluZSIsIm9tbWxfc2hhMjU2IjoiOWNjMjA3NmY3N2U5ZDBlODdiOWE5Y2ZjYWFmZmRjNTBiNzU4ZDZiYmM1MTBjZWY4ZjNiYTU3NDhmODUyMmM1ZSIsInNlbWFudGljX29tbWxfcHJvZmlsZSI6Im9mZmljZS1tYXRoLXNlbWFudGljLXYyIiwic2VtYW50aWNfb21tbF9zaGEyNTYiOiI3MGQyYWI5NmM3NjkwMTQ0MjFhOGZjMTk5ZjQ0MzE0YjFhYWNlZjVkN2RhZGNiZjU2ZDI3MzJjMWJhMjU0MzI4In1dLCJraW5kIjoibmF0aXZlX29mZmljZV9tYXRoIiwicGxhY2Vob2xkZXJfbmFtZSI6Im1hdGg6MDEwIiwic2NoZW1hX3ZlcnNpb24iOiIxLjAifQ=="/>
+              <p:cNvPr id="129" name="math:010" descr="AI_AUTOFIGURE_MATH_FALLBACK_ONLY_V1:eyJjb250ZW50X3J1bnMiOlt7ImNhbm9uaWNhbF9sYXRleCI6Inpfe3R9IiwiZm9ybXVsYV9pZCI6IkVRMDEwIiwia2luZCI6Im1hdGgiLCJsYXRleF9zaGEyNTYiOiI1MTFhZDkzYjNmYWU5ZDczZDU2MzY1NmZlYjNiZTY5M2Y0MjBjM2FkNDNmNjBkY2QzNWRiNjMxYWIwZTUwY2EzIiwibW9kZSI6ImlubGluZSIsIm9tbWxfc2hhMjU2IjoiOWNjMjA3NmY3N2U5ZDBlODdiOWE5Y2ZjYWFmZmRjNTBiNzU4ZDZiYmM1MTBjZWY4ZjNiYTU3NDhmODUyMmM1ZSIsInNlbWFudGljX29tbWxfcHJvZmlsZSI6Im9mZmljZS1tYXRoLXNlbWFudGljLXYyIiwic2VtYW50aWNfb21tbF9zaGEyNTYiOiI3MGQyYWI5NmM3NjkwMTQ0MjFhOGZjMTk5ZjQ0MzE0YjFhYWNlZjVkN2RhZGNiZjU2ZDI3MzJjMWJhMjU0MzI4In1dLCJmb3JtdWxhcyI6W3siY2Fub25pY2FsX2xhdGV4Ijoiel97dH0iLCJmb3JtdWxhX2lkIjoiRVEwMTAiLCJsYXRleF9zaGEyNTYiOiI1MTFhZDkzYjNmYWU5ZDczZDU2MzY1NmZlYjNiZTY5M2Y0MjBjM2FkNDNmNjBkY2QzNWRiNjMxYWIwZTUwY2EzIiwibW9kZSI6ImlubGluZSIsIm9tbWxfc2hhMjU2IjoiOWNjMjA3NmY3N2U5ZDBlODdiOWE5Y2ZjYWFmZmRjNTBiNzU4ZDZiYmM1MTBjZWY4ZjNiYTU3NDhmODUyMmM1ZSIsInNlbWFudGljX29tbWxfcHJvZmlsZSI6Im9mZmljZS1tYXRoLXNlbWFudGljLXYyIiwic2VtYW50aWNfb21tbF9zaGEyNTYiOiI3MGQyYWI5NmM3NjkwMTQ0MjFhOGZjMTk5ZjQ0MzE0YjFhYWNlZjVkN2RhZGNiZjU2ZDI3MzJjMWJhMjU0MzI4In1dLCJraW5kIjoibmF0aXZlX29mZmljZV9tYXRoIiwicGxhY2Vob2xkZXJfbmFtZSI6Im1hdGg6MDEwIiwic2NoZW1hX3ZlcnNpb24iOiIxLjAifQ=="/>
               <p:cNvSpPr txBox="1"/>
               <p:nvPr/>
             </p:nvSpPr>
@@ -9153,7 +9496,7 @@
               <a:effectLst/>
             </p:spPr>
             <p:txBody>
-              <a:bodyPr wrap="none" anchor="t" lIns="0" rIns="0" tIns="0" bIns="0">
+              <a:bodyPr wrap="none" lIns="0" tIns="0" rIns="0" bIns="0" anchor="t">
                 <a:spAutoFit/>
               </a:bodyPr>
               <a:lstStyle/>
@@ -9177,11 +9520,11 @@
           </p:sp>
         </mc:Fallback>
       </mc:AlternateContent>
-      <mc:AlternateContent xmlns:mc="http://schemas.openxmlformats.org/markup-compatibility/2006">
-        <mc:Choice xmlns:a14="http://schemas.microsoft.com/office/drawing/2010/main" Requires="a14">
+      <mc:AlternateContent xmlns:mc="http://schemas.openxmlformats.org/markup-compatibility/2006" xmlns:a14="http://schemas.microsoft.com/office/drawing/2010/main">
+        <mc:Choice Requires="a14">
           <p:sp>
             <p:nvSpPr>
-              <p:cNvPr id="127" name="math:011" descr="AI_AUTOFIGURE_NATIVE_MATH_V1:eyJjb250ZW50X3J1bnMiOlt7ImNhbm9uaWNhbF9sYXRleCI6Inpfe3QrMX0iLCJmb3JtdWxhX2lkIjoiRVEwMTEiLCJraW5kIjoibWF0aCIsImxhdGV4X3NoYTI1NiI6IjhlNWQwMDAwYWJiOWNmMDc3M2U3OGZiNTMwMjc1MjMwYjhlZGZiOGNkOTYyYjMyNjM1ZGRlN2NjMjg0NjkwOTEiLCJtb2RlIjoiaW5saW5lIiwib21tbF9zaGEyNTYiOiJhOTVmOTI4NDdlYzgwMmEyMzkyZDQ5YWYwYTZlMTU3NzMxZTdkYzdjMjM4YzEwMGI2ZTlhZDY2NDVhMjhmZTQyIiwic2VtYW50aWNfb21tbF9wcm9maWxlIjoib2ZmaWNlLW1hdGgtc2VtYW50aWMtdjIiLCJzZW1hbnRpY19vbW1sX3NoYTI1NiI6IjY5OTJiMGQ0ODlkYWEyM2Y3ZWViMjgxMjc3NjIyNGU5NDRhNjc1MjQxNGNjYmQ5ZTIzYjQ0OTMyODM3ZjMzZTYifV0sImZvcm11bGFzIjpbeyJjYW5vbmljYWxfbGF0ZXgiOiJ6X3t0KzF9IiwiZm9ybXVsYV9pZCI6IkVRMDExIiwibGF0ZXhfc2hhMjU2IjoiOGU1ZDAwMDBhYmI5Y2YwNzczZTc4ZmI1MzAyNzUyMzBiOGVkZmI4Y2Q5NjJiMzI2MzVkZGU3Y2MyODQ2OTA5MSIsIm1vZGUiOiJpbmxpbmUiLCJvbW1sX3NoYTI1NiI6ImE5NWY5Mjg0N2VjODAyYTIzOTJkNDlhZjBhNmUxNTc3MzFlN2RjN2MyMzhjMTAwYjZlOWFkNjY0NWEyOGZlNDIiLCJzZW1hbnRpY19vbW1sX3Byb2ZpbGUiOiJvZmZpY2UtbWF0aC1zZW1hbnRpYy12MiIsInNlbWFudGljX29tbWxfc2hhMjU2IjoiNjk5MmIwZDQ4OWRhYTIzZjdlZWIyODEyNzc2MjI0ZTk0NGE2NzUyNDE0Y2NiZDllMjNiNDQ5MzI4MzdmMzNlNiJ9XSwia2luZCI6Im5hdGl2ZV9vZmZpY2VfbWF0aCIsInBsYWNlaG9sZGVyX25hbWUiOiJtYXRoOjAxMSIsInNjaGVtYV92ZXJzaW9uIjoiMS4wIn0="/>
+              <p:cNvPr id="130" name="math:011" descr="AI_AUTOFIGURE_NATIVE_MATH_V1:eyJjb250ZW50X3J1bnMiOlt7ImNhbm9uaWNhbF9sYXRleCI6Inpfe3QrMX0iLCJmb3JtdWxhX2lkIjoiRVEwMTEiLCJraW5kIjoibWF0aCIsImxhdGV4X3NoYTI1NiI6IjhlNWQwMDAwYWJiOWNmMDc3M2U3OGZiNTMwMjc1MjMwYjhlZGZiOGNkOTYyYjMyNjM1ZGRlN2NjMjg0NjkwOTEiLCJtb2RlIjoiaW5saW5lIiwib21tbF9zaGEyNTYiOiJhOTVmOTI4NDdlYzgwMmEyMzkyZDQ5YWYwYTZlMTU3NzMxZTdkYzdjMjM4YzEwMGI2ZTlhZDY2NDVhMjhmZTQyIiwic2VtYW50aWNfb21tbF9wcm9maWxlIjoib2ZmaWNlLW1hdGgtc2VtYW50aWMtdjIiLCJzZW1hbnRpY19vbW1sX3NoYTI1NiI6IjY5OTJiMGQ0ODlkYWEyM2Y3ZWViMjgxMjc3NjIyNGU5NDRhNjc1MjQxNGNjYmQ5ZTIzYjQ0OTMyODM3ZjMzZTYifV0sImZvcm11bGFzIjpbeyJjYW5vbmljYWxfbGF0ZXgiOiJ6X3t0KzF9IiwiZm9ybXVsYV9pZCI6IkVRMDExIiwibGF0ZXhfc2hhMjU2IjoiOGU1ZDAwMDBhYmI5Y2YwNzczZTc4ZmI1MzAyNzUyMzBiOGVkZmI4Y2Q5NjJiMzI2MzVkZGU3Y2MyODQ2OTA5MSIsIm1vZGUiOiJpbmxpbmUiLCJvbW1sX3NoYTI1NiI6ImE5NWY5Mjg0N2VjODAyYTIzOTJkNDlhZjBhNmUxNTc3MzFlN2RjN2MyMzhjMTAwYjZlOWFkNjY0NWEyOGZlNDIiLCJzZW1hbnRpY19vbW1sX3Byb2ZpbGUiOiJvZmZpY2UtbWF0aC1zZW1hbnRpYy12MiIsInNlbWFudGljX29tbWxfc2hhMjU2IjoiNjk5MmIwZDQ4OWRhYTIzZjdlZWIyODEyNzc2MjI0ZTk0NGE2NzUyNDE0Y2NiZDllMjNiNDQ5MzI4MzdmMzNlNiJ9XSwia2luZCI6Im5hdGl2ZV9vZmZpY2VfbWF0aCIsInBsYWNlaG9sZGVyX25hbWUiOiJtYXRoOjAxMSIsInNjaGVtYV92ZXJzaW9uIjoiMS4wIn0="/>
               <p:cNvSpPr txBox="1"/>
               <p:nvPr/>
             </p:nvSpPr>
@@ -9197,41 +9540,62 @@
               <a:effectLst/>
             </p:spPr>
             <p:txBody>
-              <a:bodyPr wrap="none" anchor="t" lIns="0" rIns="0" tIns="0" bIns="0">
+              <a:bodyPr wrap="none" lIns="0" tIns="0" rIns="0" bIns="0" anchor="t">
                 <a:spAutoFit/>
               </a:bodyPr>
               <a:lstStyle/>
               <a:p>
                 <a:pPr algn="ctr"/>
                 <a14:m>
-                  <m:oMath xmlns:m="http://schemas.openxmlformats.org/officeDocument/2006/math">
-                    <m:sSub>
-                      <m:e>
-                        <m:r>
-                          <a:rPr lang="en-US" dirty="0" sz="1275">
-                            <a:solidFill>
-                              <a:srgbClr val="FFFFFF"/>
-                            </a:solidFill>
-                            <a:latin typeface="Cambria Math"/>
-                          </a:rPr>
-                          <m:t>z</m:t>
-                        </m:r>
-                      </m:e>
-                      <m:sub>
-                        <m:r>
-                          <a:rPr lang="en-US" dirty="0" sz="1275">
-                            <a:solidFill>
-                              <a:srgbClr val="FFFFFF"/>
-                            </a:solidFill>
-                            <a:latin typeface="Cambria Math"/>
-                          </a:rPr>
-                          <m:t>t+1</m:t>
-                        </m:r>
-                      </m:sub>
-                    </m:sSub>
-                  </m:oMath>
+                  <m:oMathPara xmlns:m="http://schemas.openxmlformats.org/officeDocument/2006/math">
+                    <m:oMath>
+                      <m:sSub>
+                        <m:sSubPr>
+                          <m:ctrlPr>
+                            <a:rPr lang="en-US" sz="1275" dirty="0">
+                              <a:solidFill>
+                                <a:srgbClr val="FFFFFF"/>
+                              </a:solidFill>
+                              <a:latin typeface="Cambria Math"/>
+                            </a:rPr>
+                          </m:ctrlPr>
+                        </m:sSubPr>
+                        <m:e>
+                          <m:r>
+                            <a:rPr lang="en-US" sz="1275" dirty="0">
+                              <a:solidFill>
+                                <a:srgbClr val="FFFFFF"/>
+                              </a:solidFill>
+                              <a:latin typeface="Cambria Math"/>
+                            </a:rPr>
+                            <m:t>𝑧</m:t>
+                          </m:r>
+                        </m:e>
+                        <m:sub>
+                          <m:r>
+                            <a:rPr lang="en-US" sz="1275" dirty="0">
+                              <a:solidFill>
+                                <a:srgbClr val="FFFFFF"/>
+                              </a:solidFill>
+                              <a:latin typeface="Cambria Math"/>
+                            </a:rPr>
+                            <m:t>𝑡</m:t>
+                          </m:r>
+                          <m:r>
+                            <a:rPr lang="en-US" sz="1275" dirty="0">
+                              <a:solidFill>
+                                <a:srgbClr val="FFFFFF"/>
+                              </a:solidFill>
+                              <a:latin typeface="Cambria Math"/>
+                            </a:rPr>
+                            <m:t>+1</m:t>
+                          </m:r>
+                        </m:sub>
+                      </m:sSub>
+                    </m:oMath>
+                  </m:oMathPara>
                 </a14:m>
-                <a:endParaRPr lang="en-US" dirty="0" sz="1275">
+                <a:endParaRPr lang="en-US" sz="1275" dirty="0">
                   <a:solidFill>
                     <a:srgbClr val="FFFFFF"/>
                   </a:solidFill>
@@ -9241,10 +9605,10 @@
             </p:txBody>
           </p:sp>
         </mc:Choice>
-        <mc:Fallback>
+        <mc:Fallback xmlns="">
           <p:sp>
             <p:nvSpPr>
-              <p:cNvPr id="127" name="math:011" descr="AI_AUTOFIGURE_MATH_FALLBACK_ONLY_V1:eyJjb250ZW50X3J1bnMiOlt7ImNhbm9uaWNhbF9sYXRleCI6Inpfe3QrMX0iLCJmb3JtdWxhX2lkIjoiRVEwMTEiLCJraW5kIjoibWF0aCIsImxhdGV4X3NoYTI1NiI6IjhlNWQwMDAwYWJiOWNmMDc3M2U3OGZiNTMwMjc1MjMwYjhlZGZiOGNkOTYyYjMyNjM1ZGRlN2NjMjg0NjkwOTEiLCJtb2RlIjoiaW5saW5lIiwib21tbF9zaGEyNTYiOiJhOTVmOTI4NDdlYzgwMmEyMzkyZDQ5YWYwYTZlMTU3NzMxZTdkYzdjMjM4YzEwMGI2ZTlhZDY2NDVhMjhmZTQyIiwic2VtYW50aWNfb21tbF9wcm9maWxlIjoib2ZmaWNlLW1hdGgtc2VtYW50aWMtdjIiLCJzZW1hbnRpY19vbW1sX3NoYTI1NiI6IjY5OTJiMGQ0ODlkYWEyM2Y3ZWViMjgxMjc3NjIyNGU5NDRhNjc1MjQxNGNjYmQ5ZTIzYjQ0OTMyODM3ZjMzZTYifV0sImZvcm11bGFzIjpbeyJjYW5vbmljYWxfbGF0ZXgiOiJ6X3t0KzF9IiwiZm9ybXVsYV9pZCI6IkVRMDExIiwibGF0ZXhfc2hhMjU2IjoiOGU1ZDAwMDBhYmI5Y2YwNzczZTc4ZmI1MzAyNzUyMzBiOGVkZmI4Y2Q5NjJiMzI2MzVkZGU3Y2MyODQ2OTA5MSIsIm1vZGUiOiJpbmxpbmUiLCJvbW1sX3NoYTI1NiI6ImE5NWY5Mjg0N2VjODAyYTIzOTJkNDlhZjBhNmUxNTc3MzFlN2RjN2MyMzhjMTAwYjZlOWFkNjY0NWEyOGZlNDIiLCJzZW1hbnRpY19vbW1sX3Byb2ZpbGUiOiJvZmZpY2UtbWF0aC1zZW1hbnRpYy12MiIsInNlbWFudGljX29tbWxfc2hhMjU2IjoiNjk5MmIwZDQ4OWRhYTIzZjdlZWIyODEyNzc2MjI0ZTk0NGE2NzUyNDE0Y2NiZDllMjNiNDQ5MzI4MzdmMzNlNiJ9XSwia2luZCI6Im5hdGl2ZV9vZmZpY2VfbWF0aCIsInBsYWNlaG9sZGVyX25hbWUiOiJtYXRoOjAxMSIsInNjaGVtYV92ZXJzaW9uIjoiMS4wIn0="/>
+              <p:cNvPr id="130" name="math:011" descr="AI_AUTOFIGURE_MATH_FALLBACK_ONLY_V1:eyJjb250ZW50X3J1bnMiOlt7ImNhbm9uaWNhbF9sYXRleCI6Inpfe3QrMX0iLCJmb3JtdWxhX2lkIjoiRVEwMTEiLCJraW5kIjoibWF0aCIsImxhdGV4X3NoYTI1NiI6IjhlNWQwMDAwYWJiOWNmMDc3M2U3OGZiNTMwMjc1MjMwYjhlZGZiOGNkOTYyYjMyNjM1ZGRlN2NjMjg0NjkwOTEiLCJtb2RlIjoiaW5saW5lIiwib21tbF9zaGEyNTYiOiJhOTVmOTI4NDdlYzgwMmEyMzkyZDQ5YWYwYTZlMTU3NzMxZTdkYzdjMjM4YzEwMGI2ZTlhZDY2NDVhMjhmZTQyIiwic2VtYW50aWNfb21tbF9wcm9maWxlIjoib2ZmaWNlLW1hdGgtc2VtYW50aWMtdjIiLCJzZW1hbnRpY19vbW1sX3NoYTI1NiI6IjY5OTJiMGQ0ODlkYWEyM2Y3ZWViMjgxMjc3NjIyNGU5NDRhNjc1MjQxNGNjYmQ5ZTIzYjQ0OTMyODM3ZjMzZTYifV0sImZvcm11bGFzIjpbeyJjYW5vbmljYWxfbGF0ZXgiOiJ6X3t0KzF9IiwiZm9ybXVsYV9pZCI6IkVRMDExIiwibGF0ZXhfc2hhMjU2IjoiOGU1ZDAwMDBhYmI5Y2YwNzczZTc4ZmI1MzAyNzUyMzBiOGVkZmI4Y2Q5NjJiMzI2MzVkZGU3Y2MyODQ2OTA5MSIsIm1vZGUiOiJpbmxpbmUiLCJvbW1sX3NoYTI1NiI6ImE5NWY5Mjg0N2VjODAyYTIzOTJkNDlhZjBhNmUxNTc3MzFlN2RjN2MyMzhjMTAwYjZlOWFkNjY0NWEyOGZlNDIiLCJzZW1hbnRpY19vbW1sX3Byb2ZpbGUiOiJvZmZpY2UtbWF0aC1zZW1hbnRpYy12MiIsInNlbWFudGljX29tbWxfc2hhMjU2IjoiNjk5MmIwZDQ4OWRhYTIzZjdlZWIyODEyNzc2MjI0ZTk0NGE2NzUyNDE0Y2NiZDllMjNiNDQ5MzI4MzdmMzNlNiJ9XSwia2luZCI6Im5hdGl2ZV9vZmZpY2VfbWF0aCIsInBsYWNlaG9sZGVyX25hbWUiOiJtYXRoOjAxMSIsInNjaGVtYV92ZXJzaW9uIjoiMS4wIn0="/>
               <p:cNvSpPr txBox="1"/>
               <p:nvPr/>
             </p:nvSpPr>
@@ -9260,7 +9624,7 @@
               <a:effectLst/>
             </p:spPr>
             <p:txBody>
-              <a:bodyPr wrap="none" anchor="t" lIns="0" rIns="0" tIns="0" bIns="0">
+              <a:bodyPr wrap="none" lIns="0" tIns="0" rIns="0" bIns="0" anchor="t">
                 <a:spAutoFit/>
               </a:bodyPr>
               <a:lstStyle/>
@@ -9284,11 +9648,11 @@
           </p:sp>
         </mc:Fallback>
       </mc:AlternateContent>
-      <mc:AlternateContent xmlns:mc="http://schemas.openxmlformats.org/markup-compatibility/2006">
-        <mc:Choice xmlns:a14="http://schemas.microsoft.com/office/drawing/2010/main" Requires="a14">
+      <mc:AlternateContent xmlns:mc="http://schemas.openxmlformats.org/markup-compatibility/2006" xmlns:a14="http://schemas.microsoft.com/office/drawing/2010/main">
+        <mc:Choice Requires="a14">
           <p:sp>
             <p:nvSpPr>
-              <p:cNvPr id="128" name="math:012" descr="AI_AUTOFIGURE_NATIVE_MATH_V1:eyJjb250ZW50X3J1bnMiOlt7ImNhbm9uaWNhbF9sYXRleCI6Inpfe3QrMn0iLCJmb3JtdWxhX2lkIjoiRVEwMTIiLCJraW5kIjoibWF0aCIsImxhdGV4X3NoYTI1NiI6ImVkN2EzM2FmMDZiOTY1M2Y4Mzk2MmMyN2IyMGRkOWI4NDZjYjJlZTBlMDAzMDY1MGNhMTQ0MzZiMzg5NzA5M2EiLCJtb2RlIjoiaW5saW5lIiwib21tbF9zaGEyNTYiOiI2NDc0MzYwMTY3NzVjMGViNTYwYWIzNjYzNDJjNjUxZTVkY2ZhMzBkZWE3ZjU3NTcyNDMxZDEzNjNlYmI3ZDBkIiwic2VtYW50aWNfb21tbF9wcm9maWxlIjoib2ZmaWNlLW1hdGgtc2VtYW50aWMtdjIiLCJzZW1hbnRpY19vbW1sX3NoYTI1NiI6ImE1ZTA0ZjFhNzZiNzc4MjQ5NzY0MzBlYzg4MmNmOGNjMWE4ZTk5YmYzN2FlYTFlMWVlNWI3ODA5MmM4ZTQ4MTMifV0sImZvcm11bGFzIjpbeyJjYW5vbmljYWxfbGF0ZXgiOiJ6X3t0KzJ9IiwiZm9ybXVsYV9pZCI6IkVRMDEyIiwibGF0ZXhfc2hhMjU2IjoiZWQ3YTMzYWYwNmI5NjUzZjgzOTYyYzI3YjIwZGQ5Yjg0NmNiMmVlMGUwMDMwNjUwY2ExNDQzNmIzODk3MDkzYSIsIm1vZGUiOiJpbmxpbmUiLCJvbW1sX3NoYTI1NiI6IjY0NzQzNjAxNjc3NWMwZWI1NjBhYjM2NjM0MmM2NTFlNWRjZmEzMGRlYTdmNTc1NzI0MzFkMTM2M2ViYjdkMGQiLCJzZW1hbnRpY19vbW1sX3Byb2ZpbGUiOiJvZmZpY2UtbWF0aC1zZW1hbnRpYy12MiIsInNlbWFudGljX29tbWxfc2hhMjU2IjoiYTVlMDRmMWE3NmI3NzgyNDk3NjQzMGVjODgyY2Y4Y2MxYThlOTliZjM3YWVhMWUxZWU1Yjc4MDkyYzhlNDgxMyJ9XSwia2luZCI6Im5hdGl2ZV9vZmZpY2VfbWF0aCIsInBsYWNlaG9sZGVyX25hbWUiOiJtYXRoOjAxMiIsInNjaGVtYV92ZXJzaW9uIjoiMS4wIn0="/>
+              <p:cNvPr id="131" name="math:012" descr="AI_AUTOFIGURE_NATIVE_MATH_V1:eyJjb250ZW50X3J1bnMiOlt7ImNhbm9uaWNhbF9sYXRleCI6Inpfe3QrMn0iLCJmb3JtdWxhX2lkIjoiRVEwMTIiLCJraW5kIjoibWF0aCIsImxhdGV4X3NoYTI1NiI6ImVkN2EzM2FmMDZiOTY1M2Y4Mzk2MmMyN2IyMGRkOWI4NDZjYjJlZTBlMDAzMDY1MGNhMTQ0MzZiMzg5NzA5M2EiLCJtb2RlIjoiaW5saW5lIiwib21tbF9zaGEyNTYiOiI2NDc0MzYwMTY3NzVjMGViNTYwYWIzNjYzNDJjNjUxZTVkY2ZhMzBkZWE3ZjU3NTcyNDMxZDEzNjNlYmI3ZDBkIiwic2VtYW50aWNfb21tbF9wcm9maWxlIjoib2ZmaWNlLW1hdGgtc2VtYW50aWMtdjIiLCJzZW1hbnRpY19vbW1sX3NoYTI1NiI6ImE1ZTA0ZjFhNzZiNzc4MjQ5NzY0MzBlYzg4MmNmOGNjMWE4ZTk5YmYzN2FlYTFlMWVlNWI3ODA5MmM4ZTQ4MTMifV0sImZvcm11bGFzIjpbeyJjYW5vbmljYWxfbGF0ZXgiOiJ6X3t0KzJ9IiwiZm9ybXVsYV9pZCI6IkVRMDEyIiwibGF0ZXhfc2hhMjU2IjoiZWQ3YTMzYWYwNmI5NjUzZjgzOTYyYzI3YjIwZGQ5Yjg0NmNiMmVlMGUwMDMwNjUwY2ExNDQzNmIzODk3MDkzYSIsIm1vZGUiOiJpbmxpbmUiLCJvbW1sX3NoYTI1NiI6IjY0NzQzNjAxNjc3NWMwZWI1NjBhYjM2NjM0MmM2NTFlNWRjZmEzMGRlYTdmNTc1NzI0MzFkMTM2M2ViYjdkMGQiLCJzZW1hbnRpY19vbW1sX3Byb2ZpbGUiOiJvZmZpY2UtbWF0aC1zZW1hbnRpYy12MiIsInNlbWFudGljX29tbWxfc2hhMjU2IjoiYTVlMDRmMWE3NmI3NzgyNDk3NjQzMGVjODgyY2Y4Y2MxYThlOTliZjM3YWVhMWUxZWU1Yjc4MDkyYzhlNDgxMyJ9XSwia2luZCI6Im5hdGl2ZV9vZmZpY2VfbWF0aCIsInBsYWNlaG9sZGVyX25hbWUiOiJtYXRoOjAxMiIsInNjaGVtYV92ZXJzaW9uIjoiMS4wIn0="/>
               <p:cNvSpPr txBox="1"/>
               <p:nvPr/>
             </p:nvSpPr>
@@ -9304,41 +9668,62 @@
               <a:effectLst/>
             </p:spPr>
             <p:txBody>
-              <a:bodyPr wrap="none" anchor="t" lIns="0" rIns="0" tIns="0" bIns="0">
+              <a:bodyPr wrap="none" lIns="0" tIns="0" rIns="0" bIns="0" anchor="t">
                 <a:spAutoFit/>
               </a:bodyPr>
               <a:lstStyle/>
               <a:p>
                 <a:pPr algn="ctr"/>
                 <a14:m>
-                  <m:oMath xmlns:m="http://schemas.openxmlformats.org/officeDocument/2006/math">
-                    <m:sSub>
-                      <m:e>
-                        <m:r>
-                          <a:rPr lang="en-US" dirty="0" sz="1275">
-                            <a:solidFill>
-                              <a:srgbClr val="FFFFFF"/>
-                            </a:solidFill>
-                            <a:latin typeface="Cambria Math"/>
-                          </a:rPr>
-                          <m:t>z</m:t>
-                        </m:r>
-                      </m:e>
-                      <m:sub>
-                        <m:r>
-                          <a:rPr lang="en-US" dirty="0" sz="1275">
-                            <a:solidFill>
-                              <a:srgbClr val="FFFFFF"/>
-                            </a:solidFill>
-                            <a:latin typeface="Cambria Math"/>
-                          </a:rPr>
-                          <m:t>t+2</m:t>
-                        </m:r>
-                      </m:sub>
-                    </m:sSub>
-                  </m:oMath>
+                  <m:oMathPara xmlns:m="http://schemas.openxmlformats.org/officeDocument/2006/math">
+                    <m:oMath>
+                      <m:sSub>
+                        <m:sSubPr>
+                          <m:ctrlPr>
+                            <a:rPr lang="en-US" sz="1275" dirty="0">
+                              <a:solidFill>
+                                <a:srgbClr val="FFFFFF"/>
+                              </a:solidFill>
+                              <a:latin typeface="Cambria Math"/>
+                            </a:rPr>
+                          </m:ctrlPr>
+                        </m:sSubPr>
+                        <m:e>
+                          <m:r>
+                            <a:rPr lang="en-US" sz="1275" dirty="0">
+                              <a:solidFill>
+                                <a:srgbClr val="FFFFFF"/>
+                              </a:solidFill>
+                              <a:latin typeface="Cambria Math"/>
+                            </a:rPr>
+                            <m:t>𝑧</m:t>
+                          </m:r>
+                        </m:e>
+                        <m:sub>
+                          <m:r>
+                            <a:rPr lang="en-US" sz="1275" dirty="0">
+                              <a:solidFill>
+                                <a:srgbClr val="FFFFFF"/>
+                              </a:solidFill>
+                              <a:latin typeface="Cambria Math"/>
+                            </a:rPr>
+                            <m:t>𝑡</m:t>
+                          </m:r>
+                          <m:r>
+                            <a:rPr lang="en-US" sz="1275" dirty="0">
+                              <a:solidFill>
+                                <a:srgbClr val="FFFFFF"/>
+                              </a:solidFill>
+                              <a:latin typeface="Cambria Math"/>
+                            </a:rPr>
+                            <m:t>+2</m:t>
+                          </m:r>
+                        </m:sub>
+                      </m:sSub>
+                    </m:oMath>
+                  </m:oMathPara>
                 </a14:m>
-                <a:endParaRPr lang="en-US" dirty="0" sz="1275">
+                <a:endParaRPr lang="en-US" sz="1275" dirty="0">
                   <a:solidFill>
                     <a:srgbClr val="FFFFFF"/>
                   </a:solidFill>
@@ -9348,10 +9733,10 @@
             </p:txBody>
           </p:sp>
         </mc:Choice>
-        <mc:Fallback>
+        <mc:Fallback xmlns="">
           <p:sp>
             <p:nvSpPr>
-              <p:cNvPr id="128" name="math:012" descr="AI_AUTOFIGURE_MATH_FALLBACK_ONLY_V1:eyJjb250ZW50X3J1bnMiOlt7ImNhbm9uaWNhbF9sYXRleCI6Inpfe3QrMn0iLCJmb3JtdWxhX2lkIjoiRVEwMTIiLCJraW5kIjoibWF0aCIsImxhdGV4X3NoYTI1NiI6ImVkN2EzM2FmMDZiOTY1M2Y4Mzk2MmMyN2IyMGRkOWI4NDZjYjJlZTBlMDAzMDY1MGNhMTQ0MzZiMzg5NzA5M2EiLCJtb2RlIjoiaW5saW5lIiwib21tbF9zaGEyNTYiOiI2NDc0MzYwMTY3NzVjMGViNTYwYWIzNjYzNDJjNjUxZTVkY2ZhMzBkZWE3ZjU3NTcyNDMxZDEzNjNlYmI3ZDBkIiwic2VtYW50aWNfb21tbF9wcm9maWxlIjoib2ZmaWNlLW1hdGgtc2VtYW50aWMtdjIiLCJzZW1hbnRpY19vbW1sX3NoYTI1NiI6ImE1ZTA0ZjFhNzZiNzc4MjQ5NzY0MzBlYzg4MmNmOGNjMWE4ZTk5YmYzN2FlYTFlMWVlNWI3ODA5MmM4ZTQ4MTMifV0sImZvcm11bGFzIjpbeyJjYW5vbmljYWxfbGF0ZXgiOiJ6X3t0KzJ9IiwiZm9ybXVsYV9pZCI6IkVRMDEyIiwibGF0ZXhfc2hhMjU2IjoiZWQ3YTMzYWYwNmI5NjUzZjgzOTYyYzI3YjIwZGQ5Yjg0NmNiMmVlMGUwMDMwNjUwY2ExNDQzNmIzODk3MDkzYSIsIm1vZGUiOiJpbmxpbmUiLCJvbW1sX3NoYTI1NiI6IjY0NzQzNjAxNjc3NWMwZWI1NjBhYjM2NjM0MmM2NTFlNWRjZmEzMGRlYTdmNTc1NzI0MzFkMTM2M2ViYjdkMGQiLCJzZW1hbnRpY19vbW1sX3Byb2ZpbGUiOiJvZmZpY2UtbWF0aC1zZW1hbnRpYy12MiIsInNlbWFudGljX29tbWxfc2hhMjU2IjoiYTVlMDRmMWE3NmI3NzgyNDk3NjQzMGVjODgyY2Y4Y2MxYThlOTliZjM3YWVhMWUxZWU1Yjc4MDkyYzhlNDgxMyJ9XSwia2luZCI6Im5hdGl2ZV9vZmZpY2VfbWF0aCIsInBsYWNlaG9sZGVyX25hbWUiOiJtYXRoOjAxMiIsInNjaGVtYV92ZXJzaW9uIjoiMS4wIn0="/>
+              <p:cNvPr id="131" name="math:012" descr="AI_AUTOFIGURE_MATH_FALLBACK_ONLY_V1:eyJjb250ZW50X3J1bnMiOlt7ImNhbm9uaWNhbF9sYXRleCI6Inpfe3QrMn0iLCJmb3JtdWxhX2lkIjoiRVEwMTIiLCJraW5kIjoibWF0aCIsImxhdGV4X3NoYTI1NiI6ImVkN2EzM2FmMDZiOTY1M2Y4Mzk2MmMyN2IyMGRkOWI4NDZjYjJlZTBlMDAzMDY1MGNhMTQ0MzZiMzg5NzA5M2EiLCJtb2RlIjoiaW5saW5lIiwib21tbF9zaGEyNTYiOiI2NDc0MzYwMTY3NzVjMGViNTYwYWIzNjYzNDJjNjUxZTVkY2ZhMzBkZWE3ZjU3NTcyNDMxZDEzNjNlYmI3ZDBkIiwic2VtYW50aWNfb21tbF9wcm9maWxlIjoib2ZmaWNlLW1hdGgtc2VtYW50aWMtdjIiLCJzZW1hbnRpY19vbW1sX3NoYTI1NiI6ImE1ZTA0ZjFhNzZiNzc4MjQ5NzY0MzBlYzg4MmNmOGNjMWE4ZTk5YmYzN2FlYTFlMWVlNWI3ODA5MmM4ZTQ4MTMifV0sImZvcm11bGFzIjpbeyJjYW5vbmljYWxfbGF0ZXgiOiJ6X3t0KzJ9IiwiZm9ybXVsYV9pZCI6IkVRMDEyIiwibGF0ZXhfc2hhMjU2IjoiZWQ3YTMzYWYwNmI5NjUzZjgzOTYyYzI3YjIwZGQ5Yjg0NmNiMmVlMGUwMDMwNjUwY2ExNDQzNmIzODk3MDkzYSIsIm1vZGUiOiJpbmxpbmUiLCJvbW1sX3NoYTI1NiI6IjY0NzQzNjAxNjc3NWMwZWI1NjBhYjM2NjM0MmM2NTFlNWRjZmEzMGRlYTdmNTc1NzI0MzFkMTM2M2ViYjdkMGQiLCJzZW1hbnRpY19vbW1sX3Byb2ZpbGUiOiJvZmZpY2UtbWF0aC1zZW1hbnRpYy12MiIsInNlbWFudGljX29tbWxfc2hhMjU2IjoiYTVlMDRmMWE3NmI3NzgyNDk3NjQzMGVjODgyY2Y4Y2MxYThlOTliZjM3YWVhMWUxZWU1Yjc4MDkyYzhlNDgxMyJ9XSwia2luZCI6Im5hdGl2ZV9vZmZpY2VfbWF0aCIsInBsYWNlaG9sZGVyX25hbWUiOiJtYXRoOjAxMiIsInNjaGVtYV92ZXJzaW9uIjoiMS4wIn0="/>
               <p:cNvSpPr txBox="1"/>
               <p:nvPr/>
             </p:nvSpPr>
@@ -9367,7 +9752,7 @@
               <a:effectLst/>
             </p:spPr>
             <p:txBody>
-              <a:bodyPr wrap="none" anchor="t" lIns="0" rIns="0" tIns="0" bIns="0">
+              <a:bodyPr wrap="none" lIns="0" tIns="0" rIns="0" bIns="0" anchor="t">
                 <a:spAutoFit/>
               </a:bodyPr>
               <a:lstStyle/>
@@ -9391,11 +9776,11 @@
           </p:sp>
         </mc:Fallback>
       </mc:AlternateContent>
-      <mc:AlternateContent xmlns:mc="http://schemas.openxmlformats.org/markup-compatibility/2006">
-        <mc:Choice xmlns:a14="http://schemas.microsoft.com/office/drawing/2010/main" Requires="a14">
+      <mc:AlternateContent xmlns:mc="http://schemas.openxmlformats.org/markup-compatibility/2006" xmlns:a14="http://schemas.microsoft.com/office/drawing/2010/main">
+        <mc:Choice Requires="a14">
           <p:sp>
             <p:nvSpPr>
-              <p:cNvPr id="129" name="math:013" descr="AI_AUTOFIGURE_NATIVE_MATH_V1:eyJjb250ZW50X3J1bnMiOlt7ImNhbm9uaWNhbF9sYXRleCI6Inpfe3QraH0iLCJmb3JtdWxhX2lkIjoiRVEwMTMiLCJraW5kIjoibWF0aCIsImxhdGV4X3NoYTI1NiI6IjA0ZWYyNTM3NWI3NzI4NDJjNzhlMjkxMGQwZWIyZTkzMTUwZTkzNmRlNGJlMjZiNDI4YTk5MGQwMWZiNDU2ZTAiLCJtb2RlIjoiaW5saW5lIiwib21tbF9zaGEyNTYiOiI2MTJkY2M3MzFjMWJmOWMzNDhmOWQxYmIwNWI5NDVjYzEwNzBlNDVkMzI0ZDJlODVlNDRiNTNkZTIwZjdmZjE0Iiwic2VtYW50aWNfb21tbF9wcm9maWxlIjoib2ZmaWNlLW1hdGgtc2VtYW50aWMtdjIiLCJzZW1hbnRpY19vbW1sX3NoYTI1NiI6IjgxYWM2YzQxYWZmNmFiZWM1NWJhOWFkMzRiNTdkM2U4MDZjYzY0YzUzMjEyYzRkODQ0ZDE5YzgyYjRiZjU0NDAifV0sImZvcm11bGFzIjpbeyJjYW5vbmljYWxfbGF0ZXgiOiJ6X3t0K2h9IiwiZm9ybXVsYV9pZCI6IkVRMDEzIiwibGF0ZXhfc2hhMjU2IjoiMDRlZjI1Mzc1Yjc3Mjg0MmM3OGUyOTEwZDBlYjJlOTMxNTBlOTM2ZGU0YmUyNmI0MjhhOTkwZDAxZmI0NTZlMCIsIm1vZGUiOiJpbmxpbmUiLCJvbW1sX3NoYTI1NiI6IjYxMmRjYzczMWMxYmY5YzM0OGY5ZDFiYjA1Yjk0NWNjMTA3MGU0NWQzMjRkMmU4NWU0NGI1M2RlMjBmN2ZmMTQiLCJzZW1hbnRpY19vbW1sX3Byb2ZpbGUiOiJvZmZpY2UtbWF0aC1zZW1hbnRpYy12MiIsInNlbWFudGljX29tbWxfc2hhMjU2IjoiODFhYzZjNDFhZmY2YWJlYzU1YmE5YWQzNGI1N2QzZTgwNmNjNjRjNTMyMTJjNGQ4NDRkMTljODJiNGJmNTQ0MCJ9XSwia2luZCI6Im5hdGl2ZV9vZmZpY2VfbWF0aCIsInBsYWNlaG9sZGVyX25hbWUiOiJtYXRoOjAxMyIsInNjaGVtYV92ZXJzaW9uIjoiMS4wIn0="/>
+              <p:cNvPr id="132" name="math:013" descr="AI_AUTOFIGURE_NATIVE_MATH_V1:eyJjb250ZW50X3J1bnMiOlt7ImNhbm9uaWNhbF9sYXRleCI6Inpfe3QraH0iLCJmb3JtdWxhX2lkIjoiRVEwMTMiLCJraW5kIjoibWF0aCIsImxhdGV4X3NoYTI1NiI6IjA0ZWYyNTM3NWI3NzI4NDJjNzhlMjkxMGQwZWIyZTkzMTUwZTkzNmRlNGJlMjZiNDI4YTk5MGQwMWZiNDU2ZTAiLCJtb2RlIjoiaW5saW5lIiwib21tbF9zaGEyNTYiOiI2MTJkY2M3MzFjMWJmOWMzNDhmOWQxYmIwNWI5NDVjYzEwNzBlNDVkMzI0ZDJlODVlNDRiNTNkZTIwZjdmZjE0Iiwic2VtYW50aWNfb21tbF9wcm9maWxlIjoib2ZmaWNlLW1hdGgtc2VtYW50aWMtdjIiLCJzZW1hbnRpY19vbW1sX3NoYTI1NiI6IjgxYWM2YzQxYWZmNmFiZWM1NWJhOWFkMzRiNTdkM2U4MDZjYzY0YzUzMjEyYzRkODQ0ZDE5YzgyYjRiZjU0NDAifV0sImZvcm11bGFzIjpbeyJjYW5vbmljYWxfbGF0ZXgiOiJ6X3t0K2h9IiwiZm9ybXVsYV9pZCI6IkVRMDEzIiwibGF0ZXhfc2hhMjU2IjoiMDRlZjI1Mzc1Yjc3Mjg0MmM3OGUyOTEwZDBlYjJlOTMxNTBlOTM2ZGU0YmUyNmI0MjhhOTkwZDAxZmI0NTZlMCIsIm1vZGUiOiJpbmxpbmUiLCJvbW1sX3NoYTI1NiI6IjYxMmRjYzczMWMxYmY5YzM0OGY5ZDFiYjA1Yjk0NWNjMTA3MGU0NWQzMjRkMmU4NWU0NGI1M2RlMjBmN2ZmMTQiLCJzZW1hbnRpY19vbW1sX3Byb2ZpbGUiOiJvZmZpY2UtbWF0aC1zZW1hbnRpYy12MiIsInNlbWFudGljX29tbWxfc2hhMjU2IjoiODFhYzZjNDFhZmY2YWJlYzU1YmE5YWQzNGI1N2QzZTgwNmNjNjRjNTMyMTJjNGQ4NDRkMTljODJiNGJmNTQ0MCJ9XSwia2luZCI6Im5hdGl2ZV9vZmZpY2VfbWF0aCIsInBsYWNlaG9sZGVyX25hbWUiOiJtYXRoOjAxMyIsInNjaGVtYV92ZXJzaW9uIjoiMS4wIn0="/>
               <p:cNvSpPr txBox="1"/>
               <p:nvPr/>
             </p:nvSpPr>
@@ -9411,41 +9796,71 @@
               <a:effectLst/>
             </p:spPr>
             <p:txBody>
-              <a:bodyPr wrap="none" anchor="t" lIns="0" rIns="0" tIns="0" bIns="0">
+              <a:bodyPr wrap="none" lIns="0" tIns="0" rIns="0" bIns="0" anchor="t">
                 <a:spAutoFit/>
               </a:bodyPr>
               <a:lstStyle/>
               <a:p>
                 <a:pPr algn="ctr"/>
                 <a14:m>
-                  <m:oMath xmlns:m="http://schemas.openxmlformats.org/officeDocument/2006/math">
-                    <m:sSub>
-                      <m:e>
-                        <m:r>
-                          <a:rPr lang="en-US" dirty="0" sz="1275">
-                            <a:solidFill>
-                              <a:srgbClr val="FFFFFF"/>
-                            </a:solidFill>
-                            <a:latin typeface="Cambria Math"/>
-                          </a:rPr>
-                          <m:t>z</m:t>
-                        </m:r>
-                      </m:e>
-                      <m:sub>
-                        <m:r>
-                          <a:rPr lang="en-US" dirty="0" sz="1275">
-                            <a:solidFill>
-                              <a:srgbClr val="FFFFFF"/>
-                            </a:solidFill>
-                            <a:latin typeface="Cambria Math"/>
-                          </a:rPr>
-                          <m:t>t+h</m:t>
-                        </m:r>
-                      </m:sub>
-                    </m:sSub>
-                  </m:oMath>
+                  <m:oMathPara xmlns:m="http://schemas.openxmlformats.org/officeDocument/2006/math">
+                    <m:oMath>
+                      <m:sSub>
+                        <m:sSubPr>
+                          <m:ctrlPr>
+                            <a:rPr lang="en-US" sz="1275" dirty="0">
+                              <a:solidFill>
+                                <a:srgbClr val="FFFFFF"/>
+                              </a:solidFill>
+                              <a:latin typeface="Cambria Math"/>
+                            </a:rPr>
+                          </m:ctrlPr>
+                        </m:sSubPr>
+                        <m:e>
+                          <m:r>
+                            <a:rPr lang="en-US" sz="1275" dirty="0">
+                              <a:solidFill>
+                                <a:srgbClr val="FFFFFF"/>
+                              </a:solidFill>
+                              <a:latin typeface="Cambria Math"/>
+                            </a:rPr>
+                            <m:t>𝑧</m:t>
+                          </m:r>
+                        </m:e>
+                        <m:sub>
+                          <m:r>
+                            <a:rPr lang="en-US" sz="1275" dirty="0">
+                              <a:solidFill>
+                                <a:srgbClr val="FFFFFF"/>
+                              </a:solidFill>
+                              <a:latin typeface="Cambria Math"/>
+                            </a:rPr>
+                            <m:t>𝑡</m:t>
+                          </m:r>
+                          <m:r>
+                            <a:rPr lang="en-US" sz="1275" dirty="0">
+                              <a:solidFill>
+                                <a:srgbClr val="FFFFFF"/>
+                              </a:solidFill>
+                              <a:latin typeface="Cambria Math"/>
+                            </a:rPr>
+                            <m:t>+</m:t>
+                          </m:r>
+                          <m:r>
+                            <a:rPr lang="en-US" sz="1275" dirty="0">
+                              <a:solidFill>
+                                <a:srgbClr val="FFFFFF"/>
+                              </a:solidFill>
+                              <a:latin typeface="Cambria Math"/>
+                            </a:rPr>
+                            <m:t>ℎ</m:t>
+                          </m:r>
+                        </m:sub>
+                      </m:sSub>
+                    </m:oMath>
+                  </m:oMathPara>
                 </a14:m>
-                <a:endParaRPr lang="en-US" dirty="0" sz="1275">
+                <a:endParaRPr lang="en-US" sz="1275" dirty="0">
                   <a:solidFill>
                     <a:srgbClr val="FFFFFF"/>
                   </a:solidFill>
@@ -9455,10 +9870,10 @@
             </p:txBody>
           </p:sp>
         </mc:Choice>
-        <mc:Fallback>
+        <mc:Fallback xmlns="">
           <p:sp>
             <p:nvSpPr>
-              <p:cNvPr id="129" name="math:013" descr="AI_AUTOFIGURE_MATH_FALLBACK_ONLY_V1:eyJjb250ZW50X3J1bnMiOlt7ImNhbm9uaWNhbF9sYXRleCI6Inpfe3QraH0iLCJmb3JtdWxhX2lkIjoiRVEwMTMiLCJraW5kIjoibWF0aCIsImxhdGV4X3NoYTI1NiI6IjA0ZWYyNTM3NWI3NzI4NDJjNzhlMjkxMGQwZWIyZTkzMTUwZTkzNmRlNGJlMjZiNDI4YTk5MGQwMWZiNDU2ZTAiLCJtb2RlIjoiaW5saW5lIiwib21tbF9zaGEyNTYiOiI2MTJkY2M3MzFjMWJmOWMzNDhmOWQxYmIwNWI5NDVjYzEwNzBlNDVkMzI0ZDJlODVlNDRiNTNkZTIwZjdmZjE0Iiwic2VtYW50aWNfb21tbF9wcm9maWxlIjoib2ZmaWNlLW1hdGgtc2VtYW50aWMtdjIiLCJzZW1hbnRpY19vbW1sX3NoYTI1NiI6IjgxYWM2YzQxYWZmNmFiZWM1NWJhOWFkMzRiNTdkM2U4MDZjYzY0YzUzMjEyYzRkODQ0ZDE5YzgyYjRiZjU0NDAifV0sImZvcm11bGFzIjpbeyJjYW5vbmljYWxfbGF0ZXgiOiJ6X3t0K2h9IiwiZm9ybXVsYV9pZCI6IkVRMDEzIiwibGF0ZXhfc2hhMjU2IjoiMDRlZjI1Mzc1Yjc3Mjg0MmM3OGUyOTEwZDBlYjJlOTMxNTBlOTM2ZGU0YmUyNmI0MjhhOTkwZDAxZmI0NTZlMCIsIm1vZGUiOiJpbmxpbmUiLCJvbW1sX3NoYTI1NiI6IjYxMmRjYzczMWMxYmY5YzM0OGY5ZDFiYjA1Yjk0NWNjMTA3MGU0NWQzMjRkMmU4NWU0NGI1M2RlMjBmN2ZmMTQiLCJzZW1hbnRpY19vbW1sX3Byb2ZpbGUiOiJvZmZpY2UtbWF0aC1zZW1hbnRpYy12MiIsInNlbWFudGljX29tbWxfc2hhMjU2IjoiODFhYzZjNDFhZmY2YWJlYzU1YmE5YWQzNGI1N2QzZTgwNmNjNjRjNTMyMTJjNGQ4NDRkMTljODJiNGJmNTQ0MCJ9XSwia2luZCI6Im5hdGl2ZV9vZmZpY2VfbWF0aCIsInBsYWNlaG9sZGVyX25hbWUiOiJtYXRoOjAxMyIsInNjaGVtYV92ZXJzaW9uIjoiMS4wIn0="/>
+              <p:cNvPr id="132" name="math:013" descr="AI_AUTOFIGURE_MATH_FALLBACK_ONLY_V1:eyJjb250ZW50X3J1bnMiOlt7ImNhbm9uaWNhbF9sYXRleCI6Inpfe3QraH0iLCJmb3JtdWxhX2lkIjoiRVEwMTMiLCJraW5kIjoibWF0aCIsImxhdGV4X3NoYTI1NiI6IjA0ZWYyNTM3NWI3NzI4NDJjNzhlMjkxMGQwZWIyZTkzMTUwZTkzNmRlNGJlMjZiNDI4YTk5MGQwMWZiNDU2ZTAiLCJtb2RlIjoiaW5saW5lIiwib21tbF9zaGEyNTYiOiI2MTJkY2M3MzFjMWJmOWMzNDhmOWQxYmIwNWI5NDVjYzEwNzBlNDVkMzI0ZDJlODVlNDRiNTNkZTIwZjdmZjE0Iiwic2VtYW50aWNfb21tbF9wcm9maWxlIjoib2ZmaWNlLW1hdGgtc2VtYW50aWMtdjIiLCJzZW1hbnRpY19vbW1sX3NoYTI1NiI6IjgxYWM2YzQxYWZmNmFiZWM1NWJhOWFkMzRiNTdkM2U4MDZjYzY0YzUzMjEyYzRkODQ0ZDE5YzgyYjRiZjU0NDAifV0sImZvcm11bGFzIjpbeyJjYW5vbmljYWxfbGF0ZXgiOiJ6X3t0K2h9IiwiZm9ybXVsYV9pZCI6IkVRMDEzIiwibGF0ZXhfc2hhMjU2IjoiMDRlZjI1Mzc1Yjc3Mjg0MmM3OGUyOTEwZDBlYjJlOTMxNTBlOTM2ZGU0YmUyNmI0MjhhOTkwZDAxZmI0NTZlMCIsIm1vZGUiOiJpbmxpbmUiLCJvbW1sX3NoYTI1NiI6IjYxMmRjYzczMWMxYmY5YzM0OGY5ZDFiYjA1Yjk0NWNjMTA3MGU0NWQzMjRkMmU4NWU0NGI1M2RlMjBmN2ZmMTQiLCJzZW1hbnRpY19vbW1sX3Byb2ZpbGUiOiJvZmZpY2UtbWF0aC1zZW1hbnRpYy12MiIsInNlbWFudGljX29tbWxfc2hhMjU2IjoiODFhYzZjNDFhZmY2YWJlYzU1YmE5YWQzNGI1N2QzZTgwNmNjNjRjNTMyMTJjNGQ4NDRkMTljODJiNGJmNTQ0MCJ9XSwia2luZCI6Im5hdGl2ZV9vZmZpY2VfbWF0aCIsInBsYWNlaG9sZGVyX25hbWUiOiJtYXRoOjAxMyIsInNjaGVtYV92ZXJzaW9uIjoiMS4wIn0="/>
               <p:cNvSpPr txBox="1"/>
               <p:nvPr/>
             </p:nvSpPr>
@@ -9474,7 +9889,7 @@
               <a:effectLst/>
             </p:spPr>
             <p:txBody>
-              <a:bodyPr wrap="none" anchor="t" lIns="0" rIns="0" tIns="0" bIns="0">
+              <a:bodyPr wrap="none" lIns="0" tIns="0" rIns="0" bIns="0" anchor="t">
                 <a:spAutoFit/>
               </a:bodyPr>
               <a:lstStyle/>
@@ -9500,7 +9915,7 @@
       </mc:AlternateContent>
       <p:sp>
         <p:nvSpPr>
-          <p:cNvPr id="130" name="af-rollout-label-text-01"/>
+          <p:cNvPr id="133" name="af-rollout-label-text-01" descr="{&quot;autofigure_element_id&quot;:&quot;rollout-label&quot;}"/>
           <p:cNvSpPr txBox="1"/>
           <p:nvPr/>
         </p:nvSpPr>
@@ -9516,7 +9931,7 @@
           <a:effectLst/>
         </p:spPr>
         <p:txBody>
-          <a:bodyPr wrap="none" anchor="t" lIns="0" rIns="0" tIns="0" bIns="0">
+          <a:bodyPr wrap="none" lIns="0" tIns="0" rIns="0" bIns="0" anchor="t">
             <a:spAutoFit/>
           </a:bodyPr>
           <a:lstStyle/>
@@ -9536,7 +9951,7 @@
       </p:sp>
       <p:sp>
         <p:nvSpPr>
-          <p:cNvPr id="131" name="af-reward-r0-ellipse-01"/>
+          <p:cNvPr id="134" name="af-reward-r0-ellipse-01" descr="{&quot;autofigure_element_id&quot;:&quot;reward-r0&quot;}"/>
           <p:cNvSpPr/>
           <p:nvPr/>
         </p:nvSpPr>
@@ -9575,12 +9990,13 @@
           <a:lstStyle/>
           <a:p>
             <a:pPr algn="ctr"/>
-          </a:p>
-        </p:txBody>
-      </p:sp>
-      <p:sp>
-        <p:nvSpPr>
-          <p:cNvPr id="132" name="af-reward-r1-ellipse-01"/>
+            <a:endParaRPr/>
+          </a:p>
+        </p:txBody>
+      </p:sp>
+      <p:sp>
+        <p:nvSpPr>
+          <p:cNvPr id="135" name="af-reward-r1-ellipse-01" descr="{&quot;autofigure_element_id&quot;:&quot;reward-r1&quot;}"/>
           <p:cNvSpPr/>
           <p:nvPr/>
         </p:nvSpPr>
@@ -9619,12 +10035,13 @@
           <a:lstStyle/>
           <a:p>
             <a:pPr algn="ctr"/>
-          </a:p>
-        </p:txBody>
-      </p:sp>
-      <p:sp>
-        <p:nvSpPr>
-          <p:cNvPr id="133" name="af-reward-r2-ellipse-01"/>
+            <a:endParaRPr/>
+          </a:p>
+        </p:txBody>
+      </p:sp>
+      <p:sp>
+        <p:nvSpPr>
+          <p:cNvPr id="136" name="af-reward-r2-ellipse-01" descr="{&quot;autofigure_element_id&quot;:&quot;reward-r2&quot;}"/>
           <p:cNvSpPr/>
           <p:nvPr/>
         </p:nvSpPr>
@@ -9663,14 +10080,15 @@
           <a:lstStyle/>
           <a:p>
             <a:pPr algn="ctr"/>
-          </a:p>
-        </p:txBody>
-      </p:sp>
-      <mc:AlternateContent xmlns:mc="http://schemas.openxmlformats.org/markup-compatibility/2006">
-        <mc:Choice xmlns:a14="http://schemas.microsoft.com/office/drawing/2010/main" Requires="a14">
+            <a:endParaRPr/>
+          </a:p>
+        </p:txBody>
+      </p:sp>
+      <mc:AlternateContent xmlns:mc="http://schemas.openxmlformats.org/markup-compatibility/2006" xmlns:a14="http://schemas.microsoft.com/office/drawing/2010/main">
+        <mc:Choice Requires="a14">
           <p:sp>
             <p:nvSpPr>
-              <p:cNvPr id="134" name="math:014" descr="AI_AUTOFIGURE_NATIVE_MATH_V1:eyJjb250ZW50X3J1bnMiOlt7ImNhbm9uaWNhbF9sYXRleCI6InLigLJfe3R9IiwiZm9ybXVsYV9pZCI6IkVRMDE0Iiwia2luZCI6Im1hdGgiLCJsYXRleF9zaGEyNTYiOiI3ZWRhZjhhYmNhZjYwZDliMGZkZDg5MDM3ZWFiODdiODQ4NDEyODA0ZTg2OTFiM2I0NzdjNzFlMTAyOWVlMjIxIiwibW9kZSI6ImlubGluZSIsIm9tbWxfc2hhMjU2IjoiMzY3NDc5MTgxYWIzZWQwNDRiODIzZTFlM2IxNjgxMjRjNjUyMzJmNDQ2YTZiODRkZTE2NTIyNjRlNWY3MzMxMiIsInNlbWFudGljX29tbWxfcHJvZmlsZSI6Im9mZmljZS1tYXRoLXNlbWFudGljLXYyIiwic2VtYW50aWNfb21tbF9zaGEyNTYiOiIwNGJiNGM4YWM3NGRlOGI4NmM0ZDJmYmM5ZDE2MDQ2NDBhNTcxYzg1MjY1MmVlNDNlNjk5YTAwOGJhMzRlMWQ0In1dLCJmb3JtdWxhcyI6W3siY2Fub25pY2FsX2xhdGV4IjoicuKAsl97dH0iLCJmb3JtdWxhX2lkIjoiRVEwMTQiLCJsYXRleF9zaGEyNTYiOiI3ZWRhZjhhYmNhZjYwZDliMGZkZDg5MDM3ZWFiODdiODQ4NDEyODA0ZTg2OTFiM2I0NzdjNzFlMTAyOWVlMjIxIiwibW9kZSI6ImlubGluZSIsIm9tbWxfc2hhMjU2IjoiMzY3NDc5MTgxYWIzZWQwNDRiODIzZTFlM2IxNjgxMjRjNjUyMzJmNDQ2YTZiODRkZTE2NTIyNjRlNWY3MzMxMiIsInNlbWFudGljX29tbWxfcHJvZmlsZSI6Im9mZmljZS1tYXRoLXNlbWFudGljLXYyIiwic2VtYW50aWNfb21tbF9zaGEyNTYiOiIwNGJiNGM4YWM3NGRlOGI4NmM0ZDJmYmM5ZDE2MDQ2NDBhNTcxYzg1MjY1MmVlNDNlNjk5YTAwOGJhMzRlMWQ0In1dLCJraW5kIjoibmF0aXZlX29mZmljZV9tYXRoIiwicGxhY2Vob2xkZXJfbmFtZSI6Im1hdGg6MDE0Iiwic2NoZW1hX3ZlcnNpb24iOiIxLjAifQ=="/>
+              <p:cNvPr id="137" name="math:014" descr="AI_AUTOFIGURE_NATIVE_MATH_V1:eyJjb250ZW50X3J1bnMiOlt7ImNhbm9uaWNhbF9sYXRleCI6InLigLJfe3R9IiwiZm9ybXVsYV9pZCI6IkVRMDE0Iiwia2luZCI6Im1hdGgiLCJsYXRleF9zaGEyNTYiOiI3ZWRhZjhhYmNhZjYwZDliMGZkZDg5MDM3ZWFiODdiODQ4NDEyODA0ZTg2OTFiM2I0NzdjNzFlMTAyOWVlMjIxIiwibW9kZSI6ImlubGluZSIsIm9tbWxfc2hhMjU2IjoiMzY3NDc5MTgxYWIzZWQwNDRiODIzZTFlM2IxNjgxMjRjNjUyMzJmNDQ2YTZiODRkZTE2NTIyNjRlNWY3MzMxMiIsInNlbWFudGljX29tbWxfcHJvZmlsZSI6Im9mZmljZS1tYXRoLXNlbWFudGljLXYyIiwic2VtYW50aWNfb21tbF9zaGEyNTYiOiIwNGJiNGM4YWM3NGRlOGI4NmM0ZDJmYmM5ZDE2MDQ2NDBhNTcxYzg1MjY1MmVlNDNlNjk5YTAwOGJhMzRlMWQ0In1dLCJmb3JtdWxhcyI6W3siY2Fub25pY2FsX2xhdGV4IjoicuKAsl97dH0iLCJmb3JtdWxhX2lkIjoiRVEwMTQiLCJsYXRleF9zaGEyNTYiOiI3ZWRhZjhhYmNhZjYwZDliMGZkZDg5MDM3ZWFiODdiODQ4NDEyODA0ZTg2OTFiM2I0NzdjNzFlMTAyOWVlMjIxIiwibW9kZSI6ImlubGluZSIsIm9tbWxfc2hhMjU2IjoiMzY3NDc5MTgxYWIzZWQwNDRiODIzZTFlM2IxNjgxMjRjNjUyMzJmNDQ2YTZiODRkZTE2NTIyNjRlNWY3MzMxMiIsInNlbWFudGljX29tbWxfcHJvZmlsZSI6Im9mZmljZS1tYXRoLXNlbWFudGljLXYyIiwic2VtYW50aWNfb21tbF9zaGEyNTYiOiIwNGJiNGM4YWM3NGRlOGI4NmM0ZDJmYmM5ZDE2MDQ2NDBhNTcxYzg1MjY1MmVlNDNlNjk5YTAwOGJhMzRlMWQ0In1dLCJraW5kIjoibmF0aXZlX29mZmljZV9tYXRoIiwicGxhY2Vob2xkZXJfbmFtZSI6Im1hdGg6MDE0Iiwic2NoZW1hX3ZlcnNpb24iOiIxLjAifQ=="/>
               <p:cNvSpPr txBox="1"/>
               <p:nvPr/>
             </p:nvSpPr>
@@ -9686,50 +10104,62 @@
               <a:effectLst/>
             </p:spPr>
             <p:txBody>
-              <a:bodyPr wrap="none" anchor="t" lIns="0" rIns="0" tIns="0" bIns="0">
+              <a:bodyPr wrap="none" lIns="0" tIns="0" rIns="0" bIns="0" anchor="t">
                 <a:spAutoFit/>
               </a:bodyPr>
               <a:lstStyle/>
               <a:p>
                 <a:pPr algn="ctr"/>
                 <a14:m>
-                  <m:oMath xmlns:m="http://schemas.openxmlformats.org/officeDocument/2006/math">
-                    <m:r>
-                      <a:rPr lang="en-US" dirty="0" sz="1275">
-                        <a:solidFill>
-                          <a:srgbClr val="FFFFFF"/>
-                        </a:solidFill>
-                        <a:latin typeface="Cambria Math"/>
-                      </a:rPr>
-                      <m:t>r</m:t>
-                    </m:r>
-                    <m:sSub>
-                      <m:e>
-                        <m:r>
-                          <a:rPr lang="en-US" dirty="0" sz="1275">
-                            <a:solidFill>
-                              <a:srgbClr val="FFFFFF"/>
-                            </a:solidFill>
-                            <a:latin typeface="Cambria Math"/>
-                          </a:rPr>
-                          <m:t>′</m:t>
-                        </m:r>
-                      </m:e>
-                      <m:sub>
-                        <m:r>
-                          <a:rPr lang="en-US" dirty="0" sz="1275">
-                            <a:solidFill>
-                              <a:srgbClr val="FFFFFF"/>
-                            </a:solidFill>
-                            <a:latin typeface="Cambria Math"/>
-                          </a:rPr>
-                          <m:t>t</m:t>
-                        </m:r>
-                      </m:sub>
-                    </m:sSub>
-                  </m:oMath>
+                  <m:oMathPara xmlns:m="http://schemas.openxmlformats.org/officeDocument/2006/math">
+                    <m:oMath>
+                      <m:r>
+                        <a:rPr lang="en-US" sz="1275" dirty="0">
+                          <a:solidFill>
+                            <a:srgbClr val="FFFFFF"/>
+                          </a:solidFill>
+                          <a:latin typeface="Cambria Math"/>
+                        </a:rPr>
+                        <m:t>𝑟</m:t>
+                      </m:r>
+                      <m:sSub>
+                        <m:sSubPr>
+                          <m:ctrlPr>
+                            <a:rPr lang="en-US" sz="1275" dirty="0">
+                              <a:solidFill>
+                                <a:srgbClr val="FFFFFF"/>
+                              </a:solidFill>
+                              <a:latin typeface="Cambria Math"/>
+                            </a:rPr>
+                          </m:ctrlPr>
+                        </m:sSubPr>
+                        <m:e>
+                          <m:r>
+                            <a:rPr lang="en-US" sz="1275" dirty="0">
+                              <a:solidFill>
+                                <a:srgbClr val="FFFFFF"/>
+                              </a:solidFill>
+                              <a:latin typeface="Cambria Math"/>
+                            </a:rPr>
+                            <m:t>′</m:t>
+                          </m:r>
+                        </m:e>
+                        <m:sub>
+                          <m:r>
+                            <a:rPr lang="en-US" sz="1275" dirty="0">
+                              <a:solidFill>
+                                <a:srgbClr val="FFFFFF"/>
+                              </a:solidFill>
+                              <a:latin typeface="Cambria Math"/>
+                            </a:rPr>
+                            <m:t>𝑡</m:t>
+                          </m:r>
+                        </m:sub>
+                      </m:sSub>
+                    </m:oMath>
+                  </m:oMathPara>
                 </a14:m>
-                <a:endParaRPr lang="en-US" dirty="0" sz="1275">
+                <a:endParaRPr lang="en-US" sz="1275" dirty="0">
                   <a:solidFill>
                     <a:srgbClr val="FFFFFF"/>
                   </a:solidFill>
@@ -9739,10 +10169,10 @@
             </p:txBody>
           </p:sp>
         </mc:Choice>
-        <mc:Fallback>
+        <mc:Fallback xmlns="">
           <p:sp>
             <p:nvSpPr>
-              <p:cNvPr id="134" name="math:014" descr="AI_AUTOFIGURE_MATH_FALLBACK_ONLY_V1:eyJjb250ZW50X3J1bnMiOlt7ImNhbm9uaWNhbF9sYXRleCI6InLigLJfe3R9IiwiZm9ybXVsYV9pZCI6IkVRMDE0Iiwia2luZCI6Im1hdGgiLCJsYXRleF9zaGEyNTYiOiI3ZWRhZjhhYmNhZjYwZDliMGZkZDg5MDM3ZWFiODdiODQ4NDEyODA0ZTg2OTFiM2I0NzdjNzFlMTAyOWVlMjIxIiwibW9kZSI6ImlubGluZSIsIm9tbWxfc2hhMjU2IjoiMzY3NDc5MTgxYWIzZWQwNDRiODIzZTFlM2IxNjgxMjRjNjUyMzJmNDQ2YTZiODRkZTE2NTIyNjRlNWY3MzMxMiIsInNlbWFudGljX29tbWxfcHJvZmlsZSI6Im9mZmljZS1tYXRoLXNlbWFudGljLXYyIiwic2VtYW50aWNfb21tbF9zaGEyNTYiOiIwNGJiNGM4YWM3NGRlOGI4NmM0ZDJmYmM5ZDE2MDQ2NDBhNTcxYzg1MjY1MmVlNDNlNjk5YTAwOGJhMzRlMWQ0In1dLCJmb3JtdWxhcyI6W3siY2Fub25pY2FsX2xhdGV4IjoicuKAsl97dH0iLCJmb3JtdWxhX2lkIjoiRVEwMTQiLCJsYXRleF9zaGEyNTYiOiI3ZWRhZjhhYmNhZjYwZDliMGZkZDg5MDM3ZWFiODdiODQ4NDEyODA0ZTg2OTFiM2I0NzdjNzFlMTAyOWVlMjIxIiwibW9kZSI6ImlubGluZSIsIm9tbWxfc2hhMjU2IjoiMzY3NDc5MTgxYWIzZWQwNDRiODIzZTFlM2IxNjgxMjRjNjUyMzJmNDQ2YTZiODRkZTE2NTIyNjRlNWY3MzMxMiIsInNlbWFudGljX29tbWxfcHJvZmlsZSI6Im9mZmljZS1tYXRoLXNlbWFudGljLXYyIiwic2VtYW50aWNfb21tbF9zaGEyNTYiOiIwNGJiNGM4YWM3NGRlOGI4NmM0ZDJmYmM5ZDE2MDQ2NDBhNTcxYzg1MjY1MmVlNDNlNjk5YTAwOGJhMzRlMWQ0In1dLCJraW5kIjoibmF0aXZlX29mZmljZV9tYXRoIiwicGxhY2Vob2xkZXJfbmFtZSI6Im1hdGg6MDE0Iiwic2NoZW1hX3ZlcnNpb24iOiIxLjAifQ=="/>
+              <p:cNvPr id="137" name="math:014" descr="AI_AUTOFIGURE_MATH_FALLBACK_ONLY_V1:eyJjb250ZW50X3J1bnMiOlt7ImNhbm9uaWNhbF9sYXRleCI6InLigLJfe3R9IiwiZm9ybXVsYV9pZCI6IkVRMDE0Iiwia2luZCI6Im1hdGgiLCJsYXRleF9zaGEyNTYiOiI3ZWRhZjhhYmNhZjYwZDliMGZkZDg5MDM3ZWFiODdiODQ4NDEyODA0ZTg2OTFiM2I0NzdjNzFlMTAyOWVlMjIxIiwibW9kZSI6ImlubGluZSIsIm9tbWxfc2hhMjU2IjoiMzY3NDc5MTgxYWIzZWQwNDRiODIzZTFlM2IxNjgxMjRjNjUyMzJmNDQ2YTZiODRkZTE2NTIyNjRlNWY3MzMxMiIsInNlbWFudGljX29tbWxfcHJvZmlsZSI6Im9mZmljZS1tYXRoLXNlbWFudGljLXYyIiwic2VtYW50aWNfb21tbF9zaGEyNTYiOiIwNGJiNGM4YWM3NGRlOGI4NmM0ZDJmYmM5ZDE2MDQ2NDBhNTcxYzg1MjY1MmVlNDNlNjk5YTAwOGJhMzRlMWQ0In1dLCJmb3JtdWxhcyI6W3siY2Fub25pY2FsX2xhdGV4IjoicuKAsl97dH0iLCJmb3JtdWxhX2lkIjoiRVEwMTQiLCJsYXRleF9zaGEyNTYiOiI3ZWRhZjhhYmNhZjYwZDliMGZkZDg5MDM3ZWFiODdiODQ4NDEyODA0ZTg2OTFiM2I0NzdjNzFlMTAyOWVlMjIxIiwibW9kZSI6ImlubGluZSIsIm9tbWxfc2hhMjU2IjoiMzY3NDc5MTgxYWIzZWQwNDRiODIzZTFlM2IxNjgxMjRjNjUyMzJmNDQ2YTZiODRkZTE2NTIyNjRlNWY3MzMxMiIsInNlbWFudGljX29tbWxfcHJvZmlsZSI6Im9mZmljZS1tYXRoLXNlbWFudGljLXYyIiwic2VtYW50aWNfb21tbF9zaGEyNTYiOiIwNGJiNGM4YWM3NGRlOGI4NmM0ZDJmYmM5ZDE2MDQ2NDBhNTcxYzg1MjY1MmVlNDNlNjk5YTAwOGJhMzRlMWQ0In1dLCJraW5kIjoibmF0aXZlX29mZmljZV9tYXRoIiwicGxhY2Vob2xkZXJfbmFtZSI6Im1hdGg6MDE0Iiwic2NoZW1hX3ZlcnNpb24iOiIxLjAifQ=="/>
               <p:cNvSpPr txBox="1"/>
               <p:nvPr/>
             </p:nvSpPr>
@@ -9758,7 +10188,7 @@
               <a:effectLst/>
             </p:spPr>
             <p:txBody>
-              <a:bodyPr wrap="none" anchor="t" lIns="0" rIns="0" tIns="0" bIns="0">
+              <a:bodyPr wrap="none" lIns="0" tIns="0" rIns="0" bIns="0" anchor="t">
                 <a:spAutoFit/>
               </a:bodyPr>
               <a:lstStyle/>
@@ -9782,11 +10212,11 @@
           </p:sp>
         </mc:Fallback>
       </mc:AlternateContent>
-      <mc:AlternateContent xmlns:mc="http://schemas.openxmlformats.org/markup-compatibility/2006">
-        <mc:Choice xmlns:a14="http://schemas.microsoft.com/office/drawing/2010/main" Requires="a14">
+      <mc:AlternateContent xmlns:mc="http://schemas.openxmlformats.org/markup-compatibility/2006" xmlns:a14="http://schemas.microsoft.com/office/drawing/2010/main">
+        <mc:Choice Requires="a14">
           <p:sp>
             <p:nvSpPr>
-              <p:cNvPr id="135" name="math:015" descr="AI_AUTOFIGURE_NATIVE_MATH_V1:eyJjb250ZW50X3J1bnMiOlt7ImNhbm9uaWNhbF9sYXRleCI6InLigLJfe3QrMX0iLCJmb3JtdWxhX2lkIjoiRVEwMTUiLCJraW5kIjoibWF0aCIsImxhdGV4X3NoYTI1NiI6ImY3NTUxODY4NGIyOGY1YjZkYzI3MmYzOGNjZDZkMjk0MjllOTNhZmFkMWFhZGJmY2JiYzA0MTg5ODIzY2VhYTEiLCJtb2RlIjoiaW5saW5lIiwib21tbF9zaGEyNTYiOiIxMjYzY2JkZjUzY2VjYWQ5OTcwMTIyMzNmMzU0YmU3ZWQwNTMzNTVlNzc3YmVjYjU3NzMxMjhlY2Q4OTliNWYyIiwic2VtYW50aWNfb21tbF9wcm9maWxlIjoib2ZmaWNlLW1hdGgtc2VtYW50aWMtdjIiLCJzZW1hbnRpY19vbW1sX3NoYTI1NiI6ImNiNzhjMGM2ZDlmNjhmNjE5NTU2OTg2NTk0YjE3MzhhMWVlOTBiZWQ3NzdmY2E1MzE1MTkxNTMzNjBhN2Y0OTQifV0sImZvcm11bGFzIjpbeyJjYW5vbmljYWxfbGF0ZXgiOiJy4oCyX3t0KzF9IiwiZm9ybXVsYV9pZCI6IkVRMDE1IiwibGF0ZXhfc2hhMjU2IjoiZjc1NTE4Njg0YjI4ZjViNmRjMjcyZjM4Y2NkNmQyOTQyOWU5M2FmYWQxYWFkYmZjYmJjMDQxODk4MjNjZWFhMSIsIm1vZGUiOiJpbmxpbmUiLCJvbW1sX3NoYTI1NiI6IjEyNjNjYmRmNTNjZWNhZDk5NzAxMjIzM2YzNTRiZTdlZDA1MzM1NWU3NzdiZWNiNTc3MzEyOGVjZDg5OWI1ZjIiLCJzZW1hbnRpY19vbW1sX3Byb2ZpbGUiOiJvZmZpY2UtbWF0aC1zZW1hbnRpYy12MiIsInNlbWFudGljX29tbWxfc2hhMjU2IjoiY2I3OGMwYzZkOWY2OGY2MTk1NTY5ODY1OTRiMTczOGExZWU5MGJlZDc3N2ZjYTUzMTUxOTE1MzM2MGE3ZjQ5NCJ9XSwia2luZCI6Im5hdGl2ZV9vZmZpY2VfbWF0aCIsInBsYWNlaG9sZGVyX25hbWUiOiJtYXRoOjAxNSIsInNjaGVtYV92ZXJzaW9uIjoiMS4wIn0="/>
+              <p:cNvPr id="138" name="math:015" descr="AI_AUTOFIGURE_NATIVE_MATH_V1:eyJjb250ZW50X3J1bnMiOlt7ImNhbm9uaWNhbF9sYXRleCI6InLigLJfe3QrMX0iLCJmb3JtdWxhX2lkIjoiRVEwMTUiLCJraW5kIjoibWF0aCIsImxhdGV4X3NoYTI1NiI6ImY3NTUxODY4NGIyOGY1YjZkYzI3MmYzOGNjZDZkMjk0MjllOTNhZmFkMWFhZGJmY2JiYzA0MTg5ODIzY2VhYTEiLCJtb2RlIjoiaW5saW5lIiwib21tbF9zaGEyNTYiOiIxMjYzY2JkZjUzY2VjYWQ5OTcwMTIyMzNmMzU0YmU3ZWQwNTMzNTVlNzc3YmVjYjU3NzMxMjhlY2Q4OTliNWYyIiwic2VtYW50aWNfb21tbF9wcm9maWxlIjoib2ZmaWNlLW1hdGgtc2VtYW50aWMtdjIiLCJzZW1hbnRpY19vbW1sX3NoYTI1NiI6ImNiNzhjMGM2ZDlmNjhmNjE5NTU2OTg2NTk0YjE3MzhhMWVlOTBiZWQ3NzdmY2E1MzE1MTkxNTMzNjBhN2Y0OTQifV0sImZvcm11bGFzIjpbeyJjYW5vbmljYWxfbGF0ZXgiOiJy4oCyX3t0KzF9IiwiZm9ybXVsYV9pZCI6IkVRMDE1IiwibGF0ZXhfc2hhMjU2IjoiZjc1NTE4Njg0YjI4ZjViNmRjMjcyZjM4Y2NkNmQyOTQyOWU5M2FmYWQxYWFkYmZjYmJjMDQxODk4MjNjZWFhMSIsIm1vZGUiOiJpbmxpbmUiLCJvbW1sX3NoYTI1NiI6IjEyNjNjYmRmNTNjZWNhZDk5NzAxMjIzM2YzNTRiZTdlZDA1MzM1NWU3NzdiZWNiNTc3MzEyOGVjZDg5OWI1ZjIiLCJzZW1hbnRpY19vbW1sX3Byb2ZpbGUiOiJvZmZpY2UtbWF0aC1zZW1hbnRpYy12MiIsInNlbWFudGljX29tbWxfc2hhMjU2IjoiY2I3OGMwYzZkOWY2OGY2MTk1NTY5ODY1OTRiMTczOGExZWU5MGJlZDc3N2ZjYTUzMTUxOTE1MzM2MGE3ZjQ5NCJ9XSwia2luZCI6Im5hdGl2ZV9vZmZpY2VfbWF0aCIsInBsYWNlaG9sZGVyX25hbWUiOiJtYXRoOjAxNSIsInNjaGVtYV92ZXJzaW9uIjoiMS4wIn0="/>
               <p:cNvSpPr txBox="1"/>
               <p:nvPr/>
             </p:nvSpPr>
@@ -9802,50 +10232,71 @@
               <a:effectLst/>
             </p:spPr>
             <p:txBody>
-              <a:bodyPr wrap="none" anchor="t" lIns="0" rIns="0" tIns="0" bIns="0">
+              <a:bodyPr wrap="none" lIns="0" tIns="0" rIns="0" bIns="0" anchor="t">
                 <a:spAutoFit/>
               </a:bodyPr>
               <a:lstStyle/>
               <a:p>
                 <a:pPr algn="ctr"/>
                 <a14:m>
-                  <m:oMath xmlns:m="http://schemas.openxmlformats.org/officeDocument/2006/math">
-                    <m:r>
-                      <a:rPr lang="en-US" dirty="0" sz="1275">
-                        <a:solidFill>
-                          <a:srgbClr val="FFFFFF"/>
-                        </a:solidFill>
-                        <a:latin typeface="Cambria Math"/>
-                      </a:rPr>
-                      <m:t>r</m:t>
-                    </m:r>
-                    <m:sSub>
-                      <m:e>
-                        <m:r>
-                          <a:rPr lang="en-US" dirty="0" sz="1275">
-                            <a:solidFill>
-                              <a:srgbClr val="FFFFFF"/>
-                            </a:solidFill>
-                            <a:latin typeface="Cambria Math"/>
-                          </a:rPr>
-                          <m:t>′</m:t>
-                        </m:r>
-                      </m:e>
-                      <m:sub>
-                        <m:r>
-                          <a:rPr lang="en-US" dirty="0" sz="1275">
-                            <a:solidFill>
-                              <a:srgbClr val="FFFFFF"/>
-                            </a:solidFill>
-                            <a:latin typeface="Cambria Math"/>
-                          </a:rPr>
-                          <m:t>t+1</m:t>
-                        </m:r>
-                      </m:sub>
-                    </m:sSub>
-                  </m:oMath>
+                  <m:oMathPara xmlns:m="http://schemas.openxmlformats.org/officeDocument/2006/math">
+                    <m:oMath>
+                      <m:r>
+                        <a:rPr lang="en-US" sz="1275" dirty="0">
+                          <a:solidFill>
+                            <a:srgbClr val="FFFFFF"/>
+                          </a:solidFill>
+                          <a:latin typeface="Cambria Math"/>
+                        </a:rPr>
+                        <m:t>𝑟</m:t>
+                      </m:r>
+                      <m:sSub>
+                        <m:sSubPr>
+                          <m:ctrlPr>
+                            <a:rPr lang="en-US" sz="1275" dirty="0">
+                              <a:solidFill>
+                                <a:srgbClr val="FFFFFF"/>
+                              </a:solidFill>
+                              <a:latin typeface="Cambria Math"/>
+                            </a:rPr>
+                          </m:ctrlPr>
+                        </m:sSubPr>
+                        <m:e>
+                          <m:r>
+                            <a:rPr lang="en-US" sz="1275" dirty="0">
+                              <a:solidFill>
+                                <a:srgbClr val="FFFFFF"/>
+                              </a:solidFill>
+                              <a:latin typeface="Cambria Math"/>
+                            </a:rPr>
+                            <m:t>′</m:t>
+                          </m:r>
+                        </m:e>
+                        <m:sub>
+                          <m:r>
+                            <a:rPr lang="en-US" sz="1275" dirty="0">
+                              <a:solidFill>
+                                <a:srgbClr val="FFFFFF"/>
+                              </a:solidFill>
+                              <a:latin typeface="Cambria Math"/>
+                            </a:rPr>
+                            <m:t>𝑡</m:t>
+                          </m:r>
+                          <m:r>
+                            <a:rPr lang="en-US" sz="1275" dirty="0">
+                              <a:solidFill>
+                                <a:srgbClr val="FFFFFF"/>
+                              </a:solidFill>
+                              <a:latin typeface="Cambria Math"/>
+                            </a:rPr>
+                            <m:t>+1</m:t>
+                          </m:r>
+                        </m:sub>
+                      </m:sSub>
+                    </m:oMath>
+                  </m:oMathPara>
                 </a14:m>
-                <a:endParaRPr lang="en-US" dirty="0" sz="1275">
+                <a:endParaRPr lang="en-US" sz="1275" dirty="0">
                   <a:solidFill>
                     <a:srgbClr val="FFFFFF"/>
                   </a:solidFill>
@@ -9855,10 +10306,10 @@
             </p:txBody>
           </p:sp>
         </mc:Choice>
-        <mc:Fallback>
+        <mc:Fallback xmlns="">
           <p:sp>
             <p:nvSpPr>
-              <p:cNvPr id="135" name="math:015" descr="AI_AUTOFIGURE_MATH_FALLBACK_ONLY_V1:eyJjb250ZW50X3J1bnMiOlt7ImNhbm9uaWNhbF9sYXRleCI6InLigLJfe3QrMX0iLCJmb3JtdWxhX2lkIjoiRVEwMTUiLCJraW5kIjoibWF0aCIsImxhdGV4X3NoYTI1NiI6ImY3NTUxODY4NGIyOGY1YjZkYzI3MmYzOGNjZDZkMjk0MjllOTNhZmFkMWFhZGJmY2JiYzA0MTg5ODIzY2VhYTEiLCJtb2RlIjoiaW5saW5lIiwib21tbF9zaGEyNTYiOiIxMjYzY2JkZjUzY2VjYWQ5OTcwMTIyMzNmMzU0YmU3ZWQwNTMzNTVlNzc3YmVjYjU3NzMxMjhlY2Q4OTliNWYyIiwic2VtYW50aWNfb21tbF9wcm9maWxlIjoib2ZmaWNlLW1hdGgtc2VtYW50aWMtdjIiLCJzZW1hbnRpY19vbW1sX3NoYTI1NiI6ImNiNzhjMGM2ZDlmNjhmNjE5NTU2OTg2NTk0YjE3MzhhMWVlOTBiZWQ3NzdmY2E1MzE1MTkxNTMzNjBhN2Y0OTQifV0sImZvcm11bGFzIjpbeyJjYW5vbmljYWxfbGF0ZXgiOiJy4oCyX3t0KzF9IiwiZm9ybXVsYV9pZCI6IkVRMDE1IiwibGF0ZXhfc2hhMjU2IjoiZjc1NTE4Njg0YjI4ZjViNmRjMjcyZjM4Y2NkNmQyOTQyOWU5M2FmYWQxYWFkYmZjYmJjMDQxODk4MjNjZWFhMSIsIm1vZGUiOiJpbmxpbmUiLCJvbW1sX3NoYTI1NiI6IjEyNjNjYmRmNTNjZWNhZDk5NzAxMjIzM2YzNTRiZTdlZDA1MzM1NWU3NzdiZWNiNTc3MzEyOGVjZDg5OWI1ZjIiLCJzZW1hbnRpY19vbW1sX3Byb2ZpbGUiOiJvZmZpY2UtbWF0aC1zZW1hbnRpYy12MiIsInNlbWFudGljX29tbWxfc2hhMjU2IjoiY2I3OGMwYzZkOWY2OGY2MTk1NTY5ODY1OTRiMTczOGExZWU5MGJlZDc3N2ZjYTUzMTUxOTE1MzM2MGE3ZjQ5NCJ9XSwia2luZCI6Im5hdGl2ZV9vZmZpY2VfbWF0aCIsInBsYWNlaG9sZGVyX25hbWUiOiJtYXRoOjAxNSIsInNjaGVtYV92ZXJzaW9uIjoiMS4wIn0="/>
+              <p:cNvPr id="138" name="math:015" descr="AI_AUTOFIGURE_MATH_FALLBACK_ONLY_V1:eyJjb250ZW50X3J1bnMiOlt7ImNhbm9uaWNhbF9sYXRleCI6InLigLJfe3QrMX0iLCJmb3JtdWxhX2lkIjoiRVEwMTUiLCJraW5kIjoibWF0aCIsImxhdGV4X3NoYTI1NiI6ImY3NTUxODY4NGIyOGY1YjZkYzI3MmYzOGNjZDZkMjk0MjllOTNhZmFkMWFhZGJmY2JiYzA0MTg5ODIzY2VhYTEiLCJtb2RlIjoiaW5saW5lIiwib21tbF9zaGEyNTYiOiIxMjYzY2JkZjUzY2VjYWQ5OTcwMTIyMzNmMzU0YmU3ZWQwNTMzNTVlNzc3YmVjYjU3NzMxMjhlY2Q4OTliNWYyIiwic2VtYW50aWNfb21tbF9wcm9maWxlIjoib2ZmaWNlLW1hdGgtc2VtYW50aWMtdjIiLCJzZW1hbnRpY19vbW1sX3NoYTI1NiI6ImNiNzhjMGM2ZDlmNjhmNjE5NTU2OTg2NTk0YjE3MzhhMWVlOTBiZWQ3NzdmY2E1MzE1MTkxNTMzNjBhN2Y0OTQifV0sImZvcm11bGFzIjpbeyJjYW5vbmljYWxfbGF0ZXgiOiJy4oCyX3t0KzF9IiwiZm9ybXVsYV9pZCI6IkVRMDE1IiwibGF0ZXhfc2hhMjU2IjoiZjc1NTE4Njg0YjI4ZjViNmRjMjcyZjM4Y2NkNmQyOTQyOWU5M2FmYWQxYWFkYmZjYmJjMDQxODk4MjNjZWFhMSIsIm1vZGUiOiJpbmxpbmUiLCJvbW1sX3NoYTI1NiI6IjEyNjNjYmRmNTNjZWNhZDk5NzAxMjIzM2YzNTRiZTdlZDA1MzM1NWU3NzdiZWNiNTc3MzEyOGVjZDg5OWI1ZjIiLCJzZW1hbnRpY19vbW1sX3Byb2ZpbGUiOiJvZmZpY2UtbWF0aC1zZW1hbnRpYy12MiIsInNlbWFudGljX29tbWxfc2hhMjU2IjoiY2I3OGMwYzZkOWY2OGY2MTk1NTY5ODY1OTRiMTczOGExZWU5MGJlZDc3N2ZjYTUzMTUxOTE1MzM2MGE3ZjQ5NCJ9XSwia2luZCI6Im5hdGl2ZV9vZmZpY2VfbWF0aCIsInBsYWNlaG9sZGVyX25hbWUiOiJtYXRoOjAxNSIsInNjaGVtYV92ZXJzaW9uIjoiMS4wIn0="/>
               <p:cNvSpPr txBox="1"/>
               <p:nvPr/>
             </p:nvSpPr>
@@ -9874,7 +10325,7 @@
               <a:effectLst/>
             </p:spPr>
             <p:txBody>
-              <a:bodyPr wrap="none" anchor="t" lIns="0" rIns="0" tIns="0" bIns="0">
+              <a:bodyPr wrap="none" lIns="0" tIns="0" rIns="0" bIns="0" anchor="t">
                 <a:spAutoFit/>
               </a:bodyPr>
               <a:lstStyle/>
@@ -9898,11 +10349,11 @@
           </p:sp>
         </mc:Fallback>
       </mc:AlternateContent>
-      <mc:AlternateContent xmlns:mc="http://schemas.openxmlformats.org/markup-compatibility/2006">
-        <mc:Choice xmlns:a14="http://schemas.microsoft.com/office/drawing/2010/main" Requires="a14">
+      <mc:AlternateContent xmlns:mc="http://schemas.openxmlformats.org/markup-compatibility/2006" xmlns:a14="http://schemas.microsoft.com/office/drawing/2010/main">
+        <mc:Choice Requires="a14">
           <p:sp>
             <p:nvSpPr>
-              <p:cNvPr id="136" name="math:016" descr="AI_AUTOFIGURE_NATIVE_MATH_V1:eyJjb250ZW50X3J1bnMiOlt7ImNhbm9uaWNhbF9sYXRleCI6InLigLJfe3QrMn0iLCJmb3JtdWxhX2lkIjoiRVEwMTYiLCJraW5kIjoibWF0aCIsImxhdGV4X3NoYTI1NiI6Ijk1MDQxNmMyNjQ2YjVjMjA5MmQ3YTU4MTdkZmJiYjhiZTkzMDNhNzU5NjAwNmM1MWNlMWNlZDIxYmI3OTIxOGQiLCJtb2RlIjoiaW5saW5lIiwib21tbF9zaGEyNTYiOiJlYTg4ZTRmNjdiODhlNTZiNmVkNTQ5MDcwN2RkZTMyMWU5OTU4MjEyYWYzNDljNGQ1NmZlNDA4NmNiMzQxYzQ5Iiwic2VtYW50aWNfb21tbF9wcm9maWxlIjoib2ZmaWNlLW1hdGgtc2VtYW50aWMtdjIiLCJzZW1hbnRpY19vbW1sX3NoYTI1NiI6Ijk2NDEwZGI1MzdlNmZiNzhmMzliZGEyNDY3ZGNhZmE4MzE5ZDM2ZTA1ODkwNzI1YjA5MTIwNWVhOWRjNDU5NDgifV0sImZvcm11bGFzIjpbeyJjYW5vbmljYWxfbGF0ZXgiOiJy4oCyX3t0KzJ9IiwiZm9ybXVsYV9pZCI6IkVRMDE2IiwibGF0ZXhfc2hhMjU2IjoiOTUwNDE2YzI2NDZiNWMyMDkyZDdhNTgxN2RmYmJiOGJlOTMwM2E3NTk2MDA2YzUxY2UxY2VkMjFiYjc5MjE4ZCIsIm1vZGUiOiJpbmxpbmUiLCJvbW1sX3NoYTI1NiI6ImVhODhlNGY2N2I4OGU1NmI2ZWQ1NDkwNzA3ZGRlMzIxZTk5NTgyMTJhZjM0OWM0ZDU2ZmU0MDg2Y2IzNDFjNDkiLCJzZW1hbnRpY19vbW1sX3Byb2ZpbGUiOiJvZmZpY2UtbWF0aC1zZW1hbnRpYy12MiIsInNlbWFudGljX29tbWxfc2hhMjU2IjoiOTY0MTBkYjUzN2U2ZmI3OGYzOWJkYTI0NjdkY2FmYTgzMTlkMzZlMDU4OTA3MjViMDkxMjA1ZWE5ZGM0NTk0OCJ9XSwia2luZCI6Im5hdGl2ZV9vZmZpY2VfbWF0aCIsInBsYWNlaG9sZGVyX25hbWUiOiJtYXRoOjAxNiIsInNjaGVtYV92ZXJzaW9uIjoiMS4wIn0="/>
+              <p:cNvPr id="139" name="math:016" descr="AI_AUTOFIGURE_NATIVE_MATH_V1:eyJjb250ZW50X3J1bnMiOlt7ImNhbm9uaWNhbF9sYXRleCI6InLigLJfe3QrMn0iLCJmb3JtdWxhX2lkIjoiRVEwMTYiLCJraW5kIjoibWF0aCIsImxhdGV4X3NoYTI1NiI6Ijk1MDQxNmMyNjQ2YjVjMjA5MmQ3YTU4MTdkZmJiYjhiZTkzMDNhNzU5NjAwNmM1MWNlMWNlZDIxYmI3OTIxOGQiLCJtb2RlIjoiaW5saW5lIiwib21tbF9zaGEyNTYiOiJlYTg4ZTRmNjdiODhlNTZiNmVkNTQ5MDcwN2RkZTMyMWU5OTU4MjEyYWYzNDljNGQ1NmZlNDA4NmNiMzQxYzQ5Iiwic2VtYW50aWNfb21tbF9wcm9maWxlIjoib2ZmaWNlLW1hdGgtc2VtYW50aWMtdjIiLCJzZW1hbnRpY19vbW1sX3NoYTI1NiI6Ijk2NDEwZGI1MzdlNmZiNzhmMzliZGEyNDY3ZGNhZmE4MzE5ZDM2ZTA1ODkwNzI1YjA5MTIwNWVhOWRjNDU5NDgifV0sImZvcm11bGFzIjpbeyJjYW5vbmljYWxfbGF0ZXgiOiJy4oCyX3t0KzJ9IiwiZm9ybXVsYV9pZCI6IkVRMDE2IiwibGF0ZXhfc2hhMjU2IjoiOTUwNDE2YzI2NDZiNWMyMDkyZDdhNTgxN2RmYmJiOGJlOTMwM2E3NTk2MDA2YzUxY2UxY2VkMjFiYjc5MjE4ZCIsIm1vZGUiOiJpbmxpbmUiLCJvbW1sX3NoYTI1NiI6ImVhODhlNGY2N2I4OGU1NmI2ZWQ1NDkwNzA3ZGRlMzIxZTk5NTgyMTJhZjM0OWM0ZDU2ZmU0MDg2Y2IzNDFjNDkiLCJzZW1hbnRpY19vbW1sX3Byb2ZpbGUiOiJvZmZpY2UtbWF0aC1zZW1hbnRpYy12MiIsInNlbWFudGljX29tbWxfc2hhMjU2IjoiOTY0MTBkYjUzN2U2ZmI3OGYzOWJkYTI0NjdkY2FmYTgzMTlkMzZlMDU4OTA3MjViMDkxMjA1ZWE5ZGM0NTk0OCJ9XSwia2luZCI6Im5hdGl2ZV9vZmZpY2VfbWF0aCIsInBsYWNlaG9sZGVyX25hbWUiOiJtYXRoOjAxNiIsInNjaGVtYV92ZXJzaW9uIjoiMS4wIn0="/>
               <p:cNvSpPr txBox="1"/>
               <p:nvPr/>
             </p:nvSpPr>
@@ -9918,50 +10369,71 @@
               <a:effectLst/>
             </p:spPr>
             <p:txBody>
-              <a:bodyPr wrap="none" anchor="t" lIns="0" rIns="0" tIns="0" bIns="0">
+              <a:bodyPr wrap="none" lIns="0" tIns="0" rIns="0" bIns="0" anchor="t">
                 <a:spAutoFit/>
               </a:bodyPr>
               <a:lstStyle/>
               <a:p>
                 <a:pPr algn="ctr"/>
                 <a14:m>
-                  <m:oMath xmlns:m="http://schemas.openxmlformats.org/officeDocument/2006/math">
-                    <m:r>
-                      <a:rPr lang="en-US" dirty="0" sz="1275">
-                        <a:solidFill>
-                          <a:srgbClr val="FFFFFF"/>
-                        </a:solidFill>
-                        <a:latin typeface="Cambria Math"/>
-                      </a:rPr>
-                      <m:t>r</m:t>
-                    </m:r>
-                    <m:sSub>
-                      <m:e>
-                        <m:r>
-                          <a:rPr lang="en-US" dirty="0" sz="1275">
-                            <a:solidFill>
-                              <a:srgbClr val="FFFFFF"/>
-                            </a:solidFill>
-                            <a:latin typeface="Cambria Math"/>
-                          </a:rPr>
-                          <m:t>′</m:t>
-                        </m:r>
-                      </m:e>
-                      <m:sub>
-                        <m:r>
-                          <a:rPr lang="en-US" dirty="0" sz="1275">
-                            <a:solidFill>
-                              <a:srgbClr val="FFFFFF"/>
-                            </a:solidFill>
-                            <a:latin typeface="Cambria Math"/>
-                          </a:rPr>
-                          <m:t>t+2</m:t>
-                        </m:r>
-                      </m:sub>
-                    </m:sSub>
-                  </m:oMath>
+                  <m:oMathPara xmlns:m="http://schemas.openxmlformats.org/officeDocument/2006/math">
+                    <m:oMath>
+                      <m:r>
+                        <a:rPr lang="en-US" sz="1275" dirty="0">
+                          <a:solidFill>
+                            <a:srgbClr val="FFFFFF"/>
+                          </a:solidFill>
+                          <a:latin typeface="Cambria Math"/>
+                        </a:rPr>
+                        <m:t>𝑟</m:t>
+                      </m:r>
+                      <m:sSub>
+                        <m:sSubPr>
+                          <m:ctrlPr>
+                            <a:rPr lang="en-US" sz="1275" dirty="0">
+                              <a:solidFill>
+                                <a:srgbClr val="FFFFFF"/>
+                              </a:solidFill>
+                              <a:latin typeface="Cambria Math"/>
+                            </a:rPr>
+                          </m:ctrlPr>
+                        </m:sSubPr>
+                        <m:e>
+                          <m:r>
+                            <a:rPr lang="en-US" sz="1275" dirty="0">
+                              <a:solidFill>
+                                <a:srgbClr val="FFFFFF"/>
+                              </a:solidFill>
+                              <a:latin typeface="Cambria Math"/>
+                            </a:rPr>
+                            <m:t>′</m:t>
+                          </m:r>
+                        </m:e>
+                        <m:sub>
+                          <m:r>
+                            <a:rPr lang="en-US" sz="1275" dirty="0">
+                              <a:solidFill>
+                                <a:srgbClr val="FFFFFF"/>
+                              </a:solidFill>
+                              <a:latin typeface="Cambria Math"/>
+                            </a:rPr>
+                            <m:t>𝑡</m:t>
+                          </m:r>
+                          <m:r>
+                            <a:rPr lang="en-US" sz="1275" dirty="0">
+                              <a:solidFill>
+                                <a:srgbClr val="FFFFFF"/>
+                              </a:solidFill>
+                              <a:latin typeface="Cambria Math"/>
+                            </a:rPr>
+                            <m:t>+2</m:t>
+                          </m:r>
+                        </m:sub>
+                      </m:sSub>
+                    </m:oMath>
+                  </m:oMathPara>
                 </a14:m>
-                <a:endParaRPr lang="en-US" dirty="0" sz="1275">
+                <a:endParaRPr lang="en-US" sz="1275" dirty="0">
                   <a:solidFill>
                     <a:srgbClr val="FFFFFF"/>
                   </a:solidFill>
@@ -9971,10 +10443,10 @@
             </p:txBody>
           </p:sp>
         </mc:Choice>
-        <mc:Fallback>
+        <mc:Fallback xmlns="">
           <p:sp>
             <p:nvSpPr>
-              <p:cNvPr id="136" name="math:016" descr="AI_AUTOFIGURE_MATH_FALLBACK_ONLY_V1:eyJjb250ZW50X3J1bnMiOlt7ImNhbm9uaWNhbF9sYXRleCI6InLigLJfe3QrMn0iLCJmb3JtdWxhX2lkIjoiRVEwMTYiLCJraW5kIjoibWF0aCIsImxhdGV4X3NoYTI1NiI6Ijk1MDQxNmMyNjQ2YjVjMjA5MmQ3YTU4MTdkZmJiYjhiZTkzMDNhNzU5NjAwNmM1MWNlMWNlZDIxYmI3OTIxOGQiLCJtb2RlIjoiaW5saW5lIiwib21tbF9zaGEyNTYiOiJlYTg4ZTRmNjdiODhlNTZiNmVkNTQ5MDcwN2RkZTMyMWU5OTU4MjEyYWYzNDljNGQ1NmZlNDA4NmNiMzQxYzQ5Iiwic2VtYW50aWNfb21tbF9wcm9maWxlIjoib2ZmaWNlLW1hdGgtc2VtYW50aWMtdjIiLCJzZW1hbnRpY19vbW1sX3NoYTI1NiI6Ijk2NDEwZGI1MzdlNmZiNzhmMzliZGEyNDY3ZGNhZmE4MzE5ZDM2ZTA1ODkwNzI1YjA5MTIwNWVhOWRjNDU5NDgifV0sImZvcm11bGFzIjpbeyJjYW5vbmljYWxfbGF0ZXgiOiJy4oCyX3t0KzJ9IiwiZm9ybXVsYV9pZCI6IkVRMDE2IiwibGF0ZXhfc2hhMjU2IjoiOTUwNDE2YzI2NDZiNWMyMDkyZDdhNTgxN2RmYmJiOGJlOTMwM2E3NTk2MDA2YzUxY2UxY2VkMjFiYjc5MjE4ZCIsIm1vZGUiOiJpbmxpbmUiLCJvbW1sX3NoYTI1NiI6ImVhODhlNGY2N2I4OGU1NmI2ZWQ1NDkwNzA3ZGRlMzIxZTk5NTgyMTJhZjM0OWM0ZDU2ZmU0MDg2Y2IzNDFjNDkiLCJzZW1hbnRpY19vbW1sX3Byb2ZpbGUiOiJvZmZpY2UtbWF0aC1zZW1hbnRpYy12MiIsInNlbWFudGljX29tbWxfc2hhMjU2IjoiOTY0MTBkYjUzN2U2ZmI3OGYzOWJkYTI0NjdkY2FmYTgzMTlkMzZlMDU4OTA3MjViMDkxMjA1ZWE5ZGM0NTk0OCJ9XSwia2luZCI6Im5hdGl2ZV9vZmZpY2VfbWF0aCIsInBsYWNlaG9sZGVyX25hbWUiOiJtYXRoOjAxNiIsInNjaGVtYV92ZXJzaW9uIjoiMS4wIn0="/>
+              <p:cNvPr id="139" name="math:016" descr="AI_AUTOFIGURE_MATH_FALLBACK_ONLY_V1:eyJjb250ZW50X3J1bnMiOlt7ImNhbm9uaWNhbF9sYXRleCI6InLigLJfe3QrMn0iLCJmb3JtdWxhX2lkIjoiRVEwMTYiLCJraW5kIjoibWF0aCIsImxhdGV4X3NoYTI1NiI6Ijk1MDQxNmMyNjQ2YjVjMjA5MmQ3YTU4MTdkZmJiYjhiZTkzMDNhNzU5NjAwNmM1MWNlMWNlZDIxYmI3OTIxOGQiLCJtb2RlIjoiaW5saW5lIiwib21tbF9zaGEyNTYiOiJlYTg4ZTRmNjdiODhlNTZiNmVkNTQ5MDcwN2RkZTMyMWU5OTU4MjEyYWYzNDljNGQ1NmZlNDA4NmNiMzQxYzQ5Iiwic2VtYW50aWNfb21tbF9wcm9maWxlIjoib2ZmaWNlLW1hdGgtc2VtYW50aWMtdjIiLCJzZW1hbnRpY19vbW1sX3NoYTI1NiI6Ijk2NDEwZGI1MzdlNmZiNzhmMzliZGEyNDY3ZGNhZmE4MzE5ZDM2ZTA1ODkwNzI1YjA5MTIwNWVhOWRjNDU5NDgifV0sImZvcm11bGFzIjpbeyJjYW5vbmljYWxfbGF0ZXgiOiJy4oCyX3t0KzJ9IiwiZm9ybXVsYV9pZCI6IkVRMDE2IiwibGF0ZXhfc2hhMjU2IjoiOTUwNDE2YzI2NDZiNWMyMDkyZDdhNTgxN2RmYmJiOGJlOTMwM2E3NTk2MDA2YzUxY2UxY2VkMjFiYjc5MjE4ZCIsIm1vZGUiOiJpbmxpbmUiLCJvbW1sX3NoYTI1NiI6ImVhODhlNGY2N2I4OGU1NmI2ZWQ1NDkwNzA3ZGRlMzIxZTk5NTgyMTJhZjM0OWM0ZDU2ZmU0MDg2Y2IzNDFjNDkiLCJzZW1hbnRpY19vbW1sX3Byb2ZpbGUiOiJvZmZpY2UtbWF0aC1zZW1hbnRpYy12MiIsInNlbWFudGljX29tbWxfc2hhMjU2IjoiOTY0MTBkYjUzN2U2ZmI3OGYzOWJkYTI0NjdkY2FmYTgzMTlkMzZlMDU4OTA3MjViMDkxMjA1ZWE5ZGM0NTk0OCJ9XSwia2luZCI6Im5hdGl2ZV9vZmZpY2VfbWF0aCIsInBsYWNlaG9sZGVyX25hbWUiOiJtYXRoOjAxNiIsInNjaGVtYV92ZXJzaW9uIjoiMS4wIn0="/>
               <p:cNvSpPr txBox="1"/>
               <p:nvPr/>
             </p:nvSpPr>
@@ -9990,7 +10462,7 @@
               <a:effectLst/>
             </p:spPr>
             <p:txBody>
-              <a:bodyPr wrap="none" anchor="t" lIns="0" rIns="0" tIns="0" bIns="0">
+              <a:bodyPr wrap="none" lIns="0" tIns="0" rIns="0" bIns="0" anchor="t">
                 <a:spAutoFit/>
               </a:bodyPr>
               <a:lstStyle/>
@@ -10016,7 +10488,7 @@
       </mc:AlternateContent>
       <p:sp>
         <p:nvSpPr>
-          <p:cNvPr id="137" name="af-policy-pi0-ellipse-01"/>
+          <p:cNvPr id="140" name="af-policy-pi0-ellipse-01" descr="{&quot;autofigure_element_id&quot;:&quot;policy-pi0&quot;}"/>
           <p:cNvSpPr/>
           <p:nvPr/>
         </p:nvSpPr>
@@ -10055,12 +10527,13 @@
           <a:lstStyle/>
           <a:p>
             <a:pPr algn="ctr"/>
-          </a:p>
-        </p:txBody>
-      </p:sp>
-      <p:sp>
-        <p:nvSpPr>
-          <p:cNvPr id="138" name="af-policy-pi1-ellipse-01"/>
+            <a:endParaRPr/>
+          </a:p>
+        </p:txBody>
+      </p:sp>
+      <p:sp>
+        <p:nvSpPr>
+          <p:cNvPr id="141" name="af-policy-pi1-ellipse-01" descr="{&quot;autofigure_element_id&quot;:&quot;policy-pi1&quot;}"/>
           <p:cNvSpPr/>
           <p:nvPr/>
         </p:nvSpPr>
@@ -10099,12 +10572,13 @@
           <a:lstStyle/>
           <a:p>
             <a:pPr algn="ctr"/>
-          </a:p>
-        </p:txBody>
-      </p:sp>
-      <p:sp>
-        <p:nvSpPr>
-          <p:cNvPr id="139" name="af-policy-pi2-ellipse-01"/>
+            <a:endParaRPr/>
+          </a:p>
+        </p:txBody>
+      </p:sp>
+      <p:sp>
+        <p:nvSpPr>
+          <p:cNvPr id="142" name="af-policy-pi2-ellipse-01" descr="{&quot;autofigure_element_id&quot;:&quot;policy-pi2&quot;}"/>
           <p:cNvSpPr/>
           <p:nvPr/>
         </p:nvSpPr>
@@ -10143,14 +10617,15 @@
           <a:lstStyle/>
           <a:p>
             <a:pPr algn="ctr"/>
-          </a:p>
-        </p:txBody>
-      </p:sp>
-      <mc:AlternateContent xmlns:mc="http://schemas.openxmlformats.org/markup-compatibility/2006">
-        <mc:Choice xmlns:a14="http://schemas.microsoft.com/office/drawing/2010/main" Requires="a14">
+            <a:endParaRPr/>
+          </a:p>
+        </p:txBody>
+      </p:sp>
+      <mc:AlternateContent xmlns:mc="http://schemas.openxmlformats.org/markup-compatibility/2006" xmlns:a14="http://schemas.microsoft.com/office/drawing/2010/main">
+        <mc:Choice Requires="a14">
           <p:sp>
             <p:nvSpPr>
-              <p:cNvPr id="140" name="math:017" descr="AI_AUTOFIGURE_NATIVE_MATH_V1:eyJjb250ZW50X3J1bnMiOlt7ImNhbm9uaWNhbF9sYXRleCI6IlxccGkiLCJmb3JtdWxhX2lkIjoiRVEwMTciLCJraW5kIjoibWF0aCIsImxhdGV4X3NoYTI1NiI6ImYxY2YwNDA5M2QwOGI2ZGMwZDU4YTg3Mzk2NDA1Y2I5MDkzYTIyZTllZDYyYTk1YmI5NWVkNDZlNWRhOTcwOTciLCJtb2RlIjoiaW5saW5lIiwib21tbF9zaGEyNTYiOiI4MGIzNzkwZWVkMDMxOWQ1MWJmZDZkZDA4MmQ2YTU3YTNjOTllNjU4Njc3MTA3ZDQyMTYyN2MxZjc0OGY3NjU5Iiwic2VtYW50aWNfb21tbF9wcm9maWxlIjoib2ZmaWNlLW1hdGgtc2VtYW50aWMtdjIiLCJzZW1hbnRpY19vbW1sX3NoYTI1NiI6ImU4OWQxNDFjNDBjNmI1MjM0M2IwNjM4ZWY3ZjUyODE2ZTg0ODU4NWY2MjU1MWFhYzMwNThjZWQwNGY3NjllYjYifV0sImZvcm11bGFzIjpbeyJjYW5vbmljYWxfbGF0ZXgiOiJcXHBpIiwiZm9ybXVsYV9pZCI6IkVRMDE3IiwibGF0ZXhfc2hhMjU2IjoiZjFjZjA0MDkzZDA4YjZkYzBkNThhODczOTY0MDVjYjkwOTNhMjJlOWVkNjJhOTViYjk1ZWQ0NmU1ZGE5NzA5NyIsIm1vZGUiOiJpbmxpbmUiLCJvbW1sX3NoYTI1NiI6IjgwYjM3OTBlZWQwMzE5ZDUxYmZkNmRkMDgyZDZhNTdhM2M5OWU2NTg2NzcxMDdkNDIxNjI3YzFmNzQ4Zjc2NTkiLCJzZW1hbnRpY19vbW1sX3Byb2ZpbGUiOiJvZmZpY2UtbWF0aC1zZW1hbnRpYy12MiIsInNlbWFudGljX29tbWxfc2hhMjU2IjoiZTg5ZDE0MWM0MGM2YjUyMzQzYjA2MzhlZjdmNTI4MTZlODQ4NTg1ZjYyNTUxYWFjMzA1OGNlZDA0Zjc2OWViNiJ9XSwia2luZCI6Im5hdGl2ZV9vZmZpY2VfbWF0aCIsInBsYWNlaG9sZGVyX25hbWUiOiJtYXRoOjAxNyIsInNjaGVtYV92ZXJzaW9uIjoiMS4wIn0="/>
+              <p:cNvPr id="143" name="math:017" descr="AI_AUTOFIGURE_NATIVE_MATH_V1:eyJjb250ZW50X3J1bnMiOlt7ImNhbm9uaWNhbF9sYXRleCI6IlxccGkiLCJmb3JtdWxhX2lkIjoiRVEwMTciLCJraW5kIjoibWF0aCIsImxhdGV4X3NoYTI1NiI6ImYxY2YwNDA5M2QwOGI2ZGMwZDU4YTg3Mzk2NDA1Y2I5MDkzYTIyZTllZDYyYTk1YmI5NWVkNDZlNWRhOTcwOTciLCJtb2RlIjoiaW5saW5lIiwib21tbF9zaGEyNTYiOiI4MGIzNzkwZWVkMDMxOWQ1MWJmZDZkZDA4MmQ2YTU3YTNjOTllNjU4Njc3MTA3ZDQyMTYyN2MxZjc0OGY3NjU5Iiwic2VtYW50aWNfb21tbF9wcm9maWxlIjoib2ZmaWNlLW1hdGgtc2VtYW50aWMtdjIiLCJzZW1hbnRpY19vbW1sX3NoYTI1NiI6ImU4OWQxNDFjNDBjNmI1MjM0M2IwNjM4ZWY3ZjUyODE2ZTg0ODU4NWY2MjU1MWFhYzMwNThjZWQwNGY3NjllYjYifV0sImZvcm11bGFzIjpbeyJjYW5vbmljYWxfbGF0ZXgiOiJcXHBpIiwiZm9ybXVsYV9pZCI6IkVRMDE3IiwibGF0ZXhfc2hhMjU2IjoiZjFjZjA0MDkzZDA4YjZkYzBkNThhODczOTY0MDVjYjkwOTNhMjJlOWVkNjJhOTViYjk1ZWQ0NmU1ZGE5NzA5NyIsIm1vZGUiOiJpbmxpbmUiLCJvbW1sX3NoYTI1NiI6IjgwYjM3OTBlZWQwMzE5ZDUxYmZkNmRkMDgyZDZhNTdhM2M5OWU2NTg2NzcxMDdkNDIxNjI3YzFmNzQ4Zjc2NTkiLCJzZW1hbnRpY19vbW1sX3Byb2ZpbGUiOiJvZmZpY2UtbWF0aC1zZW1hbnRpYy12MiIsInNlbWFudGljX29tbWxfc2hhMjU2IjoiZTg5ZDE0MWM0MGM2YjUyMzQzYjA2MzhlZjdmNTI4MTZlODQ4NTg1ZjYyNTUxYWFjMzA1OGNlZDA0Zjc2OWViNiJ9XSwia2luZCI6Im5hdGl2ZV9vZmZpY2VfbWF0aCIsInBsYWNlaG9sZGVyX25hbWUiOiJtYXRoOjAxNyIsInNjaGVtYV92ZXJzaW9uIjoiMS4wIn0="/>
               <p:cNvSpPr txBox="1"/>
               <p:nvPr/>
             </p:nvSpPr>
@@ -10166,26 +10641,28 @@
               <a:effectLst/>
             </p:spPr>
             <p:txBody>
-              <a:bodyPr wrap="none" anchor="t" lIns="0" rIns="0" tIns="0" bIns="0">
+              <a:bodyPr wrap="none" lIns="0" tIns="0" rIns="0" bIns="0" anchor="t">
                 <a:spAutoFit/>
               </a:bodyPr>
               <a:lstStyle/>
               <a:p>
                 <a:pPr algn="ctr"/>
                 <a14:m>
-                  <m:oMath xmlns:m="http://schemas.openxmlformats.org/officeDocument/2006/math">
-                    <m:r>
-                      <a:rPr lang="en-US" dirty="0" sz="1350">
-                        <a:solidFill>
-                          <a:srgbClr val="FFFFFF"/>
-                        </a:solidFill>
-                        <a:latin typeface="Cambria Math"/>
-                      </a:rPr>
-                      <m:t>π</m:t>
-                    </m:r>
-                  </m:oMath>
+                  <m:oMathPara xmlns:m="http://schemas.openxmlformats.org/officeDocument/2006/math">
+                    <m:oMath>
+                      <m:r>
+                        <a:rPr lang="en-US" sz="1350" dirty="0">
+                          <a:solidFill>
+                            <a:srgbClr val="FFFFFF"/>
+                          </a:solidFill>
+                          <a:latin typeface="Cambria Math"/>
+                        </a:rPr>
+                        <m:t>𝜋</m:t>
+                      </m:r>
+                    </m:oMath>
+                  </m:oMathPara>
                 </a14:m>
-                <a:endParaRPr lang="en-US" dirty="0" sz="1350">
+                <a:endParaRPr lang="en-US" sz="1350" dirty="0">
                   <a:solidFill>
                     <a:srgbClr val="FFFFFF"/>
                   </a:solidFill>
@@ -10195,10 +10672,10 @@
             </p:txBody>
           </p:sp>
         </mc:Choice>
-        <mc:Fallback>
+        <mc:Fallback xmlns="">
           <p:sp>
             <p:nvSpPr>
-              <p:cNvPr id="140" name="math:017" descr="AI_AUTOFIGURE_MATH_FALLBACK_ONLY_V1:eyJjb250ZW50X3J1bnMiOlt7ImNhbm9uaWNhbF9sYXRleCI6IlxccGkiLCJmb3JtdWxhX2lkIjoiRVEwMTciLCJraW5kIjoibWF0aCIsImxhdGV4X3NoYTI1NiI6ImYxY2YwNDA5M2QwOGI2ZGMwZDU4YTg3Mzk2NDA1Y2I5MDkzYTIyZTllZDYyYTk1YmI5NWVkNDZlNWRhOTcwOTciLCJtb2RlIjoiaW5saW5lIiwib21tbF9zaGEyNTYiOiI4MGIzNzkwZWVkMDMxOWQ1MWJmZDZkZDA4MmQ2YTU3YTNjOTllNjU4Njc3MTA3ZDQyMTYyN2MxZjc0OGY3NjU5Iiwic2VtYW50aWNfb21tbF9wcm9maWxlIjoib2ZmaWNlLW1hdGgtc2VtYW50aWMtdjIiLCJzZW1hbnRpY19vbW1sX3NoYTI1NiI6ImU4OWQxNDFjNDBjNmI1MjM0M2IwNjM4ZWY3ZjUyODE2ZTg0ODU4NWY2MjU1MWFhYzMwNThjZWQwNGY3NjllYjYifV0sImZvcm11bGFzIjpbeyJjYW5vbmljYWxfbGF0ZXgiOiJcXHBpIiwiZm9ybXVsYV9pZCI6IkVRMDE3IiwibGF0ZXhfc2hhMjU2IjoiZjFjZjA0MDkzZDA4YjZkYzBkNThhODczOTY0MDVjYjkwOTNhMjJlOWVkNjJhOTViYjk1ZWQ0NmU1ZGE5NzA5NyIsIm1vZGUiOiJpbmxpbmUiLCJvbW1sX3NoYTI1NiI6IjgwYjM3OTBlZWQwMzE5ZDUxYmZkNmRkMDgyZDZhNTdhM2M5OWU2NTg2NzcxMDdkNDIxNjI3YzFmNzQ4Zjc2NTkiLCJzZW1hbnRpY19vbW1sX3Byb2ZpbGUiOiJvZmZpY2UtbWF0aC1zZW1hbnRpYy12MiIsInNlbWFudGljX29tbWxfc2hhMjU2IjoiZTg5ZDE0MWM0MGM2YjUyMzQzYjA2MzhlZjdmNTI4MTZlODQ4NTg1ZjYyNTUxYWFjMzA1OGNlZDA0Zjc2OWViNiJ9XSwia2luZCI6Im5hdGl2ZV9vZmZpY2VfbWF0aCIsInBsYWNlaG9sZGVyX25hbWUiOiJtYXRoOjAxNyIsInNjaGVtYV92ZXJzaW9uIjoiMS4wIn0="/>
+              <p:cNvPr id="143" name="math:017" descr="AI_AUTOFIGURE_MATH_FALLBACK_ONLY_V1:eyJjb250ZW50X3J1bnMiOlt7ImNhbm9uaWNhbF9sYXRleCI6IlxccGkiLCJmb3JtdWxhX2lkIjoiRVEwMTciLCJraW5kIjoibWF0aCIsImxhdGV4X3NoYTI1NiI6ImYxY2YwNDA5M2QwOGI2ZGMwZDU4YTg3Mzk2NDA1Y2I5MDkzYTIyZTllZDYyYTk1YmI5NWVkNDZlNWRhOTcwOTciLCJtb2RlIjoiaW5saW5lIiwib21tbF9zaGEyNTYiOiI4MGIzNzkwZWVkMDMxOWQ1MWJmZDZkZDA4MmQ2YTU3YTNjOTllNjU4Njc3MTA3ZDQyMTYyN2MxZjc0OGY3NjU5Iiwic2VtYW50aWNfb21tbF9wcm9maWxlIjoib2ZmaWNlLW1hdGgtc2VtYW50aWMtdjIiLCJzZW1hbnRpY19vbW1sX3NoYTI1NiI6ImU4OWQxNDFjNDBjNmI1MjM0M2IwNjM4ZWY3ZjUyODE2ZTg0ODU4NWY2MjU1MWFhYzMwNThjZWQwNGY3NjllYjYifV0sImZvcm11bGFzIjpbeyJjYW5vbmljYWxfbGF0ZXgiOiJcXHBpIiwiZm9ybXVsYV9pZCI6IkVRMDE3IiwibGF0ZXhfc2hhMjU2IjoiZjFjZjA0MDkzZDA4YjZkYzBkNThhODczOTY0MDVjYjkwOTNhMjJlOWVkNjJhOTViYjk1ZWQ0NmU1ZGE5NzA5NyIsIm1vZGUiOiJpbmxpbmUiLCJvbW1sX3NoYTI1NiI6IjgwYjM3OTBlZWQwMzE5ZDUxYmZkNmRkMDgyZDZhNTdhM2M5OWU2NTg2NzcxMDdkNDIxNjI3YzFmNzQ4Zjc2NTkiLCJzZW1hbnRpY19vbW1sX3Byb2ZpbGUiOiJvZmZpY2UtbWF0aC1zZW1hbnRpYy12MiIsInNlbWFudGljX29tbWxfc2hhMjU2IjoiZTg5ZDE0MWM0MGM2YjUyMzQzYjA2MzhlZjdmNTI4MTZlODQ4NTg1ZjYyNTUxYWFjMzA1OGNlZDA0Zjc2OWViNiJ9XSwia2luZCI6Im5hdGl2ZV9vZmZpY2VfbWF0aCIsInBsYWNlaG9sZGVyX25hbWUiOiJtYXRoOjAxNyIsInNjaGVtYV92ZXJzaW9uIjoiMS4wIn0="/>
               <p:cNvSpPr txBox="1"/>
               <p:nvPr/>
             </p:nvSpPr>
@@ -10214,7 +10691,7 @@
               <a:effectLst/>
             </p:spPr>
             <p:txBody>
-              <a:bodyPr wrap="none" anchor="t" lIns="0" rIns="0" tIns="0" bIns="0">
+              <a:bodyPr wrap="none" lIns="0" tIns="0" rIns="0" bIns="0" anchor="t">
                 <a:spAutoFit/>
               </a:bodyPr>
               <a:lstStyle/>
@@ -10238,11 +10715,11 @@
           </p:sp>
         </mc:Fallback>
       </mc:AlternateContent>
-      <mc:AlternateContent xmlns:mc="http://schemas.openxmlformats.org/markup-compatibility/2006">
-        <mc:Choice xmlns:a14="http://schemas.microsoft.com/office/drawing/2010/main" Requires="a14">
+      <mc:AlternateContent xmlns:mc="http://schemas.openxmlformats.org/markup-compatibility/2006" xmlns:a14="http://schemas.microsoft.com/office/drawing/2010/main">
+        <mc:Choice Requires="a14">
           <p:sp>
             <p:nvSpPr>
-              <p:cNvPr id="141" name="math:018" descr="AI_AUTOFIGURE_NATIVE_MATH_V1:eyJjb250ZW50X3J1bnMiOlt7ImNhbm9uaWNhbF9sYXRleCI6IlxccGkiLCJmb3JtdWxhX2lkIjoiRVEwMTgiLCJraW5kIjoibWF0aCIsImxhdGV4X3NoYTI1NiI6ImYxY2YwNDA5M2QwOGI2ZGMwZDU4YTg3Mzk2NDA1Y2I5MDkzYTIyZTllZDYyYTk1YmI5NWVkNDZlNWRhOTcwOTciLCJtb2RlIjoiaW5saW5lIiwib21tbF9zaGEyNTYiOiI4MGIzNzkwZWVkMDMxOWQ1MWJmZDZkZDA4MmQ2YTU3YTNjOTllNjU4Njc3MTA3ZDQyMTYyN2MxZjc0OGY3NjU5Iiwic2VtYW50aWNfb21tbF9wcm9maWxlIjoib2ZmaWNlLW1hdGgtc2VtYW50aWMtdjIiLCJzZW1hbnRpY19vbW1sX3NoYTI1NiI6ImU4OWQxNDFjNDBjNmI1MjM0M2IwNjM4ZWY3ZjUyODE2ZTg0ODU4NWY2MjU1MWFhYzMwNThjZWQwNGY3NjllYjYifV0sImZvcm11bGFzIjpbeyJjYW5vbmljYWxfbGF0ZXgiOiJcXHBpIiwiZm9ybXVsYV9pZCI6IkVRMDE4IiwibGF0ZXhfc2hhMjU2IjoiZjFjZjA0MDkzZDA4YjZkYzBkNThhODczOTY0MDVjYjkwOTNhMjJlOWVkNjJhOTViYjk1ZWQ0NmU1ZGE5NzA5NyIsIm1vZGUiOiJpbmxpbmUiLCJvbW1sX3NoYTI1NiI6IjgwYjM3OTBlZWQwMzE5ZDUxYmZkNmRkMDgyZDZhNTdhM2M5OWU2NTg2NzcxMDdkNDIxNjI3YzFmNzQ4Zjc2NTkiLCJzZW1hbnRpY19vbW1sX3Byb2ZpbGUiOiJvZmZpY2UtbWF0aC1zZW1hbnRpYy12MiIsInNlbWFudGljX29tbWxfc2hhMjU2IjoiZTg5ZDE0MWM0MGM2YjUyMzQzYjA2MzhlZjdmNTI4MTZlODQ4NTg1ZjYyNTUxYWFjMzA1OGNlZDA0Zjc2OWViNiJ9XSwia2luZCI6Im5hdGl2ZV9vZmZpY2VfbWF0aCIsInBsYWNlaG9sZGVyX25hbWUiOiJtYXRoOjAxOCIsInNjaGVtYV92ZXJzaW9uIjoiMS4wIn0="/>
+              <p:cNvPr id="144" name="math:018" descr="AI_AUTOFIGURE_NATIVE_MATH_V1:eyJjb250ZW50X3J1bnMiOlt7ImNhbm9uaWNhbF9sYXRleCI6IlxccGkiLCJmb3JtdWxhX2lkIjoiRVEwMTgiLCJraW5kIjoibWF0aCIsImxhdGV4X3NoYTI1NiI6ImYxY2YwNDA5M2QwOGI2ZGMwZDU4YTg3Mzk2NDA1Y2I5MDkzYTIyZTllZDYyYTk1YmI5NWVkNDZlNWRhOTcwOTciLCJtb2RlIjoiaW5saW5lIiwib21tbF9zaGEyNTYiOiI4MGIzNzkwZWVkMDMxOWQ1MWJmZDZkZDA4MmQ2YTU3YTNjOTllNjU4Njc3MTA3ZDQyMTYyN2MxZjc0OGY3NjU5Iiwic2VtYW50aWNfb21tbF9wcm9maWxlIjoib2ZmaWNlLW1hdGgtc2VtYW50aWMtdjIiLCJzZW1hbnRpY19vbW1sX3NoYTI1NiI6ImU4OWQxNDFjNDBjNmI1MjM0M2IwNjM4ZWY3ZjUyODE2ZTg0ODU4NWY2MjU1MWFhYzMwNThjZWQwNGY3NjllYjYifV0sImZvcm11bGFzIjpbeyJjYW5vbmljYWxfbGF0ZXgiOiJcXHBpIiwiZm9ybXVsYV9pZCI6IkVRMDE4IiwibGF0ZXhfc2hhMjU2IjoiZjFjZjA0MDkzZDA4YjZkYzBkNThhODczOTY0MDVjYjkwOTNhMjJlOWVkNjJhOTViYjk1ZWQ0NmU1ZGE5NzA5NyIsIm1vZGUiOiJpbmxpbmUiLCJvbW1sX3NoYTI1NiI6IjgwYjM3OTBlZWQwMzE5ZDUxYmZkNmRkMDgyZDZhNTdhM2M5OWU2NTg2NzcxMDdkNDIxNjI3YzFmNzQ4Zjc2NTkiLCJzZW1hbnRpY19vbW1sX3Byb2ZpbGUiOiJvZmZpY2UtbWF0aC1zZW1hbnRpYy12MiIsInNlbWFudGljX29tbWxfc2hhMjU2IjoiZTg5ZDE0MWM0MGM2YjUyMzQzYjA2MzhlZjdmNTI4MTZlODQ4NTg1ZjYyNTUxYWFjMzA1OGNlZDA0Zjc2OWViNiJ9XSwia2luZCI6Im5hdGl2ZV9vZmZpY2VfbWF0aCIsInBsYWNlaG9sZGVyX25hbWUiOiJtYXRoOjAxOCIsInNjaGVtYV92ZXJzaW9uIjoiMS4wIn0="/>
               <p:cNvSpPr txBox="1"/>
               <p:nvPr/>
             </p:nvSpPr>
@@ -10258,26 +10735,28 @@
               <a:effectLst/>
             </p:spPr>
             <p:txBody>
-              <a:bodyPr wrap="none" anchor="t" lIns="0" rIns="0" tIns="0" bIns="0">
+              <a:bodyPr wrap="none" lIns="0" tIns="0" rIns="0" bIns="0" anchor="t">
                 <a:spAutoFit/>
               </a:bodyPr>
               <a:lstStyle/>
               <a:p>
                 <a:pPr algn="ctr"/>
                 <a14:m>
-                  <m:oMath xmlns:m="http://schemas.openxmlformats.org/officeDocument/2006/math">
-                    <m:r>
-                      <a:rPr lang="en-US" dirty="0" sz="1350">
-                        <a:solidFill>
-                          <a:srgbClr val="FFFFFF"/>
-                        </a:solidFill>
-                        <a:latin typeface="Cambria Math"/>
-                      </a:rPr>
-                      <m:t>π</m:t>
-                    </m:r>
-                  </m:oMath>
+                  <m:oMathPara xmlns:m="http://schemas.openxmlformats.org/officeDocument/2006/math">
+                    <m:oMath>
+                      <m:r>
+                        <a:rPr lang="en-US" sz="1350" dirty="0">
+                          <a:solidFill>
+                            <a:srgbClr val="FFFFFF"/>
+                          </a:solidFill>
+                          <a:latin typeface="Cambria Math"/>
+                        </a:rPr>
+                        <m:t>𝜋</m:t>
+                      </m:r>
+                    </m:oMath>
+                  </m:oMathPara>
                 </a14:m>
-                <a:endParaRPr lang="en-US" dirty="0" sz="1350">
+                <a:endParaRPr lang="en-US" sz="1350" dirty="0">
                   <a:solidFill>
                     <a:srgbClr val="FFFFFF"/>
                   </a:solidFill>
@@ -10287,10 +10766,10 @@
             </p:txBody>
           </p:sp>
         </mc:Choice>
-        <mc:Fallback>
+        <mc:Fallback xmlns="">
           <p:sp>
             <p:nvSpPr>
-              <p:cNvPr id="141" name="math:018" descr="AI_AUTOFIGURE_MATH_FALLBACK_ONLY_V1:eyJjb250ZW50X3J1bnMiOlt7ImNhbm9uaWNhbF9sYXRleCI6IlxccGkiLCJmb3JtdWxhX2lkIjoiRVEwMTgiLCJraW5kIjoibWF0aCIsImxhdGV4X3NoYTI1NiI6ImYxY2YwNDA5M2QwOGI2ZGMwZDU4YTg3Mzk2NDA1Y2I5MDkzYTIyZTllZDYyYTk1YmI5NWVkNDZlNWRhOTcwOTciLCJtb2RlIjoiaW5saW5lIiwib21tbF9zaGEyNTYiOiI4MGIzNzkwZWVkMDMxOWQ1MWJmZDZkZDA4MmQ2YTU3YTNjOTllNjU4Njc3MTA3ZDQyMTYyN2MxZjc0OGY3NjU5Iiwic2VtYW50aWNfb21tbF9wcm9maWxlIjoib2ZmaWNlLW1hdGgtc2VtYW50aWMtdjIiLCJzZW1hbnRpY19vbW1sX3NoYTI1NiI6ImU4OWQxNDFjNDBjNmI1MjM0M2IwNjM4ZWY3ZjUyODE2ZTg0ODU4NWY2MjU1MWFhYzMwNThjZWQwNGY3NjllYjYifV0sImZvcm11bGFzIjpbeyJjYW5vbmljYWxfbGF0ZXgiOiJcXHBpIiwiZm9ybXVsYV9pZCI6IkVRMDE4IiwibGF0ZXhfc2hhMjU2IjoiZjFjZjA0MDkzZDA4YjZkYzBkNThhODczOTY0MDVjYjkwOTNhMjJlOWVkNjJhOTViYjk1ZWQ0NmU1ZGE5NzA5NyIsIm1vZGUiOiJpbmxpbmUiLCJvbW1sX3NoYTI1NiI6IjgwYjM3OTBlZWQwMzE5ZDUxYmZkNmRkMDgyZDZhNTdhM2M5OWU2NTg2NzcxMDdkNDIxNjI3YzFmNzQ4Zjc2NTkiLCJzZW1hbnRpY19vbW1sX3Byb2ZpbGUiOiJvZmZpY2UtbWF0aC1zZW1hbnRpYy12MiIsInNlbWFudGljX29tbWxfc2hhMjU2IjoiZTg5ZDE0MWM0MGM2YjUyMzQzYjA2MzhlZjdmNTI4MTZlODQ4NTg1ZjYyNTUxYWFjMzA1OGNlZDA0Zjc2OWViNiJ9XSwia2luZCI6Im5hdGl2ZV9vZmZpY2VfbWF0aCIsInBsYWNlaG9sZGVyX25hbWUiOiJtYXRoOjAxOCIsInNjaGVtYV92ZXJzaW9uIjoiMS4wIn0="/>
+              <p:cNvPr id="144" name="math:018" descr="AI_AUTOFIGURE_MATH_FALLBACK_ONLY_V1:eyJjb250ZW50X3J1bnMiOlt7ImNhbm9uaWNhbF9sYXRleCI6IlxccGkiLCJmb3JtdWxhX2lkIjoiRVEwMTgiLCJraW5kIjoibWF0aCIsImxhdGV4X3NoYTI1NiI6ImYxY2YwNDA5M2QwOGI2ZGMwZDU4YTg3Mzk2NDA1Y2I5MDkzYTIyZTllZDYyYTk1YmI5NWVkNDZlNWRhOTcwOTciLCJtb2RlIjoiaW5saW5lIiwib21tbF9zaGEyNTYiOiI4MGIzNzkwZWVkMDMxOWQ1MWJmZDZkZDA4MmQ2YTU3YTNjOTllNjU4Njc3MTA3ZDQyMTYyN2MxZjc0OGY3NjU5Iiwic2VtYW50aWNfb21tbF9wcm9maWxlIjoib2ZmaWNlLW1hdGgtc2VtYW50aWMtdjIiLCJzZW1hbnRpY19vbW1sX3NoYTI1NiI6ImU4OWQxNDFjNDBjNmI1MjM0M2IwNjM4ZWY3ZjUyODE2ZTg0ODU4NWY2MjU1MWFhYzMwNThjZWQwNGY3NjllYjYifV0sImZvcm11bGFzIjpbeyJjYW5vbmljYWxfbGF0ZXgiOiJcXHBpIiwiZm9ybXVsYV9pZCI6IkVRMDE4IiwibGF0ZXhfc2hhMjU2IjoiZjFjZjA0MDkzZDA4YjZkYzBkNThhODczOTY0MDVjYjkwOTNhMjJlOWVkNjJhOTViYjk1ZWQ0NmU1ZGE5NzA5NyIsIm1vZGUiOiJpbmxpbmUiLCJvbW1sX3NoYTI1NiI6IjgwYjM3OTBlZWQwMzE5ZDUxYmZkNmRkMDgyZDZhNTdhM2M5OWU2NTg2NzcxMDdkNDIxNjI3YzFmNzQ4Zjc2NTkiLCJzZW1hbnRpY19vbW1sX3Byb2ZpbGUiOiJvZmZpY2UtbWF0aC1zZW1hbnRpYy12MiIsInNlbWFudGljX29tbWxfc2hhMjU2IjoiZTg5ZDE0MWM0MGM2YjUyMzQzYjA2MzhlZjdmNTI4MTZlODQ4NTg1ZjYyNTUxYWFjMzA1OGNlZDA0Zjc2OWViNiJ9XSwia2luZCI6Im5hdGl2ZV9vZmZpY2VfbWF0aCIsInBsYWNlaG9sZGVyX25hbWUiOiJtYXRoOjAxOCIsInNjaGVtYV92ZXJzaW9uIjoiMS4wIn0="/>
               <p:cNvSpPr txBox="1"/>
               <p:nvPr/>
             </p:nvSpPr>
@@ -10306,7 +10785,7 @@
               <a:effectLst/>
             </p:spPr>
             <p:txBody>
-              <a:bodyPr wrap="none" anchor="t" lIns="0" rIns="0" tIns="0" bIns="0">
+              <a:bodyPr wrap="none" lIns="0" tIns="0" rIns="0" bIns="0" anchor="t">
                 <a:spAutoFit/>
               </a:bodyPr>
               <a:lstStyle/>
@@ -10330,11 +10809,11 @@
           </p:sp>
         </mc:Fallback>
       </mc:AlternateContent>
-      <mc:AlternateContent xmlns:mc="http://schemas.openxmlformats.org/markup-compatibility/2006">
-        <mc:Choice xmlns:a14="http://schemas.microsoft.com/office/drawing/2010/main" Requires="a14">
+      <mc:AlternateContent xmlns:mc="http://schemas.openxmlformats.org/markup-compatibility/2006" xmlns:a14="http://schemas.microsoft.com/office/drawing/2010/main">
+        <mc:Choice Requires="a14">
           <p:sp>
             <p:nvSpPr>
-              <p:cNvPr id="142" name="math:019" descr="AI_AUTOFIGURE_NATIVE_MATH_V1:eyJjb250ZW50X3J1bnMiOlt7ImNhbm9uaWNhbF9sYXRleCI6IlxccGkiLCJmb3JtdWxhX2lkIjoiRVEwMTkiLCJraW5kIjoibWF0aCIsImxhdGV4X3NoYTI1NiI6ImYxY2YwNDA5M2QwOGI2ZGMwZDU4YTg3Mzk2NDA1Y2I5MDkzYTIyZTllZDYyYTk1YmI5NWVkNDZlNWRhOTcwOTciLCJtb2RlIjoiaW5saW5lIiwib21tbF9zaGEyNTYiOiI4MGIzNzkwZWVkMDMxOWQ1MWJmZDZkZDA4MmQ2YTU3YTNjOTllNjU4Njc3MTA3ZDQyMTYyN2MxZjc0OGY3NjU5Iiwic2VtYW50aWNfb21tbF9wcm9maWxlIjoib2ZmaWNlLW1hdGgtc2VtYW50aWMtdjIiLCJzZW1hbnRpY19vbW1sX3NoYTI1NiI6ImU4OWQxNDFjNDBjNmI1MjM0M2IwNjM4ZWY3ZjUyODE2ZTg0ODU4NWY2MjU1MWFhYzMwNThjZWQwNGY3NjllYjYifV0sImZvcm11bGFzIjpbeyJjYW5vbmljYWxfbGF0ZXgiOiJcXHBpIiwiZm9ybXVsYV9pZCI6IkVRMDE5IiwibGF0ZXhfc2hhMjU2IjoiZjFjZjA0MDkzZDA4YjZkYzBkNThhODczOTY0MDVjYjkwOTNhMjJlOWVkNjJhOTViYjk1ZWQ0NmU1ZGE5NzA5NyIsIm1vZGUiOiJpbmxpbmUiLCJvbW1sX3NoYTI1NiI6IjgwYjM3OTBlZWQwMzE5ZDUxYmZkNmRkMDgyZDZhNTdhM2M5OWU2NTg2NzcxMDdkNDIxNjI3YzFmNzQ4Zjc2NTkiLCJzZW1hbnRpY19vbW1sX3Byb2ZpbGUiOiJvZmZpY2UtbWF0aC1zZW1hbnRpYy12MiIsInNlbWFudGljX29tbWxfc2hhMjU2IjoiZTg5ZDE0MWM0MGM2YjUyMzQzYjA2MzhlZjdmNTI4MTZlODQ4NTg1ZjYyNTUxYWFjMzA1OGNlZDA0Zjc2OWViNiJ9XSwia2luZCI6Im5hdGl2ZV9vZmZpY2VfbWF0aCIsInBsYWNlaG9sZGVyX25hbWUiOiJtYXRoOjAxOSIsInNjaGVtYV92ZXJzaW9uIjoiMS4wIn0="/>
+              <p:cNvPr id="145" name="math:019" descr="AI_AUTOFIGURE_NATIVE_MATH_V1:eyJjb250ZW50X3J1bnMiOlt7ImNhbm9uaWNhbF9sYXRleCI6IlxccGkiLCJmb3JtdWxhX2lkIjoiRVEwMTkiLCJraW5kIjoibWF0aCIsImxhdGV4X3NoYTI1NiI6ImYxY2YwNDA5M2QwOGI2ZGMwZDU4YTg3Mzk2NDA1Y2I5MDkzYTIyZTllZDYyYTk1YmI5NWVkNDZlNWRhOTcwOTciLCJtb2RlIjoiaW5saW5lIiwib21tbF9zaGEyNTYiOiI4MGIzNzkwZWVkMDMxOWQ1MWJmZDZkZDA4MmQ2YTU3YTNjOTllNjU4Njc3MTA3ZDQyMTYyN2MxZjc0OGY3NjU5Iiwic2VtYW50aWNfb21tbF9wcm9maWxlIjoib2ZmaWNlLW1hdGgtc2VtYW50aWMtdjIiLCJzZW1hbnRpY19vbW1sX3NoYTI1NiI6ImU4OWQxNDFjNDBjNmI1MjM0M2IwNjM4ZWY3ZjUyODE2ZTg0ODU4NWY2MjU1MWFhYzMwNThjZWQwNGY3NjllYjYifV0sImZvcm11bGFzIjpbeyJjYW5vbmljYWxfbGF0ZXgiOiJcXHBpIiwiZm9ybXVsYV9pZCI6IkVRMDE5IiwibGF0ZXhfc2hhMjU2IjoiZjFjZjA0MDkzZDA4YjZkYzBkNThhODczOTY0MDVjYjkwOTNhMjJlOWVkNjJhOTViYjk1ZWQ0NmU1ZGE5NzA5NyIsIm1vZGUiOiJpbmxpbmUiLCJvbW1sX3NoYTI1NiI6IjgwYjM3OTBlZWQwMzE5ZDUxYmZkNmRkMDgyZDZhNTdhM2M5OWU2NTg2NzcxMDdkNDIxNjI3YzFmNzQ4Zjc2NTkiLCJzZW1hbnRpY19vbW1sX3Byb2ZpbGUiOiJvZmZpY2UtbWF0aC1zZW1hbnRpYy12MiIsInNlbWFudGljX29tbWxfc2hhMjU2IjoiZTg5ZDE0MWM0MGM2YjUyMzQzYjA2MzhlZjdmNTI4MTZlODQ4NTg1ZjYyNTUxYWFjMzA1OGNlZDA0Zjc2OWViNiJ9XSwia2luZCI6Im5hdGl2ZV9vZmZpY2VfbWF0aCIsInBsYWNlaG9sZGVyX25hbWUiOiJtYXRoOjAxOSIsInNjaGVtYV92ZXJzaW9uIjoiMS4wIn0="/>
               <p:cNvSpPr txBox="1"/>
               <p:nvPr/>
             </p:nvSpPr>
@@ -10350,26 +10829,28 @@
               <a:effectLst/>
             </p:spPr>
             <p:txBody>
-              <a:bodyPr wrap="none" anchor="t" lIns="0" rIns="0" tIns="0" bIns="0">
+              <a:bodyPr wrap="none" lIns="0" tIns="0" rIns="0" bIns="0" anchor="t">
                 <a:spAutoFit/>
               </a:bodyPr>
               <a:lstStyle/>
               <a:p>
                 <a:pPr algn="ctr"/>
                 <a14:m>
-                  <m:oMath xmlns:m="http://schemas.openxmlformats.org/officeDocument/2006/math">
-                    <m:r>
-                      <a:rPr lang="en-US" dirty="0" sz="1350">
-                        <a:solidFill>
-                          <a:srgbClr val="FFFFFF"/>
-                        </a:solidFill>
-                        <a:latin typeface="Cambria Math"/>
-                      </a:rPr>
-                      <m:t>π</m:t>
-                    </m:r>
-                  </m:oMath>
+                  <m:oMathPara xmlns:m="http://schemas.openxmlformats.org/officeDocument/2006/math">
+                    <m:oMath>
+                      <m:r>
+                        <a:rPr lang="en-US" sz="1350" dirty="0">
+                          <a:solidFill>
+                            <a:srgbClr val="FFFFFF"/>
+                          </a:solidFill>
+                          <a:latin typeface="Cambria Math"/>
+                        </a:rPr>
+                        <m:t>𝜋</m:t>
+                      </m:r>
+                    </m:oMath>
+                  </m:oMathPara>
                 </a14:m>
-                <a:endParaRPr lang="en-US" dirty="0" sz="1350">
+                <a:endParaRPr lang="en-US" sz="1350" dirty="0">
                   <a:solidFill>
                     <a:srgbClr val="FFFFFF"/>
                   </a:solidFill>
@@ -10379,10 +10860,10 @@
             </p:txBody>
           </p:sp>
         </mc:Choice>
-        <mc:Fallback>
+        <mc:Fallback xmlns="">
           <p:sp>
             <p:nvSpPr>
-              <p:cNvPr id="142" name="math:019" descr="AI_AUTOFIGURE_MATH_FALLBACK_ONLY_V1:eyJjb250ZW50X3J1bnMiOlt7ImNhbm9uaWNhbF9sYXRleCI6IlxccGkiLCJmb3JtdWxhX2lkIjoiRVEwMTkiLCJraW5kIjoibWF0aCIsImxhdGV4X3NoYTI1NiI6ImYxY2YwNDA5M2QwOGI2ZGMwZDU4YTg3Mzk2NDA1Y2I5MDkzYTIyZTllZDYyYTk1YmI5NWVkNDZlNWRhOTcwOTciLCJtb2RlIjoiaW5saW5lIiwib21tbF9zaGEyNTYiOiI4MGIzNzkwZWVkMDMxOWQ1MWJmZDZkZDA4MmQ2YTU3YTNjOTllNjU4Njc3MTA3ZDQyMTYyN2MxZjc0OGY3NjU5Iiwic2VtYW50aWNfb21tbF9wcm9maWxlIjoib2ZmaWNlLW1hdGgtc2VtYW50aWMtdjIiLCJzZW1hbnRpY19vbW1sX3NoYTI1NiI6ImU4OWQxNDFjNDBjNmI1MjM0M2IwNjM4ZWY3ZjUyODE2ZTg0ODU4NWY2MjU1MWFhYzMwNThjZWQwNGY3NjllYjYifV0sImZvcm11bGFzIjpbeyJjYW5vbmljYWxfbGF0ZXgiOiJcXHBpIiwiZm9ybXVsYV9pZCI6IkVRMDE5IiwibGF0ZXhfc2hhMjU2IjoiZjFjZjA0MDkzZDA4YjZkYzBkNThhODczOTY0MDVjYjkwOTNhMjJlOWVkNjJhOTViYjk1ZWQ0NmU1ZGE5NzA5NyIsIm1vZGUiOiJpbmxpbmUiLCJvbW1sX3NoYTI1NiI6IjgwYjM3OTBlZWQwMzE5ZDUxYmZkNmRkMDgyZDZhNTdhM2M5OWU2NTg2NzcxMDdkNDIxNjI3YzFmNzQ4Zjc2NTkiLCJzZW1hbnRpY19vbW1sX3Byb2ZpbGUiOiJvZmZpY2UtbWF0aC1zZW1hbnRpYy12MiIsInNlbWFudGljX29tbWxfc2hhMjU2IjoiZTg5ZDE0MWM0MGM2YjUyMzQzYjA2MzhlZjdmNTI4MTZlODQ4NTg1ZjYyNTUxYWFjMzA1OGNlZDA0Zjc2OWViNiJ9XSwia2luZCI6Im5hdGl2ZV9vZmZpY2VfbWF0aCIsInBsYWNlaG9sZGVyX25hbWUiOiJtYXRoOjAxOSIsInNjaGVtYV92ZXJzaW9uIjoiMS4wIn0="/>
+              <p:cNvPr id="145" name="math:019" descr="AI_AUTOFIGURE_MATH_FALLBACK_ONLY_V1:eyJjb250ZW50X3J1bnMiOlt7ImNhbm9uaWNhbF9sYXRleCI6IlxccGkiLCJmb3JtdWxhX2lkIjoiRVEwMTkiLCJraW5kIjoibWF0aCIsImxhdGV4X3NoYTI1NiI6ImYxY2YwNDA5M2QwOGI2ZGMwZDU4YTg3Mzk2NDA1Y2I5MDkzYTIyZTllZDYyYTk1YmI5NWVkNDZlNWRhOTcwOTciLCJtb2RlIjoiaW5saW5lIiwib21tbF9zaGEyNTYiOiI4MGIzNzkwZWVkMDMxOWQ1MWJmZDZkZDA4MmQ2YTU3YTNjOTllNjU4Njc3MTA3ZDQyMTYyN2MxZjc0OGY3NjU5Iiwic2VtYW50aWNfb21tbF9wcm9maWxlIjoib2ZmaWNlLW1hdGgtc2VtYW50aWMtdjIiLCJzZW1hbnRpY19vbW1sX3NoYTI1NiI6ImU4OWQxNDFjNDBjNmI1MjM0M2IwNjM4ZWY3ZjUyODE2ZTg0ODU4NWY2MjU1MWFhYzMwNThjZWQwNGY3NjllYjYifV0sImZvcm11bGFzIjpbeyJjYW5vbmljYWxfbGF0ZXgiOiJcXHBpIiwiZm9ybXVsYV9pZCI6IkVRMDE5IiwibGF0ZXhfc2hhMjU2IjoiZjFjZjA0MDkzZDA4YjZkYzBkNThhODczOTY0MDVjYjkwOTNhMjJlOWVkNjJhOTViYjk1ZWQ0NmU1ZGE5NzA5NyIsIm1vZGUiOiJpbmxpbmUiLCJvbW1sX3NoYTI1NiI6IjgwYjM3OTBlZWQwMzE5ZDUxYmZkNmRkMDgyZDZhNTdhM2M5OWU2NTg2NzcxMDdkNDIxNjI3YzFmNzQ4Zjc2NTkiLCJzZW1hbnRpY19vbW1sX3Byb2ZpbGUiOiJvZmZpY2UtbWF0aC1zZW1hbnRpYy12MiIsInNlbWFudGljX29tbWxfc2hhMjU2IjoiZTg5ZDE0MWM0MGM2YjUyMzQzYjA2MzhlZjdmNTI4MTZlODQ4NTg1ZjYyNTUxYWFjMzA1OGNlZDA0Zjc2OWViNiJ9XSwia2luZCI6Im5hdGl2ZV9vZmZpY2VfbWF0aCIsInBsYWNlaG9sZGVyX25hbWUiOiJtYXRoOjAxOSIsInNjaGVtYV92ZXJzaW9uIjoiMS4wIn0="/>
               <p:cNvSpPr txBox="1"/>
               <p:nvPr/>
             </p:nvSpPr>
@@ -10398,7 +10879,7 @@
               <a:effectLst/>
             </p:spPr>
             <p:txBody>
-              <a:bodyPr wrap="none" anchor="t" lIns="0" rIns="0" tIns="0" bIns="0">
+              <a:bodyPr wrap="none" lIns="0" tIns="0" rIns="0" bIns="0" anchor="t">
                 <a:spAutoFit/>
               </a:bodyPr>
               <a:lstStyle/>
@@ -10424,7 +10905,7 @@
       </mc:AlternateContent>
       <p:sp>
         <p:nvSpPr>
-          <p:cNvPr id="143" name="af-action-a0-ellipse-01"/>
+          <p:cNvPr id="146" name="af-action-a0-ellipse-01" descr="{&quot;autofigure_element_id&quot;:&quot;action-a0&quot;}"/>
           <p:cNvSpPr/>
           <p:nvPr/>
         </p:nvSpPr>
@@ -10463,12 +10944,13 @@
           <a:lstStyle/>
           <a:p>
             <a:pPr algn="ctr"/>
-          </a:p>
-        </p:txBody>
-      </p:sp>
-      <p:sp>
-        <p:nvSpPr>
-          <p:cNvPr id="144" name="af-action-a1-ellipse-01"/>
+            <a:endParaRPr/>
+          </a:p>
+        </p:txBody>
+      </p:sp>
+      <p:sp>
+        <p:nvSpPr>
+          <p:cNvPr id="147" name="af-action-a1-ellipse-01" descr="{&quot;autofigure_element_id&quot;:&quot;action-a1&quot;}"/>
           <p:cNvSpPr/>
           <p:nvPr/>
         </p:nvSpPr>
@@ -10507,12 +10989,13 @@
           <a:lstStyle/>
           <a:p>
             <a:pPr algn="ctr"/>
-          </a:p>
-        </p:txBody>
-      </p:sp>
-      <p:sp>
-        <p:nvSpPr>
-          <p:cNvPr id="145" name="af-action-a2-ellipse-01"/>
+            <a:endParaRPr/>
+          </a:p>
+        </p:txBody>
+      </p:sp>
+      <p:sp>
+        <p:nvSpPr>
+          <p:cNvPr id="148" name="af-action-a2-ellipse-01" descr="{&quot;autofigure_element_id&quot;:&quot;action-a2&quot;}"/>
           <p:cNvSpPr/>
           <p:nvPr/>
         </p:nvSpPr>
@@ -10551,14 +11034,15 @@
           <a:lstStyle/>
           <a:p>
             <a:pPr algn="ctr"/>
-          </a:p>
-        </p:txBody>
-      </p:sp>
-      <mc:AlternateContent xmlns:mc="http://schemas.openxmlformats.org/markup-compatibility/2006">
-        <mc:Choice xmlns:a14="http://schemas.microsoft.com/office/drawing/2010/main" Requires="a14">
+            <a:endParaRPr/>
+          </a:p>
+        </p:txBody>
+      </p:sp>
+      <mc:AlternateContent xmlns:mc="http://schemas.openxmlformats.org/markup-compatibility/2006" xmlns:a14="http://schemas.microsoft.com/office/drawing/2010/main">
+        <mc:Choice Requires="a14">
           <p:sp>
             <p:nvSpPr>
-              <p:cNvPr id="146" name="math:020" descr="AI_AUTOFIGURE_NATIVE_MATH_V1:eyJjb250ZW50X3J1bnMiOlt7ImNhbm9uaWNhbF9sYXRleCI6ImFfe3R9IiwiZm9ybXVsYV9pZCI6IkVRMDIwIiwia2luZCI6Im1hdGgiLCJsYXRleF9zaGEyNTYiOiJiMjM2YTRmNjc5MDRhMDkzYjk2N2E2NTYxMjY2OTM2Yjc1MDczMTAwMjc5YjZjZGRkYzhlMTc3Nzc2ZDVmZDdlIiwibW9kZSI6ImlubGluZSIsIm9tbWxfc2hhMjU2IjoiOTRjNWE5YzNlOGZiOWY5NmRhOWFiZDJkYTJiMTA4ZDdlNzUyNDU2YzJkYzZlNDJiNzlmZDZmYTAwNGRmNmMzYyIsInNlbWFudGljX29tbWxfcHJvZmlsZSI6Im9mZmljZS1tYXRoLXNlbWFudGljLXYyIiwic2VtYW50aWNfb21tbF9zaGEyNTYiOiI1OGYyMTBlMTVmNzM4YjY1YTk3MmYyODI4MTFjYTllMjBkODE0MWU4ZTk2N2JjYWE4NGRkN2VlZTBlZmU4MzFhIn1dLCJmb3JtdWxhcyI6W3siY2Fub25pY2FsX2xhdGV4IjoiYV97dH0iLCJmb3JtdWxhX2lkIjoiRVEwMjAiLCJsYXRleF9zaGEyNTYiOiJiMjM2YTRmNjc5MDRhMDkzYjk2N2E2NTYxMjY2OTM2Yjc1MDczMTAwMjc5YjZjZGRkYzhlMTc3Nzc2ZDVmZDdlIiwibW9kZSI6ImlubGluZSIsIm9tbWxfc2hhMjU2IjoiOTRjNWE5YzNlOGZiOWY5NmRhOWFiZDJkYTJiMTA4ZDdlNzUyNDU2YzJkYzZlNDJiNzlmZDZmYTAwNGRmNmMzYyIsInNlbWFudGljX29tbWxfcHJvZmlsZSI6Im9mZmljZS1tYXRoLXNlbWFudGljLXYyIiwic2VtYW50aWNfb21tbF9zaGEyNTYiOiI1OGYyMTBlMTVmNzM4YjY1YTk3MmYyODI4MTFjYTllMjBkODE0MWU4ZTk2N2JjYWE4NGRkN2VlZTBlZmU4MzFhIn1dLCJraW5kIjoibmF0aXZlX29mZmljZV9tYXRoIiwicGxhY2Vob2xkZXJfbmFtZSI6Im1hdGg6MDIwIiwic2NoZW1hX3ZlcnNpb24iOiIxLjAifQ=="/>
+              <p:cNvPr id="149" name="math:020" descr="AI_AUTOFIGURE_NATIVE_MATH_V1:eyJjb250ZW50X3J1bnMiOlt7ImNhbm9uaWNhbF9sYXRleCI6ImFfe3R9IiwiZm9ybXVsYV9pZCI6IkVRMDIwIiwia2luZCI6Im1hdGgiLCJsYXRleF9zaGEyNTYiOiJiMjM2YTRmNjc5MDRhMDkzYjk2N2E2NTYxMjY2OTM2Yjc1MDczMTAwMjc5YjZjZGRkYzhlMTc3Nzc2ZDVmZDdlIiwibW9kZSI6ImlubGluZSIsIm9tbWxfc2hhMjU2IjoiOTRjNWE5YzNlOGZiOWY5NmRhOWFiZDJkYTJiMTA4ZDdlNzUyNDU2YzJkYzZlNDJiNzlmZDZmYTAwNGRmNmMzYyIsInNlbWFudGljX29tbWxfcHJvZmlsZSI6Im9mZmljZS1tYXRoLXNlbWFudGljLXYyIiwic2VtYW50aWNfb21tbF9zaGEyNTYiOiI1OGYyMTBlMTVmNzM4YjY1YTk3MmYyODI4MTFjYTllMjBkODE0MWU4ZTk2N2JjYWE4NGRkN2VlZTBlZmU4MzFhIn1dLCJmb3JtdWxhcyI6W3siY2Fub25pY2FsX2xhdGV4IjoiYV97dH0iLCJmb3JtdWxhX2lkIjoiRVEwMjAiLCJsYXRleF9zaGEyNTYiOiJiMjM2YTRmNjc5MDRhMDkzYjk2N2E2NTYxMjY2OTM2Yjc1MDczMTAwMjc5YjZjZGRkYzhlMTc3Nzc2ZDVmZDdlIiwibW9kZSI6ImlubGluZSIsIm9tbWxfc2hhMjU2IjoiOTRjNWE5YzNlOGZiOWY5NmRhOWFiZDJkYTJiMTA4ZDdlNzUyNDU2YzJkYzZlNDJiNzlmZDZmYTAwNGRmNmMzYyIsInNlbWFudGljX29tbWxfcHJvZmlsZSI6Im9mZmljZS1tYXRoLXNlbWFudGljLXYyIiwic2VtYW50aWNfb21tbF9zaGEyNTYiOiI1OGYyMTBlMTVmNzM4YjY1YTk3MmYyODI4MTFjYTllMjBkODE0MWU4ZTk2N2JjYWE4NGRkN2VlZTBlZmU4MzFhIn1dLCJraW5kIjoibmF0aXZlX29mZmljZV9tYXRoIiwicGxhY2Vob2xkZXJfbmFtZSI6Im1hdGg6MDIwIiwic2NoZW1hX3ZlcnNpb24iOiIxLjAifQ=="/>
               <p:cNvSpPr txBox="1"/>
               <p:nvPr/>
             </p:nvSpPr>
@@ -10574,41 +11058,53 @@
               <a:effectLst/>
             </p:spPr>
             <p:txBody>
-              <a:bodyPr wrap="none" anchor="t" lIns="0" rIns="0" tIns="0" bIns="0">
+              <a:bodyPr wrap="none" lIns="0" tIns="0" rIns="0" bIns="0" anchor="t">
                 <a:spAutoFit/>
               </a:bodyPr>
               <a:lstStyle/>
               <a:p>
                 <a:pPr algn="ctr"/>
                 <a14:m>
-                  <m:oMath xmlns:m="http://schemas.openxmlformats.org/officeDocument/2006/math">
-                    <m:sSub>
-                      <m:e>
-                        <m:r>
-                          <a:rPr lang="en-US" dirty="0" sz="1275">
-                            <a:solidFill>
-                              <a:srgbClr val="FFFFFF"/>
-                            </a:solidFill>
-                            <a:latin typeface="Cambria Math"/>
-                          </a:rPr>
-                          <m:t>a</m:t>
-                        </m:r>
-                      </m:e>
-                      <m:sub>
-                        <m:r>
-                          <a:rPr lang="en-US" dirty="0" sz="1275">
-                            <a:solidFill>
-                              <a:srgbClr val="FFFFFF"/>
-                            </a:solidFill>
-                            <a:latin typeface="Cambria Math"/>
-                          </a:rPr>
-                          <m:t>t</m:t>
-                        </m:r>
-                      </m:sub>
-                    </m:sSub>
-                  </m:oMath>
+                  <m:oMathPara xmlns:m="http://schemas.openxmlformats.org/officeDocument/2006/math">
+                    <m:oMath>
+                      <m:sSub>
+                        <m:sSubPr>
+                          <m:ctrlPr>
+                            <a:rPr lang="en-US" sz="1275" dirty="0">
+                              <a:solidFill>
+                                <a:srgbClr val="FFFFFF"/>
+                              </a:solidFill>
+                              <a:latin typeface="Cambria Math"/>
+                            </a:rPr>
+                          </m:ctrlPr>
+                        </m:sSubPr>
+                        <m:e>
+                          <m:r>
+                            <a:rPr lang="en-US" sz="1275" dirty="0">
+                              <a:solidFill>
+                                <a:srgbClr val="FFFFFF"/>
+                              </a:solidFill>
+                              <a:latin typeface="Cambria Math"/>
+                            </a:rPr>
+                            <m:t>𝑎</m:t>
+                          </m:r>
+                        </m:e>
+                        <m:sub>
+                          <m:r>
+                            <a:rPr lang="en-US" sz="1275" dirty="0">
+                              <a:solidFill>
+                                <a:srgbClr val="FFFFFF"/>
+                              </a:solidFill>
+                              <a:latin typeface="Cambria Math"/>
+                            </a:rPr>
+                            <m:t>𝑡</m:t>
+                          </m:r>
+                        </m:sub>
+                      </m:sSub>
+                    </m:oMath>
+                  </m:oMathPara>
                 </a14:m>
-                <a:endParaRPr lang="en-US" dirty="0" sz="1275">
+                <a:endParaRPr lang="en-US" sz="1275" dirty="0">
                   <a:solidFill>
                     <a:srgbClr val="FFFFFF"/>
                   </a:solidFill>
@@ -10618,10 +11114,10 @@
             </p:txBody>
           </p:sp>
         </mc:Choice>
-        <mc:Fallback>
+        <mc:Fallback xmlns="">
           <p:sp>
             <p:nvSpPr>
-              <p:cNvPr id="146" name="math:020" descr="AI_AUTOFIGURE_MATH_FALLBACK_ONLY_V1:eyJjb250ZW50X3J1bnMiOlt7ImNhbm9uaWNhbF9sYXRleCI6ImFfe3R9IiwiZm9ybXVsYV9pZCI6IkVRMDIwIiwia2luZCI6Im1hdGgiLCJsYXRleF9zaGEyNTYiOiJiMjM2YTRmNjc5MDRhMDkzYjk2N2E2NTYxMjY2OTM2Yjc1MDczMTAwMjc5YjZjZGRkYzhlMTc3Nzc2ZDVmZDdlIiwibW9kZSI6ImlubGluZSIsIm9tbWxfc2hhMjU2IjoiOTRjNWE5YzNlOGZiOWY5NmRhOWFiZDJkYTJiMTA4ZDdlNzUyNDU2YzJkYzZlNDJiNzlmZDZmYTAwNGRmNmMzYyIsInNlbWFudGljX29tbWxfcHJvZmlsZSI6Im9mZmljZS1tYXRoLXNlbWFudGljLXYyIiwic2VtYW50aWNfb21tbF9zaGEyNTYiOiI1OGYyMTBlMTVmNzM4YjY1YTk3MmYyODI4MTFjYTllMjBkODE0MWU4ZTk2N2JjYWE4NGRkN2VlZTBlZmU4MzFhIn1dLCJmb3JtdWxhcyI6W3siY2Fub25pY2FsX2xhdGV4IjoiYV97dH0iLCJmb3JtdWxhX2lkIjoiRVEwMjAiLCJsYXRleF9zaGEyNTYiOiJiMjM2YTRmNjc5MDRhMDkzYjk2N2E2NTYxMjY2OTM2Yjc1MDczMTAwMjc5YjZjZGRkYzhlMTc3Nzc2ZDVmZDdlIiwibW9kZSI6ImlubGluZSIsIm9tbWxfc2hhMjU2IjoiOTRjNWE5YzNlOGZiOWY5NmRhOWFiZDJkYTJiMTA4ZDdlNzUyNDU2YzJkYzZlNDJiNzlmZDZmYTAwNGRmNmMzYyIsInNlbWFudGljX29tbWxfcHJvZmlsZSI6Im9mZmljZS1tYXRoLXNlbWFudGljLXYyIiwic2VtYW50aWNfb21tbF9zaGEyNTYiOiI1OGYyMTBlMTVmNzM4YjY1YTk3MmYyODI4MTFjYTllMjBkODE0MWU4ZTk2N2JjYWE4NGRkN2VlZTBlZmU4MzFhIn1dLCJraW5kIjoibmF0aXZlX29mZmljZV9tYXRoIiwicGxhY2Vob2xkZXJfbmFtZSI6Im1hdGg6MDIwIiwic2NoZW1hX3ZlcnNpb24iOiIxLjAifQ=="/>
+              <p:cNvPr id="149" name="math:020" descr="AI_AUTOFIGURE_MATH_FALLBACK_ONLY_V1:eyJjb250ZW50X3J1bnMiOlt7ImNhbm9uaWNhbF9sYXRleCI6ImFfe3R9IiwiZm9ybXVsYV9pZCI6IkVRMDIwIiwia2luZCI6Im1hdGgiLCJsYXRleF9zaGEyNTYiOiJiMjM2YTRmNjc5MDRhMDkzYjk2N2E2NTYxMjY2OTM2Yjc1MDczMTAwMjc5YjZjZGRkYzhlMTc3Nzc2ZDVmZDdlIiwibW9kZSI6ImlubGluZSIsIm9tbWxfc2hhMjU2IjoiOTRjNWE5YzNlOGZiOWY5NmRhOWFiZDJkYTJiMTA4ZDdlNzUyNDU2YzJkYzZlNDJiNzlmZDZmYTAwNGRmNmMzYyIsInNlbWFudGljX29tbWxfcHJvZmlsZSI6Im9mZmljZS1tYXRoLXNlbWFudGljLXYyIiwic2VtYW50aWNfb21tbF9zaGEyNTYiOiI1OGYyMTBlMTVmNzM4YjY1YTk3MmYyODI4MTFjYTllMjBkODE0MWU4ZTk2N2JjYWE4NGRkN2VlZTBlZmU4MzFhIn1dLCJmb3JtdWxhcyI6W3siY2Fub25pY2FsX2xhdGV4IjoiYV97dH0iLCJmb3JtdWxhX2lkIjoiRVEwMjAiLCJsYXRleF9zaGEyNTYiOiJiMjM2YTRmNjc5MDRhMDkzYjk2N2E2NTYxMjY2OTM2Yjc1MDczMTAwMjc5YjZjZGRkYzhlMTc3Nzc2ZDVmZDdlIiwibW9kZSI6ImlubGluZSIsIm9tbWxfc2hhMjU2IjoiOTRjNWE5YzNlOGZiOWY5NmRhOWFiZDJkYTJiMTA4ZDdlNzUyNDU2YzJkYzZlNDJiNzlmZDZmYTAwNGRmNmMzYyIsInNlbWFudGljX29tbWxfcHJvZmlsZSI6Im9mZmljZS1tYXRoLXNlbWFudGljLXYyIiwic2VtYW50aWNfb21tbF9zaGEyNTYiOiI1OGYyMTBlMTVmNzM4YjY1YTk3MmYyODI4MTFjYTllMjBkODE0MWU4ZTk2N2JjYWE4NGRkN2VlZTBlZmU4MzFhIn1dLCJraW5kIjoibmF0aXZlX29mZmljZV9tYXRoIiwicGxhY2Vob2xkZXJfbmFtZSI6Im1hdGg6MDIwIiwic2NoZW1hX3ZlcnNpb24iOiIxLjAifQ=="/>
               <p:cNvSpPr txBox="1"/>
               <p:nvPr/>
             </p:nvSpPr>
@@ -10637,7 +11133,7 @@
               <a:effectLst/>
             </p:spPr>
             <p:txBody>
-              <a:bodyPr wrap="none" anchor="t" lIns="0" rIns="0" tIns="0" bIns="0">
+              <a:bodyPr wrap="none" lIns="0" tIns="0" rIns="0" bIns="0" anchor="t">
                 <a:spAutoFit/>
               </a:bodyPr>
               <a:lstStyle/>
@@ -10661,11 +11157,11 @@
           </p:sp>
         </mc:Fallback>
       </mc:AlternateContent>
-      <mc:AlternateContent xmlns:mc="http://schemas.openxmlformats.org/markup-compatibility/2006">
-        <mc:Choice xmlns:a14="http://schemas.microsoft.com/office/drawing/2010/main" Requires="a14">
+      <mc:AlternateContent xmlns:mc="http://schemas.openxmlformats.org/markup-compatibility/2006" xmlns:a14="http://schemas.microsoft.com/office/drawing/2010/main">
+        <mc:Choice Requires="a14">
           <p:sp>
             <p:nvSpPr>
-              <p:cNvPr id="147" name="math:021" descr="AI_AUTOFIGURE_NATIVE_MATH_V1:eyJjb250ZW50X3J1bnMiOlt7ImNhbm9uaWNhbF9sYXRleCI6ImFfe3QrMX0iLCJmb3JtdWxhX2lkIjoiRVEwMjEiLCJraW5kIjoibWF0aCIsImxhdGV4X3NoYTI1NiI6ImNkNTFlODVhMWRhMGJkNjU2MGEzOGU0NTVmNWIzMDNkYjcxNzUzMzc3NmRhZTFjZjU0NGM0ZTEwOGJmM2VhZWEiLCJtb2RlIjoiaW5saW5lIiwib21tbF9zaGEyNTYiOiJiYzc2NzNhNjFlZDE1OTBkYmJjNzQzYzMzNjI2NWU0Zjk4ZTYzOGZhMGE3NzMxZjRlMzk2MmE3NDdmNmY1MmYwIiwic2VtYW50aWNfb21tbF9wcm9maWxlIjoib2ZmaWNlLW1hdGgtc2VtYW50aWMtdjIiLCJzZW1hbnRpY19vbW1sX3NoYTI1NiI6IjM1ZmU0NTJiNDQ4ZWY4MTUxMWJlOTA3ZjVlZWRjOWM1YjYwMWMzN2U2NTVmY2ZmNDY3ZmQ5NzFiYWM4ZTllZTEifV0sImZvcm11bGFzIjpbeyJjYW5vbmljYWxfbGF0ZXgiOiJhX3t0KzF9IiwiZm9ybXVsYV9pZCI6IkVRMDIxIiwibGF0ZXhfc2hhMjU2IjoiY2Q1MWU4NWExZGEwYmQ2NTYwYTM4ZTQ1NWY1YjMwM2RiNzE3NTMzNzc2ZGFlMWNmNTQ0YzRlMTA4YmYzZWFlYSIsIm1vZGUiOiJpbmxpbmUiLCJvbW1sX3NoYTI1NiI6ImJjNzY3M2E2MWVkMTU5MGRiYmM3NDNjMzM2MjY1ZTRmOThlNjM4ZmEwYTc3MzFmNGUzOTYyYTc0N2Y2ZjUyZjAiLCJzZW1hbnRpY19vbW1sX3Byb2ZpbGUiOiJvZmZpY2UtbWF0aC1zZW1hbnRpYy12MiIsInNlbWFudGljX29tbWxfc2hhMjU2IjoiMzVmZTQ1MmI0NDhlZjgxNTExYmU5MDdmNWVlZGM5YzViNjAxYzM3ZTY1NWZjZmY0NjdmZDk3MWJhYzhlOWVlMSJ9XSwia2luZCI6Im5hdGl2ZV9vZmZpY2VfbWF0aCIsInBsYWNlaG9sZGVyX25hbWUiOiJtYXRoOjAyMSIsInNjaGVtYV92ZXJzaW9uIjoiMS4wIn0="/>
+              <p:cNvPr id="150" name="math:021" descr="AI_AUTOFIGURE_NATIVE_MATH_V1:eyJjb250ZW50X3J1bnMiOlt7ImNhbm9uaWNhbF9sYXRleCI6ImFfe3QrMX0iLCJmb3JtdWxhX2lkIjoiRVEwMjEiLCJraW5kIjoibWF0aCIsImxhdGV4X3NoYTI1NiI6ImNkNTFlODVhMWRhMGJkNjU2MGEzOGU0NTVmNWIzMDNkYjcxNzUzMzc3NmRhZTFjZjU0NGM0ZTEwOGJmM2VhZWEiLCJtb2RlIjoiaW5saW5lIiwib21tbF9zaGEyNTYiOiJiYzc2NzNhNjFlZDE1OTBkYmJjNzQzYzMzNjI2NWU0Zjk4ZTYzOGZhMGE3NzMxZjRlMzk2MmE3NDdmNmY1MmYwIiwic2VtYW50aWNfb21tbF9wcm9maWxlIjoib2ZmaWNlLW1hdGgtc2VtYW50aWMtdjIiLCJzZW1hbnRpY19vbW1sX3NoYTI1NiI6IjM1ZmU0NTJiNDQ4ZWY4MTUxMWJlOTA3ZjVlZWRjOWM1YjYwMWMzN2U2NTVmY2ZmNDY3ZmQ5NzFiYWM4ZTllZTEifV0sImZvcm11bGFzIjpbeyJjYW5vbmljYWxfbGF0ZXgiOiJhX3t0KzF9IiwiZm9ybXVsYV9pZCI6IkVRMDIxIiwibGF0ZXhfc2hhMjU2IjoiY2Q1MWU4NWExZGEwYmQ2NTYwYTM4ZTQ1NWY1YjMwM2RiNzE3NTMzNzc2ZGFlMWNmNTQ0YzRlMTA4YmYzZWFlYSIsIm1vZGUiOiJpbmxpbmUiLCJvbW1sX3NoYTI1NiI6ImJjNzY3M2E2MWVkMTU5MGRiYmM3NDNjMzM2MjY1ZTRmOThlNjM4ZmEwYTc3MzFmNGUzOTYyYTc0N2Y2ZjUyZjAiLCJzZW1hbnRpY19vbW1sX3Byb2ZpbGUiOiJvZmZpY2UtbWF0aC1zZW1hbnRpYy12MiIsInNlbWFudGljX29tbWxfc2hhMjU2IjoiMzVmZTQ1MmI0NDhlZjgxNTExYmU5MDdmNWVlZGM5YzViNjAxYzM3ZTY1NWZjZmY0NjdmZDk3MWJhYzhlOWVlMSJ9XSwia2luZCI6Im5hdGl2ZV9vZmZpY2VfbWF0aCIsInBsYWNlaG9sZGVyX25hbWUiOiJtYXRoOjAyMSIsInNjaGVtYV92ZXJzaW9uIjoiMS4wIn0="/>
               <p:cNvSpPr txBox="1"/>
               <p:nvPr/>
             </p:nvSpPr>
@@ -10681,41 +11177,62 @@
               <a:effectLst/>
             </p:spPr>
             <p:txBody>
-              <a:bodyPr wrap="none" anchor="t" lIns="0" rIns="0" tIns="0" bIns="0">
+              <a:bodyPr wrap="none" lIns="0" tIns="0" rIns="0" bIns="0" anchor="t">
                 <a:spAutoFit/>
               </a:bodyPr>
               <a:lstStyle/>
               <a:p>
                 <a:pPr algn="ctr"/>
                 <a14:m>
-                  <m:oMath xmlns:m="http://schemas.openxmlformats.org/officeDocument/2006/math">
-                    <m:sSub>
-                      <m:e>
-                        <m:r>
-                          <a:rPr lang="en-US" dirty="0" sz="1275">
-                            <a:solidFill>
-                              <a:srgbClr val="FFFFFF"/>
-                            </a:solidFill>
-                            <a:latin typeface="Cambria Math"/>
-                          </a:rPr>
-                          <m:t>a</m:t>
-                        </m:r>
-                      </m:e>
-                      <m:sub>
-                        <m:r>
-                          <a:rPr lang="en-US" dirty="0" sz="1275">
-                            <a:solidFill>
-                              <a:srgbClr val="FFFFFF"/>
-                            </a:solidFill>
-                            <a:latin typeface="Cambria Math"/>
-                          </a:rPr>
-                          <m:t>t+1</m:t>
-                        </m:r>
-                      </m:sub>
-                    </m:sSub>
-                  </m:oMath>
+                  <m:oMathPara xmlns:m="http://schemas.openxmlformats.org/officeDocument/2006/math">
+                    <m:oMath>
+                      <m:sSub>
+                        <m:sSubPr>
+                          <m:ctrlPr>
+                            <a:rPr lang="en-US" sz="1275" dirty="0">
+                              <a:solidFill>
+                                <a:srgbClr val="FFFFFF"/>
+                              </a:solidFill>
+                              <a:latin typeface="Cambria Math"/>
+                            </a:rPr>
+                          </m:ctrlPr>
+                        </m:sSubPr>
+                        <m:e>
+                          <m:r>
+                            <a:rPr lang="en-US" sz="1275" dirty="0">
+                              <a:solidFill>
+                                <a:srgbClr val="FFFFFF"/>
+                              </a:solidFill>
+                              <a:latin typeface="Cambria Math"/>
+                            </a:rPr>
+                            <m:t>𝑎</m:t>
+                          </m:r>
+                        </m:e>
+                        <m:sub>
+                          <m:r>
+                            <a:rPr lang="en-US" sz="1275" dirty="0">
+                              <a:solidFill>
+                                <a:srgbClr val="FFFFFF"/>
+                              </a:solidFill>
+                              <a:latin typeface="Cambria Math"/>
+                            </a:rPr>
+                            <m:t>𝑡</m:t>
+                          </m:r>
+                          <m:r>
+                            <a:rPr lang="en-US" sz="1275" dirty="0">
+                              <a:solidFill>
+                                <a:srgbClr val="FFFFFF"/>
+                              </a:solidFill>
+                              <a:latin typeface="Cambria Math"/>
+                            </a:rPr>
+                            <m:t>+1</m:t>
+                          </m:r>
+                        </m:sub>
+                      </m:sSub>
+                    </m:oMath>
+                  </m:oMathPara>
                 </a14:m>
-                <a:endParaRPr lang="en-US" dirty="0" sz="1275">
+                <a:endParaRPr lang="en-US" sz="1275" dirty="0">
                   <a:solidFill>
                     <a:srgbClr val="FFFFFF"/>
                   </a:solidFill>
@@ -10725,10 +11242,10 @@
             </p:txBody>
           </p:sp>
         </mc:Choice>
-        <mc:Fallback>
+        <mc:Fallback xmlns="">
           <p:sp>
             <p:nvSpPr>
-              <p:cNvPr id="147" name="math:021" descr="AI_AUTOFIGURE_MATH_FALLBACK_ONLY_V1:eyJjb250ZW50X3J1bnMiOlt7ImNhbm9uaWNhbF9sYXRleCI6ImFfe3QrMX0iLCJmb3JtdWxhX2lkIjoiRVEwMjEiLCJraW5kIjoibWF0aCIsImxhdGV4X3NoYTI1NiI6ImNkNTFlODVhMWRhMGJkNjU2MGEzOGU0NTVmNWIzMDNkYjcxNzUzMzc3NmRhZTFjZjU0NGM0ZTEwOGJmM2VhZWEiLCJtb2RlIjoiaW5saW5lIiwib21tbF9zaGEyNTYiOiJiYzc2NzNhNjFlZDE1OTBkYmJjNzQzYzMzNjI2NWU0Zjk4ZTYzOGZhMGE3NzMxZjRlMzk2MmE3NDdmNmY1MmYwIiwic2VtYW50aWNfb21tbF9wcm9maWxlIjoib2ZmaWNlLW1hdGgtc2VtYW50aWMtdjIiLCJzZW1hbnRpY19vbW1sX3NoYTI1NiI6IjM1ZmU0NTJiNDQ4ZWY4MTUxMWJlOTA3ZjVlZWRjOWM1YjYwMWMzN2U2NTVmY2ZmNDY3ZmQ5NzFiYWM4ZTllZTEifV0sImZvcm11bGFzIjpbeyJjYW5vbmljYWxfbGF0ZXgiOiJhX3t0KzF9IiwiZm9ybXVsYV9pZCI6IkVRMDIxIiwibGF0ZXhfc2hhMjU2IjoiY2Q1MWU4NWExZGEwYmQ2NTYwYTM4ZTQ1NWY1YjMwM2RiNzE3NTMzNzc2ZGFlMWNmNTQ0YzRlMTA4YmYzZWFlYSIsIm1vZGUiOiJpbmxpbmUiLCJvbW1sX3NoYTI1NiI6ImJjNzY3M2E2MWVkMTU5MGRiYmM3NDNjMzM2MjY1ZTRmOThlNjM4ZmEwYTc3MzFmNGUzOTYyYTc0N2Y2ZjUyZjAiLCJzZW1hbnRpY19vbW1sX3Byb2ZpbGUiOiJvZmZpY2UtbWF0aC1zZW1hbnRpYy12MiIsInNlbWFudGljX29tbWxfc2hhMjU2IjoiMzVmZTQ1MmI0NDhlZjgxNTExYmU5MDdmNWVlZGM5YzViNjAxYzM3ZTY1NWZjZmY0NjdmZDk3MWJhYzhlOWVlMSJ9XSwia2luZCI6Im5hdGl2ZV9vZmZpY2VfbWF0aCIsInBsYWNlaG9sZGVyX25hbWUiOiJtYXRoOjAyMSIsInNjaGVtYV92ZXJzaW9uIjoiMS4wIn0="/>
+              <p:cNvPr id="150" name="math:021" descr="AI_AUTOFIGURE_MATH_FALLBACK_ONLY_V1:eyJjb250ZW50X3J1bnMiOlt7ImNhbm9uaWNhbF9sYXRleCI6ImFfe3QrMX0iLCJmb3JtdWxhX2lkIjoiRVEwMjEiLCJraW5kIjoibWF0aCIsImxhdGV4X3NoYTI1NiI6ImNkNTFlODVhMWRhMGJkNjU2MGEzOGU0NTVmNWIzMDNkYjcxNzUzMzc3NmRhZTFjZjU0NGM0ZTEwOGJmM2VhZWEiLCJtb2RlIjoiaW5saW5lIiwib21tbF9zaGEyNTYiOiJiYzc2NzNhNjFlZDE1OTBkYmJjNzQzYzMzNjI2NWU0Zjk4ZTYzOGZhMGE3NzMxZjRlMzk2MmE3NDdmNmY1MmYwIiwic2VtYW50aWNfb21tbF9wcm9maWxlIjoib2ZmaWNlLW1hdGgtc2VtYW50aWMtdjIiLCJzZW1hbnRpY19vbW1sX3NoYTI1NiI6IjM1ZmU0NTJiNDQ4ZWY4MTUxMWJlOTA3ZjVlZWRjOWM1YjYwMWMzN2U2NTVmY2ZmNDY3ZmQ5NzFiYWM4ZTllZTEifV0sImZvcm11bGFzIjpbeyJjYW5vbmljYWxfbGF0ZXgiOiJhX3t0KzF9IiwiZm9ybXVsYV9pZCI6IkVRMDIxIiwibGF0ZXhfc2hhMjU2IjoiY2Q1MWU4NWExZGEwYmQ2NTYwYTM4ZTQ1NWY1YjMwM2RiNzE3NTMzNzc2ZGFlMWNmNTQ0YzRlMTA4YmYzZWFlYSIsIm1vZGUiOiJpbmxpbmUiLCJvbW1sX3NoYTI1NiI6ImJjNzY3M2E2MWVkMTU5MGRiYmM3NDNjMzM2MjY1ZTRmOThlNjM4ZmEwYTc3MzFmNGUzOTYyYTc0N2Y2ZjUyZjAiLCJzZW1hbnRpY19vbW1sX3Byb2ZpbGUiOiJvZmZpY2UtbWF0aC1zZW1hbnRpYy12MiIsInNlbWFudGljX29tbWxfc2hhMjU2IjoiMzVmZTQ1MmI0NDhlZjgxNTExYmU5MDdmNWVlZGM5YzViNjAxYzM3ZTY1NWZjZmY0NjdmZDk3MWJhYzhlOWVlMSJ9XSwia2luZCI6Im5hdGl2ZV9vZmZpY2VfbWF0aCIsInBsYWNlaG9sZGVyX25hbWUiOiJtYXRoOjAyMSIsInNjaGVtYV92ZXJzaW9uIjoiMS4wIn0="/>
               <p:cNvSpPr txBox="1"/>
               <p:nvPr/>
             </p:nvSpPr>
@@ -10744,7 +11261,7 @@
               <a:effectLst/>
             </p:spPr>
             <p:txBody>
-              <a:bodyPr wrap="none" anchor="t" lIns="0" rIns="0" tIns="0" bIns="0">
+              <a:bodyPr wrap="none" lIns="0" tIns="0" rIns="0" bIns="0" anchor="t">
                 <a:spAutoFit/>
               </a:bodyPr>
               <a:lstStyle/>
@@ -10768,11 +11285,11 @@
           </p:sp>
         </mc:Fallback>
       </mc:AlternateContent>
-      <mc:AlternateContent xmlns:mc="http://schemas.openxmlformats.org/markup-compatibility/2006">
-        <mc:Choice xmlns:a14="http://schemas.microsoft.com/office/drawing/2010/main" Requires="a14">
+      <mc:AlternateContent xmlns:mc="http://schemas.openxmlformats.org/markup-compatibility/2006" xmlns:a14="http://schemas.microsoft.com/office/drawing/2010/main">
+        <mc:Choice Requires="a14">
           <p:sp>
             <p:nvSpPr>
-              <p:cNvPr id="148" name="math:022" descr="AI_AUTOFIGURE_NATIVE_MATH_V1:eyJjb250ZW50X3J1bnMiOlt7ImNhbm9uaWNhbF9sYXRleCI6ImFfe3QrMn0iLCJmb3JtdWxhX2lkIjoiRVEwMjIiLCJraW5kIjoibWF0aCIsImxhdGV4X3NoYTI1NiI6ImZkYWYzMzQzZjgxNjEyYjY0OWZlNDcyZDc0Mzk4M2U2YTBmMTI4MzdiOGZmY2M4NjUwMTVhNjZkYWU0Zjc2YjQiLCJtb2RlIjoiaW5saW5lIiwib21tbF9zaGEyNTYiOiI4MWRjMWE4MmFlNGVmY2JmMDYxYmYzM2E2NmNjZmE4OGNkOTg5NzQzZjM2NjExMzhmZWRiYmU1OTNlZjJjOTVlIiwic2VtYW50aWNfb21tbF9wcm9maWxlIjoib2ZmaWNlLW1hdGgtc2VtYW50aWMtdjIiLCJzZW1hbnRpY19vbW1sX3NoYTI1NiI6ImYzNmQyNDY3MzZjNjAyNjZkODBmMWI0MGY3ODU1MTk0NDgzNjE4ZjcyYWM1ZjlmMWJhZTg5YTQwZGZjYmM3MWIifV0sImZvcm11bGFzIjpbeyJjYW5vbmljYWxfbGF0ZXgiOiJhX3t0KzJ9IiwiZm9ybXVsYV9pZCI6IkVRMDIyIiwibGF0ZXhfc2hhMjU2IjoiZmRhZjMzNDNmODE2MTJiNjQ5ZmU0NzJkNzQzOTgzZTZhMGYxMjgzN2I4ZmZjYzg2NTAxNWE2NmRhZTRmNzZiNCIsIm1vZGUiOiJpbmxpbmUiLCJvbW1sX3NoYTI1NiI6IjgxZGMxYTgyYWU0ZWZjYmYwNjFiZjMzYTY2Y2NmYTg4Y2Q5ODk3NDNmMzY2MTEzOGZlZGJiZTU5M2VmMmM5NWUiLCJzZW1hbnRpY19vbW1sX3Byb2ZpbGUiOiJvZmZpY2UtbWF0aC1zZW1hbnRpYy12MiIsInNlbWFudGljX29tbWxfc2hhMjU2IjoiZjM2ZDI0NjczNmM2MDI2NmQ4MGYxYjQwZjc4NTUxOTQ0ODM2MThmNzJhYzVmOWYxYmFlODlhNDBkZmNiYzcxYiJ9XSwia2luZCI6Im5hdGl2ZV9vZmZpY2VfbWF0aCIsInBsYWNlaG9sZGVyX25hbWUiOiJtYXRoOjAyMiIsInNjaGVtYV92ZXJzaW9uIjoiMS4wIn0="/>
+              <p:cNvPr id="151" name="math:022" descr="AI_AUTOFIGURE_NATIVE_MATH_V1:eyJjb250ZW50X3J1bnMiOlt7ImNhbm9uaWNhbF9sYXRleCI6ImFfe3QrMn0iLCJmb3JtdWxhX2lkIjoiRVEwMjIiLCJraW5kIjoibWF0aCIsImxhdGV4X3NoYTI1NiI6ImZkYWYzMzQzZjgxNjEyYjY0OWZlNDcyZDc0Mzk4M2U2YTBmMTI4MzdiOGZmY2M4NjUwMTVhNjZkYWU0Zjc2YjQiLCJtb2RlIjoiaW5saW5lIiwib21tbF9zaGEyNTYiOiI4MWRjMWE4MmFlNGVmY2JmMDYxYmYzM2E2NmNjZmE4OGNkOTg5NzQzZjM2NjExMzhmZWRiYmU1OTNlZjJjOTVlIiwic2VtYW50aWNfb21tbF9wcm9maWxlIjoib2ZmaWNlLW1hdGgtc2VtYW50aWMtdjIiLCJzZW1hbnRpY19vbW1sX3NoYTI1NiI6ImYzNmQyNDY3MzZjNjAyNjZkODBmMWI0MGY3ODU1MTk0NDgzNjE4ZjcyYWM1ZjlmMWJhZTg5YTQwZGZjYmM3MWIifV0sImZvcm11bGFzIjpbeyJjYW5vbmljYWxfbGF0ZXgiOiJhX3t0KzJ9IiwiZm9ybXVsYV9pZCI6IkVRMDIyIiwibGF0ZXhfc2hhMjU2IjoiZmRhZjMzNDNmODE2MTJiNjQ5ZmU0NzJkNzQzOTgzZTZhMGYxMjgzN2I4ZmZjYzg2NTAxNWE2NmRhZTRmNzZiNCIsIm1vZGUiOiJpbmxpbmUiLCJvbW1sX3NoYTI1NiI6IjgxZGMxYTgyYWU0ZWZjYmYwNjFiZjMzYTY2Y2NmYTg4Y2Q5ODk3NDNmMzY2MTEzOGZlZGJiZTU5M2VmMmM5NWUiLCJzZW1hbnRpY19vbW1sX3Byb2ZpbGUiOiJvZmZpY2UtbWF0aC1zZW1hbnRpYy12MiIsInNlbWFudGljX29tbWxfc2hhMjU2IjoiZjM2ZDI0NjczNmM2MDI2NmQ4MGYxYjQwZjc4NTUxOTQ0ODM2MThmNzJhYzVmOWYxYmFlODlhNDBkZmNiYzcxYiJ9XSwia2luZCI6Im5hdGl2ZV9vZmZpY2VfbWF0aCIsInBsYWNlaG9sZGVyX25hbWUiOiJtYXRoOjAyMiIsInNjaGVtYV92ZXJzaW9uIjoiMS4wIn0="/>
               <p:cNvSpPr txBox="1"/>
               <p:nvPr/>
             </p:nvSpPr>
@@ -10788,41 +11305,62 @@
               <a:effectLst/>
             </p:spPr>
             <p:txBody>
-              <a:bodyPr wrap="none" anchor="t" lIns="0" rIns="0" tIns="0" bIns="0">
+              <a:bodyPr wrap="none" lIns="0" tIns="0" rIns="0" bIns="0" anchor="t">
                 <a:spAutoFit/>
               </a:bodyPr>
               <a:lstStyle/>
               <a:p>
                 <a:pPr algn="ctr"/>
                 <a14:m>
-                  <m:oMath xmlns:m="http://schemas.openxmlformats.org/officeDocument/2006/math">
-                    <m:sSub>
-                      <m:e>
-                        <m:r>
-                          <a:rPr lang="en-US" dirty="0" sz="1275">
-                            <a:solidFill>
-                              <a:srgbClr val="FFFFFF"/>
-                            </a:solidFill>
-                            <a:latin typeface="Cambria Math"/>
-                          </a:rPr>
-                          <m:t>a</m:t>
-                        </m:r>
-                      </m:e>
-                      <m:sub>
-                        <m:r>
-                          <a:rPr lang="en-US" dirty="0" sz="1275">
-                            <a:solidFill>
-                              <a:srgbClr val="FFFFFF"/>
-                            </a:solidFill>
-                            <a:latin typeface="Cambria Math"/>
-                          </a:rPr>
-                          <m:t>t+2</m:t>
-                        </m:r>
-                      </m:sub>
-                    </m:sSub>
-                  </m:oMath>
+                  <m:oMathPara xmlns:m="http://schemas.openxmlformats.org/officeDocument/2006/math">
+                    <m:oMath>
+                      <m:sSub>
+                        <m:sSubPr>
+                          <m:ctrlPr>
+                            <a:rPr lang="en-US" sz="1275" dirty="0">
+                              <a:solidFill>
+                                <a:srgbClr val="FFFFFF"/>
+                              </a:solidFill>
+                              <a:latin typeface="Cambria Math"/>
+                            </a:rPr>
+                          </m:ctrlPr>
+                        </m:sSubPr>
+                        <m:e>
+                          <m:r>
+                            <a:rPr lang="en-US" sz="1275" dirty="0">
+                              <a:solidFill>
+                                <a:srgbClr val="FFFFFF"/>
+                              </a:solidFill>
+                              <a:latin typeface="Cambria Math"/>
+                            </a:rPr>
+                            <m:t>𝑎</m:t>
+                          </m:r>
+                        </m:e>
+                        <m:sub>
+                          <m:r>
+                            <a:rPr lang="en-US" sz="1275" dirty="0">
+                              <a:solidFill>
+                                <a:srgbClr val="FFFFFF"/>
+                              </a:solidFill>
+                              <a:latin typeface="Cambria Math"/>
+                            </a:rPr>
+                            <m:t>𝑡</m:t>
+                          </m:r>
+                          <m:r>
+                            <a:rPr lang="en-US" sz="1275" dirty="0">
+                              <a:solidFill>
+                                <a:srgbClr val="FFFFFF"/>
+                              </a:solidFill>
+                              <a:latin typeface="Cambria Math"/>
+                            </a:rPr>
+                            <m:t>+2</m:t>
+                          </m:r>
+                        </m:sub>
+                      </m:sSub>
+                    </m:oMath>
+                  </m:oMathPara>
                 </a14:m>
-                <a:endParaRPr lang="en-US" dirty="0" sz="1275">
+                <a:endParaRPr lang="en-US" sz="1275" dirty="0">
                   <a:solidFill>
                     <a:srgbClr val="FFFFFF"/>
                   </a:solidFill>
@@ -10832,10 +11370,10 @@
             </p:txBody>
           </p:sp>
         </mc:Choice>
-        <mc:Fallback>
+        <mc:Fallback xmlns="">
           <p:sp>
             <p:nvSpPr>
-              <p:cNvPr id="148" name="math:022" descr="AI_AUTOFIGURE_MATH_FALLBACK_ONLY_V1:eyJjb250ZW50X3J1bnMiOlt7ImNhbm9uaWNhbF9sYXRleCI6ImFfe3QrMn0iLCJmb3JtdWxhX2lkIjoiRVEwMjIiLCJraW5kIjoibWF0aCIsImxhdGV4X3NoYTI1NiI6ImZkYWYzMzQzZjgxNjEyYjY0OWZlNDcyZDc0Mzk4M2U2YTBmMTI4MzdiOGZmY2M4NjUwMTVhNjZkYWU0Zjc2YjQiLCJtb2RlIjoiaW5saW5lIiwib21tbF9zaGEyNTYiOiI4MWRjMWE4MmFlNGVmY2JmMDYxYmYzM2E2NmNjZmE4OGNkOTg5NzQzZjM2NjExMzhmZWRiYmU1OTNlZjJjOTVlIiwic2VtYW50aWNfb21tbF9wcm9maWxlIjoib2ZmaWNlLW1hdGgtc2VtYW50aWMtdjIiLCJzZW1hbnRpY19vbW1sX3NoYTI1NiI6ImYzNmQyNDY3MzZjNjAyNjZkODBmMWI0MGY3ODU1MTk0NDgzNjE4ZjcyYWM1ZjlmMWJhZTg5YTQwZGZjYmM3MWIifV0sImZvcm11bGFzIjpbeyJjYW5vbmljYWxfbGF0ZXgiOiJhX3t0KzJ9IiwiZm9ybXVsYV9pZCI6IkVRMDIyIiwibGF0ZXhfc2hhMjU2IjoiZmRhZjMzNDNmODE2MTJiNjQ5ZmU0NzJkNzQzOTgzZTZhMGYxMjgzN2I4ZmZjYzg2NTAxNWE2NmRhZTRmNzZiNCIsIm1vZGUiOiJpbmxpbmUiLCJvbW1sX3NoYTI1NiI6IjgxZGMxYTgyYWU0ZWZjYmYwNjFiZjMzYTY2Y2NmYTg4Y2Q5ODk3NDNmMzY2MTEzOGZlZGJiZTU5M2VmMmM5NWUiLCJzZW1hbnRpY19vbW1sX3Byb2ZpbGUiOiJvZmZpY2UtbWF0aC1zZW1hbnRpYy12MiIsInNlbWFudGljX29tbWxfc2hhMjU2IjoiZjM2ZDI0NjczNmM2MDI2NmQ4MGYxYjQwZjc4NTUxOTQ0ODM2MThmNzJhYzVmOWYxYmFlODlhNDBkZmNiYzcxYiJ9XSwia2luZCI6Im5hdGl2ZV9vZmZpY2VfbWF0aCIsInBsYWNlaG9sZGVyX25hbWUiOiJtYXRoOjAyMiIsInNjaGVtYV92ZXJzaW9uIjoiMS4wIn0="/>
+              <p:cNvPr id="151" name="math:022" descr="AI_AUTOFIGURE_MATH_FALLBACK_ONLY_V1:eyJjb250ZW50X3J1bnMiOlt7ImNhbm9uaWNhbF9sYXRleCI6ImFfe3QrMn0iLCJmb3JtdWxhX2lkIjoiRVEwMjIiLCJraW5kIjoibWF0aCIsImxhdGV4X3NoYTI1NiI6ImZkYWYzMzQzZjgxNjEyYjY0OWZlNDcyZDc0Mzk4M2U2YTBmMTI4MzdiOGZmY2M4NjUwMTVhNjZkYWU0Zjc2YjQiLCJtb2RlIjoiaW5saW5lIiwib21tbF9zaGEyNTYiOiI4MWRjMWE4MmFlNGVmY2JmMDYxYmYzM2E2NmNjZmE4OGNkOTg5NzQzZjM2NjExMzhmZWRiYmU1OTNlZjJjOTVlIiwic2VtYW50aWNfb21tbF9wcm9maWxlIjoib2ZmaWNlLW1hdGgtc2VtYW50aWMtdjIiLCJzZW1hbnRpY19vbW1sX3NoYTI1NiI6ImYzNmQyNDY3MzZjNjAyNjZkODBmMWI0MGY3ODU1MTk0NDgzNjE4ZjcyYWM1ZjlmMWJhZTg5YTQwZGZjYmM3MWIifV0sImZvcm11bGFzIjpbeyJjYW5vbmljYWxfbGF0ZXgiOiJhX3t0KzJ9IiwiZm9ybXVsYV9pZCI6IkVRMDIyIiwibGF0ZXhfc2hhMjU2IjoiZmRhZjMzNDNmODE2MTJiNjQ5ZmU0NzJkNzQzOTgzZTZhMGYxMjgzN2I4ZmZjYzg2NTAxNWE2NmRhZTRmNzZiNCIsIm1vZGUiOiJpbmxpbmUiLCJvbW1sX3NoYTI1NiI6IjgxZGMxYTgyYWU0ZWZjYmYwNjFiZjMzYTY2Y2NmYTg4Y2Q5ODk3NDNmMzY2MTEzOGZlZGJiZTU5M2VmMmM5NWUiLCJzZW1hbnRpY19vbW1sX3Byb2ZpbGUiOiJvZmZpY2UtbWF0aC1zZW1hbnRpYy12MiIsInNlbWFudGljX29tbWxfc2hhMjU2IjoiZjM2ZDI0NjczNmM2MDI2NmQ4MGYxYjQwZjc4NTUxOTQ0ODM2MThmNzJhYzVmOWYxYmFlODlhNDBkZmNiYzcxYiJ9XSwia2luZCI6Im5hdGl2ZV9vZmZpY2VfbWF0aCIsInBsYWNlaG9sZGVyX25hbWUiOiJtYXRoOjAyMiIsInNjaGVtYV92ZXJzaW9uIjoiMS4wIn0="/>
               <p:cNvSpPr txBox="1"/>
               <p:nvPr/>
             </p:nvSpPr>
@@ -10851,7 +11389,7 @@
               <a:effectLst/>
             </p:spPr>
             <p:txBody>
-              <a:bodyPr wrap="none" anchor="t" lIns="0" rIns="0" tIns="0" bIns="0">
+              <a:bodyPr wrap="none" lIns="0" tIns="0" rIns="0" bIns="0" anchor="t">
                 <a:spAutoFit/>
               </a:bodyPr>
               <a:lstStyle/>
@@ -10877,10 +11415,10 @@
       </mc:AlternateContent>
       <p:cxnSp>
         <p:nvCxnSpPr>
-          <p:cNvPr id="149" name="af-imagination-z0-to-z1-connector-01"/>
+          <p:cNvPr id="152" name="af-imagination-z0-to-z1-connector-01" descr="{&quot;arrow_spec_sha256&quot;:&quot;162c70926207ff1c2d0241b318e7855c96602fe2f53126846b7e286712304bbc&quot;,&quot;autofigure_element_id&quot;:&quot;imagination-z0-to-z1&quot;}"/>
           <p:cNvCxnSpPr>
-            <a:stCxn id="112" idx="0"/>
-            <a:endCxn id="113" idx="0"/>
+            <a:stCxn id="110" idx="3"/>
+            <a:endCxn id="111" idx="1"/>
           </p:cNvCxnSpPr>
           <p:nvPr/>
         </p:nvCxnSpPr>
@@ -10894,9 +11432,10 @@
           </a:prstGeom>
           <a:ln w="19050">
             <a:solidFill>
-              <a:srgbClr val="9A7600"/>
+              <a:srgbClr val="7E6000"/>
             </a:solidFill>
-            <a:tailEnd type="triangle" w="lg" len="med"/>
+            <a:miter/>
+            <a:tailEnd type="triangle" w="med" len="med"/>
           </a:ln>
           <a:effectLst/>
         </p:spPr>
@@ -10917,10 +11456,10 @@
       </p:cxnSp>
       <p:cxnSp>
         <p:nvCxnSpPr>
-          <p:cNvPr id="150" name="af-imagination-z1-to-z2-connector-01"/>
+          <p:cNvPr id="153" name="af-imagination-z1-to-z2-connector-01" descr="{&quot;arrow_spec_sha256&quot;:&quot;88fbbf5aff693f06bb03b61a8851bc248ab7dd1e04675ec5ebe524e1674a9b9c&quot;,&quot;autofigure_element_id&quot;:&quot;imagination-z1-to-z2&quot;}"/>
           <p:cNvCxnSpPr>
-            <a:stCxn id="113" idx="0"/>
-            <a:endCxn id="114" idx="0"/>
+            <a:stCxn id="111" idx="3"/>
+            <a:endCxn id="112" idx="1"/>
           </p:cNvCxnSpPr>
           <p:nvPr/>
         </p:nvCxnSpPr>
@@ -10934,9 +11473,10 @@
           </a:prstGeom>
           <a:ln w="19050">
             <a:solidFill>
-              <a:srgbClr val="9A7600"/>
+              <a:srgbClr val="7E6000"/>
             </a:solidFill>
-            <a:tailEnd type="triangle" w="lg" len="med"/>
+            <a:miter/>
+            <a:tailEnd type="triangle" w="med" len="med"/>
           </a:ln>
           <a:effectLst/>
         </p:spPr>
@@ -10957,10 +11497,10 @@
       </p:cxnSp>
       <p:cxnSp>
         <p:nvCxnSpPr>
-          <p:cNvPr id="151" name="af-imagination-z2-to-zh-connector-01"/>
+          <p:cNvPr id="154" name="af-imagination-z2-to-zh-connector-01" descr="{&quot;arrow_spec_sha256&quot;:&quot;5a73e0e78b4259011c9231b3b1473fc80cb9044560062b702452cf84473f039b&quot;,&quot;autofigure_element_id&quot;:&quot;imagination-z2-to-zh&quot;}"/>
           <p:cNvCxnSpPr>
-            <a:stCxn id="114" idx="0"/>
-            <a:endCxn id="115" idx="0"/>
+            <a:stCxn id="112" idx="3"/>
+            <a:endCxn id="113" idx="1"/>
           </p:cNvCxnSpPr>
           <p:nvPr/>
         </p:nvCxnSpPr>
@@ -10974,9 +11514,10 @@
           </a:prstGeom>
           <a:ln w="19050">
             <a:solidFill>
-              <a:srgbClr val="9A7600"/>
+              <a:srgbClr val="7E6000"/>
             </a:solidFill>
-            <a:tailEnd type="triangle" w="lg" len="med"/>
+            <a:miter/>
+            <a:tailEnd type="triangle" w="med" len="med"/>
           </a:ln>
           <a:effectLst/>
         </p:spPr>
@@ -10997,26 +11538,27 @@
       </p:cxnSp>
       <p:cxnSp>
         <p:nvCxnSpPr>
-          <p:cNvPr id="152" name="af-imagination-z0-to-r0-connector-01"/>
+          <p:cNvPr id="155" name="af-rollout-z0-to-z1-connector-01" descr="{&quot;arrow_spec_sha256&quot;:&quot;59a636ef104730e3561865e9d8495723f944d4a0d43c97bae9c3dfa2d71d39dd&quot;,&quot;autofigure_element_id&quot;:&quot;rollout-z0-to-z1&quot;}"/>
           <p:cNvCxnSpPr>
-            <a:stCxn id="112" idx="0"/>
-            <a:endCxn id="131" idx="0"/>
+            <a:stCxn id="125" idx="3"/>
+            <a:endCxn id="126" idx="1"/>
           </p:cNvCxnSpPr>
           <p:nvPr/>
         </p:nvCxnSpPr>
         <p:spPr>
           <a:xfrm>
-            <a:off x="9839325" y="1914525"/>
-            <a:ext cx="0" cy="209550"/>
+            <a:off x="10067925" y="2990850"/>
+            <a:ext cx="428625" cy="0"/>
           </a:xfrm>
           <a:prstGeom prst="line">
             <a:avLst/>
           </a:prstGeom>
           <a:ln w="19050">
             <a:solidFill>
-              <a:srgbClr val="9A7600"/>
+              <a:srgbClr val="7E6000"/>
             </a:solidFill>
-            <a:tailEnd type="triangle" w="lg" len="med"/>
+            <a:miter/>
+            <a:tailEnd type="triangle" w="med" len="med"/>
           </a:ln>
           <a:effectLst/>
         </p:spPr>
@@ -11037,26 +11579,27 @@
       </p:cxnSp>
       <p:cxnSp>
         <p:nvCxnSpPr>
-          <p:cNvPr id="153" name="af-imagination-z1-to-r1-connector-01"/>
+          <p:cNvPr id="156" name="af-rollout-z1-to-z2-connector-01" descr="{&quot;arrow_spec_sha256&quot;:&quot;37d17d470c3cc157b89ce6b88cb0dd0564135bca99139b757464e8b22e3bfacb&quot;,&quot;autofigure_element_id&quot;:&quot;rollout-z1-to-z2&quot;}"/>
           <p:cNvCxnSpPr>
-            <a:stCxn id="113" idx="0"/>
-            <a:endCxn id="132" idx="0"/>
+            <a:stCxn id="126" idx="3"/>
+            <a:endCxn id="127" idx="1"/>
           </p:cNvCxnSpPr>
           <p:nvPr/>
         </p:nvCxnSpPr>
         <p:spPr>
           <a:xfrm>
-            <a:off x="10753725" y="1914525"/>
-            <a:ext cx="0" cy="209550"/>
+            <a:off x="10982325" y="2990850"/>
+            <a:ext cx="466725" cy="0"/>
           </a:xfrm>
           <a:prstGeom prst="line">
             <a:avLst/>
           </a:prstGeom>
           <a:ln w="19050">
             <a:solidFill>
-              <a:srgbClr val="9A7600"/>
+              <a:srgbClr val="7E6000"/>
             </a:solidFill>
-            <a:tailEnd type="triangle" w="lg" len="med"/>
+            <a:miter/>
+            <a:tailEnd type="triangle" w="med" len="med"/>
           </a:ln>
           <a:effectLst/>
         </p:spPr>
@@ -11077,26 +11620,27 @@
       </p:cxnSp>
       <p:cxnSp>
         <p:nvCxnSpPr>
-          <p:cNvPr id="154" name="af-imagination-z2-to-r2-connector-01"/>
+          <p:cNvPr id="157" name="af-rollout-z2-to-zh-connector-01" descr="{&quot;arrow_spec_sha256&quot;:&quot;efaf7995767a87968ee2b34c153a950065ed5f60e7fd8673221a46030fb0d77a&quot;,&quot;autofigure_element_id&quot;:&quot;rollout-z2-to-zh&quot;}"/>
           <p:cNvCxnSpPr>
-            <a:stCxn id="114" idx="0"/>
-            <a:endCxn id="133" idx="0"/>
+            <a:stCxn id="127" idx="3"/>
+            <a:endCxn id="128" idx="1"/>
           </p:cNvCxnSpPr>
           <p:nvPr/>
         </p:nvCxnSpPr>
         <p:spPr>
           <a:xfrm>
-            <a:off x="11706225" y="1914525"/>
-            <a:ext cx="0" cy="209550"/>
+            <a:off x="11934825" y="2990850"/>
+            <a:ext cx="733425" cy="0"/>
           </a:xfrm>
           <a:prstGeom prst="line">
             <a:avLst/>
           </a:prstGeom>
           <a:ln w="19050">
             <a:solidFill>
-              <a:srgbClr val="9A7600"/>
+              <a:srgbClr val="7E6000"/>
             </a:solidFill>
-            <a:tailEnd type="triangle" w="lg" len="med"/>
+            <a:miter/>
+            <a:tailEnd type="triangle" w="med" len="med"/>
           </a:ln>
           <a:effectLst/>
         </p:spPr>
@@ -11117,26 +11661,27 @@
       </p:cxnSp>
       <p:cxnSp>
         <p:nvCxnSpPr>
-          <p:cNvPr id="155" name="af-rollout-z0-to-z1-connector-01"/>
+          <p:cNvPr id="158" name="af-rollout-z0-to-pi0-connector-01" descr="{&quot;arrow_spec_sha256&quot;:&quot;62aa437f811c2704d0562268e73cafe4a11401ae568e957b1c264eff18363999&quot;,&quot;autofigure_element_id&quot;:&quot;rollout-z0-to-pi0&quot;}"/>
           <p:cNvCxnSpPr>
-            <a:stCxn id="122" idx="0"/>
-            <a:endCxn id="123" idx="0"/>
+            <a:stCxn id="125" idx="2"/>
+            <a:endCxn id="140" idx="0"/>
           </p:cNvCxnSpPr>
           <p:nvPr/>
         </p:nvCxnSpPr>
         <p:spPr>
           <a:xfrm>
-            <a:off x="10067925" y="2990850"/>
-            <a:ext cx="428625" cy="0"/>
+            <a:off x="9839325" y="3171825"/>
+            <a:ext cx="0" cy="676275"/>
           </a:xfrm>
           <a:prstGeom prst="line">
             <a:avLst/>
           </a:prstGeom>
           <a:ln w="19050">
             <a:solidFill>
-              <a:srgbClr val="9A7600"/>
+              <a:srgbClr val="7E6000"/>
             </a:solidFill>
-            <a:tailEnd type="triangle" w="lg" len="med"/>
+            <a:miter/>
+            <a:tailEnd type="triangle" w="med" len="med"/>
           </a:ln>
           <a:effectLst/>
         </p:spPr>
@@ -11157,26 +11702,27 @@
       </p:cxnSp>
       <p:cxnSp>
         <p:nvCxnSpPr>
-          <p:cNvPr id="156" name="af-rollout-z1-to-z2-connector-01"/>
+          <p:cNvPr id="159" name="af-rollout-z1-to-pi1-connector-01" descr="{&quot;arrow_spec_sha256&quot;:&quot;fd7e896f11c0e894c5605cd0a55f0966385c41476cf5f14f91679a9734a1e188&quot;,&quot;autofigure_element_id&quot;:&quot;rollout-z1-to-pi1&quot;}"/>
           <p:cNvCxnSpPr>
-            <a:stCxn id="123" idx="0"/>
-            <a:endCxn id="124" idx="0"/>
+            <a:stCxn id="126" idx="2"/>
+            <a:endCxn id="141" idx="0"/>
           </p:cNvCxnSpPr>
           <p:nvPr/>
         </p:nvCxnSpPr>
         <p:spPr>
           <a:xfrm>
-            <a:off x="10982325" y="2990850"/>
-            <a:ext cx="466725" cy="0"/>
+            <a:off x="10763250" y="3171825"/>
+            <a:ext cx="0" cy="676275"/>
           </a:xfrm>
           <a:prstGeom prst="line">
             <a:avLst/>
           </a:prstGeom>
           <a:ln w="19050">
             <a:solidFill>
-              <a:srgbClr val="9A7600"/>
+              <a:srgbClr val="7E6000"/>
             </a:solidFill>
-            <a:tailEnd type="triangle" w="lg" len="med"/>
+            <a:miter/>
+            <a:tailEnd type="triangle" w="med" len="med"/>
           </a:ln>
           <a:effectLst/>
         </p:spPr>
@@ -11197,26 +11743,27 @@
       </p:cxnSp>
       <p:cxnSp>
         <p:nvCxnSpPr>
-          <p:cNvPr id="157" name="af-rollout-z2-to-zh-connector-01"/>
+          <p:cNvPr id="160" name="af-rollout-z2-to-pi2-connector-01" descr="{&quot;arrow_spec_sha256&quot;:&quot;23aa9ddcc23ed34705ea14831614a9f92be4ee2d89408f173fdd223b5b20ff21&quot;,&quot;autofigure_element_id&quot;:&quot;rollout-z2-to-pi2&quot;}"/>
           <p:cNvCxnSpPr>
-            <a:stCxn id="124" idx="0"/>
-            <a:endCxn id="125" idx="0"/>
+            <a:stCxn id="127" idx="2"/>
+            <a:endCxn id="142" idx="0"/>
           </p:cNvCxnSpPr>
           <p:nvPr/>
         </p:nvCxnSpPr>
         <p:spPr>
           <a:xfrm>
-            <a:off x="11934825" y="2990850"/>
-            <a:ext cx="733425" cy="0"/>
+            <a:off x="11715750" y="3171825"/>
+            <a:ext cx="0" cy="676275"/>
           </a:xfrm>
           <a:prstGeom prst="line">
             <a:avLst/>
           </a:prstGeom>
           <a:ln w="19050">
             <a:solidFill>
-              <a:srgbClr val="9A7600"/>
+              <a:srgbClr val="7E6000"/>
             </a:solidFill>
-            <a:tailEnd type="triangle" w="lg" len="med"/>
+            <a:miter/>
+            <a:tailEnd type="triangle" w="med" len="med"/>
           </a:ln>
           <a:effectLst/>
         </p:spPr>
@@ -11235,129 +11782,9 @@
           </a:fontRef>
         </p:style>
       </p:cxnSp>
-      <p:cxnSp>
-        <p:nvCxnSpPr>
-          <p:cNvPr id="158" name="af-rollout-z0-to-pi0-connector-01"/>
-          <p:cNvCxnSpPr>
-            <a:stCxn id="122" idx="0"/>
-            <a:endCxn id="137" idx="0"/>
-          </p:cNvCxnSpPr>
-          <p:nvPr/>
-        </p:nvCxnSpPr>
-        <p:spPr>
-          <a:xfrm>
-            <a:off x="9839325" y="3171825"/>
-            <a:ext cx="0" cy="676275"/>
-          </a:xfrm>
-          <a:prstGeom prst="line">
-            <a:avLst/>
-          </a:prstGeom>
-          <a:ln w="19050">
-            <a:solidFill>
-              <a:srgbClr val="9A7600"/>
-            </a:solidFill>
-            <a:tailEnd type="triangle" w="lg" len="med"/>
-          </a:ln>
-          <a:effectLst/>
-        </p:spPr>
-        <p:style>
-          <a:lnRef idx="2">
-            <a:schemeClr val="accent1"/>
-          </a:lnRef>
-          <a:fillRef idx="0">
-            <a:schemeClr val="accent1"/>
-          </a:fillRef>
-          <a:effectRef idx="1">
-            <a:schemeClr val="accent1"/>
-          </a:effectRef>
-          <a:fontRef idx="minor">
-            <a:schemeClr val="tx1"/>
-          </a:fontRef>
-        </p:style>
-      </p:cxnSp>
-      <p:cxnSp>
-        <p:nvCxnSpPr>
-          <p:cNvPr id="159" name="af-rollout-z1-to-pi1-connector-01"/>
-          <p:cNvCxnSpPr>
-            <a:stCxn id="123" idx="0"/>
-            <a:endCxn id="138" idx="0"/>
-          </p:cNvCxnSpPr>
-          <p:nvPr/>
-        </p:nvCxnSpPr>
-        <p:spPr>
-          <a:xfrm>
-            <a:off x="10763250" y="3171825"/>
-            <a:ext cx="0" cy="676275"/>
-          </a:xfrm>
-          <a:prstGeom prst="line">
-            <a:avLst/>
-          </a:prstGeom>
-          <a:ln w="19050">
-            <a:solidFill>
-              <a:srgbClr val="9A7600"/>
-            </a:solidFill>
-            <a:tailEnd type="triangle" w="lg" len="med"/>
-          </a:ln>
-          <a:effectLst/>
-        </p:spPr>
-        <p:style>
-          <a:lnRef idx="2">
-            <a:schemeClr val="accent1"/>
-          </a:lnRef>
-          <a:fillRef idx="0">
-            <a:schemeClr val="accent1"/>
-          </a:fillRef>
-          <a:effectRef idx="1">
-            <a:schemeClr val="accent1"/>
-          </a:effectRef>
-          <a:fontRef idx="minor">
-            <a:schemeClr val="tx1"/>
-          </a:fontRef>
-        </p:style>
-      </p:cxnSp>
-      <p:cxnSp>
-        <p:nvCxnSpPr>
-          <p:cNvPr id="160" name="af-rollout-z2-to-pi2-connector-01"/>
-          <p:cNvCxnSpPr>
-            <a:stCxn id="124" idx="0"/>
-            <a:endCxn id="139" idx="0"/>
-          </p:cNvCxnSpPr>
-          <p:nvPr/>
-        </p:nvCxnSpPr>
-        <p:spPr>
-          <a:xfrm>
-            <a:off x="11715750" y="3171825"/>
-            <a:ext cx="0" cy="676275"/>
-          </a:xfrm>
-          <a:prstGeom prst="line">
-            <a:avLst/>
-          </a:prstGeom>
-          <a:ln w="19050">
-            <a:solidFill>
-              <a:srgbClr val="9A7600"/>
-            </a:solidFill>
-            <a:tailEnd type="triangle" w="lg" len="med"/>
-          </a:ln>
-          <a:effectLst/>
-        </p:spPr>
-        <p:style>
-          <a:lnRef idx="2">
-            <a:schemeClr val="accent1"/>
-          </a:lnRef>
-          <a:fillRef idx="0">
-            <a:schemeClr val="accent1"/>
-          </a:fillRef>
-          <a:effectRef idx="1">
-            <a:schemeClr val="accent1"/>
-          </a:effectRef>
-          <a:fontRef idx="minor">
-            <a:schemeClr val="tx1"/>
-          </a:fontRef>
-        </p:style>
-      </p:cxnSp>
-      <p:sp>
-        <p:nvSpPr>
-          <p:cNvPr id="161" name="af-rollout-pi0-to-a0-freeform-arrow-01"/>
+      <p:sp>
+        <p:nvSpPr>
+          <p:cNvPr id="161" name="af-rollout-pi0-to-a0-freeform-arrow-01" descr="{&quot;arrow_spec_sha256&quot;:&quot;f297f4212bbaf79bc81e1538525275bb95d78d5c3fbc5076f932f3f4a9202497&quot;,&quot;autofigure_element_id&quot;:&quot;rollout-pi0-to-a0&quot;}"/>
           <p:cNvSpPr/>
           <p:nvPr/>
         </p:nvSpPr>
@@ -11388,19 +11815,23 @@
           <a:noFill/>
           <a:ln w="19050">
             <a:solidFill>
-              <a:srgbClr val="9A7600"/>
+              <a:srgbClr val="7E6000"/>
             </a:solidFill>
-            <a:tailEnd type="triangle" w="lg" len="med"/>
+            <a:miter/>
+            <a:tailEnd type="triangle" w="med" len="med"/>
           </a:ln>
         </p:spPr>
         <p:txBody>
           <a:bodyPr/>
-          <a:p/>
-        </p:txBody>
-      </p:sp>
-      <p:sp>
-        <p:nvSpPr>
-          <p:cNvPr id="162" name="af-rollout-pi1-to-a1-freeform-arrow-01"/>
+          <a:lstStyle/>
+          <a:p>
+            <a:endParaRPr/>
+          </a:p>
+        </p:txBody>
+      </p:sp>
+      <p:sp>
+        <p:nvSpPr>
+          <p:cNvPr id="162" name="af-rollout-pi1-to-a1-freeform-arrow-01" descr="{&quot;arrow_spec_sha256&quot;:&quot;80bc16fd8946a61a1d0c7178dbdbd8ac4d85d34bca79e1c966fdef806a265611&quot;,&quot;autofigure_element_id&quot;:&quot;rollout-pi1-to-a1&quot;}"/>
           <p:cNvSpPr/>
           <p:nvPr/>
         </p:nvSpPr>
@@ -11431,19 +11862,23 @@
           <a:noFill/>
           <a:ln w="19050">
             <a:solidFill>
-              <a:srgbClr val="9A7600"/>
+              <a:srgbClr val="7E6000"/>
             </a:solidFill>
-            <a:tailEnd type="triangle" w="lg" len="med"/>
+            <a:miter/>
+            <a:tailEnd type="triangle" w="med" len="med"/>
           </a:ln>
         </p:spPr>
         <p:txBody>
           <a:bodyPr/>
-          <a:p/>
-        </p:txBody>
-      </p:sp>
-      <p:sp>
-        <p:nvSpPr>
-          <p:cNvPr id="163" name="af-rollout-pi2-to-a2-freeform-arrow-01"/>
+          <a:lstStyle/>
+          <a:p>
+            <a:endParaRPr/>
+          </a:p>
+        </p:txBody>
+      </p:sp>
+      <p:sp>
+        <p:nvSpPr>
+          <p:cNvPr id="163" name="af-rollout-pi2-to-a2-freeform-arrow-01" descr="{&quot;arrow_spec_sha256&quot;:&quot;8c3a2ec0b5993063f2cabd8879419baaa0352aca827503318c5bf4022d70485a&quot;,&quot;autofigure_element_id&quot;:&quot;rollout-pi2-to-a2&quot;}"/>
           <p:cNvSpPr/>
           <p:nvPr/>
         </p:nvSpPr>
@@ -11474,19 +11909,23 @@
           <a:noFill/>
           <a:ln w="19050">
             <a:solidFill>
-              <a:srgbClr val="9A7600"/>
+              <a:srgbClr val="7E6000"/>
             </a:solidFill>
-            <a:tailEnd type="triangle" w="lg" len="med"/>
+            <a:miter/>
+            <a:tailEnd type="triangle" w="med" len="med"/>
           </a:ln>
         </p:spPr>
         <p:txBody>
           <a:bodyPr/>
-          <a:p/>
-        </p:txBody>
-      </p:sp>
-      <p:sp>
-        <p:nvSpPr>
-          <p:cNvPr id="164" name="af-rollout-a0-to-z1-freeform-arrow-01"/>
+          <a:lstStyle/>
+          <a:p>
+            <a:endParaRPr/>
+          </a:p>
+        </p:txBody>
+      </p:sp>
+      <p:sp>
+        <p:nvSpPr>
+          <p:cNvPr id="164" name="af-rollout-a0-to-z1-freeform-arrow-01" descr="{&quot;arrow_spec_sha256&quot;:&quot;6e58ece868c5939e8982211c105139d70af47a839ac6b30cdf58eb58392049d2&quot;,&quot;autofigure_element_id&quot;:&quot;rollout-a0-to-z1&quot;}"/>
           <p:cNvSpPr/>
           <p:nvPr/>
         </p:nvSpPr>
@@ -11517,19 +11956,23 @@
           <a:noFill/>
           <a:ln w="19050">
             <a:solidFill>
-              <a:srgbClr val="9A7600"/>
+              <a:srgbClr val="7E6000"/>
             </a:solidFill>
-            <a:tailEnd type="triangle" w="lg" len="med"/>
+            <a:miter/>
+            <a:tailEnd type="triangle" w="med" len="med"/>
           </a:ln>
         </p:spPr>
         <p:txBody>
           <a:bodyPr/>
-          <a:p/>
-        </p:txBody>
-      </p:sp>
-      <p:sp>
-        <p:nvSpPr>
-          <p:cNvPr id="165" name="af-rollout-a1-to-z2-freeform-arrow-01"/>
+          <a:lstStyle/>
+          <a:p>
+            <a:endParaRPr/>
+          </a:p>
+        </p:txBody>
+      </p:sp>
+      <p:sp>
+        <p:nvSpPr>
+          <p:cNvPr id="165" name="af-rollout-a1-to-z2-freeform-arrow-01" descr="{&quot;arrow_spec_sha256&quot;:&quot;29ae1ddb54088f6d2443b556aa6e4b20807f349a89f04edec077ef1d4775891b&quot;,&quot;autofigure_element_id&quot;:&quot;rollout-a1-to-z2&quot;}"/>
           <p:cNvSpPr/>
           <p:nvPr/>
         </p:nvSpPr>
@@ -11560,19 +12003,23 @@
           <a:noFill/>
           <a:ln w="19050">
             <a:solidFill>
-              <a:srgbClr val="9A7600"/>
+              <a:srgbClr val="7E6000"/>
             </a:solidFill>
-            <a:tailEnd type="triangle" w="lg" len="med"/>
+            <a:miter/>
+            <a:tailEnd type="triangle" w="med" len="med"/>
           </a:ln>
         </p:spPr>
         <p:txBody>
           <a:bodyPr/>
-          <a:p/>
-        </p:txBody>
-      </p:sp>
-      <p:sp>
-        <p:nvSpPr>
-          <p:cNvPr id="166" name="af-rollout-a2-to-next-freeform-arrow-01"/>
+          <a:lstStyle/>
+          <a:p>
+            <a:endParaRPr/>
+          </a:p>
+        </p:txBody>
+      </p:sp>
+      <p:sp>
+        <p:nvSpPr>
+          <p:cNvPr id="166" name="af-rollout-a2-to-next-freeform-arrow-01" descr="{&quot;arrow_spec_sha256&quot;:&quot;8e92be1f44bce5d76e810cc5db05054e1886b2e383ea77c31d539340fc4f4573&quot;,&quot;autofigure_element_id&quot;:&quot;rollout-a2-to-next&quot;}"/>
           <p:cNvSpPr/>
           <p:nvPr/>
         </p:nvSpPr>
@@ -11603,99 +12050,23 @@
           <a:noFill/>
           <a:ln w="19050">
             <a:solidFill>
-              <a:srgbClr val="9A7600"/>
+              <a:srgbClr val="7E6000"/>
             </a:solidFill>
-            <a:tailEnd type="triangle" w="lg" len="med"/>
+            <a:miter/>
+            <a:tailEnd type="triangle" w="med" len="med"/>
           </a:ln>
         </p:spPr>
         <p:txBody>
           <a:bodyPr/>
-          <a:p/>
-        </p:txBody>
-      </p:sp>
-      <p:cxnSp>
-        <p:nvCxnSpPr>
-          <p:cNvPr id="167" name="af-zt-top-to-imagination-connector-01"/>
-          <p:cNvCxnSpPr>
-            <a:stCxn id="101" idx="0"/>
-            <a:endCxn id="122" idx="0"/>
-          </p:cNvCxnSpPr>
-          <p:nvPr/>
-        </p:nvCxnSpPr>
-        <p:spPr>
-          <a:xfrm>
-            <a:off x="9010650" y="2590800"/>
-            <a:ext cx="561975" cy="381000"/>
-          </a:xfrm>
-          <a:prstGeom prst="line">
-            <a:avLst/>
-          </a:prstGeom>
-          <a:ln w="19050">
-            <a:solidFill>
-              <a:srgbClr val="9A7600"/>
-            </a:solidFill>
-            <a:tailEnd type="triangle" w="lg" len="med"/>
-          </a:ln>
-          <a:effectLst/>
-        </p:spPr>
-        <p:style>
-          <a:lnRef idx="2">
-            <a:schemeClr val="accent1"/>
-          </a:lnRef>
-          <a:fillRef idx="0">
-            <a:schemeClr val="accent1"/>
-          </a:fillRef>
-          <a:effectRef idx="1">
-            <a:schemeClr val="accent1"/>
-          </a:effectRef>
-          <a:fontRef idx="minor">
-            <a:schemeClr val="tx1"/>
-          </a:fontRef>
-        </p:style>
-      </p:cxnSp>
-      <p:cxnSp>
-        <p:nvCxnSpPr>
-          <p:cNvPr id="168" name="af-zt-bottom-to-rollout-connector-01"/>
-          <p:cNvCxnSpPr>
-            <a:stCxn id="106" idx="0"/>
-            <a:endCxn id="122" idx="0"/>
-          </p:cNvCxnSpPr>
-          <p:nvPr/>
-        </p:nvCxnSpPr>
-        <p:spPr>
-          <a:xfrm flipV="1">
-            <a:off x="9010650" y="3105150"/>
-            <a:ext cx="561975" cy="857250"/>
-          </a:xfrm>
-          <a:prstGeom prst="line">
-            <a:avLst/>
-          </a:prstGeom>
-          <a:ln w="19050">
-            <a:solidFill>
-              <a:srgbClr val="9A7600"/>
-            </a:solidFill>
-            <a:tailEnd type="triangle" w="lg" len="med"/>
-          </a:ln>
-          <a:effectLst/>
-        </p:spPr>
-        <p:style>
-          <a:lnRef idx="2">
-            <a:schemeClr val="accent1"/>
-          </a:lnRef>
-          <a:fillRef idx="0">
-            <a:schemeClr val="accent1"/>
-          </a:fillRef>
-          <a:effectRef idx="1">
-            <a:schemeClr val="accent1"/>
-          </a:effectRef>
-          <a:fontRef idx="minor">
-            <a:schemeClr val="tx1"/>
-          </a:fontRef>
-        </p:style>
-      </p:cxnSp>
-      <p:sp>
-        <p:nvSpPr>
-          <p:cNvPr id="169" name="af-dense-trophy-text-01"/>
+          <a:lstStyle/>
+          <a:p>
+            <a:endParaRPr/>
+          </a:p>
+        </p:txBody>
+      </p:sp>
+      <p:sp>
+        <p:nvSpPr>
+          <p:cNvPr id="167" name="af-dense-trophy-text-01" descr="{&quot;autofigure_element_id&quot;:&quot;dense-trophy&quot;}"/>
           <p:cNvSpPr txBox="1"/>
           <p:nvPr/>
         </p:nvSpPr>
@@ -11711,7 +12082,7 @@
           <a:effectLst/>
         </p:spPr>
         <p:txBody>
-          <a:bodyPr wrap="none" anchor="t" lIns="0" rIns="0" tIns="0" bIns="0">
+          <a:bodyPr wrap="none" lIns="0" tIns="0" rIns="0" bIns="0" anchor="t">
             <a:spAutoFit/>
           </a:bodyPr>
           <a:lstStyle/>
@@ -11731,7 +12102,7 @@
       </p:sp>
       <p:sp>
         <p:nvSpPr>
-          <p:cNvPr id="170" name="af-dense-reward-label-text-01"/>
+          <p:cNvPr id="168" name="af-dense-reward-label-text-01" descr="{&quot;autofigure_element_id&quot;:&quot;dense-reward-label&quot;}"/>
           <p:cNvSpPr txBox="1"/>
           <p:nvPr/>
         </p:nvSpPr>
@@ -11747,7 +12118,7 @@
           <a:effectLst/>
         </p:spPr>
         <p:txBody>
-          <a:bodyPr wrap="none" anchor="t" lIns="0" rIns="0" tIns="0" bIns="0">
+          <a:bodyPr wrap="none" lIns="0" tIns="0" rIns="0" bIns="0" anchor="t">
             <a:spAutoFit/>
           </a:bodyPr>
           <a:lstStyle/>
@@ -11767,7 +12138,7 @@
       </p:sp>
       <p:sp>
         <p:nvSpPr>
-          <p:cNvPr id="171" name="af-dense-reward-label-2-text-01"/>
+          <p:cNvPr id="169" name="af-dense-reward-label-2-text-01" descr="{&quot;autofigure_element_id&quot;:&quot;dense-reward-label-2&quot;}"/>
           <p:cNvSpPr txBox="1"/>
           <p:nvPr/>
         </p:nvSpPr>
@@ -11783,7 +12154,7 @@
           <a:effectLst/>
         </p:spPr>
         <p:txBody>
-          <a:bodyPr wrap="none" anchor="t" lIns="0" rIns="0" tIns="0" bIns="0">
+          <a:bodyPr wrap="none" lIns="0" tIns="0" rIns="0" bIns="0" anchor="t">
             <a:spAutoFit/>
           </a:bodyPr>
           <a:lstStyle/>
@@ -11803,7 +12174,7 @@
       </p:sp>
       <p:sp>
         <p:nvSpPr>
-          <p:cNvPr id="172" name="af-behavior-title-text-01"/>
+          <p:cNvPr id="170" name="af-behavior-title-text-01" descr="{&quot;autofigure_element_id&quot;:&quot;behavior-title&quot;}"/>
           <p:cNvSpPr txBox="1"/>
           <p:nvPr/>
         </p:nvSpPr>
@@ -11819,7 +12190,7 @@
           <a:effectLst/>
         </p:spPr>
         <p:txBody>
-          <a:bodyPr wrap="none" anchor="t" lIns="0" rIns="0" tIns="0" bIns="0">
+          <a:bodyPr wrap="none" lIns="0" tIns="0" rIns="0" bIns="0" anchor="t">
             <a:spAutoFit/>
           </a:bodyPr>
           <a:lstStyle/>
@@ -11839,10 +12210,10 @@
       </p:sp>
       <p:cxnSp>
         <p:nvCxnSpPr>
-          <p:cNvPr id="173" name="af-mapping-to-imagination-connector-01"/>
+          <p:cNvPr id="171" name="af-mapping-to-imagination-connector-01" descr="{&quot;arrow_spec_sha256&quot;:&quot;35f5c5b14f7d55da1c3f80440453112a0bcf6f7d260e07f8da121d0d3ef86385&quot;,&quot;autofigure_element_id&quot;:&quot;mapping-to-imagination&quot;}"/>
           <p:cNvCxnSpPr>
             <a:stCxn id="19" idx="0"/>
-            <a:endCxn id="110" idx="0"/>
+            <a:endCxn id="105" idx="0"/>
           </p:cNvCxnSpPr>
           <p:nvPr/>
         </p:nvCxnSpPr>
@@ -11858,6 +12229,7 @@
             <a:solidFill>
               <a:srgbClr val="7F7F7F"/>
             </a:solidFill>
+            <a:miter/>
             <a:tailEnd type="triangle" w="sm" len="sm"/>
           </a:ln>
           <a:effectLst/>
@@ -11879,7 +12251,7 @@
       </p:cxnSp>
       <p:sp>
         <p:nvSpPr>
-          <p:cNvPr id="174" name="af-joint-optimization-box-rect-01"/>
+          <p:cNvPr id="172" name="af-joint-optimization-box-rect-01" descr="{&quot;autofigure_element_id&quot;:&quot;joint-optimization-box&quot;}"/>
           <p:cNvSpPr/>
           <p:nvPr/>
         </p:nvSpPr>
@@ -11899,6 +12271,7 @@
               <a:srgbClr val="17355F"/>
             </a:solidFill>
             <a:prstDash val="sysDot"/>
+            <a:miter/>
           </a:ln>
           <a:effectLst/>
         </p:spPr>
@@ -11921,12 +12294,13 @@
           <a:lstStyle/>
           <a:p>
             <a:pPr algn="ctr"/>
-          </a:p>
-        </p:txBody>
-      </p:sp>
-      <p:sp>
-        <p:nvSpPr>
-          <p:cNvPr id="175" name="af-joint-optimization-label-text-01"/>
+            <a:endParaRPr/>
+          </a:p>
+        </p:txBody>
+      </p:sp>
+      <p:sp>
+        <p:nvSpPr>
+          <p:cNvPr id="173" name="af-joint-optimization-label-text-01" descr="{&quot;autofigure_element_id&quot;:&quot;joint-optimization-label&quot;}"/>
           <p:cNvSpPr txBox="1"/>
           <p:nvPr/>
         </p:nvSpPr>
@@ -11942,7 +12316,7 @@
           <a:effectLst/>
         </p:spPr>
         <p:txBody>
-          <a:bodyPr wrap="none" anchor="t" lIns="0" rIns="0" tIns="0" bIns="0">
+          <a:bodyPr wrap="none" lIns="0" tIns="0" rIns="0" bIns="0" anchor="t">
             <a:spAutoFit/>
           </a:bodyPr>
           <a:lstStyle/>
@@ -11962,14 +12336,14 @@
       </p:sp>
       <p:sp>
         <p:nvSpPr>
-          <p:cNvPr id="176" name="af-joint-loop-arrow-freeform-01"/>
+          <p:cNvPr id="174" name="af-joint-loop-arrow-freeform-arrow-01" descr="{&quot;arrow_spec_sha256&quot;:&quot;11e8f198de3aa2ea64a78181ee4a87985cbb2a5d072f3d8e47093c566e3c29ad&quot;,&quot;autofigure_element_id&quot;:&quot;joint-loop-arrow&quot;}"/>
           <p:cNvSpPr/>
           <p:nvPr/>
         </p:nvSpPr>
         <p:spPr>
           <a:xfrm>
-            <a:off x="1009650" y="4953000"/>
-            <a:ext cx="771525" cy="514350"/>
+            <a:off x="1114425" y="4943475"/>
+            <a:ext cx="600075" cy="514350"/>
           </a:xfrm>
           <a:custGeom>
             <a:avLst/>
@@ -11978,63 +12352,44 @@
             <a:cxnLst/>
             <a:rect l="0" t="0" r="0" b="0"/>
             <a:pathLst>
-              <a:path w="771525" h="514350">
+              <a:path w="600075" h="514350">
                 <a:moveTo>
-                  <a:pt x="771525" y="514350"/>
+                  <a:pt x="600075" y="514350"/>
                 </a:moveTo>
                 <a:lnTo>
-                  <a:pt x="314325" y="514350"/>
+                  <a:pt x="209550" y="514350"/>
                 </a:lnTo>
                 <a:cubicBezTo>
-                  <a:pt x="152400" y="514350"/>
-                  <a:pt x="95250" y="438150"/>
-                  <a:pt x="95250" y="285750"/>
+                  <a:pt x="69850" y="514350"/>
+                  <a:pt x="0" y="441325"/>
+                  <a:pt x="0" y="295275"/>
                 </a:cubicBezTo>
                 <a:lnTo>
-                  <a:pt x="95250" y="28575"/>
+                  <a:pt x="0" y="0"/>
                 </a:lnTo>
-                <a:lnTo>
-                  <a:pt x="0" y="142875"/>
-                </a:lnTo>
-                <a:lnTo>
-                  <a:pt x="95250" y="0"/>
-                </a:lnTo>
-                <a:lnTo>
-                  <a:pt x="200025" y="142875"/>
-                </a:lnTo>
-                <a:lnTo>
-                  <a:pt x="133350" y="57150"/>
-                </a:lnTo>
-                <a:lnTo>
-                  <a:pt x="133350" y="285750"/>
-                </a:lnTo>
-                <a:cubicBezTo>
-                  <a:pt x="133350" y="419100"/>
-                  <a:pt x="200025" y="466725"/>
-                  <a:pt x="323850" y="466725"/>
-                </a:cubicBezTo>
-                <a:lnTo>
-                  <a:pt x="771525" y="466725"/>
-                </a:lnTo>
-                <a:close/>
               </a:path>
             </a:pathLst>
           </a:custGeom>
-          <a:solidFill>
-            <a:srgbClr val="D8747D"/>
-          </a:solidFill>
-          <a:ln>
-            <a:noFill/>
+          <a:noFill/>
+          <a:ln w="95250" cap="rnd">
+            <a:solidFill>
+              <a:srgbClr val="D77E84"/>
+            </a:solidFill>
+            <a:round/>
+            <a:tailEnd type="triangle" w="sm" len="sm"/>
           </a:ln>
         </p:spPr>
         <p:txBody>
           <a:bodyPr/>
-          <a:p/>
-        </p:txBody>
-      </p:sp>
-      <p:sp>
-        <p:nvSpPr>
-          <p:cNvPr id="177" name="af-optimization-to-reward-freeform-01"/>
+          <a:lstStyle/>
+          <a:p>
+            <a:endParaRPr/>
+          </a:p>
+        </p:txBody>
+      </p:sp>
+      <p:sp>
+        <p:nvSpPr>
+          <p:cNvPr id="175" name="af-optimization-to-reward-freeform-01" descr="{&quot;autofigure_element_id&quot;:&quot;optimization-to-reward&quot;}"/>
           <p:cNvSpPr/>
           <p:nvPr/>
         </p:nvSpPr>
@@ -12085,12 +12440,15 @@
         </p:spPr>
         <p:txBody>
           <a:bodyPr/>
-          <a:p/>
-        </p:txBody>
-      </p:sp>
-      <p:sp>
-        <p:nvSpPr>
-          <p:cNvPr id="178" name="af-reward-action-box-rect-01"/>
+          <a:lstStyle/>
+          <a:p>
+            <a:endParaRPr/>
+          </a:p>
+        </p:txBody>
+      </p:sp>
+      <p:sp>
+        <p:nvSpPr>
+          <p:cNvPr id="176" name="af-reward-action-box-rect-01" descr="{&quot;autofigure_element_id&quot;:&quot;reward-action-box&quot;}"/>
           <p:cNvSpPr/>
           <p:nvPr/>
         </p:nvSpPr>
@@ -12111,6 +12469,7 @@
             <a:solidFill>
               <a:srgbClr val="19365F"/>
             </a:solidFill>
+            <a:miter/>
           </a:ln>
           <a:effectLst/>
         </p:spPr>
@@ -12133,12 +12492,13 @@
           <a:lstStyle/>
           <a:p>
             <a:pPr algn="ctr"/>
-          </a:p>
-        </p:txBody>
-      </p:sp>
-      <p:sp>
-        <p:nvSpPr>
-          <p:cNvPr id="179" name="af-reward-icon-text-01"/>
+            <a:endParaRPr/>
+          </a:p>
+        </p:txBody>
+      </p:sp>
+      <p:sp>
+        <p:nvSpPr>
+          <p:cNvPr id="177" name="af-reward-icon-text-01" descr="{&quot;autofigure_element_id&quot;:&quot;reward-icon&quot;}"/>
           <p:cNvSpPr txBox="1"/>
           <p:nvPr/>
         </p:nvSpPr>
@@ -12154,7 +12514,7 @@
           <a:effectLst/>
         </p:spPr>
         <p:txBody>
-          <a:bodyPr wrap="none" anchor="t" lIns="0" rIns="0" tIns="0" bIns="0">
+          <a:bodyPr wrap="none" lIns="0" tIns="0" rIns="0" bIns="0" anchor="t">
             <a:spAutoFit/>
           </a:bodyPr>
           <a:lstStyle/>
@@ -12174,7 +12534,7 @@
       </p:sp>
       <p:sp>
         <p:nvSpPr>
-          <p:cNvPr id="180" name="af-reward-text-text-01"/>
+          <p:cNvPr id="178" name="af-reward-text-text-01" descr="{&quot;autofigure_element_id&quot;:&quot;reward-text&quot;}"/>
           <p:cNvSpPr txBox="1"/>
           <p:nvPr/>
         </p:nvSpPr>
@@ -12190,7 +12550,7 @@
           <a:effectLst/>
         </p:spPr>
         <p:txBody>
-          <a:bodyPr wrap="none" anchor="t" lIns="0" rIns="0" tIns="0" bIns="0">
+          <a:bodyPr wrap="none" lIns="0" tIns="0" rIns="0" bIns="0" anchor="t">
             <a:spAutoFit/>
           </a:bodyPr>
           <a:lstStyle/>
@@ -12210,7 +12570,7 @@
       </p:sp>
       <p:sp>
         <p:nvSpPr>
-          <p:cNvPr id="181" name="af-action-icon-ellipse-01"/>
+          <p:cNvPr id="179" name="af-action-icon-ellipse-01" descr="{&quot;autofigure_element_id&quot;:&quot;action-icon&quot;}"/>
           <p:cNvSpPr/>
           <p:nvPr/>
         </p:nvSpPr>
@@ -12229,6 +12589,7 @@
             <a:solidFill>
               <a:srgbClr val="5B9734"/>
             </a:solidFill>
+            <a:miter/>
           </a:ln>
           <a:effectLst/>
         </p:spPr>
@@ -12251,12 +12612,13 @@
           <a:lstStyle/>
           <a:p>
             <a:pPr algn="ctr"/>
-          </a:p>
-        </p:txBody>
-      </p:sp>
-      <p:sp>
-        <p:nvSpPr>
-          <p:cNvPr id="182" name="af-action-icon-path-freeform-01"/>
+            <a:endParaRPr/>
+          </a:p>
+        </p:txBody>
+      </p:sp>
+      <p:sp>
+        <p:nvSpPr>
+          <p:cNvPr id="180" name="af-action-icon-path-freeform-01" descr="{&quot;autofigure_element_id&quot;:&quot;action-icon-path&quot;}"/>
           <p:cNvSpPr/>
           <p:nvPr/>
         </p:nvSpPr>
@@ -12311,16 +12673,20 @@
             <a:solidFill>
               <a:srgbClr val="5B9734"/>
             </a:solidFill>
+            <a:miter/>
           </a:ln>
         </p:spPr>
         <p:txBody>
           <a:bodyPr/>
-          <a:p/>
-        </p:txBody>
-      </p:sp>
-      <p:sp>
-        <p:nvSpPr>
-          <p:cNvPr id="183" name="af-action-text-text-01"/>
+          <a:lstStyle/>
+          <a:p>
+            <a:endParaRPr/>
+          </a:p>
+        </p:txBody>
+      </p:sp>
+      <p:sp>
+        <p:nvSpPr>
+          <p:cNvPr id="181" name="af-action-text-text-01" descr="{&quot;autofigure_element_id&quot;:&quot;action-text&quot;}"/>
           <p:cNvSpPr txBox="1"/>
           <p:nvPr/>
         </p:nvSpPr>
@@ -12336,7 +12702,7 @@
           <a:effectLst/>
         </p:spPr>
         <p:txBody>
-          <a:bodyPr wrap="none" anchor="t" lIns="0" rIns="0" tIns="0" bIns="0">
+          <a:bodyPr wrap="none" lIns="0" tIns="0" rIns="0" bIns="0" anchor="t">
             <a:spAutoFit/>
           </a:bodyPr>
           <a:lstStyle/>
@@ -12356,7 +12722,7 @@
       </p:sp>
       <p:sp>
         <p:nvSpPr>
-          <p:cNvPr id="184" name="af-behavior-to-reward-freeform-01"/>
+          <p:cNvPr id="182" name="af-behavior-to-reward-freeform-01" descr="{&quot;autofigure_element_id&quot;:&quot;behavior-to-reward&quot;}"/>
           <p:cNvSpPr/>
           <p:nvPr/>
         </p:nvSpPr>
@@ -12407,12 +12773,15 @@
         </p:spPr>
         <p:txBody>
           <a:bodyPr/>
-          <a:p/>
-        </p:txBody>
-      </p:sp>
-      <p:sp>
-        <p:nvSpPr>
-          <p:cNvPr id="185" name="af-interaction-label-text-01"/>
+          <a:lstStyle/>
+          <a:p>
+            <a:endParaRPr/>
+          </a:p>
+        </p:txBody>
+      </p:sp>
+      <p:sp>
+        <p:nvSpPr>
+          <p:cNvPr id="183" name="af-interaction-label-text-01" descr="{&quot;autofigure_element_id&quot;:&quot;interaction-label&quot;}"/>
           <p:cNvSpPr txBox="1"/>
           <p:nvPr/>
         </p:nvSpPr>
@@ -12428,7 +12797,7 @@
           <a:effectLst/>
         </p:spPr>
         <p:txBody>
-          <a:bodyPr wrap="none" anchor="t" lIns="0" rIns="0" tIns="0" bIns="0">
+          <a:bodyPr wrap="none" lIns="0" tIns="0" rIns="0" bIns="0" anchor="t">
             <a:spAutoFit/>
           </a:bodyPr>
           <a:lstStyle/>
@@ -12446,100 +12815,68 @@
           </a:p>
         </p:txBody>
       </p:sp>
-      <p:cxnSp>
-        <p:nvCxnSpPr>
-          <p:cNvPr id="186" name="af-interaction-left-connector-01"/>
-          <p:cNvCxnSpPr>
-            <a:stCxn id="188" idx="0"/>
-            <a:endCxn id="178" idx="0"/>
-          </p:cNvCxnSpPr>
-          <p:nvPr/>
-        </p:nvCxnSpPr>
-        <p:spPr>
-          <a:xfrm flipH="1">
-            <a:off x="9667875" y="5457825"/>
-            <a:ext cx="1457325" cy="0"/>
-          </a:xfrm>
-          <a:prstGeom prst="line">
-            <a:avLst/>
-          </a:prstGeom>
-          <a:ln w="66675">
-            <a:solidFill>
-              <a:srgbClr val="7F7F7F"/>
-            </a:solidFill>
-            <a:tailEnd type="triangle" w="sm" len="sm"/>
+      <p:sp>
+        <p:nvSpPr>
+          <p:cNvPr id="184" name="af-interaction-exchange-block-arrow-autoshape-01" descr="{&quot;arrow_spec_sha256&quot;:&quot;c81c2d12be45956611bfd35a779c39c8e3144f198070787cdc5d34249a579e15&quot;,&quot;autofigure_element_id&quot;:&quot;interaction-exchange&quot;}"/>
+          <p:cNvSpPr/>
+          <p:nvPr/>
+        </p:nvSpPr>
+        <p:spPr>
+          <a:xfrm>
+            <a:off x="9658350" y="5367338"/>
+            <a:ext cx="1524000" cy="161925"/>
+          </a:xfrm>
+          <a:prstGeom prst="leftRightArrow">
+            <a:avLst>
+              <a:gd name="adj1" fmla="val 52941"/>
+              <a:gd name="adj2" fmla="val 47058"/>
+            </a:avLst>
+          </a:prstGeom>
+          <a:solidFill>
+            <a:srgbClr val="767171"/>
+          </a:solidFill>
+          <a:ln>
+            <a:noFill/>
           </a:ln>
           <a:effectLst/>
         </p:spPr>
         <p:style>
-          <a:lnRef idx="2">
+          <a:lnRef idx="1">
             <a:schemeClr val="accent1"/>
           </a:lnRef>
-          <a:fillRef idx="0">
+          <a:fillRef idx="3">
             <a:schemeClr val="accent1"/>
           </a:fillRef>
-          <a:effectRef idx="1">
+          <a:effectRef idx="2">
             <a:schemeClr val="accent1"/>
           </a:effectRef>
           <a:fontRef idx="minor">
-            <a:schemeClr val="tx1"/>
+            <a:schemeClr val="lt1"/>
           </a:fontRef>
         </p:style>
-      </p:cxnSp>
-      <p:cxnSp>
-        <p:nvCxnSpPr>
-          <p:cNvPr id="187" name="af-interaction-right-connector-01"/>
-          <p:cNvCxnSpPr>
-            <a:stCxn id="178" idx="0"/>
-            <a:endCxn id="188" idx="0"/>
-          </p:cNvCxnSpPr>
-          <p:nvPr/>
-        </p:nvCxnSpPr>
-        <p:spPr>
-          <a:xfrm>
-            <a:off x="9667875" y="5457825"/>
-            <a:ext cx="1543050" cy="0"/>
-          </a:xfrm>
-          <a:prstGeom prst="line">
-            <a:avLst/>
-          </a:prstGeom>
-          <a:ln w="66675">
-            <a:solidFill>
-              <a:srgbClr val="7F7F7F"/>
-            </a:solidFill>
-            <a:tailEnd type="triangle" w="sm" len="sm"/>
-          </a:ln>
-          <a:effectLst/>
-        </p:spPr>
-        <p:style>
-          <a:lnRef idx="2">
-            <a:schemeClr val="accent1"/>
-          </a:lnRef>
-          <a:fillRef idx="0">
-            <a:schemeClr val="accent1"/>
-          </a:fillRef>
-          <a:effectRef idx="1">
-            <a:schemeClr val="accent1"/>
-          </a:effectRef>
-          <a:fontRef idx="minor">
-            <a:schemeClr val="tx1"/>
-          </a:fontRef>
-        </p:style>
-      </p:cxnSp>
+        <p:txBody>
+          <a:bodyPr rtlCol="0" anchor="ctr"/>
+          <a:lstStyle/>
+          <a:p>
+            <a:pPr algn="ctr"/>
+            <a:endParaRPr/>
+          </a:p>
+        </p:txBody>
+      </p:sp>
       <p:pic>
         <p:nvPicPr>
-          <p:cNvPr id="188" name="af-atomic-environment-globe-atomic-raster-01" descr="image.png"/>
+          <p:cNvPr id="185" name="af-atomic-environment-globe-atomic-raster-01" descr="{&quot;autofigure_element_id&quot;:&quot;atomic:environment-globe&quot;}"/>
           <p:cNvPicPr>
             <a:picLocks noChangeAspect="1"/>
           </p:cNvPicPr>
           <p:nvPr>
             <p:custDataLst>
-              <p:tags r:id="rId5"/>
+              <p:tags r:id="rId2"/>
             </p:custDataLst>
           </p:nvPr>
         </p:nvPicPr>
         <p:blipFill>
-          <a:blip r:embed="rId4"/>
+          <a:blip r:embed="rId5"/>
           <a:stretch>
             <a:fillRect/>
           </a:stretch>
@@ -12556,7 +12893,7 @@
       </p:pic>
       <p:sp>
         <p:nvSpPr>
-          <p:cNvPr id="189" name="af-environment-label-text-01"/>
+          <p:cNvPr id="186" name="af-environment-label-text-01" descr="{&quot;autofigure_element_id&quot;:&quot;environment-label&quot;}"/>
           <p:cNvSpPr txBox="1"/>
           <p:nvPr/>
         </p:nvSpPr>
@@ -12572,7 +12909,7 @@
           <a:effectLst/>
         </p:spPr>
         <p:txBody>
-          <a:bodyPr wrap="none" anchor="t" lIns="0" rIns="0" tIns="0" bIns="0">
+          <a:bodyPr wrap="none" lIns="0" tIns="0" rIns="0" bIns="0" anchor="t">
             <a:spAutoFit/>
           </a:bodyPr>
           <a:lstStyle/>
@@ -12599,27 +12936,40 @@
 </file>
 
 <file path=ppt/tags/tag1.xml><?xml version="1.0" encoding="utf-8"?>
-<ns0:tagLst xmlns:ns0="http://schemas.openxmlformats.org/presentationml/2006/main">
-  <ns0:tag name="AISCIENTIFICILLUSTRATORASSETID" val="atomic:observation"/>
-  <ns0:tag name="AISCIENTIFICILLUSTRATORSOURCESHA256" val="61c6c0a2d3ee6722cb36713edacd8310a676e2855245e250f1f1a8cae56f5e9f"/>
-  <ns0:tag name="AISCIENTIFICILLUSTRATORRASTERREASON" val="The embedded observation photograph cannot be faithfully reconstructed with native PowerPoint geometry."/>
-  <ns0:tag name="AISCIENTIFICILLUSTRATORSOURCETIGHTLYCROPPED" val="True"/>
-  <ns0:tag name="AISCIENTIFICILLUSTRATORATOMICRASTERUNIT" val="True"/>
-  <ns0:tag name="AISCIENTIFICILLUSTRATORCONTAINSRECONSTRUCTABLECONTENT" val="False"/>
-  <ns0:tag name="AISCIENTIFICILLUSTRATORDECOMPOSITIONNOTE" val="Only the photograph is raster; its label and all connecting arrows remain native editable objects."/>
-</ns0:tagLst>
+<p:tagLst xmlns:a="http://schemas.openxmlformats.org/drawingml/2006/main" xmlns:r="http://schemas.openxmlformats.org/officeDocument/2006/relationships" xmlns:p="http://schemas.openxmlformats.org/presentationml/2006/main">
+  <p:tag name="AISCIENTIFICILLUSTRATORPROJECTID" val="HEX:6175746F6669677572652D30312D6D6F64756C61722D6167656E742D7265666572656E63652D6F6E6C79"/>
+  <p:tag name="AISCIENTIFICILLUSTRATORTASKMODE" val="HEX:5245434F4E5354525543545F31544F31"/>
+  <p:tag name="AISCIENTIFICILLUSTRATORTARGETID" val="HEX:6175746F6669677572652D70707478"/>
+  <p:tag name="AISCIENTIFICILLUSTRATORSCENESCHEMAVERSION" val="HEX:322E312E30"/>
+  <p:tag name="AISCIENTIFICILLUSTRATORREVISION" val="HEX:30"/>
+  <p:tag name="AISCIENTIFICILLUSTRATORSESSIONID" val="HEX:65626261373533322D616430622D346166622D383663622D666131386235373135616665"/>
+  <p:tag name="AISCIENTIFICILLUSTRATORSCENEGRAPHSHA256" val="HEX:63316330316239653631396532633464303130346337643934653061343736666136666433636561343337353130313664376139306566386464373937326365"/>
+  <p:tag name="AISCIENTIFICILLUSTRATORRENDERPLANSHA256" val="HEX:62353737396461376533313935343263386430353533383462303438653039636666353235333130626634323734663365653532376231363565613664396365"/>
+</p:tagLst>
 </file>
 
 <file path=ppt/tags/tag2.xml><?xml version="1.0" encoding="utf-8"?>
-<ns0:tagLst xmlns:ns0="http://schemas.openxmlformats.org/presentationml/2006/main">
-  <ns0:tag name="AISCIENTIFICILLUSTRATORASSETID" val="atomic:environment-globe"/>
-  <ns0:tag name="AISCIENTIFICILLUSTRATORSOURCESHA256" val="3bfe64f24f546aab0797223e0256f9da48314e668dc18d93a0b27347b84ba21d"/>
-  <ns0:tag name="AISCIENTIFICILLUSTRATORRASTERREASON" val="The illustrated globe is a creative microasset whose native redraw materially reduces reference fidelity."/>
-  <ns0:tag name="AISCIENTIFICILLUSTRATORSOURCETIGHTLYCROPPED" val="True"/>
-  <ns0:tag name="AISCIENTIFICILLUSTRATORATOMICRASTERUNIT" val="True"/>
-  <ns0:tag name="AISCIENTIFICILLUSTRATORCONTAINSRECONSTRUCTABLECONTENT" val="False"/>
-  <ns0:tag name="AISCIENTIFICILLUSTRATORDECOMPOSITIONNOTE" val="Only the globe is raster; the Environment label and interaction arrows remain native editable objects."/>
-</ns0:tagLst>
+<p:tagLst xmlns:a="http://schemas.openxmlformats.org/drawingml/2006/main" xmlns:r="http://schemas.openxmlformats.org/officeDocument/2006/relationships" xmlns:p="http://schemas.openxmlformats.org/presentationml/2006/main">
+  <p:tag name="AISCIENTIFICILLUSTRATORASSETID" val="atomic:observation"/>
+  <p:tag name="AISCIENTIFICILLUSTRATORSOURCESHA256" val="61c6c0a2d3ee6722cb36713edacd8310a676e2855245e250f1f1a8cae56f5e9f"/>
+  <p:tag name="AISCIENTIFICILLUSTRATORRASTERREASON" val="The embedded observation photograph cannot be faithfully reconstructed with native PowerPoint geometry."/>
+  <p:tag name="AISCIENTIFICILLUSTRATORSOURCETIGHTLYCROPPED" val="True"/>
+  <p:tag name="AISCIENTIFICILLUSTRATORATOMICRASTERUNIT" val="True"/>
+  <p:tag name="AISCIENTIFICILLUSTRATORCONTAINSRECONSTRUCTABLECONTENT" val="False"/>
+  <p:tag name="AISCIENTIFICILLUSTRATORDECOMPOSITIONNOTE" val="Only the photograph is raster; its label and all connecting arrows remain native editable objects."/>
+</p:tagLst>
+</file>
+
+<file path=ppt/tags/tag3.xml><?xml version="1.0" encoding="utf-8"?>
+<p:tagLst xmlns:a="http://schemas.openxmlformats.org/drawingml/2006/main" xmlns:r="http://schemas.openxmlformats.org/officeDocument/2006/relationships" xmlns:p="http://schemas.openxmlformats.org/presentationml/2006/main">
+  <p:tag name="AISCIENTIFICILLUSTRATORASSETID" val="atomic:environment-globe"/>
+  <p:tag name="AISCIENTIFICILLUSTRATORSOURCESHA256" val="3bfe64f24f546aab0797223e0256f9da48314e668dc18d93a0b27347b84ba21d"/>
+  <p:tag name="AISCIENTIFICILLUSTRATORRASTERREASON" val="The illustrated globe is a creative microasset whose native redraw materially reduces reference fidelity."/>
+  <p:tag name="AISCIENTIFICILLUSTRATORSOURCETIGHTLYCROPPED" val="True"/>
+  <p:tag name="AISCIENTIFICILLUSTRATORATOMICRASTERUNIT" val="True"/>
+  <p:tag name="AISCIENTIFICILLUSTRATORCONTAINSRECONSTRUCTABLECONTENT" val="False"/>
+  <p:tag name="AISCIENTIFICILLUSTRATORDECOMPOSITIONNOTE" val="Only the globe is raster; the Environment label and interaction arrows remain native editable objects."/>
+</p:tagLst>
 </file>
 
 <file path=ppt/theme/theme1.xml><?xml version="1.0" encoding="utf-8"?>
